--- a/docs/plots/carbo/jx_carbo_linsubhr_ratio_sideeffect.pptx
+++ b/docs/plots/carbo/jx_carbo_linsubhr_ratio_sideeffect.pptx
@@ -3003,521 +3003,530 @@
           <p:spPr>
             <a:xfrm>
               <a:off x="817517" y="1896563"/>
-              <a:ext cx="7370972" cy="3623850"/>
+              <a:ext cx="7370972" cy="3611669"/>
             </a:xfrm>
             <a:custGeom>
               <a:avLst/>
               <a:pathLst>
-                <a:path w="7370972" h="3623850">
+                <a:path w="7370972" h="3611669">
                   <a:moveTo>
-                    <a:pt x="1708316" y="0"/>
+                    <a:pt x="1514958" y="0"/>
                   </a:moveTo>
                   <a:lnTo>
-                    <a:pt x="1781321" y="221502"/>
-                  </a:lnTo>
-                  <a:lnTo>
-                    <a:pt x="1858955" y="441918"/>
-                  </a:lnTo>
-                  <a:lnTo>
-                    <a:pt x="1936589" y="648175"/>
-                  </a:lnTo>
-                  <a:lnTo>
-                    <a:pt x="2014223" y="841182"/>
-                  </a:lnTo>
-                  <a:lnTo>
-                    <a:pt x="2091857" y="1021790"/>
-                  </a:lnTo>
-                  <a:lnTo>
-                    <a:pt x="2169491" y="1190795"/>
-                  </a:lnTo>
-                  <a:lnTo>
-                    <a:pt x="2247125" y="1348944"/>
-                  </a:lnTo>
-                  <a:lnTo>
-                    <a:pt x="2324759" y="1496934"/>
-                  </a:lnTo>
-                  <a:lnTo>
-                    <a:pt x="2402393" y="1635416"/>
-                  </a:lnTo>
-                  <a:lnTo>
-                    <a:pt x="2480027" y="1765003"/>
-                  </a:lnTo>
-                  <a:lnTo>
-                    <a:pt x="2557661" y="1886265"/>
-                  </a:lnTo>
-                  <a:lnTo>
-                    <a:pt x="2635295" y="1999737"/>
-                  </a:lnTo>
-                  <a:lnTo>
-                    <a:pt x="2712930" y="2105919"/>
-                  </a:lnTo>
-                  <a:lnTo>
-                    <a:pt x="2790564" y="2205280"/>
-                  </a:lnTo>
-                  <a:lnTo>
-                    <a:pt x="2868198" y="2298259"/>
-                  </a:lnTo>
-                  <a:lnTo>
-                    <a:pt x="2945832" y="2385264"/>
-                  </a:lnTo>
-                  <a:lnTo>
-                    <a:pt x="3023466" y="2466681"/>
-                  </a:lnTo>
-                  <a:lnTo>
-                    <a:pt x="3101100" y="2542867"/>
-                  </a:lnTo>
-                  <a:lnTo>
-                    <a:pt x="3178734" y="2614159"/>
-                  </a:lnTo>
-                  <a:lnTo>
-                    <a:pt x="3256368" y="2680871"/>
-                  </a:lnTo>
-                  <a:lnTo>
-                    <a:pt x="3334002" y="2743297"/>
-                  </a:lnTo>
-                  <a:lnTo>
-                    <a:pt x="3411636" y="2789904"/>
-                  </a:lnTo>
-                  <a:lnTo>
-                    <a:pt x="3489270" y="2810702"/>
-                  </a:lnTo>
-                  <a:lnTo>
-                    <a:pt x="3566904" y="2830998"/>
-                  </a:lnTo>
-                  <a:lnTo>
-                    <a:pt x="3644538" y="2850805"/>
-                  </a:lnTo>
-                  <a:lnTo>
-                    <a:pt x="3722172" y="2870135"/>
-                  </a:lnTo>
-                  <a:lnTo>
-                    <a:pt x="3799806" y="2888999"/>
-                  </a:lnTo>
-                  <a:lnTo>
-                    <a:pt x="3877440" y="2907408"/>
-                  </a:lnTo>
-                  <a:lnTo>
-                    <a:pt x="3955074" y="2925373"/>
-                  </a:lnTo>
-                  <a:lnTo>
-                    <a:pt x="4032708" y="2942905"/>
-                  </a:lnTo>
-                  <a:lnTo>
-                    <a:pt x="4110342" y="2960014"/>
-                  </a:lnTo>
-                  <a:lnTo>
-                    <a:pt x="4187976" y="2976711"/>
-                  </a:lnTo>
-                  <a:lnTo>
-                    <a:pt x="4265610" y="2993006"/>
-                  </a:lnTo>
-                  <a:lnTo>
-                    <a:pt x="4343244" y="3008907"/>
-                  </a:lnTo>
-                  <a:lnTo>
-                    <a:pt x="4420879" y="3024426"/>
-                  </a:lnTo>
-                  <a:lnTo>
-                    <a:pt x="4498513" y="3039570"/>
-                  </a:lnTo>
-                  <a:lnTo>
-                    <a:pt x="4576147" y="3054349"/>
-                  </a:lnTo>
-                  <a:lnTo>
-                    <a:pt x="4653781" y="3068772"/>
-                  </a:lnTo>
-                  <a:lnTo>
-                    <a:pt x="4731415" y="3082847"/>
-                  </a:lnTo>
-                  <a:lnTo>
-                    <a:pt x="4809049" y="3096583"/>
-                  </a:lnTo>
-                  <a:lnTo>
-                    <a:pt x="4886683" y="3109988"/>
-                  </a:lnTo>
-                  <a:lnTo>
-                    <a:pt x="4964317" y="3123070"/>
-                  </a:lnTo>
-                  <a:lnTo>
-                    <a:pt x="5041951" y="3135836"/>
-                  </a:lnTo>
-                  <a:lnTo>
-                    <a:pt x="5119585" y="3148294"/>
-                  </a:lnTo>
-                  <a:lnTo>
-                    <a:pt x="5197219" y="3160453"/>
-                  </a:lnTo>
-                  <a:lnTo>
-                    <a:pt x="5274853" y="3172318"/>
-                  </a:lnTo>
-                  <a:lnTo>
-                    <a:pt x="5352487" y="3183897"/>
-                  </a:lnTo>
-                  <a:lnTo>
-                    <a:pt x="5430121" y="3195197"/>
-                  </a:lnTo>
-                  <a:lnTo>
-                    <a:pt x="5507755" y="3206224"/>
-                  </a:lnTo>
-                  <a:lnTo>
-                    <a:pt x="5585389" y="3216986"/>
-                  </a:lnTo>
-                  <a:lnTo>
-                    <a:pt x="5663023" y="3227488"/>
-                  </a:lnTo>
-                  <a:lnTo>
-                    <a:pt x="5740657" y="3237737"/>
-                  </a:lnTo>
-                  <a:lnTo>
-                    <a:pt x="5818291" y="3247739"/>
-                  </a:lnTo>
-                  <a:lnTo>
-                    <a:pt x="5895925" y="3257500"/>
-                  </a:lnTo>
-                  <a:lnTo>
-                    <a:pt x="5973559" y="3267026"/>
-                  </a:lnTo>
-                  <a:lnTo>
-                    <a:pt x="6051193" y="3276322"/>
-                  </a:lnTo>
-                  <a:lnTo>
-                    <a:pt x="6128827" y="3285394"/>
-                  </a:lnTo>
-                  <a:lnTo>
-                    <a:pt x="6206462" y="3294247"/>
-                  </a:lnTo>
-                  <a:lnTo>
-                    <a:pt x="6284096" y="3302887"/>
-                  </a:lnTo>
-                  <a:lnTo>
-                    <a:pt x="6361730" y="3311318"/>
-                  </a:lnTo>
-                  <a:lnTo>
-                    <a:pt x="6439364" y="3319546"/>
-                  </a:lnTo>
-                  <a:lnTo>
-                    <a:pt x="6516998" y="3327576"/>
-                  </a:lnTo>
-                  <a:lnTo>
-                    <a:pt x="6594632" y="3335412"/>
-                  </a:lnTo>
-                  <a:lnTo>
-                    <a:pt x="6672266" y="3343060"/>
-                  </a:lnTo>
-                  <a:lnTo>
-                    <a:pt x="6749900" y="3350523"/>
-                  </a:lnTo>
-                  <a:lnTo>
-                    <a:pt x="6827534" y="3357806"/>
-                  </a:lnTo>
-                  <a:lnTo>
-                    <a:pt x="6905168" y="3364914"/>
-                  </a:lnTo>
-                  <a:lnTo>
-                    <a:pt x="6982802" y="3371850"/>
-                  </a:lnTo>
-                  <a:lnTo>
-                    <a:pt x="7060436" y="3378619"/>
-                  </a:lnTo>
-                  <a:lnTo>
-                    <a:pt x="7138070" y="3385225"/>
-                  </a:lnTo>
-                  <a:lnTo>
-                    <a:pt x="7215704" y="3391671"/>
-                  </a:lnTo>
-                  <a:lnTo>
-                    <a:pt x="7293338" y="3397962"/>
-                  </a:lnTo>
-                  <a:lnTo>
-                    <a:pt x="7370972" y="3404102"/>
-                  </a:lnTo>
-                  <a:lnTo>
-                    <a:pt x="7370972" y="3623850"/>
-                  </a:lnTo>
-                  <a:lnTo>
-                    <a:pt x="7293338" y="3621874"/>
-                  </a:lnTo>
-                  <a:lnTo>
-                    <a:pt x="7215704" y="3619762"/>
-                  </a:lnTo>
-                  <a:lnTo>
-                    <a:pt x="7138070" y="3617504"/>
-                  </a:lnTo>
-                  <a:lnTo>
-                    <a:pt x="7060436" y="3615092"/>
-                  </a:lnTo>
-                  <a:lnTo>
-                    <a:pt x="6982802" y="3612514"/>
-                  </a:lnTo>
-                  <a:lnTo>
-                    <a:pt x="6905168" y="3609759"/>
-                  </a:lnTo>
-                  <a:lnTo>
-                    <a:pt x="6827534" y="3606815"/>
-                  </a:lnTo>
-                  <a:lnTo>
-                    <a:pt x="6749900" y="3603669"/>
-                  </a:lnTo>
-                  <a:lnTo>
-                    <a:pt x="6672266" y="3600307"/>
-                  </a:lnTo>
-                  <a:lnTo>
-                    <a:pt x="6594632" y="3596714"/>
-                  </a:lnTo>
-                  <a:lnTo>
-                    <a:pt x="6516998" y="3592874"/>
-                  </a:lnTo>
-                  <a:lnTo>
-                    <a:pt x="6439364" y="3588771"/>
-                  </a:lnTo>
-                  <a:lnTo>
-                    <a:pt x="6361730" y="3584387"/>
-                  </a:lnTo>
-                  <a:lnTo>
-                    <a:pt x="6284096" y="3579701"/>
-                  </a:lnTo>
-                  <a:lnTo>
-                    <a:pt x="6206462" y="3574693"/>
-                  </a:lnTo>
-                  <a:lnTo>
-                    <a:pt x="6128827" y="3569342"/>
-                  </a:lnTo>
-                  <a:lnTo>
-                    <a:pt x="6051193" y="3563623"/>
-                  </a:lnTo>
-                  <a:lnTo>
-                    <a:pt x="5973559" y="3557512"/>
-                  </a:lnTo>
-                  <a:lnTo>
-                    <a:pt x="5895925" y="3550981"/>
-                  </a:lnTo>
-                  <a:lnTo>
-                    <a:pt x="5818291" y="3544002"/>
-                  </a:lnTo>
-                  <a:lnTo>
-                    <a:pt x="5740657" y="3536544"/>
-                  </a:lnTo>
-                  <a:lnTo>
-                    <a:pt x="5663023" y="3528574"/>
-                  </a:lnTo>
-                  <a:lnTo>
-                    <a:pt x="5585389" y="3520056"/>
-                  </a:lnTo>
-                  <a:lnTo>
-                    <a:pt x="5507755" y="3510954"/>
-                  </a:lnTo>
-                  <a:lnTo>
-                    <a:pt x="5430121" y="3501227"/>
-                  </a:lnTo>
-                  <a:lnTo>
-                    <a:pt x="5352487" y="3490833"/>
-                  </a:lnTo>
-                  <a:lnTo>
-                    <a:pt x="5274853" y="3479724"/>
-                  </a:lnTo>
-                  <a:lnTo>
-                    <a:pt x="5197219" y="3467854"/>
-                  </a:lnTo>
-                  <a:lnTo>
-                    <a:pt x="5119585" y="3455168"/>
-                  </a:lnTo>
-                  <a:lnTo>
-                    <a:pt x="5041951" y="3441611"/>
-                  </a:lnTo>
-                  <a:lnTo>
-                    <a:pt x="4964317" y="3427124"/>
-                  </a:lnTo>
-                  <a:lnTo>
-                    <a:pt x="4886683" y="3411642"/>
-                  </a:lnTo>
-                  <a:lnTo>
-                    <a:pt x="4809049" y="3395097"/>
-                  </a:lnTo>
-                  <a:lnTo>
-                    <a:pt x="4731415" y="3377417"/>
-                  </a:lnTo>
-                  <a:lnTo>
-                    <a:pt x="4653781" y="3358522"/>
-                  </a:lnTo>
-                  <a:lnTo>
-                    <a:pt x="4576147" y="3338331"/>
-                  </a:lnTo>
-                  <a:lnTo>
-                    <a:pt x="4498513" y="3316753"/>
-                  </a:lnTo>
-                  <a:lnTo>
-                    <a:pt x="4420879" y="3293695"/>
-                  </a:lnTo>
-                  <a:lnTo>
-                    <a:pt x="4343244" y="3269053"/>
-                  </a:lnTo>
-                  <a:lnTo>
-                    <a:pt x="4265610" y="3242719"/>
-                  </a:lnTo>
-                  <a:lnTo>
-                    <a:pt x="4187976" y="3214578"/>
-                  </a:lnTo>
-                  <a:lnTo>
-                    <a:pt x="4110342" y="3184505"/>
-                  </a:lnTo>
-                  <a:lnTo>
-                    <a:pt x="4032708" y="3152367"/>
-                  </a:lnTo>
-                  <a:lnTo>
-                    <a:pt x="3955074" y="3118023"/>
-                  </a:lnTo>
-                  <a:lnTo>
-                    <a:pt x="3877440" y="3081322"/>
-                  </a:lnTo>
-                  <a:lnTo>
-                    <a:pt x="3799806" y="3042100"/>
-                  </a:lnTo>
-                  <a:lnTo>
-                    <a:pt x="3722172" y="3000187"/>
-                  </a:lnTo>
-                  <a:lnTo>
-                    <a:pt x="3644538" y="2955395"/>
-                  </a:lnTo>
-                  <a:lnTo>
-                    <a:pt x="3566904" y="2907529"/>
-                  </a:lnTo>
-                  <a:lnTo>
-                    <a:pt x="3489270" y="2856377"/>
-                  </a:lnTo>
-                  <a:lnTo>
-                    <a:pt x="3411636" y="2801714"/>
-                  </a:lnTo>
-                  <a:lnTo>
-                    <a:pt x="3334002" y="2768592"/>
-                  </a:lnTo>
-                  <a:lnTo>
-                    <a:pt x="3256368" y="2746754"/>
-                  </a:lnTo>
-                  <a:lnTo>
-                    <a:pt x="3178734" y="2724377"/>
-                  </a:lnTo>
-                  <a:lnTo>
-                    <a:pt x="3101100" y="2701447"/>
-                  </a:lnTo>
-                  <a:lnTo>
-                    <a:pt x="3023466" y="2677950"/>
-                  </a:lnTo>
-                  <a:lnTo>
-                    <a:pt x="2945832" y="2653873"/>
-                  </a:lnTo>
-                  <a:lnTo>
-                    <a:pt x="2868198" y="2629201"/>
-                  </a:lnTo>
-                  <a:lnTo>
-                    <a:pt x="2790564" y="2603920"/>
-                  </a:lnTo>
-                  <a:lnTo>
-                    <a:pt x="2712930" y="2578014"/>
-                  </a:lnTo>
-                  <a:lnTo>
-                    <a:pt x="2635295" y="2551468"/>
-                  </a:lnTo>
-                  <a:lnTo>
-                    <a:pt x="2557661" y="2524267"/>
-                  </a:lnTo>
-                  <a:lnTo>
-                    <a:pt x="2480027" y="2496394"/>
-                  </a:lnTo>
-                  <a:lnTo>
-                    <a:pt x="2402393" y="2467832"/>
-                  </a:lnTo>
-                  <a:lnTo>
-                    <a:pt x="2324759" y="2438564"/>
-                  </a:lnTo>
-                  <a:lnTo>
-                    <a:pt x="2247125" y="2408574"/>
-                  </a:lnTo>
-                  <a:lnTo>
-                    <a:pt x="2169491" y="2377843"/>
-                  </a:lnTo>
-                  <a:lnTo>
-                    <a:pt x="2091857" y="2346352"/>
-                  </a:lnTo>
-                  <a:lnTo>
-                    <a:pt x="2014223" y="2314084"/>
-                  </a:lnTo>
-                  <a:lnTo>
-                    <a:pt x="1936589" y="2281019"/>
-                  </a:lnTo>
-                  <a:lnTo>
-                    <a:pt x="1858955" y="2247137"/>
-                  </a:lnTo>
-                  <a:lnTo>
-                    <a:pt x="1781321" y="2212417"/>
-                  </a:lnTo>
-                  <a:lnTo>
-                    <a:pt x="1703687" y="2176841"/>
-                  </a:lnTo>
-                  <a:lnTo>
-                    <a:pt x="1626053" y="2140385"/>
-                  </a:lnTo>
-                  <a:lnTo>
-                    <a:pt x="1548419" y="2103029"/>
-                  </a:lnTo>
-                  <a:lnTo>
-                    <a:pt x="1470785" y="2064750"/>
-                  </a:lnTo>
-                  <a:lnTo>
-                    <a:pt x="1393151" y="2025526"/>
-                  </a:lnTo>
-                  <a:lnTo>
-                    <a:pt x="1315517" y="1985332"/>
-                  </a:lnTo>
-                  <a:lnTo>
-                    <a:pt x="1237883" y="1944146"/>
-                  </a:lnTo>
-                  <a:lnTo>
-                    <a:pt x="1160249" y="1901943"/>
-                  </a:lnTo>
-                  <a:lnTo>
-                    <a:pt x="1082615" y="1858696"/>
-                  </a:lnTo>
-                  <a:lnTo>
-                    <a:pt x="1004981" y="1814382"/>
-                  </a:lnTo>
-                  <a:lnTo>
-                    <a:pt x="927346" y="1768973"/>
-                  </a:lnTo>
-                  <a:lnTo>
-                    <a:pt x="849712" y="1722442"/>
-                  </a:lnTo>
-                  <a:lnTo>
-                    <a:pt x="772078" y="1674762"/>
-                  </a:lnTo>
-                  <a:lnTo>
-                    <a:pt x="694444" y="1625904"/>
-                  </a:lnTo>
-                  <a:lnTo>
-                    <a:pt x="616810" y="1575839"/>
-                  </a:lnTo>
-                  <a:lnTo>
-                    <a:pt x="539176" y="1524537"/>
-                  </a:lnTo>
-                  <a:lnTo>
-                    <a:pt x="461542" y="1471969"/>
-                  </a:lnTo>
-                  <a:lnTo>
-                    <a:pt x="383908" y="1418101"/>
-                  </a:lnTo>
-                  <a:lnTo>
-                    <a:pt x="306274" y="1362903"/>
-                  </a:lnTo>
-                  <a:lnTo>
-                    <a:pt x="228640" y="1306341"/>
-                  </a:lnTo>
-                  <a:lnTo>
-                    <a:pt x="151006" y="1248383"/>
-                  </a:lnTo>
-                  <a:lnTo>
-                    <a:pt x="73372" y="1188992"/>
-                  </a:lnTo>
-                  <a:lnTo>
-                    <a:pt x="0" y="1131475"/>
+                    <a:pt x="1548419" y="94064"/>
+                  </a:lnTo>
+                  <a:lnTo>
+                    <a:pt x="1626053" y="299697"/>
+                  </a:lnTo>
+                  <a:lnTo>
+                    <a:pt x="1703687" y="493448"/>
+                  </a:lnTo>
+                  <a:lnTo>
+                    <a:pt x="1781321" y="676003"/>
+                  </a:lnTo>
+                  <a:lnTo>
+                    <a:pt x="1858955" y="848010"/>
+                  </a:lnTo>
+                  <a:lnTo>
+                    <a:pt x="1936589" y="1010076"/>
+                  </a:lnTo>
+                  <a:lnTo>
+                    <a:pt x="2014223" y="1162778"/>
+                  </a:lnTo>
+                  <a:lnTo>
+                    <a:pt x="2091857" y="1306655"/>
+                  </a:lnTo>
+                  <a:lnTo>
+                    <a:pt x="2169491" y="1442219"/>
+                  </a:lnTo>
+                  <a:lnTo>
+                    <a:pt x="2247125" y="1569949"/>
+                  </a:lnTo>
+                  <a:lnTo>
+                    <a:pt x="2324759" y="1690298"/>
+                  </a:lnTo>
+                  <a:lnTo>
+                    <a:pt x="2402393" y="1803693"/>
+                  </a:lnTo>
+                  <a:lnTo>
+                    <a:pt x="2480027" y="1910535"/>
+                  </a:lnTo>
+                  <a:lnTo>
+                    <a:pt x="2557661" y="2011204"/>
+                  </a:lnTo>
+                  <a:lnTo>
+                    <a:pt x="2635295" y="2106055"/>
+                  </a:lnTo>
+                  <a:lnTo>
+                    <a:pt x="2712930" y="2195425"/>
+                  </a:lnTo>
+                  <a:lnTo>
+                    <a:pt x="2790564" y="2279631"/>
+                  </a:lnTo>
+                  <a:lnTo>
+                    <a:pt x="2868198" y="2358971"/>
+                  </a:lnTo>
+                  <a:lnTo>
+                    <a:pt x="2945832" y="2433726"/>
+                  </a:lnTo>
+                  <a:lnTo>
+                    <a:pt x="3023466" y="2504161"/>
+                  </a:lnTo>
+                  <a:lnTo>
+                    <a:pt x="3101100" y="2570527"/>
+                  </a:lnTo>
+                  <a:lnTo>
+                    <a:pt x="3178734" y="2633057"/>
+                  </a:lnTo>
+                  <a:lnTo>
+                    <a:pt x="3256368" y="2691974"/>
+                  </a:lnTo>
+                  <a:lnTo>
+                    <a:pt x="3334002" y="2747487"/>
+                  </a:lnTo>
+                  <a:lnTo>
+                    <a:pt x="3411636" y="2788509"/>
+                  </a:lnTo>
+                  <a:lnTo>
+                    <a:pt x="3489270" y="2805178"/>
+                  </a:lnTo>
+                  <a:lnTo>
+                    <a:pt x="3566904" y="2821526"/>
+                  </a:lnTo>
+                  <a:lnTo>
+                    <a:pt x="3644538" y="2837559"/>
+                  </a:lnTo>
+                  <a:lnTo>
+                    <a:pt x="3722172" y="2853282"/>
+                  </a:lnTo>
+                  <a:lnTo>
+                    <a:pt x="3799806" y="2868702"/>
+                  </a:lnTo>
+                  <a:lnTo>
+                    <a:pt x="3877440" y="2883825"/>
+                  </a:lnTo>
+                  <a:lnTo>
+                    <a:pt x="3955074" y="2898656"/>
+                  </a:lnTo>
+                  <a:lnTo>
+                    <a:pt x="4032708" y="2913201"/>
+                  </a:lnTo>
+                  <a:lnTo>
+                    <a:pt x="4110342" y="2927465"/>
+                  </a:lnTo>
+                  <a:lnTo>
+                    <a:pt x="4187976" y="2941454"/>
+                  </a:lnTo>
+                  <a:lnTo>
+                    <a:pt x="4265610" y="2955173"/>
+                  </a:lnTo>
+                  <a:lnTo>
+                    <a:pt x="4343244" y="2968627"/>
+                  </a:lnTo>
+                  <a:lnTo>
+                    <a:pt x="4420879" y="2981822"/>
+                  </a:lnTo>
+                  <a:lnTo>
+                    <a:pt x="4498513" y="2994763"/>
+                  </a:lnTo>
+                  <a:lnTo>
+                    <a:pt x="4576147" y="3007454"/>
+                  </a:lnTo>
+                  <a:lnTo>
+                    <a:pt x="4653781" y="3019900"/>
+                  </a:lnTo>
+                  <a:lnTo>
+                    <a:pt x="4731415" y="3032106"/>
+                  </a:lnTo>
+                  <a:lnTo>
+                    <a:pt x="4809049" y="3044076"/>
+                  </a:lnTo>
+                  <a:lnTo>
+                    <a:pt x="4886683" y="3055816"/>
+                  </a:lnTo>
+                  <a:lnTo>
+                    <a:pt x="4964317" y="3067329"/>
+                  </a:lnTo>
+                  <a:lnTo>
+                    <a:pt x="5041951" y="3078620"/>
+                  </a:lnTo>
+                  <a:lnTo>
+                    <a:pt x="5119585" y="3089693"/>
+                  </a:lnTo>
+                  <a:lnTo>
+                    <a:pt x="5197219" y="3100552"/>
+                  </a:lnTo>
+                  <a:lnTo>
+                    <a:pt x="5274853" y="3111203"/>
+                  </a:lnTo>
+                  <a:lnTo>
+                    <a:pt x="5352487" y="3121647"/>
+                  </a:lnTo>
+                  <a:lnTo>
+                    <a:pt x="5430121" y="3131890"/>
+                  </a:lnTo>
+                  <a:lnTo>
+                    <a:pt x="5507755" y="3141936"/>
+                  </a:lnTo>
+                  <a:lnTo>
+                    <a:pt x="5585389" y="3151788"/>
+                  </a:lnTo>
+                  <a:lnTo>
+                    <a:pt x="5663023" y="3161449"/>
+                  </a:lnTo>
+                  <a:lnTo>
+                    <a:pt x="5740657" y="3170925"/>
+                  </a:lnTo>
+                  <a:lnTo>
+                    <a:pt x="5818291" y="3180217"/>
+                  </a:lnTo>
+                  <a:lnTo>
+                    <a:pt x="5895925" y="3189331"/>
+                  </a:lnTo>
+                  <a:lnTo>
+                    <a:pt x="5973559" y="3198268"/>
+                  </a:lnTo>
+                  <a:lnTo>
+                    <a:pt x="6051193" y="3207033"/>
+                  </a:lnTo>
+                  <a:lnTo>
+                    <a:pt x="6128827" y="3215629"/>
+                  </a:lnTo>
+                  <a:lnTo>
+                    <a:pt x="6206462" y="3224060"/>
+                  </a:lnTo>
+                  <a:lnTo>
+                    <a:pt x="6284096" y="3232327"/>
+                  </a:lnTo>
+                  <a:lnTo>
+                    <a:pt x="6361730" y="3240435"/>
+                  </a:lnTo>
+                  <a:lnTo>
+                    <a:pt x="6439364" y="3248387"/>
+                  </a:lnTo>
+                  <a:lnTo>
+                    <a:pt x="6516998" y="3256185"/>
+                  </a:lnTo>
+                  <a:lnTo>
+                    <a:pt x="6594632" y="3263833"/>
+                  </a:lnTo>
+                  <a:lnTo>
+                    <a:pt x="6672266" y="3271333"/>
+                  </a:lnTo>
+                  <a:lnTo>
+                    <a:pt x="6749900" y="3278689"/>
+                  </a:lnTo>
+                  <a:lnTo>
+                    <a:pt x="6827534" y="3285903"/>
+                  </a:lnTo>
+                  <a:lnTo>
+                    <a:pt x="6905168" y="3292977"/>
+                  </a:lnTo>
+                  <a:lnTo>
+                    <a:pt x="6982802" y="3299916"/>
+                  </a:lnTo>
+                  <a:lnTo>
+                    <a:pt x="7060436" y="3306720"/>
+                  </a:lnTo>
+                  <a:lnTo>
+                    <a:pt x="7138070" y="3313393"/>
+                  </a:lnTo>
+                  <a:lnTo>
+                    <a:pt x="7215704" y="3319937"/>
+                  </a:lnTo>
+                  <a:lnTo>
+                    <a:pt x="7293338" y="3326355"/>
+                  </a:lnTo>
+                  <a:lnTo>
+                    <a:pt x="7370972" y="3332649"/>
+                  </a:lnTo>
+                  <a:lnTo>
+                    <a:pt x="7370972" y="3611669"/>
+                  </a:lnTo>
+                  <a:lnTo>
+                    <a:pt x="7293338" y="3609156"/>
+                  </a:lnTo>
+                  <a:lnTo>
+                    <a:pt x="7215704" y="3606488"/>
+                  </a:lnTo>
+                  <a:lnTo>
+                    <a:pt x="7138070" y="3603658"/>
+                  </a:lnTo>
+                  <a:lnTo>
+                    <a:pt x="7060436" y="3600654"/>
+                  </a:lnTo>
+                  <a:lnTo>
+                    <a:pt x="6982802" y="3597465"/>
+                  </a:lnTo>
+                  <a:lnTo>
+                    <a:pt x="6905168" y="3594081"/>
+                  </a:lnTo>
+                  <a:lnTo>
+                    <a:pt x="6827534" y="3590490"/>
+                  </a:lnTo>
+                  <a:lnTo>
+                    <a:pt x="6749900" y="3586678"/>
+                  </a:lnTo>
+                  <a:lnTo>
+                    <a:pt x="6672266" y="3582632"/>
+                  </a:lnTo>
+                  <a:lnTo>
+                    <a:pt x="6594632" y="3578338"/>
+                  </a:lnTo>
+                  <a:lnTo>
+                    <a:pt x="6516998" y="3573781"/>
+                  </a:lnTo>
+                  <a:lnTo>
+                    <a:pt x="6439364" y="3568945"/>
+                  </a:lnTo>
+                  <a:lnTo>
+                    <a:pt x="6361730" y="3563812"/>
+                  </a:lnTo>
+                  <a:lnTo>
+                    <a:pt x="6284096" y="3558364"/>
+                  </a:lnTo>
+                  <a:lnTo>
+                    <a:pt x="6206462" y="3552581"/>
+                  </a:lnTo>
+                  <a:lnTo>
+                    <a:pt x="6128827" y="3546445"/>
+                  </a:lnTo>
+                  <a:lnTo>
+                    <a:pt x="6051193" y="3539932"/>
+                  </a:lnTo>
+                  <a:lnTo>
+                    <a:pt x="5973559" y="3533019"/>
+                  </a:lnTo>
+                  <a:lnTo>
+                    <a:pt x="5895925" y="3525683"/>
+                  </a:lnTo>
+                  <a:lnTo>
+                    <a:pt x="5818291" y="3517896"/>
+                  </a:lnTo>
+                  <a:lnTo>
+                    <a:pt x="5740657" y="3509632"/>
+                  </a:lnTo>
+                  <a:lnTo>
+                    <a:pt x="5663023" y="3500862"/>
+                  </a:lnTo>
+                  <a:lnTo>
+                    <a:pt x="5585389" y="3491553"/>
+                  </a:lnTo>
+                  <a:lnTo>
+                    <a:pt x="5507755" y="3481673"/>
+                  </a:lnTo>
+                  <a:lnTo>
+                    <a:pt x="5430121" y="3471188"/>
+                  </a:lnTo>
+                  <a:lnTo>
+                    <a:pt x="5352487" y="3460059"/>
+                  </a:lnTo>
+                  <a:lnTo>
+                    <a:pt x="5274853" y="3448248"/>
+                  </a:lnTo>
+                  <a:lnTo>
+                    <a:pt x="5197219" y="3435713"/>
+                  </a:lnTo>
+                  <a:lnTo>
+                    <a:pt x="5119585" y="3422409"/>
+                  </a:lnTo>
+                  <a:lnTo>
+                    <a:pt x="5041951" y="3408289"/>
+                  </a:lnTo>
+                  <a:lnTo>
+                    <a:pt x="4964317" y="3393303"/>
+                  </a:lnTo>
+                  <a:lnTo>
+                    <a:pt x="4886683" y="3377397"/>
+                  </a:lnTo>
+                  <a:lnTo>
+                    <a:pt x="4809049" y="3360517"/>
+                  </a:lnTo>
+                  <a:lnTo>
+                    <a:pt x="4731415" y="3342601"/>
+                  </a:lnTo>
+                  <a:lnTo>
+                    <a:pt x="4653781" y="3323586"/>
+                  </a:lnTo>
+                  <a:lnTo>
+                    <a:pt x="4576147" y="3303405"/>
+                  </a:lnTo>
+                  <a:lnTo>
+                    <a:pt x="4498513" y="3281987"/>
+                  </a:lnTo>
+                  <a:lnTo>
+                    <a:pt x="4420879" y="3259255"/>
+                  </a:lnTo>
+                  <a:lnTo>
+                    <a:pt x="4343244" y="3235129"/>
+                  </a:lnTo>
+                  <a:lnTo>
+                    <a:pt x="4265610" y="3209523"/>
+                  </a:lnTo>
+                  <a:lnTo>
+                    <a:pt x="4187976" y="3182346"/>
+                  </a:lnTo>
+                  <a:lnTo>
+                    <a:pt x="4110342" y="3153503"/>
+                  </a:lnTo>
+                  <a:lnTo>
+                    <a:pt x="4032708" y="3122892"/>
+                  </a:lnTo>
+                  <a:lnTo>
+                    <a:pt x="3955074" y="3090402"/>
+                  </a:lnTo>
+                  <a:lnTo>
+                    <a:pt x="3877440" y="3055920"/>
+                  </a:lnTo>
+                  <a:lnTo>
+                    <a:pt x="3799806" y="3019324"/>
+                  </a:lnTo>
+                  <a:lnTo>
+                    <a:pt x="3722172" y="2980483"/>
+                  </a:lnTo>
+                  <a:lnTo>
+                    <a:pt x="3644538" y="2939260"/>
+                  </a:lnTo>
+                  <a:lnTo>
+                    <a:pt x="3566904" y="2895508"/>
+                  </a:lnTo>
+                  <a:lnTo>
+                    <a:pt x="3489270" y="2849074"/>
+                  </a:lnTo>
+                  <a:lnTo>
+                    <a:pt x="3411636" y="2799792"/>
+                  </a:lnTo>
+                  <a:lnTo>
+                    <a:pt x="3334002" y="2771511"/>
+                  </a:lnTo>
+                  <a:lnTo>
+                    <a:pt x="3256368" y="2754179"/>
+                  </a:lnTo>
+                  <a:lnTo>
+                    <a:pt x="3178734" y="2736507"/>
+                  </a:lnTo>
+                  <a:lnTo>
+                    <a:pt x="3101100" y="2718486"/>
+                  </a:lnTo>
+                  <a:lnTo>
+                    <a:pt x="3023466" y="2700112"/>
+                  </a:lnTo>
+                  <a:lnTo>
+                    <a:pt x="2945832" y="2681375"/>
+                  </a:lnTo>
+                  <a:lnTo>
+                    <a:pt x="2868198" y="2662271"/>
+                  </a:lnTo>
+                  <a:lnTo>
+                    <a:pt x="2790564" y="2642790"/>
+                  </a:lnTo>
+                  <a:lnTo>
+                    <a:pt x="2712930" y="2622926"/>
+                  </a:lnTo>
+                  <a:lnTo>
+                    <a:pt x="2635295" y="2602672"/>
+                  </a:lnTo>
+                  <a:lnTo>
+                    <a:pt x="2557661" y="2582019"/>
+                  </a:lnTo>
+                  <a:lnTo>
+                    <a:pt x="2480027" y="2560960"/>
+                  </a:lnTo>
+                  <a:lnTo>
+                    <a:pt x="2402393" y="2539487"/>
+                  </a:lnTo>
+                  <a:lnTo>
+                    <a:pt x="2324759" y="2517591"/>
+                  </a:lnTo>
+                  <a:lnTo>
+                    <a:pt x="2247125" y="2495265"/>
+                  </a:lnTo>
+                  <a:lnTo>
+                    <a:pt x="2169491" y="2472499"/>
+                  </a:lnTo>
+                  <a:lnTo>
+                    <a:pt x="2091857" y="2449286"/>
+                  </a:lnTo>
+                  <a:lnTo>
+                    <a:pt x="2014223" y="2425616"/>
+                  </a:lnTo>
+                  <a:lnTo>
+                    <a:pt x="1936589" y="2401480"/>
+                  </a:lnTo>
+                  <a:lnTo>
+                    <a:pt x="1858955" y="2376870"/>
+                  </a:lnTo>
+                  <a:lnTo>
+                    <a:pt x="1781321" y="2351776"/>
+                  </a:lnTo>
+                  <a:lnTo>
+                    <a:pt x="1703687" y="2326188"/>
+                  </a:lnTo>
+                  <a:lnTo>
+                    <a:pt x="1626053" y="2300096"/>
+                  </a:lnTo>
+                  <a:lnTo>
+                    <a:pt x="1548419" y="2273492"/>
+                  </a:lnTo>
+                  <a:lnTo>
+                    <a:pt x="1470785" y="2246364"/>
+                  </a:lnTo>
+                  <a:lnTo>
+                    <a:pt x="1393151" y="2218703"/>
+                  </a:lnTo>
+                  <a:lnTo>
+                    <a:pt x="1315517" y="2190497"/>
+                  </a:lnTo>
+                  <a:lnTo>
+                    <a:pt x="1237883" y="2161737"/>
+                  </a:lnTo>
+                  <a:lnTo>
+                    <a:pt x="1160249" y="2132411"/>
+                  </a:lnTo>
+                  <a:lnTo>
+                    <a:pt x="1082615" y="2102508"/>
+                  </a:lnTo>
+                  <a:lnTo>
+                    <a:pt x="1004981" y="2072017"/>
+                  </a:lnTo>
+                  <a:lnTo>
+                    <a:pt x="927346" y="2040926"/>
+                  </a:lnTo>
+                  <a:lnTo>
+                    <a:pt x="849712" y="2009224"/>
+                  </a:lnTo>
+                  <a:lnTo>
+                    <a:pt x="772078" y="1976898"/>
+                  </a:lnTo>
+                  <a:lnTo>
+                    <a:pt x="694444" y="1943937"/>
+                  </a:lnTo>
+                  <a:lnTo>
+                    <a:pt x="616810" y="1910326"/>
+                  </a:lnTo>
+                  <a:lnTo>
+                    <a:pt x="539176" y="1876055"/>
+                  </a:lnTo>
+                  <a:lnTo>
+                    <a:pt x="461542" y="1841110"/>
+                  </a:lnTo>
+                  <a:lnTo>
+                    <a:pt x="383908" y="1805477"/>
+                  </a:lnTo>
+                  <a:lnTo>
+                    <a:pt x="306274" y="1769144"/>
+                  </a:lnTo>
+                  <a:lnTo>
+                    <a:pt x="228640" y="1732095"/>
+                  </a:lnTo>
+                  <a:lnTo>
+                    <a:pt x="151006" y="1694318"/>
+                  </a:lnTo>
+                  <a:lnTo>
+                    <a:pt x="73372" y="1655798"/>
+                  </a:lnTo>
+                  <a:lnTo>
+                    <a:pt x="0" y="1618677"/>
                   </a:lnTo>
                   <a:close/>
                 </a:path>
@@ -3543,234 +3552,243 @@
           </p:nvSpPr>
           <p:spPr>
             <a:xfrm>
-              <a:off x="2525834" y="1896563"/>
-              <a:ext cx="5662656" cy="3404102"/>
+              <a:off x="2332476" y="1896563"/>
+              <a:ext cx="5856013" cy="3332649"/>
             </a:xfrm>
             <a:custGeom>
               <a:avLst/>
               <a:pathLst>
-                <a:path w="5662656" h="3404102">
+                <a:path w="5856013" h="3332649">
                   <a:moveTo>
                     <a:pt x="0" y="0"/>
                   </a:moveTo>
                   <a:lnTo>
-                    <a:pt x="73004" y="221502"/>
-                  </a:lnTo>
-                  <a:lnTo>
-                    <a:pt x="150639" y="441918"/>
-                  </a:lnTo>
-                  <a:lnTo>
-                    <a:pt x="228273" y="648175"/>
-                  </a:lnTo>
-                  <a:lnTo>
-                    <a:pt x="305907" y="841182"/>
-                  </a:lnTo>
-                  <a:lnTo>
-                    <a:pt x="383541" y="1021790"/>
-                  </a:lnTo>
-                  <a:lnTo>
-                    <a:pt x="461175" y="1190795"/>
-                  </a:lnTo>
-                  <a:lnTo>
-                    <a:pt x="538809" y="1348944"/>
-                  </a:lnTo>
-                  <a:lnTo>
-                    <a:pt x="616443" y="1496934"/>
-                  </a:lnTo>
-                  <a:lnTo>
-                    <a:pt x="694077" y="1635416"/>
-                  </a:lnTo>
-                  <a:lnTo>
-                    <a:pt x="771711" y="1765003"/>
-                  </a:lnTo>
-                  <a:lnTo>
-                    <a:pt x="849345" y="1886265"/>
-                  </a:lnTo>
-                  <a:lnTo>
-                    <a:pt x="926979" y="1999737"/>
-                  </a:lnTo>
-                  <a:lnTo>
-                    <a:pt x="1004613" y="2105919"/>
-                  </a:lnTo>
-                  <a:lnTo>
-                    <a:pt x="1082247" y="2205280"/>
-                  </a:lnTo>
-                  <a:lnTo>
-                    <a:pt x="1159881" y="2298259"/>
-                  </a:lnTo>
-                  <a:lnTo>
-                    <a:pt x="1237515" y="2385264"/>
-                  </a:lnTo>
-                  <a:lnTo>
-                    <a:pt x="1315149" y="2466681"/>
-                  </a:lnTo>
-                  <a:lnTo>
-                    <a:pt x="1392783" y="2542867"/>
-                  </a:lnTo>
-                  <a:lnTo>
-                    <a:pt x="1470417" y="2614159"/>
-                  </a:lnTo>
-                  <a:lnTo>
-                    <a:pt x="1548051" y="2680871"/>
-                  </a:lnTo>
-                  <a:lnTo>
-                    <a:pt x="1625685" y="2743297"/>
-                  </a:lnTo>
-                  <a:lnTo>
-                    <a:pt x="1703319" y="2789904"/>
-                  </a:lnTo>
-                  <a:lnTo>
-                    <a:pt x="1780953" y="2810702"/>
-                  </a:lnTo>
-                  <a:lnTo>
-                    <a:pt x="1858588" y="2830998"/>
-                  </a:lnTo>
-                  <a:lnTo>
-                    <a:pt x="1936222" y="2850805"/>
-                  </a:lnTo>
-                  <a:lnTo>
-                    <a:pt x="2013856" y="2870135"/>
-                  </a:lnTo>
-                  <a:lnTo>
-                    <a:pt x="2091490" y="2888999"/>
-                  </a:lnTo>
-                  <a:lnTo>
-                    <a:pt x="2169124" y="2907408"/>
-                  </a:lnTo>
-                  <a:lnTo>
-                    <a:pt x="2246758" y="2925373"/>
-                  </a:lnTo>
-                  <a:lnTo>
-                    <a:pt x="2324392" y="2942905"/>
-                  </a:lnTo>
-                  <a:lnTo>
-                    <a:pt x="2402026" y="2960014"/>
-                  </a:lnTo>
-                  <a:lnTo>
-                    <a:pt x="2479660" y="2976711"/>
-                  </a:lnTo>
-                  <a:lnTo>
-                    <a:pt x="2557294" y="2993006"/>
-                  </a:lnTo>
-                  <a:lnTo>
-                    <a:pt x="2634928" y="3008907"/>
-                  </a:lnTo>
-                  <a:lnTo>
-                    <a:pt x="2712562" y="3024426"/>
-                  </a:lnTo>
-                  <a:lnTo>
-                    <a:pt x="2790196" y="3039570"/>
-                  </a:lnTo>
-                  <a:lnTo>
-                    <a:pt x="2867830" y="3054349"/>
-                  </a:lnTo>
-                  <a:lnTo>
-                    <a:pt x="2945464" y="3068772"/>
-                  </a:lnTo>
-                  <a:lnTo>
-                    <a:pt x="3023098" y="3082847"/>
-                  </a:lnTo>
-                  <a:lnTo>
-                    <a:pt x="3100732" y="3096583"/>
-                  </a:lnTo>
-                  <a:lnTo>
-                    <a:pt x="3178366" y="3109988"/>
-                  </a:lnTo>
-                  <a:lnTo>
-                    <a:pt x="3256000" y="3123070"/>
-                  </a:lnTo>
-                  <a:lnTo>
-                    <a:pt x="3333634" y="3135836"/>
-                  </a:lnTo>
-                  <a:lnTo>
-                    <a:pt x="3411268" y="3148294"/>
-                  </a:lnTo>
-                  <a:lnTo>
-                    <a:pt x="3488902" y="3160453"/>
-                  </a:lnTo>
-                  <a:lnTo>
-                    <a:pt x="3566536" y="3172318"/>
-                  </a:lnTo>
-                  <a:lnTo>
-                    <a:pt x="3644171" y="3183897"/>
-                  </a:lnTo>
-                  <a:lnTo>
-                    <a:pt x="3721805" y="3195197"/>
-                  </a:lnTo>
-                  <a:lnTo>
-                    <a:pt x="3799439" y="3206224"/>
-                  </a:lnTo>
-                  <a:lnTo>
-                    <a:pt x="3877073" y="3216986"/>
-                  </a:lnTo>
-                  <a:lnTo>
-                    <a:pt x="3954707" y="3227488"/>
-                  </a:lnTo>
-                  <a:lnTo>
-                    <a:pt x="4032341" y="3237737"/>
-                  </a:lnTo>
-                  <a:lnTo>
-                    <a:pt x="4109975" y="3247739"/>
-                  </a:lnTo>
-                  <a:lnTo>
-                    <a:pt x="4187609" y="3257500"/>
-                  </a:lnTo>
-                  <a:lnTo>
-                    <a:pt x="4265243" y="3267026"/>
-                  </a:lnTo>
-                  <a:lnTo>
-                    <a:pt x="4342877" y="3276322"/>
-                  </a:lnTo>
-                  <a:lnTo>
-                    <a:pt x="4420511" y="3285394"/>
-                  </a:lnTo>
-                  <a:lnTo>
-                    <a:pt x="4498145" y="3294247"/>
-                  </a:lnTo>
-                  <a:lnTo>
-                    <a:pt x="4575779" y="3302887"/>
-                  </a:lnTo>
-                  <a:lnTo>
-                    <a:pt x="4653413" y="3311318"/>
-                  </a:lnTo>
-                  <a:lnTo>
-                    <a:pt x="4731047" y="3319546"/>
-                  </a:lnTo>
-                  <a:lnTo>
-                    <a:pt x="4808681" y="3327576"/>
-                  </a:lnTo>
-                  <a:lnTo>
-                    <a:pt x="4886315" y="3335412"/>
-                  </a:lnTo>
-                  <a:lnTo>
-                    <a:pt x="4963949" y="3343060"/>
-                  </a:lnTo>
-                  <a:lnTo>
-                    <a:pt x="5041583" y="3350523"/>
-                  </a:lnTo>
-                  <a:lnTo>
-                    <a:pt x="5119217" y="3357806"/>
-                  </a:lnTo>
-                  <a:lnTo>
-                    <a:pt x="5196851" y="3364914"/>
-                  </a:lnTo>
-                  <a:lnTo>
-                    <a:pt x="5274485" y="3371850"/>
-                  </a:lnTo>
-                  <a:lnTo>
-                    <a:pt x="5352120" y="3378619"/>
-                  </a:lnTo>
-                  <a:lnTo>
-                    <a:pt x="5429754" y="3385225"/>
-                  </a:lnTo>
-                  <a:lnTo>
-                    <a:pt x="5507388" y="3391671"/>
-                  </a:lnTo>
-                  <a:lnTo>
-                    <a:pt x="5585022" y="3397962"/>
-                  </a:lnTo>
-                  <a:lnTo>
-                    <a:pt x="5662656" y="3404102"/>
+                    <a:pt x="33460" y="94064"/>
+                  </a:lnTo>
+                  <a:lnTo>
+                    <a:pt x="111094" y="299697"/>
+                  </a:lnTo>
+                  <a:lnTo>
+                    <a:pt x="188728" y="493448"/>
+                  </a:lnTo>
+                  <a:lnTo>
+                    <a:pt x="266362" y="676003"/>
+                  </a:lnTo>
+                  <a:lnTo>
+                    <a:pt x="343996" y="848010"/>
+                  </a:lnTo>
+                  <a:lnTo>
+                    <a:pt x="421630" y="1010076"/>
+                  </a:lnTo>
+                  <a:lnTo>
+                    <a:pt x="499264" y="1162778"/>
+                  </a:lnTo>
+                  <a:lnTo>
+                    <a:pt x="576898" y="1306655"/>
+                  </a:lnTo>
+                  <a:lnTo>
+                    <a:pt x="654532" y="1442219"/>
+                  </a:lnTo>
+                  <a:lnTo>
+                    <a:pt x="732166" y="1569949"/>
+                  </a:lnTo>
+                  <a:lnTo>
+                    <a:pt x="809800" y="1690298"/>
+                  </a:lnTo>
+                  <a:lnTo>
+                    <a:pt x="887434" y="1803693"/>
+                  </a:lnTo>
+                  <a:lnTo>
+                    <a:pt x="965069" y="1910535"/>
+                  </a:lnTo>
+                  <a:lnTo>
+                    <a:pt x="1042703" y="2011204"/>
+                  </a:lnTo>
+                  <a:lnTo>
+                    <a:pt x="1120337" y="2106055"/>
+                  </a:lnTo>
+                  <a:lnTo>
+                    <a:pt x="1197971" y="2195425"/>
+                  </a:lnTo>
+                  <a:lnTo>
+                    <a:pt x="1275605" y="2279631"/>
+                  </a:lnTo>
+                  <a:lnTo>
+                    <a:pt x="1353239" y="2358971"/>
+                  </a:lnTo>
+                  <a:lnTo>
+                    <a:pt x="1430873" y="2433726"/>
+                  </a:lnTo>
+                  <a:lnTo>
+                    <a:pt x="1508507" y="2504161"/>
+                  </a:lnTo>
+                  <a:lnTo>
+                    <a:pt x="1586141" y="2570527"/>
+                  </a:lnTo>
+                  <a:lnTo>
+                    <a:pt x="1663775" y="2633057"/>
+                  </a:lnTo>
+                  <a:lnTo>
+                    <a:pt x="1741409" y="2691974"/>
+                  </a:lnTo>
+                  <a:lnTo>
+                    <a:pt x="1819043" y="2747487"/>
+                  </a:lnTo>
+                  <a:lnTo>
+                    <a:pt x="1896677" y="2788509"/>
+                  </a:lnTo>
+                  <a:lnTo>
+                    <a:pt x="1974311" y="2805178"/>
+                  </a:lnTo>
+                  <a:lnTo>
+                    <a:pt x="2051945" y="2821526"/>
+                  </a:lnTo>
+                  <a:lnTo>
+                    <a:pt x="2129579" y="2837559"/>
+                  </a:lnTo>
+                  <a:lnTo>
+                    <a:pt x="2207213" y="2853282"/>
+                  </a:lnTo>
+                  <a:lnTo>
+                    <a:pt x="2284847" y="2868702"/>
+                  </a:lnTo>
+                  <a:lnTo>
+                    <a:pt x="2362481" y="2883825"/>
+                  </a:lnTo>
+                  <a:lnTo>
+                    <a:pt x="2440115" y="2898656"/>
+                  </a:lnTo>
+                  <a:lnTo>
+                    <a:pt x="2517749" y="2913201"/>
+                  </a:lnTo>
+                  <a:lnTo>
+                    <a:pt x="2595383" y="2927465"/>
+                  </a:lnTo>
+                  <a:lnTo>
+                    <a:pt x="2673018" y="2941454"/>
+                  </a:lnTo>
+                  <a:lnTo>
+                    <a:pt x="2750652" y="2955173"/>
+                  </a:lnTo>
+                  <a:lnTo>
+                    <a:pt x="2828286" y="2968627"/>
+                  </a:lnTo>
+                  <a:lnTo>
+                    <a:pt x="2905920" y="2981822"/>
+                  </a:lnTo>
+                  <a:lnTo>
+                    <a:pt x="2983554" y="2994763"/>
+                  </a:lnTo>
+                  <a:lnTo>
+                    <a:pt x="3061188" y="3007454"/>
+                  </a:lnTo>
+                  <a:lnTo>
+                    <a:pt x="3138822" y="3019900"/>
+                  </a:lnTo>
+                  <a:lnTo>
+                    <a:pt x="3216456" y="3032106"/>
+                  </a:lnTo>
+                  <a:lnTo>
+                    <a:pt x="3294090" y="3044076"/>
+                  </a:lnTo>
+                  <a:lnTo>
+                    <a:pt x="3371724" y="3055816"/>
+                  </a:lnTo>
+                  <a:lnTo>
+                    <a:pt x="3449358" y="3067329"/>
+                  </a:lnTo>
+                  <a:lnTo>
+                    <a:pt x="3526992" y="3078620"/>
+                  </a:lnTo>
+                  <a:lnTo>
+                    <a:pt x="3604626" y="3089693"/>
+                  </a:lnTo>
+                  <a:lnTo>
+                    <a:pt x="3682260" y="3100552"/>
+                  </a:lnTo>
+                  <a:lnTo>
+                    <a:pt x="3759894" y="3111203"/>
+                  </a:lnTo>
+                  <a:lnTo>
+                    <a:pt x="3837528" y="3121647"/>
+                  </a:lnTo>
+                  <a:lnTo>
+                    <a:pt x="3915162" y="3131890"/>
+                  </a:lnTo>
+                  <a:lnTo>
+                    <a:pt x="3992796" y="3141936"/>
+                  </a:lnTo>
+                  <a:lnTo>
+                    <a:pt x="4070430" y="3151788"/>
+                  </a:lnTo>
+                  <a:lnTo>
+                    <a:pt x="4148064" y="3161449"/>
+                  </a:lnTo>
+                  <a:lnTo>
+                    <a:pt x="4225698" y="3170925"/>
+                  </a:lnTo>
+                  <a:lnTo>
+                    <a:pt x="4303332" y="3180217"/>
+                  </a:lnTo>
+                  <a:lnTo>
+                    <a:pt x="4380966" y="3189331"/>
+                  </a:lnTo>
+                  <a:lnTo>
+                    <a:pt x="4458601" y="3198268"/>
+                  </a:lnTo>
+                  <a:lnTo>
+                    <a:pt x="4536235" y="3207033"/>
+                  </a:lnTo>
+                  <a:lnTo>
+                    <a:pt x="4613869" y="3215629"/>
+                  </a:lnTo>
+                  <a:lnTo>
+                    <a:pt x="4691503" y="3224060"/>
+                  </a:lnTo>
+                  <a:lnTo>
+                    <a:pt x="4769137" y="3232327"/>
+                  </a:lnTo>
+                  <a:lnTo>
+                    <a:pt x="4846771" y="3240435"/>
+                  </a:lnTo>
+                  <a:lnTo>
+                    <a:pt x="4924405" y="3248387"/>
+                  </a:lnTo>
+                  <a:lnTo>
+                    <a:pt x="5002039" y="3256185"/>
+                  </a:lnTo>
+                  <a:lnTo>
+                    <a:pt x="5079673" y="3263833"/>
+                  </a:lnTo>
+                  <a:lnTo>
+                    <a:pt x="5157307" y="3271333"/>
+                  </a:lnTo>
+                  <a:lnTo>
+                    <a:pt x="5234941" y="3278689"/>
+                  </a:lnTo>
+                  <a:lnTo>
+                    <a:pt x="5312575" y="3285903"/>
+                  </a:lnTo>
+                  <a:lnTo>
+                    <a:pt x="5390209" y="3292977"/>
+                  </a:lnTo>
+                  <a:lnTo>
+                    <a:pt x="5467843" y="3299916"/>
+                  </a:lnTo>
+                  <a:lnTo>
+                    <a:pt x="5545477" y="3306720"/>
+                  </a:lnTo>
+                  <a:lnTo>
+                    <a:pt x="5623111" y="3313393"/>
+                  </a:lnTo>
+                  <a:lnTo>
+                    <a:pt x="5700745" y="3319937"/>
+                  </a:lnTo>
+                  <a:lnTo>
+                    <a:pt x="5778379" y="3326355"/>
+                  </a:lnTo>
+                  <a:lnTo>
+                    <a:pt x="5856013" y="3332649"/>
                   </a:lnTo>
                 </a:path>
               </a:pathLst>
@@ -3790,297 +3808,297 @@
           </p:nvSpPr>
           <p:spPr>
             <a:xfrm>
-              <a:off x="817517" y="3028039"/>
-              <a:ext cx="7370972" cy="2492375"/>
+              <a:off x="817517" y="3515240"/>
+              <a:ext cx="7370972" cy="1992992"/>
             </a:xfrm>
             <a:custGeom>
               <a:avLst/>
               <a:pathLst>
-                <a:path w="7370972" h="2492375">
+                <a:path w="7370972" h="1992992">
                   <a:moveTo>
-                    <a:pt x="7370972" y="2492375"/>
+                    <a:pt x="7370972" y="1992992"/>
                   </a:moveTo>
                   <a:lnTo>
-                    <a:pt x="7293338" y="2490398"/>
-                  </a:lnTo>
-                  <a:lnTo>
-                    <a:pt x="7215704" y="2488286"/>
-                  </a:lnTo>
-                  <a:lnTo>
-                    <a:pt x="7138070" y="2486029"/>
-                  </a:lnTo>
-                  <a:lnTo>
-                    <a:pt x="7060436" y="2483616"/>
-                  </a:lnTo>
-                  <a:lnTo>
-                    <a:pt x="6982802" y="2481038"/>
-                  </a:lnTo>
-                  <a:lnTo>
-                    <a:pt x="6905168" y="2478283"/>
-                  </a:lnTo>
-                  <a:lnTo>
-                    <a:pt x="6827534" y="2475339"/>
-                  </a:lnTo>
-                  <a:lnTo>
-                    <a:pt x="6749900" y="2472193"/>
-                  </a:lnTo>
-                  <a:lnTo>
-                    <a:pt x="6672266" y="2468831"/>
-                  </a:lnTo>
-                  <a:lnTo>
-                    <a:pt x="6594632" y="2465238"/>
-                  </a:lnTo>
-                  <a:lnTo>
-                    <a:pt x="6516998" y="2461399"/>
-                  </a:lnTo>
-                  <a:lnTo>
-                    <a:pt x="6439364" y="2457296"/>
-                  </a:lnTo>
-                  <a:lnTo>
-                    <a:pt x="6361730" y="2452911"/>
-                  </a:lnTo>
-                  <a:lnTo>
-                    <a:pt x="6284096" y="2448225"/>
-                  </a:lnTo>
-                  <a:lnTo>
-                    <a:pt x="6206462" y="2443218"/>
-                  </a:lnTo>
-                  <a:lnTo>
-                    <a:pt x="6128827" y="2437866"/>
-                  </a:lnTo>
-                  <a:lnTo>
-                    <a:pt x="6051193" y="2432148"/>
-                  </a:lnTo>
-                  <a:lnTo>
-                    <a:pt x="5973559" y="2426036"/>
-                  </a:lnTo>
-                  <a:lnTo>
-                    <a:pt x="5895925" y="2419506"/>
-                  </a:lnTo>
-                  <a:lnTo>
-                    <a:pt x="5818291" y="2412527"/>
-                  </a:lnTo>
-                  <a:lnTo>
-                    <a:pt x="5740657" y="2405068"/>
-                  </a:lnTo>
-                  <a:lnTo>
-                    <a:pt x="5663023" y="2397098"/>
-                  </a:lnTo>
-                  <a:lnTo>
-                    <a:pt x="5585389" y="2388581"/>
-                  </a:lnTo>
-                  <a:lnTo>
-                    <a:pt x="5507755" y="2379479"/>
-                  </a:lnTo>
-                  <a:lnTo>
-                    <a:pt x="5430121" y="2369752"/>
-                  </a:lnTo>
-                  <a:lnTo>
-                    <a:pt x="5352487" y="2359357"/>
-                  </a:lnTo>
-                  <a:lnTo>
-                    <a:pt x="5274853" y="2348249"/>
-                  </a:lnTo>
-                  <a:lnTo>
-                    <a:pt x="5197219" y="2336378"/>
-                  </a:lnTo>
-                  <a:lnTo>
-                    <a:pt x="5119585" y="2323692"/>
-                  </a:lnTo>
-                  <a:lnTo>
-                    <a:pt x="5041951" y="2310135"/>
-                  </a:lnTo>
-                  <a:lnTo>
-                    <a:pt x="4964317" y="2295648"/>
-                  </a:lnTo>
-                  <a:lnTo>
-                    <a:pt x="4886683" y="2280166"/>
-                  </a:lnTo>
-                  <a:lnTo>
-                    <a:pt x="4809049" y="2263621"/>
-                  </a:lnTo>
-                  <a:lnTo>
-                    <a:pt x="4731415" y="2245941"/>
-                  </a:lnTo>
-                  <a:lnTo>
-                    <a:pt x="4653781" y="2227047"/>
-                  </a:lnTo>
-                  <a:lnTo>
-                    <a:pt x="4576147" y="2206855"/>
-                  </a:lnTo>
-                  <a:lnTo>
-                    <a:pt x="4498513" y="2185278"/>
-                  </a:lnTo>
-                  <a:lnTo>
-                    <a:pt x="4420879" y="2162219"/>
-                  </a:lnTo>
-                  <a:lnTo>
-                    <a:pt x="4343244" y="2137577"/>
-                  </a:lnTo>
-                  <a:lnTo>
-                    <a:pt x="4265610" y="2111244"/>
-                  </a:lnTo>
-                  <a:lnTo>
-                    <a:pt x="4187976" y="2083102"/>
-                  </a:lnTo>
-                  <a:lnTo>
-                    <a:pt x="4110342" y="2053029"/>
-                  </a:lnTo>
-                  <a:lnTo>
-                    <a:pt x="4032708" y="2020891"/>
-                  </a:lnTo>
-                  <a:lnTo>
-                    <a:pt x="3955074" y="1986547"/>
-                  </a:lnTo>
-                  <a:lnTo>
-                    <a:pt x="3877440" y="1949846"/>
-                  </a:lnTo>
-                  <a:lnTo>
-                    <a:pt x="3799806" y="1910625"/>
-                  </a:lnTo>
-                  <a:lnTo>
-                    <a:pt x="3722172" y="1868711"/>
-                  </a:lnTo>
-                  <a:lnTo>
-                    <a:pt x="3644538" y="1823920"/>
-                  </a:lnTo>
-                  <a:lnTo>
-                    <a:pt x="3566904" y="1776054"/>
-                  </a:lnTo>
-                  <a:lnTo>
-                    <a:pt x="3489270" y="1724902"/>
-                  </a:lnTo>
-                  <a:lnTo>
-                    <a:pt x="3411636" y="1670238"/>
-                  </a:lnTo>
-                  <a:lnTo>
-                    <a:pt x="3334002" y="1637117"/>
-                  </a:lnTo>
-                  <a:lnTo>
-                    <a:pt x="3256368" y="1615279"/>
-                  </a:lnTo>
-                  <a:lnTo>
-                    <a:pt x="3178734" y="1592901"/>
-                  </a:lnTo>
-                  <a:lnTo>
-                    <a:pt x="3101100" y="1569971"/>
-                  </a:lnTo>
-                  <a:lnTo>
-                    <a:pt x="3023466" y="1546474"/>
-                  </a:lnTo>
-                  <a:lnTo>
-                    <a:pt x="2945832" y="1522397"/>
-                  </a:lnTo>
-                  <a:lnTo>
-                    <a:pt x="2868198" y="1497725"/>
-                  </a:lnTo>
-                  <a:lnTo>
-                    <a:pt x="2790564" y="1472444"/>
-                  </a:lnTo>
-                  <a:lnTo>
-                    <a:pt x="2712930" y="1446538"/>
-                  </a:lnTo>
-                  <a:lnTo>
-                    <a:pt x="2635295" y="1419993"/>
-                  </a:lnTo>
-                  <a:lnTo>
-                    <a:pt x="2557661" y="1392791"/>
-                  </a:lnTo>
-                  <a:lnTo>
-                    <a:pt x="2480027" y="1364918"/>
-                  </a:lnTo>
-                  <a:lnTo>
-                    <a:pt x="2402393" y="1336356"/>
-                  </a:lnTo>
-                  <a:lnTo>
-                    <a:pt x="2324759" y="1307089"/>
-                  </a:lnTo>
-                  <a:lnTo>
-                    <a:pt x="2247125" y="1277098"/>
-                  </a:lnTo>
-                  <a:lnTo>
-                    <a:pt x="2169491" y="1246367"/>
-                  </a:lnTo>
-                  <a:lnTo>
-                    <a:pt x="2091857" y="1214877"/>
-                  </a:lnTo>
-                  <a:lnTo>
-                    <a:pt x="2014223" y="1182608"/>
-                  </a:lnTo>
-                  <a:lnTo>
-                    <a:pt x="1936589" y="1149543"/>
-                  </a:lnTo>
-                  <a:lnTo>
-                    <a:pt x="1858955" y="1115661"/>
-                  </a:lnTo>
-                  <a:lnTo>
-                    <a:pt x="1781321" y="1080942"/>
-                  </a:lnTo>
-                  <a:lnTo>
-                    <a:pt x="1703687" y="1045365"/>
-                  </a:lnTo>
-                  <a:lnTo>
-                    <a:pt x="1626053" y="1008909"/>
-                  </a:lnTo>
-                  <a:lnTo>
-                    <a:pt x="1548419" y="971553"/>
-                  </a:lnTo>
-                  <a:lnTo>
-                    <a:pt x="1470785" y="933275"/>
-                  </a:lnTo>
-                  <a:lnTo>
-                    <a:pt x="1393151" y="894050"/>
-                  </a:lnTo>
-                  <a:lnTo>
-                    <a:pt x="1315517" y="853857"/>
-                  </a:lnTo>
-                  <a:lnTo>
-                    <a:pt x="1237883" y="812670"/>
-                  </a:lnTo>
-                  <a:lnTo>
-                    <a:pt x="1160249" y="770467"/>
-                  </a:lnTo>
-                  <a:lnTo>
-                    <a:pt x="1082615" y="727221"/>
-                  </a:lnTo>
-                  <a:lnTo>
-                    <a:pt x="1004981" y="682906"/>
-                  </a:lnTo>
-                  <a:lnTo>
-                    <a:pt x="927346" y="637497"/>
-                  </a:lnTo>
-                  <a:lnTo>
-                    <a:pt x="849712" y="590966"/>
-                  </a:lnTo>
-                  <a:lnTo>
-                    <a:pt x="772078" y="543286"/>
-                  </a:lnTo>
-                  <a:lnTo>
-                    <a:pt x="694444" y="494428"/>
-                  </a:lnTo>
-                  <a:lnTo>
-                    <a:pt x="616810" y="444363"/>
-                  </a:lnTo>
-                  <a:lnTo>
-                    <a:pt x="539176" y="393062"/>
-                  </a:lnTo>
-                  <a:lnTo>
-                    <a:pt x="461542" y="340493"/>
-                  </a:lnTo>
-                  <a:lnTo>
-                    <a:pt x="383908" y="286625"/>
-                  </a:lnTo>
-                  <a:lnTo>
-                    <a:pt x="306274" y="231427"/>
-                  </a:lnTo>
-                  <a:lnTo>
-                    <a:pt x="228640" y="174866"/>
-                  </a:lnTo>
-                  <a:lnTo>
-                    <a:pt x="151006" y="116907"/>
-                  </a:lnTo>
-                  <a:lnTo>
-                    <a:pt x="73372" y="57516"/>
+                    <a:pt x="7293338" y="1990479"/>
+                  </a:lnTo>
+                  <a:lnTo>
+                    <a:pt x="7215704" y="1987811"/>
+                  </a:lnTo>
+                  <a:lnTo>
+                    <a:pt x="7138070" y="1984981"/>
+                  </a:lnTo>
+                  <a:lnTo>
+                    <a:pt x="7060436" y="1981977"/>
+                  </a:lnTo>
+                  <a:lnTo>
+                    <a:pt x="6982802" y="1978788"/>
+                  </a:lnTo>
+                  <a:lnTo>
+                    <a:pt x="6905168" y="1975404"/>
+                  </a:lnTo>
+                  <a:lnTo>
+                    <a:pt x="6827534" y="1971813"/>
+                  </a:lnTo>
+                  <a:lnTo>
+                    <a:pt x="6749900" y="1968001"/>
+                  </a:lnTo>
+                  <a:lnTo>
+                    <a:pt x="6672266" y="1963955"/>
+                  </a:lnTo>
+                  <a:lnTo>
+                    <a:pt x="6594632" y="1959661"/>
+                  </a:lnTo>
+                  <a:lnTo>
+                    <a:pt x="6516998" y="1955104"/>
+                  </a:lnTo>
+                  <a:lnTo>
+                    <a:pt x="6439364" y="1950268"/>
+                  </a:lnTo>
+                  <a:lnTo>
+                    <a:pt x="6361730" y="1945135"/>
+                  </a:lnTo>
+                  <a:lnTo>
+                    <a:pt x="6284096" y="1939687"/>
+                  </a:lnTo>
+                  <a:lnTo>
+                    <a:pt x="6206462" y="1933904"/>
+                  </a:lnTo>
+                  <a:lnTo>
+                    <a:pt x="6128827" y="1927768"/>
+                  </a:lnTo>
+                  <a:lnTo>
+                    <a:pt x="6051193" y="1921255"/>
+                  </a:lnTo>
+                  <a:lnTo>
+                    <a:pt x="5973559" y="1914342"/>
+                  </a:lnTo>
+                  <a:lnTo>
+                    <a:pt x="5895925" y="1907006"/>
+                  </a:lnTo>
+                  <a:lnTo>
+                    <a:pt x="5818291" y="1899219"/>
+                  </a:lnTo>
+                  <a:lnTo>
+                    <a:pt x="5740657" y="1890955"/>
+                  </a:lnTo>
+                  <a:lnTo>
+                    <a:pt x="5663023" y="1882185"/>
+                  </a:lnTo>
+                  <a:lnTo>
+                    <a:pt x="5585389" y="1872876"/>
+                  </a:lnTo>
+                  <a:lnTo>
+                    <a:pt x="5507755" y="1862996"/>
+                  </a:lnTo>
+                  <a:lnTo>
+                    <a:pt x="5430121" y="1852511"/>
+                  </a:lnTo>
+                  <a:lnTo>
+                    <a:pt x="5352487" y="1841382"/>
+                  </a:lnTo>
+                  <a:lnTo>
+                    <a:pt x="5274853" y="1829571"/>
+                  </a:lnTo>
+                  <a:lnTo>
+                    <a:pt x="5197219" y="1817036"/>
+                  </a:lnTo>
+                  <a:lnTo>
+                    <a:pt x="5119585" y="1803732"/>
+                  </a:lnTo>
+                  <a:lnTo>
+                    <a:pt x="5041951" y="1789612"/>
+                  </a:lnTo>
+                  <a:lnTo>
+                    <a:pt x="4964317" y="1774626"/>
+                  </a:lnTo>
+                  <a:lnTo>
+                    <a:pt x="4886683" y="1758720"/>
+                  </a:lnTo>
+                  <a:lnTo>
+                    <a:pt x="4809049" y="1741840"/>
+                  </a:lnTo>
+                  <a:lnTo>
+                    <a:pt x="4731415" y="1723924"/>
+                  </a:lnTo>
+                  <a:lnTo>
+                    <a:pt x="4653781" y="1704909"/>
+                  </a:lnTo>
+                  <a:lnTo>
+                    <a:pt x="4576147" y="1684728"/>
+                  </a:lnTo>
+                  <a:lnTo>
+                    <a:pt x="4498513" y="1663310"/>
+                  </a:lnTo>
+                  <a:lnTo>
+                    <a:pt x="4420879" y="1640578"/>
+                  </a:lnTo>
+                  <a:lnTo>
+                    <a:pt x="4343244" y="1616451"/>
+                  </a:lnTo>
+                  <a:lnTo>
+                    <a:pt x="4265610" y="1590846"/>
+                  </a:lnTo>
+                  <a:lnTo>
+                    <a:pt x="4187976" y="1563669"/>
+                  </a:lnTo>
+                  <a:lnTo>
+                    <a:pt x="4110342" y="1534826"/>
+                  </a:lnTo>
+                  <a:lnTo>
+                    <a:pt x="4032708" y="1504215"/>
+                  </a:lnTo>
+                  <a:lnTo>
+                    <a:pt x="3955074" y="1471725"/>
+                  </a:lnTo>
+                  <a:lnTo>
+                    <a:pt x="3877440" y="1437243"/>
+                  </a:lnTo>
+                  <a:lnTo>
+                    <a:pt x="3799806" y="1400647"/>
+                  </a:lnTo>
+                  <a:lnTo>
+                    <a:pt x="3722172" y="1361806"/>
+                  </a:lnTo>
+                  <a:lnTo>
+                    <a:pt x="3644538" y="1320583"/>
+                  </a:lnTo>
+                  <a:lnTo>
+                    <a:pt x="3566904" y="1276831"/>
+                  </a:lnTo>
+                  <a:lnTo>
+                    <a:pt x="3489270" y="1230397"/>
+                  </a:lnTo>
+                  <a:lnTo>
+                    <a:pt x="3411636" y="1181115"/>
+                  </a:lnTo>
+                  <a:lnTo>
+                    <a:pt x="3334002" y="1152834"/>
+                  </a:lnTo>
+                  <a:lnTo>
+                    <a:pt x="3256368" y="1135502"/>
+                  </a:lnTo>
+                  <a:lnTo>
+                    <a:pt x="3178734" y="1117830"/>
+                  </a:lnTo>
+                  <a:lnTo>
+                    <a:pt x="3101100" y="1099809"/>
+                  </a:lnTo>
+                  <a:lnTo>
+                    <a:pt x="3023466" y="1081435"/>
+                  </a:lnTo>
+                  <a:lnTo>
+                    <a:pt x="2945832" y="1062698"/>
+                  </a:lnTo>
+                  <a:lnTo>
+                    <a:pt x="2868198" y="1043594"/>
+                  </a:lnTo>
+                  <a:lnTo>
+                    <a:pt x="2790564" y="1024113"/>
+                  </a:lnTo>
+                  <a:lnTo>
+                    <a:pt x="2712930" y="1004249"/>
+                  </a:lnTo>
+                  <a:lnTo>
+                    <a:pt x="2635295" y="983995"/>
+                  </a:lnTo>
+                  <a:lnTo>
+                    <a:pt x="2557661" y="963342"/>
+                  </a:lnTo>
+                  <a:lnTo>
+                    <a:pt x="2480027" y="942283"/>
+                  </a:lnTo>
+                  <a:lnTo>
+                    <a:pt x="2402393" y="920810"/>
+                  </a:lnTo>
+                  <a:lnTo>
+                    <a:pt x="2324759" y="898914"/>
+                  </a:lnTo>
+                  <a:lnTo>
+                    <a:pt x="2247125" y="876588"/>
+                  </a:lnTo>
+                  <a:lnTo>
+                    <a:pt x="2169491" y="853822"/>
+                  </a:lnTo>
+                  <a:lnTo>
+                    <a:pt x="2091857" y="830609"/>
+                  </a:lnTo>
+                  <a:lnTo>
+                    <a:pt x="2014223" y="806939"/>
+                  </a:lnTo>
+                  <a:lnTo>
+                    <a:pt x="1936589" y="782803"/>
+                  </a:lnTo>
+                  <a:lnTo>
+                    <a:pt x="1858955" y="758193"/>
+                  </a:lnTo>
+                  <a:lnTo>
+                    <a:pt x="1781321" y="733099"/>
+                  </a:lnTo>
+                  <a:lnTo>
+                    <a:pt x="1703687" y="707511"/>
+                  </a:lnTo>
+                  <a:lnTo>
+                    <a:pt x="1626053" y="681419"/>
+                  </a:lnTo>
+                  <a:lnTo>
+                    <a:pt x="1548419" y="654815"/>
+                  </a:lnTo>
+                  <a:lnTo>
+                    <a:pt x="1470785" y="627687"/>
+                  </a:lnTo>
+                  <a:lnTo>
+                    <a:pt x="1393151" y="600026"/>
+                  </a:lnTo>
+                  <a:lnTo>
+                    <a:pt x="1315517" y="571820"/>
+                  </a:lnTo>
+                  <a:lnTo>
+                    <a:pt x="1237883" y="543060"/>
+                  </a:lnTo>
+                  <a:lnTo>
+                    <a:pt x="1160249" y="513734"/>
+                  </a:lnTo>
+                  <a:lnTo>
+                    <a:pt x="1082615" y="483831"/>
+                  </a:lnTo>
+                  <a:lnTo>
+                    <a:pt x="1004981" y="453340"/>
+                  </a:lnTo>
+                  <a:lnTo>
+                    <a:pt x="927346" y="422249"/>
+                  </a:lnTo>
+                  <a:lnTo>
+                    <a:pt x="849712" y="390547"/>
+                  </a:lnTo>
+                  <a:lnTo>
+                    <a:pt x="772078" y="358221"/>
+                  </a:lnTo>
+                  <a:lnTo>
+                    <a:pt x="694444" y="325260"/>
+                  </a:lnTo>
+                  <a:lnTo>
+                    <a:pt x="616810" y="291649"/>
+                  </a:lnTo>
+                  <a:lnTo>
+                    <a:pt x="539176" y="257378"/>
+                  </a:lnTo>
+                  <a:lnTo>
+                    <a:pt x="461542" y="222433"/>
+                  </a:lnTo>
+                  <a:lnTo>
+                    <a:pt x="383908" y="186800"/>
+                  </a:lnTo>
+                  <a:lnTo>
+                    <a:pt x="306274" y="150467"/>
+                  </a:lnTo>
+                  <a:lnTo>
+                    <a:pt x="228640" y="113418"/>
+                  </a:lnTo>
+                  <a:lnTo>
+                    <a:pt x="151006" y="75641"/>
+                  </a:lnTo>
+                  <a:lnTo>
+                    <a:pt x="73372" y="37121"/>
                   </a:lnTo>
                   <a:lnTo>
                     <a:pt x="0" y="0"/>
@@ -4103,264 +4121,279 @@
           </p:nvSpPr>
           <p:spPr>
             <a:xfrm>
-              <a:off x="1749729" y="1896563"/>
-              <a:ext cx="6438761" cy="3568049"/>
+              <a:off x="1383515" y="1896563"/>
+              <a:ext cx="6804975" cy="3538137"/>
             </a:xfrm>
             <a:custGeom>
               <a:avLst/>
               <a:pathLst>
-                <a:path w="6438761" h="3568049">
+                <a:path w="6804975" h="3538137">
                   <a:moveTo>
                     <a:pt x="0" y="0"/>
                   </a:moveTo>
                   <a:lnTo>
-                    <a:pt x="72769" y="152384"/>
-                  </a:lnTo>
-                  <a:lnTo>
-                    <a:pt x="150403" y="307739"/>
-                  </a:lnTo>
-                  <a:lnTo>
-                    <a:pt x="228037" y="456199"/>
-                  </a:lnTo>
-                  <a:lnTo>
-                    <a:pt x="305671" y="598070"/>
-                  </a:lnTo>
-                  <a:lnTo>
-                    <a:pt x="383305" y="733644"/>
-                  </a:lnTo>
-                  <a:lnTo>
-                    <a:pt x="460939" y="863201"/>
-                  </a:lnTo>
-                  <a:lnTo>
-                    <a:pt x="538573" y="987007"/>
-                  </a:lnTo>
-                  <a:lnTo>
-                    <a:pt x="616207" y="1105319"/>
-                  </a:lnTo>
-                  <a:lnTo>
-                    <a:pt x="693841" y="1218379"/>
-                  </a:lnTo>
-                  <a:lnTo>
-                    <a:pt x="771475" y="1326421"/>
-                  </a:lnTo>
-                  <a:lnTo>
-                    <a:pt x="849109" y="1429668"/>
-                  </a:lnTo>
-                  <a:lnTo>
-                    <a:pt x="926743" y="1528333"/>
-                  </a:lnTo>
-                  <a:lnTo>
-                    <a:pt x="1004377" y="1622618"/>
-                  </a:lnTo>
-                  <a:lnTo>
-                    <a:pt x="1082011" y="1712719"/>
-                  </a:lnTo>
-                  <a:lnTo>
-                    <a:pt x="1159646" y="1798820"/>
-                  </a:lnTo>
-                  <a:lnTo>
-                    <a:pt x="1237280" y="1881100"/>
-                  </a:lnTo>
-                  <a:lnTo>
-                    <a:pt x="1314914" y="1959728"/>
-                  </a:lnTo>
-                  <a:lnTo>
-                    <a:pt x="1392548" y="2034866"/>
-                  </a:lnTo>
-                  <a:lnTo>
-                    <a:pt x="1470182" y="2106670"/>
-                  </a:lnTo>
-                  <a:lnTo>
-                    <a:pt x="1547816" y="2175286"/>
-                  </a:lnTo>
-                  <a:lnTo>
-                    <a:pt x="1625450" y="2240857"/>
-                  </a:lnTo>
-                  <a:lnTo>
-                    <a:pt x="1703084" y="2303518"/>
-                  </a:lnTo>
-                  <a:lnTo>
-                    <a:pt x="1780718" y="2363397"/>
-                  </a:lnTo>
-                  <a:lnTo>
-                    <a:pt x="1858352" y="2420619"/>
-                  </a:lnTo>
-                  <a:lnTo>
-                    <a:pt x="1935986" y="2475301"/>
-                  </a:lnTo>
-                  <a:lnTo>
-                    <a:pt x="2013620" y="2527556"/>
-                  </a:lnTo>
-                  <a:lnTo>
-                    <a:pt x="2091254" y="2577492"/>
-                  </a:lnTo>
-                  <a:lnTo>
-                    <a:pt x="2168888" y="2625212"/>
-                  </a:lnTo>
-                  <a:lnTo>
-                    <a:pt x="2246522" y="2670813"/>
-                  </a:lnTo>
-                  <a:lnTo>
-                    <a:pt x="2324156" y="2714391"/>
-                  </a:lnTo>
-                  <a:lnTo>
-                    <a:pt x="2401790" y="2756034"/>
-                  </a:lnTo>
-                  <a:lnTo>
-                    <a:pt x="2479424" y="2795829"/>
-                  </a:lnTo>
-                  <a:lnTo>
-                    <a:pt x="2557058" y="2833858"/>
-                  </a:lnTo>
-                  <a:lnTo>
-                    <a:pt x="2634692" y="2870199"/>
-                  </a:lnTo>
-                  <a:lnTo>
-                    <a:pt x="2712326" y="2904927"/>
-                  </a:lnTo>
-                  <a:lnTo>
-                    <a:pt x="2789960" y="2938113"/>
-                  </a:lnTo>
-                  <a:lnTo>
-                    <a:pt x="2867595" y="2969827"/>
-                  </a:lnTo>
-                  <a:lnTo>
-                    <a:pt x="2945229" y="3000133"/>
-                  </a:lnTo>
-                  <a:lnTo>
-                    <a:pt x="3022863" y="3029094"/>
-                  </a:lnTo>
-                  <a:lnTo>
-                    <a:pt x="3100497" y="3056770"/>
-                  </a:lnTo>
-                  <a:lnTo>
-                    <a:pt x="3178131" y="3083217"/>
-                  </a:lnTo>
-                  <a:lnTo>
-                    <a:pt x="3255765" y="3108490"/>
-                  </a:lnTo>
-                  <a:lnTo>
-                    <a:pt x="3333399" y="3132642"/>
-                  </a:lnTo>
-                  <a:lnTo>
-                    <a:pt x="3411033" y="3155722"/>
-                  </a:lnTo>
-                  <a:lnTo>
-                    <a:pt x="3488667" y="3177777"/>
-                  </a:lnTo>
-                  <a:lnTo>
-                    <a:pt x="3566301" y="3198854"/>
-                  </a:lnTo>
-                  <a:lnTo>
-                    <a:pt x="3643935" y="3218995"/>
-                  </a:lnTo>
-                  <a:lnTo>
-                    <a:pt x="3721569" y="3238242"/>
-                  </a:lnTo>
-                  <a:lnTo>
-                    <a:pt x="3799203" y="3256634"/>
-                  </a:lnTo>
-                  <a:lnTo>
-                    <a:pt x="3876837" y="3274211"/>
-                  </a:lnTo>
-                  <a:lnTo>
-                    <a:pt x="3954471" y="3291007"/>
-                  </a:lnTo>
-                  <a:lnTo>
-                    <a:pt x="4032105" y="3307058"/>
-                  </a:lnTo>
-                  <a:lnTo>
-                    <a:pt x="4109739" y="3322396"/>
-                  </a:lnTo>
-                  <a:lnTo>
-                    <a:pt x="4187373" y="3337054"/>
-                  </a:lnTo>
-                  <a:lnTo>
-                    <a:pt x="4265007" y="3351061"/>
-                  </a:lnTo>
-                  <a:lnTo>
-                    <a:pt x="4342641" y="3364447"/>
-                  </a:lnTo>
-                  <a:lnTo>
-                    <a:pt x="4420275" y="3377238"/>
-                  </a:lnTo>
-                  <a:lnTo>
-                    <a:pt x="4497909" y="3389462"/>
-                  </a:lnTo>
-                  <a:lnTo>
-                    <a:pt x="4575543" y="3401143"/>
-                  </a:lnTo>
-                  <a:lnTo>
-                    <a:pt x="4653178" y="3412305"/>
-                  </a:lnTo>
-                  <a:lnTo>
-                    <a:pt x="4730812" y="3422972"/>
-                  </a:lnTo>
-                  <a:lnTo>
-                    <a:pt x="4808446" y="3433166"/>
-                  </a:lnTo>
-                  <a:lnTo>
-                    <a:pt x="4886080" y="3442907"/>
-                  </a:lnTo>
-                  <a:lnTo>
-                    <a:pt x="4963714" y="3452216"/>
-                  </a:lnTo>
-                  <a:lnTo>
-                    <a:pt x="5041348" y="3461112"/>
-                  </a:lnTo>
-                  <a:lnTo>
-                    <a:pt x="5118982" y="3469613"/>
-                  </a:lnTo>
-                  <a:lnTo>
-                    <a:pt x="5196616" y="3477736"/>
-                  </a:lnTo>
-                  <a:lnTo>
-                    <a:pt x="5274250" y="3485500"/>
-                  </a:lnTo>
-                  <a:lnTo>
-                    <a:pt x="5351884" y="3492918"/>
-                  </a:lnTo>
-                  <a:lnTo>
-                    <a:pt x="5429518" y="3500007"/>
-                  </a:lnTo>
-                  <a:lnTo>
-                    <a:pt x="5507152" y="3506782"/>
-                  </a:lnTo>
-                  <a:lnTo>
-                    <a:pt x="5584786" y="3513256"/>
-                  </a:lnTo>
-                  <a:lnTo>
-                    <a:pt x="5662420" y="3519442"/>
-                  </a:lnTo>
-                  <a:lnTo>
-                    <a:pt x="5740054" y="3525354"/>
-                  </a:lnTo>
-                  <a:lnTo>
-                    <a:pt x="5817688" y="3531004"/>
-                  </a:lnTo>
-                  <a:lnTo>
-                    <a:pt x="5895322" y="3536403"/>
-                  </a:lnTo>
-                  <a:lnTo>
-                    <a:pt x="5972956" y="3541562"/>
-                  </a:lnTo>
-                  <a:lnTo>
-                    <a:pt x="6050590" y="3546492"/>
-                  </a:lnTo>
-                  <a:lnTo>
-                    <a:pt x="6128224" y="3551204"/>
-                  </a:lnTo>
-                  <a:lnTo>
-                    <a:pt x="6205858" y="3555706"/>
-                  </a:lnTo>
-                  <a:lnTo>
-                    <a:pt x="6283492" y="3560008"/>
-                  </a:lnTo>
-                  <a:lnTo>
-                    <a:pt x="6361127" y="3564120"/>
-                  </a:lnTo>
-                  <a:lnTo>
-                    <a:pt x="6438761" y="3568049"/>
+                    <a:pt x="50813" y="93850"/>
+                  </a:lnTo>
+                  <a:lnTo>
+                    <a:pt x="128447" y="231684"/>
+                  </a:lnTo>
+                  <a:lnTo>
+                    <a:pt x="206081" y="364180"/>
+                  </a:lnTo>
+                  <a:lnTo>
+                    <a:pt x="283715" y="491544"/>
+                  </a:lnTo>
+                  <a:lnTo>
+                    <a:pt x="361349" y="613975"/>
+                  </a:lnTo>
+                  <a:lnTo>
+                    <a:pt x="438983" y="731665"/>
+                  </a:lnTo>
+                  <a:lnTo>
+                    <a:pt x="516617" y="844796"/>
+                  </a:lnTo>
+                  <a:lnTo>
+                    <a:pt x="594251" y="953545"/>
+                  </a:lnTo>
+                  <a:lnTo>
+                    <a:pt x="671885" y="1058083"/>
+                  </a:lnTo>
+                  <a:lnTo>
+                    <a:pt x="749519" y="1158572"/>
+                  </a:lnTo>
+                  <a:lnTo>
+                    <a:pt x="827153" y="1255169"/>
+                  </a:lnTo>
+                  <a:lnTo>
+                    <a:pt x="904787" y="1348024"/>
+                  </a:lnTo>
+                  <a:lnTo>
+                    <a:pt x="982422" y="1437283"/>
+                  </a:lnTo>
+                  <a:lnTo>
+                    <a:pt x="1060056" y="1523086"/>
+                  </a:lnTo>
+                  <a:lnTo>
+                    <a:pt x="1137690" y="1605565"/>
+                  </a:lnTo>
+                  <a:lnTo>
+                    <a:pt x="1215324" y="1684849"/>
+                  </a:lnTo>
+                  <a:lnTo>
+                    <a:pt x="1292958" y="1761063"/>
+                  </a:lnTo>
+                  <a:lnTo>
+                    <a:pt x="1370592" y="1834325"/>
+                  </a:lnTo>
+                  <a:lnTo>
+                    <a:pt x="1448226" y="1904749"/>
+                  </a:lnTo>
+                  <a:lnTo>
+                    <a:pt x="1525860" y="1972446"/>
+                  </a:lnTo>
+                  <a:lnTo>
+                    <a:pt x="1603494" y="2037521"/>
+                  </a:lnTo>
+                  <a:lnTo>
+                    <a:pt x="1681128" y="2100076"/>
+                  </a:lnTo>
+                  <a:lnTo>
+                    <a:pt x="1758762" y="2160208"/>
+                  </a:lnTo>
+                  <a:lnTo>
+                    <a:pt x="1836396" y="2218011"/>
+                  </a:lnTo>
+                  <a:lnTo>
+                    <a:pt x="1914030" y="2273575"/>
+                  </a:lnTo>
+                  <a:lnTo>
+                    <a:pt x="1991664" y="2326987"/>
+                  </a:lnTo>
+                  <a:lnTo>
+                    <a:pt x="2069298" y="2378330"/>
+                  </a:lnTo>
+                  <a:lnTo>
+                    <a:pt x="2146932" y="2427685"/>
+                  </a:lnTo>
+                  <a:lnTo>
+                    <a:pt x="2224566" y="2475128"/>
+                  </a:lnTo>
+                  <a:lnTo>
+                    <a:pt x="2302200" y="2520734"/>
+                  </a:lnTo>
+                  <a:lnTo>
+                    <a:pt x="2379834" y="2564574"/>
+                  </a:lnTo>
+                  <a:lnTo>
+                    <a:pt x="2457468" y="2606715"/>
+                  </a:lnTo>
+                  <a:lnTo>
+                    <a:pt x="2535102" y="2647225"/>
+                  </a:lnTo>
+                  <a:lnTo>
+                    <a:pt x="2612736" y="2686165"/>
+                  </a:lnTo>
+                  <a:lnTo>
+                    <a:pt x="2690371" y="2723597"/>
+                  </a:lnTo>
+                  <a:lnTo>
+                    <a:pt x="2768005" y="2759580"/>
+                  </a:lnTo>
+                  <a:lnTo>
+                    <a:pt x="2845639" y="2794169"/>
+                  </a:lnTo>
+                  <a:lnTo>
+                    <a:pt x="2923273" y="2827418"/>
+                  </a:lnTo>
+                  <a:lnTo>
+                    <a:pt x="3000907" y="2859379"/>
+                  </a:lnTo>
+                  <a:lnTo>
+                    <a:pt x="3078541" y="2890103"/>
+                  </a:lnTo>
+                  <a:lnTo>
+                    <a:pt x="3156175" y="2919637"/>
+                  </a:lnTo>
+                  <a:lnTo>
+                    <a:pt x="3233809" y="2948026"/>
+                  </a:lnTo>
+                  <a:lnTo>
+                    <a:pt x="3311443" y="2975317"/>
+                  </a:lnTo>
+                  <a:lnTo>
+                    <a:pt x="3389077" y="3001550"/>
+                  </a:lnTo>
+                  <a:lnTo>
+                    <a:pt x="3466711" y="3026767"/>
+                  </a:lnTo>
+                  <a:lnTo>
+                    <a:pt x="3544345" y="3051008"/>
+                  </a:lnTo>
+                  <a:lnTo>
+                    <a:pt x="3621979" y="3074309"/>
+                  </a:lnTo>
+                  <a:lnTo>
+                    <a:pt x="3699613" y="3096708"/>
+                  </a:lnTo>
+                  <a:lnTo>
+                    <a:pt x="3777247" y="3118240"/>
+                  </a:lnTo>
+                  <a:lnTo>
+                    <a:pt x="3854881" y="3138938"/>
+                  </a:lnTo>
+                  <a:lnTo>
+                    <a:pt x="3932515" y="3158834"/>
+                  </a:lnTo>
+                  <a:lnTo>
+                    <a:pt x="4010149" y="3177959"/>
+                  </a:lnTo>
+                  <a:lnTo>
+                    <a:pt x="4087783" y="3196344"/>
+                  </a:lnTo>
+                  <a:lnTo>
+                    <a:pt x="4165417" y="3214017"/>
+                  </a:lnTo>
+                  <a:lnTo>
+                    <a:pt x="4243051" y="3231005"/>
+                  </a:lnTo>
+                  <a:lnTo>
+                    <a:pt x="4320685" y="3247336"/>
+                  </a:lnTo>
+                  <a:lnTo>
+                    <a:pt x="4398319" y="3263033"/>
+                  </a:lnTo>
+                  <a:lnTo>
+                    <a:pt x="4475954" y="3278123"/>
+                  </a:lnTo>
+                  <a:lnTo>
+                    <a:pt x="4553588" y="3292629"/>
+                  </a:lnTo>
+                  <a:lnTo>
+                    <a:pt x="4631222" y="3306572"/>
+                  </a:lnTo>
+                  <a:lnTo>
+                    <a:pt x="4708856" y="3319976"/>
+                  </a:lnTo>
+                  <a:lnTo>
+                    <a:pt x="4786490" y="3332860"/>
+                  </a:lnTo>
+                  <a:lnTo>
+                    <a:pt x="4864124" y="3345245"/>
+                  </a:lnTo>
+                  <a:lnTo>
+                    <a:pt x="4941758" y="3357151"/>
+                  </a:lnTo>
+                  <a:lnTo>
+                    <a:pt x="5019392" y="3368596"/>
+                  </a:lnTo>
+                  <a:lnTo>
+                    <a:pt x="5097026" y="3379597"/>
+                  </a:lnTo>
+                  <a:lnTo>
+                    <a:pt x="5174660" y="3390172"/>
+                  </a:lnTo>
+                  <a:lnTo>
+                    <a:pt x="5252294" y="3400338"/>
+                  </a:lnTo>
+                  <a:lnTo>
+                    <a:pt x="5329928" y="3410110"/>
+                  </a:lnTo>
+                  <a:lnTo>
+                    <a:pt x="5407562" y="3419503"/>
+                  </a:lnTo>
+                  <a:lnTo>
+                    <a:pt x="5485196" y="3428533"/>
+                  </a:lnTo>
+                  <a:lnTo>
+                    <a:pt x="5562830" y="3437213"/>
+                  </a:lnTo>
+                  <a:lnTo>
+                    <a:pt x="5640464" y="3445557"/>
+                  </a:lnTo>
+                  <a:lnTo>
+                    <a:pt x="5718098" y="3453577"/>
+                  </a:lnTo>
+                  <a:lnTo>
+                    <a:pt x="5795732" y="3461287"/>
+                  </a:lnTo>
+                  <a:lnTo>
+                    <a:pt x="5873366" y="3468698"/>
+                  </a:lnTo>
+                  <a:lnTo>
+                    <a:pt x="5951000" y="3475823"/>
+                  </a:lnTo>
+                  <a:lnTo>
+                    <a:pt x="6028634" y="3482671"/>
+                  </a:lnTo>
+                  <a:lnTo>
+                    <a:pt x="6106268" y="3489254"/>
+                  </a:lnTo>
+                  <a:lnTo>
+                    <a:pt x="6183903" y="3495582"/>
+                  </a:lnTo>
+                  <a:lnTo>
+                    <a:pt x="6261537" y="3501665"/>
+                  </a:lnTo>
+                  <a:lnTo>
+                    <a:pt x="6339171" y="3507513"/>
+                  </a:lnTo>
+                  <a:lnTo>
+                    <a:pt x="6416805" y="3513134"/>
+                  </a:lnTo>
+                  <a:lnTo>
+                    <a:pt x="6494439" y="3518537"/>
+                  </a:lnTo>
+                  <a:lnTo>
+                    <a:pt x="6572073" y="3523731"/>
+                  </a:lnTo>
+                  <a:lnTo>
+                    <a:pt x="6649707" y="3528724"/>
+                  </a:lnTo>
+                  <a:lnTo>
+                    <a:pt x="6727341" y="3533523"/>
+                  </a:lnTo>
+                  <a:lnTo>
+                    <a:pt x="6804975" y="3538137"/>
                   </a:lnTo>
                 </a:path>
               </a:pathLst>

--- a/docs/plots/carbo/jx_carbo_linsubhr_ratio_sideeffect.pptx
+++ b/docs/plots/carbo/jx_carbo_linsubhr_ratio_sideeffect.pptx
@@ -3003,530 +3003,527 @@
           <p:spPr>
             <a:xfrm>
               <a:off x="817517" y="1896563"/>
-              <a:ext cx="7370972" cy="3611669"/>
+              <a:ext cx="7370972" cy="3615620"/>
             </a:xfrm>
             <a:custGeom>
               <a:avLst/>
               <a:pathLst>
-                <a:path w="7370972" h="3611669">
+                <a:path w="7370972" h="3615620">
                   <a:moveTo>
-                    <a:pt x="1514958" y="0"/>
+                    <a:pt x="1575059" y="0"/>
                   </a:moveTo>
                   <a:lnTo>
-                    <a:pt x="1548419" y="94064"/>
-                  </a:lnTo>
-                  <a:lnTo>
-                    <a:pt x="1626053" y="299697"/>
-                  </a:lnTo>
-                  <a:lnTo>
-                    <a:pt x="1703687" y="493448"/>
-                  </a:lnTo>
-                  <a:lnTo>
-                    <a:pt x="1781321" y="676003"/>
-                  </a:lnTo>
-                  <a:lnTo>
-                    <a:pt x="1858955" y="848010"/>
-                  </a:lnTo>
-                  <a:lnTo>
-                    <a:pt x="1936589" y="1010076"/>
-                  </a:lnTo>
-                  <a:lnTo>
-                    <a:pt x="2014223" y="1162778"/>
-                  </a:lnTo>
-                  <a:lnTo>
-                    <a:pt x="2091857" y="1306655"/>
-                  </a:lnTo>
-                  <a:lnTo>
-                    <a:pt x="2169491" y="1442219"/>
-                  </a:lnTo>
-                  <a:lnTo>
-                    <a:pt x="2247125" y="1569949"/>
-                  </a:lnTo>
-                  <a:lnTo>
-                    <a:pt x="2324759" y="1690298"/>
-                  </a:lnTo>
-                  <a:lnTo>
-                    <a:pt x="2402393" y="1803693"/>
-                  </a:lnTo>
-                  <a:lnTo>
-                    <a:pt x="2480027" y="1910535"/>
-                  </a:lnTo>
-                  <a:lnTo>
-                    <a:pt x="2557661" y="2011204"/>
-                  </a:lnTo>
-                  <a:lnTo>
-                    <a:pt x="2635295" y="2106055"/>
-                  </a:lnTo>
-                  <a:lnTo>
-                    <a:pt x="2712930" y="2195425"/>
-                  </a:lnTo>
-                  <a:lnTo>
-                    <a:pt x="2790564" y="2279631"/>
-                  </a:lnTo>
-                  <a:lnTo>
-                    <a:pt x="2868198" y="2358971"/>
-                  </a:lnTo>
-                  <a:lnTo>
-                    <a:pt x="2945832" y="2433726"/>
-                  </a:lnTo>
-                  <a:lnTo>
-                    <a:pt x="3023466" y="2504161"/>
-                  </a:lnTo>
-                  <a:lnTo>
-                    <a:pt x="3101100" y="2570527"/>
-                  </a:lnTo>
-                  <a:lnTo>
-                    <a:pt x="3178734" y="2633057"/>
-                  </a:lnTo>
-                  <a:lnTo>
-                    <a:pt x="3256368" y="2691974"/>
-                  </a:lnTo>
-                  <a:lnTo>
-                    <a:pt x="3334002" y="2747487"/>
-                  </a:lnTo>
-                  <a:lnTo>
-                    <a:pt x="3411636" y="2788509"/>
-                  </a:lnTo>
-                  <a:lnTo>
-                    <a:pt x="3489270" y="2805178"/>
-                  </a:lnTo>
-                  <a:lnTo>
-                    <a:pt x="3566904" y="2821526"/>
-                  </a:lnTo>
-                  <a:lnTo>
-                    <a:pt x="3644538" y="2837559"/>
-                  </a:lnTo>
-                  <a:lnTo>
-                    <a:pt x="3722172" y="2853282"/>
-                  </a:lnTo>
-                  <a:lnTo>
-                    <a:pt x="3799806" y="2868702"/>
-                  </a:lnTo>
-                  <a:lnTo>
-                    <a:pt x="3877440" y="2883825"/>
-                  </a:lnTo>
-                  <a:lnTo>
-                    <a:pt x="3955074" y="2898656"/>
-                  </a:lnTo>
-                  <a:lnTo>
-                    <a:pt x="4032708" y="2913201"/>
-                  </a:lnTo>
-                  <a:lnTo>
-                    <a:pt x="4110342" y="2927465"/>
-                  </a:lnTo>
-                  <a:lnTo>
-                    <a:pt x="4187976" y="2941454"/>
-                  </a:lnTo>
-                  <a:lnTo>
-                    <a:pt x="4265610" y="2955173"/>
-                  </a:lnTo>
-                  <a:lnTo>
-                    <a:pt x="4343244" y="2968627"/>
-                  </a:lnTo>
-                  <a:lnTo>
-                    <a:pt x="4420879" y="2981822"/>
-                  </a:lnTo>
-                  <a:lnTo>
-                    <a:pt x="4498513" y="2994763"/>
-                  </a:lnTo>
-                  <a:lnTo>
-                    <a:pt x="4576147" y="3007454"/>
-                  </a:lnTo>
-                  <a:lnTo>
-                    <a:pt x="4653781" y="3019900"/>
-                  </a:lnTo>
-                  <a:lnTo>
-                    <a:pt x="4731415" y="3032106"/>
-                  </a:lnTo>
-                  <a:lnTo>
-                    <a:pt x="4809049" y="3044076"/>
-                  </a:lnTo>
-                  <a:lnTo>
-                    <a:pt x="4886683" y="3055816"/>
-                  </a:lnTo>
-                  <a:lnTo>
-                    <a:pt x="4964317" y="3067329"/>
-                  </a:lnTo>
-                  <a:lnTo>
-                    <a:pt x="5041951" y="3078620"/>
-                  </a:lnTo>
-                  <a:lnTo>
-                    <a:pt x="5119585" y="3089693"/>
-                  </a:lnTo>
-                  <a:lnTo>
-                    <a:pt x="5197219" y="3100552"/>
-                  </a:lnTo>
-                  <a:lnTo>
-                    <a:pt x="5274853" y="3111203"/>
-                  </a:lnTo>
-                  <a:lnTo>
-                    <a:pt x="5352487" y="3121647"/>
-                  </a:lnTo>
-                  <a:lnTo>
-                    <a:pt x="5430121" y="3131890"/>
-                  </a:lnTo>
-                  <a:lnTo>
-                    <a:pt x="5507755" y="3141936"/>
-                  </a:lnTo>
-                  <a:lnTo>
-                    <a:pt x="5585389" y="3151788"/>
-                  </a:lnTo>
-                  <a:lnTo>
-                    <a:pt x="5663023" y="3161449"/>
-                  </a:lnTo>
-                  <a:lnTo>
-                    <a:pt x="5740657" y="3170925"/>
-                  </a:lnTo>
-                  <a:lnTo>
-                    <a:pt x="5818291" y="3180217"/>
-                  </a:lnTo>
-                  <a:lnTo>
-                    <a:pt x="5895925" y="3189331"/>
-                  </a:lnTo>
-                  <a:lnTo>
-                    <a:pt x="5973559" y="3198268"/>
-                  </a:lnTo>
-                  <a:lnTo>
-                    <a:pt x="6051193" y="3207033"/>
-                  </a:lnTo>
-                  <a:lnTo>
-                    <a:pt x="6128827" y="3215629"/>
-                  </a:lnTo>
-                  <a:lnTo>
-                    <a:pt x="6206462" y="3224060"/>
-                  </a:lnTo>
-                  <a:lnTo>
-                    <a:pt x="6284096" y="3232327"/>
-                  </a:lnTo>
-                  <a:lnTo>
-                    <a:pt x="6361730" y="3240435"/>
-                  </a:lnTo>
-                  <a:lnTo>
-                    <a:pt x="6439364" y="3248387"/>
-                  </a:lnTo>
-                  <a:lnTo>
-                    <a:pt x="6516998" y="3256185"/>
-                  </a:lnTo>
-                  <a:lnTo>
-                    <a:pt x="6594632" y="3263833"/>
-                  </a:lnTo>
-                  <a:lnTo>
-                    <a:pt x="6672266" y="3271333"/>
-                  </a:lnTo>
-                  <a:lnTo>
-                    <a:pt x="6749900" y="3278689"/>
-                  </a:lnTo>
-                  <a:lnTo>
-                    <a:pt x="6827534" y="3285903"/>
-                  </a:lnTo>
-                  <a:lnTo>
-                    <a:pt x="6905168" y="3292977"/>
-                  </a:lnTo>
-                  <a:lnTo>
-                    <a:pt x="6982802" y="3299916"/>
-                  </a:lnTo>
-                  <a:lnTo>
-                    <a:pt x="7060436" y="3306720"/>
-                  </a:lnTo>
-                  <a:lnTo>
-                    <a:pt x="7138070" y="3313393"/>
-                  </a:lnTo>
-                  <a:lnTo>
-                    <a:pt x="7215704" y="3319937"/>
-                  </a:lnTo>
-                  <a:lnTo>
-                    <a:pt x="7293338" y="3326355"/>
-                  </a:lnTo>
-                  <a:lnTo>
-                    <a:pt x="7370972" y="3332649"/>
-                  </a:lnTo>
-                  <a:lnTo>
-                    <a:pt x="7370972" y="3611669"/>
-                  </a:lnTo>
-                  <a:lnTo>
-                    <a:pt x="7293338" y="3609156"/>
-                  </a:lnTo>
-                  <a:lnTo>
-                    <a:pt x="7215704" y="3606488"/>
-                  </a:lnTo>
-                  <a:lnTo>
-                    <a:pt x="7138070" y="3603658"/>
-                  </a:lnTo>
-                  <a:lnTo>
-                    <a:pt x="7060436" y="3600654"/>
-                  </a:lnTo>
-                  <a:lnTo>
-                    <a:pt x="6982802" y="3597465"/>
-                  </a:lnTo>
-                  <a:lnTo>
-                    <a:pt x="6905168" y="3594081"/>
-                  </a:lnTo>
-                  <a:lnTo>
-                    <a:pt x="6827534" y="3590490"/>
-                  </a:lnTo>
-                  <a:lnTo>
-                    <a:pt x="6749900" y="3586678"/>
-                  </a:lnTo>
-                  <a:lnTo>
-                    <a:pt x="6672266" y="3582632"/>
-                  </a:lnTo>
-                  <a:lnTo>
-                    <a:pt x="6594632" y="3578338"/>
-                  </a:lnTo>
-                  <a:lnTo>
-                    <a:pt x="6516998" y="3573781"/>
-                  </a:lnTo>
-                  <a:lnTo>
-                    <a:pt x="6439364" y="3568945"/>
-                  </a:lnTo>
-                  <a:lnTo>
-                    <a:pt x="6361730" y="3563812"/>
-                  </a:lnTo>
-                  <a:lnTo>
-                    <a:pt x="6284096" y="3558364"/>
-                  </a:lnTo>
-                  <a:lnTo>
-                    <a:pt x="6206462" y="3552581"/>
-                  </a:lnTo>
-                  <a:lnTo>
-                    <a:pt x="6128827" y="3546445"/>
-                  </a:lnTo>
-                  <a:lnTo>
-                    <a:pt x="6051193" y="3539932"/>
-                  </a:lnTo>
-                  <a:lnTo>
-                    <a:pt x="5973559" y="3533019"/>
-                  </a:lnTo>
-                  <a:lnTo>
-                    <a:pt x="5895925" y="3525683"/>
-                  </a:lnTo>
-                  <a:lnTo>
-                    <a:pt x="5818291" y="3517896"/>
-                  </a:lnTo>
-                  <a:lnTo>
-                    <a:pt x="5740657" y="3509632"/>
-                  </a:lnTo>
-                  <a:lnTo>
-                    <a:pt x="5663023" y="3500862"/>
-                  </a:lnTo>
-                  <a:lnTo>
-                    <a:pt x="5585389" y="3491553"/>
-                  </a:lnTo>
-                  <a:lnTo>
-                    <a:pt x="5507755" y="3481673"/>
-                  </a:lnTo>
-                  <a:lnTo>
-                    <a:pt x="5430121" y="3471188"/>
-                  </a:lnTo>
-                  <a:lnTo>
-                    <a:pt x="5352487" y="3460059"/>
-                  </a:lnTo>
-                  <a:lnTo>
-                    <a:pt x="5274853" y="3448248"/>
-                  </a:lnTo>
-                  <a:lnTo>
-                    <a:pt x="5197219" y="3435713"/>
-                  </a:lnTo>
-                  <a:lnTo>
-                    <a:pt x="5119585" y="3422409"/>
-                  </a:lnTo>
-                  <a:lnTo>
-                    <a:pt x="5041951" y="3408289"/>
-                  </a:lnTo>
-                  <a:lnTo>
-                    <a:pt x="4964317" y="3393303"/>
-                  </a:lnTo>
-                  <a:lnTo>
-                    <a:pt x="4886683" y="3377397"/>
-                  </a:lnTo>
-                  <a:lnTo>
-                    <a:pt x="4809049" y="3360517"/>
-                  </a:lnTo>
-                  <a:lnTo>
-                    <a:pt x="4731415" y="3342601"/>
-                  </a:lnTo>
-                  <a:lnTo>
-                    <a:pt x="4653781" y="3323586"/>
-                  </a:lnTo>
-                  <a:lnTo>
-                    <a:pt x="4576147" y="3303405"/>
-                  </a:lnTo>
-                  <a:lnTo>
-                    <a:pt x="4498513" y="3281987"/>
-                  </a:lnTo>
-                  <a:lnTo>
-                    <a:pt x="4420879" y="3259255"/>
-                  </a:lnTo>
-                  <a:lnTo>
-                    <a:pt x="4343244" y="3235129"/>
-                  </a:lnTo>
-                  <a:lnTo>
-                    <a:pt x="4265610" y="3209523"/>
-                  </a:lnTo>
-                  <a:lnTo>
-                    <a:pt x="4187976" y="3182346"/>
-                  </a:lnTo>
-                  <a:lnTo>
-                    <a:pt x="4110342" y="3153503"/>
-                  </a:lnTo>
-                  <a:lnTo>
-                    <a:pt x="4032708" y="3122892"/>
-                  </a:lnTo>
-                  <a:lnTo>
-                    <a:pt x="3955074" y="3090402"/>
-                  </a:lnTo>
-                  <a:lnTo>
-                    <a:pt x="3877440" y="3055920"/>
-                  </a:lnTo>
-                  <a:lnTo>
-                    <a:pt x="3799806" y="3019324"/>
-                  </a:lnTo>
-                  <a:lnTo>
-                    <a:pt x="3722172" y="2980483"/>
-                  </a:lnTo>
-                  <a:lnTo>
-                    <a:pt x="3644538" y="2939260"/>
-                  </a:lnTo>
-                  <a:lnTo>
-                    <a:pt x="3566904" y="2895508"/>
-                  </a:lnTo>
-                  <a:lnTo>
-                    <a:pt x="3489270" y="2849074"/>
-                  </a:lnTo>
-                  <a:lnTo>
-                    <a:pt x="3411636" y="2799792"/>
-                  </a:lnTo>
-                  <a:lnTo>
-                    <a:pt x="3334002" y="2771511"/>
-                  </a:lnTo>
-                  <a:lnTo>
-                    <a:pt x="3256368" y="2754179"/>
-                  </a:lnTo>
-                  <a:lnTo>
-                    <a:pt x="3178734" y="2736507"/>
-                  </a:lnTo>
-                  <a:lnTo>
-                    <a:pt x="3101100" y="2718486"/>
-                  </a:lnTo>
-                  <a:lnTo>
-                    <a:pt x="3023466" y="2700112"/>
-                  </a:lnTo>
-                  <a:lnTo>
-                    <a:pt x="2945832" y="2681375"/>
-                  </a:lnTo>
-                  <a:lnTo>
-                    <a:pt x="2868198" y="2662271"/>
-                  </a:lnTo>
-                  <a:lnTo>
-                    <a:pt x="2790564" y="2642790"/>
-                  </a:lnTo>
-                  <a:lnTo>
-                    <a:pt x="2712930" y="2622926"/>
-                  </a:lnTo>
-                  <a:lnTo>
-                    <a:pt x="2635295" y="2602672"/>
-                  </a:lnTo>
-                  <a:lnTo>
-                    <a:pt x="2557661" y="2582019"/>
-                  </a:lnTo>
-                  <a:lnTo>
-                    <a:pt x="2480027" y="2560960"/>
-                  </a:lnTo>
-                  <a:lnTo>
-                    <a:pt x="2402393" y="2539487"/>
-                  </a:lnTo>
-                  <a:lnTo>
-                    <a:pt x="2324759" y="2517591"/>
-                  </a:lnTo>
-                  <a:lnTo>
-                    <a:pt x="2247125" y="2495265"/>
-                  </a:lnTo>
-                  <a:lnTo>
-                    <a:pt x="2169491" y="2472499"/>
-                  </a:lnTo>
-                  <a:lnTo>
-                    <a:pt x="2091857" y="2449286"/>
-                  </a:lnTo>
-                  <a:lnTo>
-                    <a:pt x="2014223" y="2425616"/>
-                  </a:lnTo>
-                  <a:lnTo>
-                    <a:pt x="1936589" y="2401480"/>
-                  </a:lnTo>
-                  <a:lnTo>
-                    <a:pt x="1858955" y="2376870"/>
-                  </a:lnTo>
-                  <a:lnTo>
-                    <a:pt x="1781321" y="2351776"/>
-                  </a:lnTo>
-                  <a:lnTo>
-                    <a:pt x="1703687" y="2326188"/>
-                  </a:lnTo>
-                  <a:lnTo>
-                    <a:pt x="1626053" y="2300096"/>
-                  </a:lnTo>
-                  <a:lnTo>
-                    <a:pt x="1548419" y="2273492"/>
-                  </a:lnTo>
-                  <a:lnTo>
-                    <a:pt x="1470785" y="2246364"/>
-                  </a:lnTo>
-                  <a:lnTo>
-                    <a:pt x="1393151" y="2218703"/>
-                  </a:lnTo>
-                  <a:lnTo>
-                    <a:pt x="1315517" y="2190497"/>
-                  </a:lnTo>
-                  <a:lnTo>
-                    <a:pt x="1237883" y="2161737"/>
-                  </a:lnTo>
-                  <a:lnTo>
-                    <a:pt x="1160249" y="2132411"/>
-                  </a:lnTo>
-                  <a:lnTo>
-                    <a:pt x="1082615" y="2102508"/>
-                  </a:lnTo>
-                  <a:lnTo>
-                    <a:pt x="1004981" y="2072017"/>
-                  </a:lnTo>
-                  <a:lnTo>
-                    <a:pt x="927346" y="2040926"/>
-                  </a:lnTo>
-                  <a:lnTo>
-                    <a:pt x="849712" y="2009224"/>
-                  </a:lnTo>
-                  <a:lnTo>
-                    <a:pt x="772078" y="1976898"/>
-                  </a:lnTo>
-                  <a:lnTo>
-                    <a:pt x="694444" y="1943937"/>
-                  </a:lnTo>
-                  <a:lnTo>
-                    <a:pt x="616810" y="1910326"/>
-                  </a:lnTo>
-                  <a:lnTo>
-                    <a:pt x="539176" y="1876055"/>
-                  </a:lnTo>
-                  <a:lnTo>
-                    <a:pt x="461542" y="1841110"/>
-                  </a:lnTo>
-                  <a:lnTo>
-                    <a:pt x="383908" y="1805477"/>
-                  </a:lnTo>
-                  <a:lnTo>
-                    <a:pt x="306274" y="1769144"/>
-                  </a:lnTo>
-                  <a:lnTo>
-                    <a:pt x="228640" y="1732095"/>
-                  </a:lnTo>
-                  <a:lnTo>
-                    <a:pt x="151006" y="1694318"/>
-                  </a:lnTo>
-                  <a:lnTo>
-                    <a:pt x="73372" y="1655798"/>
-                  </a:lnTo>
-                  <a:lnTo>
-                    <a:pt x="0" y="1618677"/>
+                    <a:pt x="1626053" y="146093"/>
+                  </a:lnTo>
+                  <a:lnTo>
+                    <a:pt x="1703687" y="355242"/>
+                  </a:lnTo>
+                  <a:lnTo>
+                    <a:pt x="1781321" y="551915"/>
+                  </a:lnTo>
+                  <a:lnTo>
+                    <a:pt x="1858955" y="736858"/>
+                  </a:lnTo>
+                  <a:lnTo>
+                    <a:pt x="1936589" y="910770"/>
+                  </a:lnTo>
+                  <a:lnTo>
+                    <a:pt x="2014223" y="1074310"/>
+                  </a:lnTo>
+                  <a:lnTo>
+                    <a:pt x="2091857" y="1228094"/>
+                  </a:lnTo>
+                  <a:lnTo>
+                    <a:pt x="2169491" y="1372707"/>
+                  </a:lnTo>
+                  <a:lnTo>
+                    <a:pt x="2247125" y="1508694"/>
+                  </a:lnTo>
+                  <a:lnTo>
+                    <a:pt x="2324759" y="1636570"/>
+                  </a:lnTo>
+                  <a:lnTo>
+                    <a:pt x="2402393" y="1756818"/>
+                  </a:lnTo>
+                  <a:lnTo>
+                    <a:pt x="2480027" y="1869895"/>
+                  </a:lnTo>
+                  <a:lnTo>
+                    <a:pt x="2557661" y="1976227"/>
+                  </a:lnTo>
+                  <a:lnTo>
+                    <a:pt x="2635295" y="2076217"/>
+                  </a:lnTo>
+                  <a:lnTo>
+                    <a:pt x="2712930" y="2170243"/>
+                  </a:lnTo>
+                  <a:lnTo>
+                    <a:pt x="2790564" y="2258661"/>
+                  </a:lnTo>
+                  <a:lnTo>
+                    <a:pt x="2868198" y="2341805"/>
+                  </a:lnTo>
+                  <a:lnTo>
+                    <a:pt x="2945832" y="2419990"/>
+                  </a:lnTo>
+                  <a:lnTo>
+                    <a:pt x="3023466" y="2493512"/>
+                  </a:lnTo>
+                  <a:lnTo>
+                    <a:pt x="3101100" y="2562648"/>
+                  </a:lnTo>
+                  <a:lnTo>
+                    <a:pt x="3178734" y="2627661"/>
+                  </a:lnTo>
+                  <a:lnTo>
+                    <a:pt x="3256368" y="2688796"/>
+                  </a:lnTo>
+                  <a:lnTo>
+                    <a:pt x="3334002" y="2746285"/>
+                  </a:lnTo>
+                  <a:lnTo>
+                    <a:pt x="3411636" y="2788334"/>
+                  </a:lnTo>
+                  <a:lnTo>
+                    <a:pt x="3489270" y="2804483"/>
+                  </a:lnTo>
+                  <a:lnTo>
+                    <a:pt x="3566904" y="2820331"/>
+                  </a:lnTo>
+                  <a:lnTo>
+                    <a:pt x="3644538" y="2835883"/>
+                  </a:lnTo>
+                  <a:lnTo>
+                    <a:pt x="3722172" y="2851145"/>
+                  </a:lnTo>
+                  <a:lnTo>
+                    <a:pt x="3799806" y="2866121"/>
+                  </a:lnTo>
+                  <a:lnTo>
+                    <a:pt x="3877440" y="2880817"/>
+                  </a:lnTo>
+                  <a:lnTo>
+                    <a:pt x="3955074" y="2895239"/>
+                  </a:lnTo>
+                  <a:lnTo>
+                    <a:pt x="4032708" y="2909391"/>
+                  </a:lnTo>
+                  <a:lnTo>
+                    <a:pt x="4110342" y="2923279"/>
+                  </a:lnTo>
+                  <a:lnTo>
+                    <a:pt x="4187976" y="2936907"/>
+                  </a:lnTo>
+                  <a:lnTo>
+                    <a:pt x="4265610" y="2950281"/>
+                  </a:lnTo>
+                  <a:lnTo>
+                    <a:pt x="4343244" y="2963404"/>
+                  </a:lnTo>
+                  <a:lnTo>
+                    <a:pt x="4420879" y="2976283"/>
+                  </a:lnTo>
+                  <a:lnTo>
+                    <a:pt x="4498513" y="2988921"/>
+                  </a:lnTo>
+                  <a:lnTo>
+                    <a:pt x="4576147" y="3001323"/>
+                  </a:lnTo>
+                  <a:lnTo>
+                    <a:pt x="4653781" y="3013493"/>
+                  </a:lnTo>
+                  <a:lnTo>
+                    <a:pt x="4731415" y="3025435"/>
+                  </a:lnTo>
+                  <a:lnTo>
+                    <a:pt x="4809049" y="3037155"/>
+                  </a:lnTo>
+                  <a:lnTo>
+                    <a:pt x="4886683" y="3048655"/>
+                  </a:lnTo>
+                  <a:lnTo>
+                    <a:pt x="4964317" y="3059941"/>
+                  </a:lnTo>
+                  <a:lnTo>
+                    <a:pt x="5041951" y="3071016"/>
+                  </a:lnTo>
+                  <a:lnTo>
+                    <a:pt x="5119585" y="3081883"/>
+                  </a:lnTo>
+                  <a:lnTo>
+                    <a:pt x="5197219" y="3092548"/>
+                  </a:lnTo>
+                  <a:lnTo>
+                    <a:pt x="5274853" y="3103014"/>
+                  </a:lnTo>
+                  <a:lnTo>
+                    <a:pt x="5352487" y="3113283"/>
+                  </a:lnTo>
+                  <a:lnTo>
+                    <a:pt x="5430121" y="3123361"/>
+                  </a:lnTo>
+                  <a:lnTo>
+                    <a:pt x="5507755" y="3133251"/>
+                  </a:lnTo>
+                  <a:lnTo>
+                    <a:pt x="5585389" y="3142956"/>
+                  </a:lnTo>
+                  <a:lnTo>
+                    <a:pt x="5663023" y="3152480"/>
+                  </a:lnTo>
+                  <a:lnTo>
+                    <a:pt x="5740657" y="3161825"/>
+                  </a:lnTo>
+                  <a:lnTo>
+                    <a:pt x="5818291" y="3170996"/>
+                  </a:lnTo>
+                  <a:lnTo>
+                    <a:pt x="5895925" y="3179996"/>
+                  </a:lnTo>
+                  <a:lnTo>
+                    <a:pt x="5973559" y="3188827"/>
+                  </a:lnTo>
+                  <a:lnTo>
+                    <a:pt x="6051193" y="3197494"/>
+                  </a:lnTo>
+                  <a:lnTo>
+                    <a:pt x="6128827" y="3205998"/>
+                  </a:lnTo>
+                  <a:lnTo>
+                    <a:pt x="6206462" y="3214344"/>
+                  </a:lnTo>
+                  <a:lnTo>
+                    <a:pt x="6284096" y="3222534"/>
+                  </a:lnTo>
+                  <a:lnTo>
+                    <a:pt x="6361730" y="3230570"/>
+                  </a:lnTo>
+                  <a:lnTo>
+                    <a:pt x="6439364" y="3238457"/>
+                  </a:lnTo>
+                  <a:lnTo>
+                    <a:pt x="6516998" y="3246196"/>
+                  </a:lnTo>
+                  <a:lnTo>
+                    <a:pt x="6594632" y="3253791"/>
+                  </a:lnTo>
+                  <a:lnTo>
+                    <a:pt x="6672266" y="3261243"/>
+                  </a:lnTo>
+                  <a:lnTo>
+                    <a:pt x="6749900" y="3268557"/>
+                  </a:lnTo>
+                  <a:lnTo>
+                    <a:pt x="6827534" y="3275733"/>
+                  </a:lnTo>
+                  <a:lnTo>
+                    <a:pt x="6905168" y="3282776"/>
+                  </a:lnTo>
+                  <a:lnTo>
+                    <a:pt x="6982802" y="3289687"/>
+                  </a:lnTo>
+                  <a:lnTo>
+                    <a:pt x="7060436" y="3296469"/>
+                  </a:lnTo>
+                  <a:lnTo>
+                    <a:pt x="7138070" y="3303124"/>
+                  </a:lnTo>
+                  <a:lnTo>
+                    <a:pt x="7215704" y="3309655"/>
+                  </a:lnTo>
+                  <a:lnTo>
+                    <a:pt x="7293338" y="3316064"/>
+                  </a:lnTo>
+                  <a:lnTo>
+                    <a:pt x="7370972" y="3322353"/>
+                  </a:lnTo>
+                  <a:lnTo>
+                    <a:pt x="7370972" y="3615620"/>
+                  </a:lnTo>
+                  <a:lnTo>
+                    <a:pt x="7293338" y="3613272"/>
+                  </a:lnTo>
+                  <a:lnTo>
+                    <a:pt x="7215704" y="3610774"/>
+                  </a:lnTo>
+                  <a:lnTo>
+                    <a:pt x="7138070" y="3608119"/>
+                  </a:lnTo>
+                  <a:lnTo>
+                    <a:pt x="7060436" y="3605295"/>
+                  </a:lnTo>
+                  <a:lnTo>
+                    <a:pt x="6982802" y="3602291"/>
+                  </a:lnTo>
+                  <a:lnTo>
+                    <a:pt x="6905168" y="3599098"/>
+                  </a:lnTo>
+                  <a:lnTo>
+                    <a:pt x="6827534" y="3595701"/>
+                  </a:lnTo>
+                  <a:lnTo>
+                    <a:pt x="6749900" y="3592090"/>
+                  </a:lnTo>
+                  <a:lnTo>
+                    <a:pt x="6672266" y="3588249"/>
+                  </a:lnTo>
+                  <a:lnTo>
+                    <a:pt x="6594632" y="3584164"/>
+                  </a:lnTo>
+                  <a:lnTo>
+                    <a:pt x="6516998" y="3579821"/>
+                  </a:lnTo>
+                  <a:lnTo>
+                    <a:pt x="6439364" y="3575202"/>
+                  </a:lnTo>
+                  <a:lnTo>
+                    <a:pt x="6361730" y="3570290"/>
+                  </a:lnTo>
+                  <a:lnTo>
+                    <a:pt x="6284096" y="3565066"/>
+                  </a:lnTo>
+                  <a:lnTo>
+                    <a:pt x="6206462" y="3559512"/>
+                  </a:lnTo>
+                  <a:lnTo>
+                    <a:pt x="6128827" y="3553604"/>
+                  </a:lnTo>
+                  <a:lnTo>
+                    <a:pt x="6051193" y="3547323"/>
+                  </a:lnTo>
+                  <a:lnTo>
+                    <a:pt x="5973559" y="3540642"/>
+                  </a:lnTo>
+                  <a:lnTo>
+                    <a:pt x="5895925" y="3533538"/>
+                  </a:lnTo>
+                  <a:lnTo>
+                    <a:pt x="5818291" y="3525984"/>
+                  </a:lnTo>
+                  <a:lnTo>
+                    <a:pt x="5740657" y="3517950"/>
+                  </a:lnTo>
+                  <a:lnTo>
+                    <a:pt x="5663023" y="3509407"/>
+                  </a:lnTo>
+                  <a:lnTo>
+                    <a:pt x="5585389" y="3500321"/>
+                  </a:lnTo>
+                  <a:lnTo>
+                    <a:pt x="5507755" y="3490660"/>
+                  </a:lnTo>
+                  <a:lnTo>
+                    <a:pt x="5430121" y="3480385"/>
+                  </a:lnTo>
+                  <a:lnTo>
+                    <a:pt x="5352487" y="3469459"/>
+                  </a:lnTo>
+                  <a:lnTo>
+                    <a:pt x="5274853" y="3457840"/>
+                  </a:lnTo>
+                  <a:lnTo>
+                    <a:pt x="5197219" y="3445484"/>
+                  </a:lnTo>
+                  <a:lnTo>
+                    <a:pt x="5119585" y="3432345"/>
+                  </a:lnTo>
+                  <a:lnTo>
+                    <a:pt x="5041951" y="3418371"/>
+                  </a:lnTo>
+                  <a:lnTo>
+                    <a:pt x="4964317" y="3403512"/>
+                  </a:lnTo>
+                  <a:lnTo>
+                    <a:pt x="4886683" y="3387710"/>
+                  </a:lnTo>
+                  <a:lnTo>
+                    <a:pt x="4809049" y="3370906"/>
+                  </a:lnTo>
+                  <a:lnTo>
+                    <a:pt x="4731415" y="3353036"/>
+                  </a:lnTo>
+                  <a:lnTo>
+                    <a:pt x="4653781" y="3334032"/>
+                  </a:lnTo>
+                  <a:lnTo>
+                    <a:pt x="4576147" y="3313823"/>
+                  </a:lnTo>
+                  <a:lnTo>
+                    <a:pt x="4498513" y="3292332"/>
+                  </a:lnTo>
+                  <a:lnTo>
+                    <a:pt x="4420879" y="3269479"/>
+                  </a:lnTo>
+                  <a:lnTo>
+                    <a:pt x="4343244" y="3245175"/>
+                  </a:lnTo>
+                  <a:lnTo>
+                    <a:pt x="4265610" y="3219330"/>
+                  </a:lnTo>
+                  <a:lnTo>
+                    <a:pt x="4187976" y="3191846"/>
+                  </a:lnTo>
+                  <a:lnTo>
+                    <a:pt x="4110342" y="3162618"/>
+                  </a:lnTo>
+                  <a:lnTo>
+                    <a:pt x="4032708" y="3131537"/>
+                  </a:lnTo>
+                  <a:lnTo>
+                    <a:pt x="3955074" y="3098484"/>
+                  </a:lnTo>
+                  <a:lnTo>
+                    <a:pt x="3877440" y="3063335"/>
+                  </a:lnTo>
+                  <a:lnTo>
+                    <a:pt x="3799806" y="3025956"/>
+                  </a:lnTo>
+                  <a:lnTo>
+                    <a:pt x="3722172" y="2986206"/>
+                  </a:lnTo>
+                  <a:lnTo>
+                    <a:pt x="3644538" y="2943935"/>
+                  </a:lnTo>
+                  <a:lnTo>
+                    <a:pt x="3566904" y="2898983"/>
+                  </a:lnTo>
+                  <a:lnTo>
+                    <a:pt x="3489270" y="2851180"/>
+                  </a:lnTo>
+                  <a:lnTo>
+                    <a:pt x="3411636" y="2800345"/>
+                  </a:lnTo>
+                  <a:lnTo>
+                    <a:pt x="3334002" y="2771876"/>
+                  </a:lnTo>
+                  <a:lnTo>
+                    <a:pt x="3256368" y="2755106"/>
+                  </a:lnTo>
+                  <a:lnTo>
+                    <a:pt x="3178734" y="2738016"/>
+                  </a:lnTo>
+                  <a:lnTo>
+                    <a:pt x="3101100" y="2720600"/>
+                  </a:lnTo>
+                  <a:lnTo>
+                    <a:pt x="3023466" y="2702853"/>
+                  </a:lnTo>
+                  <a:lnTo>
+                    <a:pt x="2945832" y="2684769"/>
+                  </a:lnTo>
+                  <a:lnTo>
+                    <a:pt x="2868198" y="2666339"/>
+                  </a:lnTo>
+                  <a:lnTo>
+                    <a:pt x="2790564" y="2647559"/>
+                  </a:lnTo>
+                  <a:lnTo>
+                    <a:pt x="2712930" y="2628421"/>
+                  </a:lnTo>
+                  <a:lnTo>
+                    <a:pt x="2635295" y="2608919"/>
+                  </a:lnTo>
+                  <a:lnTo>
+                    <a:pt x="2557661" y="2589046"/>
+                  </a:lnTo>
+                  <a:lnTo>
+                    <a:pt x="2480027" y="2568794"/>
+                  </a:lnTo>
+                  <a:lnTo>
+                    <a:pt x="2402393" y="2548156"/>
+                  </a:lnTo>
+                  <a:lnTo>
+                    <a:pt x="2324759" y="2527126"/>
+                  </a:lnTo>
+                  <a:lnTo>
+                    <a:pt x="2247125" y="2505695"/>
+                  </a:lnTo>
+                  <a:lnTo>
+                    <a:pt x="2169491" y="2483856"/>
+                  </a:lnTo>
+                  <a:lnTo>
+                    <a:pt x="2091857" y="2461601"/>
+                  </a:lnTo>
+                  <a:lnTo>
+                    <a:pt x="2014223" y="2438923"/>
+                  </a:lnTo>
+                  <a:lnTo>
+                    <a:pt x="1936589" y="2415812"/>
+                  </a:lnTo>
+                  <a:lnTo>
+                    <a:pt x="1858955" y="2392262"/>
+                  </a:lnTo>
+                  <a:lnTo>
+                    <a:pt x="1781321" y="2368263"/>
+                  </a:lnTo>
+                  <a:lnTo>
+                    <a:pt x="1703687" y="2343807"/>
+                  </a:lnTo>
+                  <a:lnTo>
+                    <a:pt x="1626053" y="2318886"/>
+                  </a:lnTo>
+                  <a:lnTo>
+                    <a:pt x="1548419" y="2293490"/>
+                  </a:lnTo>
+                  <a:lnTo>
+                    <a:pt x="1470785" y="2267610"/>
+                  </a:lnTo>
+                  <a:lnTo>
+                    <a:pt x="1393151" y="2241238"/>
+                  </a:lnTo>
+                  <a:lnTo>
+                    <a:pt x="1315517" y="2214364"/>
+                  </a:lnTo>
+                  <a:lnTo>
+                    <a:pt x="1237883" y="2186977"/>
+                  </a:lnTo>
+                  <a:lnTo>
+                    <a:pt x="1160249" y="2159070"/>
+                  </a:lnTo>
+                  <a:lnTo>
+                    <a:pt x="1082615" y="2130631"/>
+                  </a:lnTo>
+                  <a:lnTo>
+                    <a:pt x="1004981" y="2101650"/>
+                  </a:lnTo>
+                  <a:lnTo>
+                    <a:pt x="927346" y="2072118"/>
+                  </a:lnTo>
+                  <a:lnTo>
+                    <a:pt x="849712" y="2042023"/>
+                  </a:lnTo>
+                  <a:lnTo>
+                    <a:pt x="772078" y="2011355"/>
+                  </a:lnTo>
+                  <a:lnTo>
+                    <a:pt x="694444" y="1980104"/>
+                  </a:lnTo>
+                  <a:lnTo>
+                    <a:pt x="616810" y="1948257"/>
+                  </a:lnTo>
+                  <a:lnTo>
+                    <a:pt x="539176" y="1915804"/>
+                  </a:lnTo>
+                  <a:lnTo>
+                    <a:pt x="461542" y="1882733"/>
+                  </a:lnTo>
+                  <a:lnTo>
+                    <a:pt x="383908" y="1849032"/>
+                  </a:lnTo>
+                  <a:lnTo>
+                    <a:pt x="306274" y="1814690"/>
+                  </a:lnTo>
+                  <a:lnTo>
+                    <a:pt x="228640" y="1779693"/>
+                  </a:lnTo>
+                  <a:lnTo>
+                    <a:pt x="151006" y="1744031"/>
+                  </a:lnTo>
+                  <a:lnTo>
+                    <a:pt x="73372" y="1707689"/>
+                  </a:lnTo>
+                  <a:lnTo>
+                    <a:pt x="0" y="1672688"/>
                   </a:lnTo>
                   <a:close/>
                 </a:path>
@@ -3552,243 +3549,240 @@
           </p:nvSpPr>
           <p:spPr>
             <a:xfrm>
-              <a:off x="2332476" y="1896563"/>
-              <a:ext cx="5856013" cy="3332649"/>
+              <a:off x="2392576" y="1896563"/>
+              <a:ext cx="5795913" cy="3322353"/>
             </a:xfrm>
             <a:custGeom>
               <a:avLst/>
               <a:pathLst>
-                <a:path w="5856013" h="3332649">
+                <a:path w="5795913" h="3322353">
                   <a:moveTo>
                     <a:pt x="0" y="0"/>
                   </a:moveTo>
                   <a:lnTo>
-                    <a:pt x="33460" y="94064"/>
-                  </a:lnTo>
-                  <a:lnTo>
-                    <a:pt x="111094" y="299697"/>
-                  </a:lnTo>
-                  <a:lnTo>
-                    <a:pt x="188728" y="493448"/>
-                  </a:lnTo>
-                  <a:lnTo>
-                    <a:pt x="266362" y="676003"/>
-                  </a:lnTo>
-                  <a:lnTo>
-                    <a:pt x="343996" y="848010"/>
-                  </a:lnTo>
-                  <a:lnTo>
-                    <a:pt x="421630" y="1010076"/>
-                  </a:lnTo>
-                  <a:lnTo>
-                    <a:pt x="499264" y="1162778"/>
-                  </a:lnTo>
-                  <a:lnTo>
-                    <a:pt x="576898" y="1306655"/>
-                  </a:lnTo>
-                  <a:lnTo>
-                    <a:pt x="654532" y="1442219"/>
-                  </a:lnTo>
-                  <a:lnTo>
-                    <a:pt x="732166" y="1569949"/>
-                  </a:lnTo>
-                  <a:lnTo>
-                    <a:pt x="809800" y="1690298"/>
-                  </a:lnTo>
-                  <a:lnTo>
-                    <a:pt x="887434" y="1803693"/>
-                  </a:lnTo>
-                  <a:lnTo>
-                    <a:pt x="965069" y="1910535"/>
-                  </a:lnTo>
-                  <a:lnTo>
-                    <a:pt x="1042703" y="2011204"/>
-                  </a:lnTo>
-                  <a:lnTo>
-                    <a:pt x="1120337" y="2106055"/>
-                  </a:lnTo>
-                  <a:lnTo>
-                    <a:pt x="1197971" y="2195425"/>
-                  </a:lnTo>
-                  <a:lnTo>
-                    <a:pt x="1275605" y="2279631"/>
-                  </a:lnTo>
-                  <a:lnTo>
-                    <a:pt x="1353239" y="2358971"/>
-                  </a:lnTo>
-                  <a:lnTo>
-                    <a:pt x="1430873" y="2433726"/>
-                  </a:lnTo>
-                  <a:lnTo>
-                    <a:pt x="1508507" y="2504161"/>
-                  </a:lnTo>
-                  <a:lnTo>
-                    <a:pt x="1586141" y="2570527"/>
-                  </a:lnTo>
-                  <a:lnTo>
-                    <a:pt x="1663775" y="2633057"/>
-                  </a:lnTo>
-                  <a:lnTo>
-                    <a:pt x="1741409" y="2691974"/>
-                  </a:lnTo>
-                  <a:lnTo>
-                    <a:pt x="1819043" y="2747487"/>
-                  </a:lnTo>
-                  <a:lnTo>
-                    <a:pt x="1896677" y="2788509"/>
-                  </a:lnTo>
-                  <a:lnTo>
-                    <a:pt x="1974311" y="2805178"/>
-                  </a:lnTo>
-                  <a:lnTo>
-                    <a:pt x="2051945" y="2821526"/>
-                  </a:lnTo>
-                  <a:lnTo>
-                    <a:pt x="2129579" y="2837559"/>
-                  </a:lnTo>
-                  <a:lnTo>
-                    <a:pt x="2207213" y="2853282"/>
-                  </a:lnTo>
-                  <a:lnTo>
-                    <a:pt x="2284847" y="2868702"/>
-                  </a:lnTo>
-                  <a:lnTo>
-                    <a:pt x="2362481" y="2883825"/>
-                  </a:lnTo>
-                  <a:lnTo>
-                    <a:pt x="2440115" y="2898656"/>
-                  </a:lnTo>
-                  <a:lnTo>
-                    <a:pt x="2517749" y="2913201"/>
-                  </a:lnTo>
-                  <a:lnTo>
-                    <a:pt x="2595383" y="2927465"/>
-                  </a:lnTo>
-                  <a:lnTo>
-                    <a:pt x="2673018" y="2941454"/>
-                  </a:lnTo>
-                  <a:lnTo>
-                    <a:pt x="2750652" y="2955173"/>
-                  </a:lnTo>
-                  <a:lnTo>
-                    <a:pt x="2828286" y="2968627"/>
-                  </a:lnTo>
-                  <a:lnTo>
-                    <a:pt x="2905920" y="2981822"/>
-                  </a:lnTo>
-                  <a:lnTo>
-                    <a:pt x="2983554" y="2994763"/>
-                  </a:lnTo>
-                  <a:lnTo>
-                    <a:pt x="3061188" y="3007454"/>
-                  </a:lnTo>
-                  <a:lnTo>
-                    <a:pt x="3138822" y="3019900"/>
-                  </a:lnTo>
-                  <a:lnTo>
-                    <a:pt x="3216456" y="3032106"/>
-                  </a:lnTo>
-                  <a:lnTo>
-                    <a:pt x="3294090" y="3044076"/>
-                  </a:lnTo>
-                  <a:lnTo>
-                    <a:pt x="3371724" y="3055816"/>
-                  </a:lnTo>
-                  <a:lnTo>
-                    <a:pt x="3449358" y="3067329"/>
-                  </a:lnTo>
-                  <a:lnTo>
-                    <a:pt x="3526992" y="3078620"/>
-                  </a:lnTo>
-                  <a:lnTo>
-                    <a:pt x="3604626" y="3089693"/>
-                  </a:lnTo>
-                  <a:lnTo>
-                    <a:pt x="3682260" y="3100552"/>
-                  </a:lnTo>
-                  <a:lnTo>
-                    <a:pt x="3759894" y="3111203"/>
-                  </a:lnTo>
-                  <a:lnTo>
-                    <a:pt x="3837528" y="3121647"/>
-                  </a:lnTo>
-                  <a:lnTo>
-                    <a:pt x="3915162" y="3131890"/>
-                  </a:lnTo>
-                  <a:lnTo>
-                    <a:pt x="3992796" y="3141936"/>
-                  </a:lnTo>
-                  <a:lnTo>
-                    <a:pt x="4070430" y="3151788"/>
-                  </a:lnTo>
-                  <a:lnTo>
-                    <a:pt x="4148064" y="3161449"/>
-                  </a:lnTo>
-                  <a:lnTo>
-                    <a:pt x="4225698" y="3170925"/>
-                  </a:lnTo>
-                  <a:lnTo>
-                    <a:pt x="4303332" y="3180217"/>
-                  </a:lnTo>
-                  <a:lnTo>
-                    <a:pt x="4380966" y="3189331"/>
-                  </a:lnTo>
-                  <a:lnTo>
-                    <a:pt x="4458601" y="3198268"/>
-                  </a:lnTo>
-                  <a:lnTo>
-                    <a:pt x="4536235" y="3207033"/>
-                  </a:lnTo>
-                  <a:lnTo>
-                    <a:pt x="4613869" y="3215629"/>
-                  </a:lnTo>
-                  <a:lnTo>
-                    <a:pt x="4691503" y="3224060"/>
-                  </a:lnTo>
-                  <a:lnTo>
-                    <a:pt x="4769137" y="3232327"/>
-                  </a:lnTo>
-                  <a:lnTo>
-                    <a:pt x="4846771" y="3240435"/>
-                  </a:lnTo>
-                  <a:lnTo>
-                    <a:pt x="4924405" y="3248387"/>
-                  </a:lnTo>
-                  <a:lnTo>
-                    <a:pt x="5002039" y="3256185"/>
-                  </a:lnTo>
-                  <a:lnTo>
-                    <a:pt x="5079673" y="3263833"/>
-                  </a:lnTo>
-                  <a:lnTo>
-                    <a:pt x="5157307" y="3271333"/>
-                  </a:lnTo>
-                  <a:lnTo>
-                    <a:pt x="5234941" y="3278689"/>
-                  </a:lnTo>
-                  <a:lnTo>
-                    <a:pt x="5312575" y="3285903"/>
-                  </a:lnTo>
-                  <a:lnTo>
-                    <a:pt x="5390209" y="3292977"/>
-                  </a:lnTo>
-                  <a:lnTo>
-                    <a:pt x="5467843" y="3299916"/>
-                  </a:lnTo>
-                  <a:lnTo>
-                    <a:pt x="5545477" y="3306720"/>
-                  </a:lnTo>
-                  <a:lnTo>
-                    <a:pt x="5623111" y="3313393"/>
-                  </a:lnTo>
-                  <a:lnTo>
-                    <a:pt x="5700745" y="3319937"/>
-                  </a:lnTo>
-                  <a:lnTo>
-                    <a:pt x="5778379" y="3326355"/>
-                  </a:lnTo>
-                  <a:lnTo>
-                    <a:pt x="5856013" y="3332649"/>
+                    <a:pt x="50994" y="146093"/>
+                  </a:lnTo>
+                  <a:lnTo>
+                    <a:pt x="128628" y="355242"/>
+                  </a:lnTo>
+                  <a:lnTo>
+                    <a:pt x="206262" y="551915"/>
+                  </a:lnTo>
+                  <a:lnTo>
+                    <a:pt x="283896" y="736858"/>
+                  </a:lnTo>
+                  <a:lnTo>
+                    <a:pt x="361530" y="910770"/>
+                  </a:lnTo>
+                  <a:lnTo>
+                    <a:pt x="439164" y="1074310"/>
+                  </a:lnTo>
+                  <a:lnTo>
+                    <a:pt x="516798" y="1228094"/>
+                  </a:lnTo>
+                  <a:lnTo>
+                    <a:pt x="594432" y="1372707"/>
+                  </a:lnTo>
+                  <a:lnTo>
+                    <a:pt x="672066" y="1508694"/>
+                  </a:lnTo>
+                  <a:lnTo>
+                    <a:pt x="749700" y="1636570"/>
+                  </a:lnTo>
+                  <a:lnTo>
+                    <a:pt x="827334" y="1756818"/>
+                  </a:lnTo>
+                  <a:lnTo>
+                    <a:pt x="904968" y="1869895"/>
+                  </a:lnTo>
+                  <a:lnTo>
+                    <a:pt x="982602" y="1976227"/>
+                  </a:lnTo>
+                  <a:lnTo>
+                    <a:pt x="1060236" y="2076217"/>
+                  </a:lnTo>
+                  <a:lnTo>
+                    <a:pt x="1137870" y="2170243"/>
+                  </a:lnTo>
+                  <a:lnTo>
+                    <a:pt x="1215504" y="2258661"/>
+                  </a:lnTo>
+                  <a:lnTo>
+                    <a:pt x="1293138" y="2341805"/>
+                  </a:lnTo>
+                  <a:lnTo>
+                    <a:pt x="1370773" y="2419990"/>
+                  </a:lnTo>
+                  <a:lnTo>
+                    <a:pt x="1448407" y="2493512"/>
+                  </a:lnTo>
+                  <a:lnTo>
+                    <a:pt x="1526041" y="2562648"/>
+                  </a:lnTo>
+                  <a:lnTo>
+                    <a:pt x="1603675" y="2627661"/>
+                  </a:lnTo>
+                  <a:lnTo>
+                    <a:pt x="1681309" y="2688796"/>
+                  </a:lnTo>
+                  <a:lnTo>
+                    <a:pt x="1758943" y="2746285"/>
+                  </a:lnTo>
+                  <a:lnTo>
+                    <a:pt x="1836577" y="2788334"/>
+                  </a:lnTo>
+                  <a:lnTo>
+                    <a:pt x="1914211" y="2804483"/>
+                  </a:lnTo>
+                  <a:lnTo>
+                    <a:pt x="1991845" y="2820331"/>
+                  </a:lnTo>
+                  <a:lnTo>
+                    <a:pt x="2069479" y="2835883"/>
+                  </a:lnTo>
+                  <a:lnTo>
+                    <a:pt x="2147113" y="2851145"/>
+                  </a:lnTo>
+                  <a:lnTo>
+                    <a:pt x="2224747" y="2866121"/>
+                  </a:lnTo>
+                  <a:lnTo>
+                    <a:pt x="2302381" y="2880817"/>
+                  </a:lnTo>
+                  <a:lnTo>
+                    <a:pt x="2380015" y="2895239"/>
+                  </a:lnTo>
+                  <a:lnTo>
+                    <a:pt x="2457649" y="2909391"/>
+                  </a:lnTo>
+                  <a:lnTo>
+                    <a:pt x="2535283" y="2923279"/>
+                  </a:lnTo>
+                  <a:lnTo>
+                    <a:pt x="2612917" y="2936907"/>
+                  </a:lnTo>
+                  <a:lnTo>
+                    <a:pt x="2690551" y="2950281"/>
+                  </a:lnTo>
+                  <a:lnTo>
+                    <a:pt x="2768185" y="2963404"/>
+                  </a:lnTo>
+                  <a:lnTo>
+                    <a:pt x="2845819" y="2976283"/>
+                  </a:lnTo>
+                  <a:lnTo>
+                    <a:pt x="2923453" y="2988921"/>
+                  </a:lnTo>
+                  <a:lnTo>
+                    <a:pt x="3001087" y="3001323"/>
+                  </a:lnTo>
+                  <a:lnTo>
+                    <a:pt x="3078722" y="3013493"/>
+                  </a:lnTo>
+                  <a:lnTo>
+                    <a:pt x="3156356" y="3025435"/>
+                  </a:lnTo>
+                  <a:lnTo>
+                    <a:pt x="3233990" y="3037155"/>
+                  </a:lnTo>
+                  <a:lnTo>
+                    <a:pt x="3311624" y="3048655"/>
+                  </a:lnTo>
+                  <a:lnTo>
+                    <a:pt x="3389258" y="3059941"/>
+                  </a:lnTo>
+                  <a:lnTo>
+                    <a:pt x="3466892" y="3071016"/>
+                  </a:lnTo>
+                  <a:lnTo>
+                    <a:pt x="3544526" y="3081883"/>
+                  </a:lnTo>
+                  <a:lnTo>
+                    <a:pt x="3622160" y="3092548"/>
+                  </a:lnTo>
+                  <a:lnTo>
+                    <a:pt x="3699794" y="3103014"/>
+                  </a:lnTo>
+                  <a:lnTo>
+                    <a:pt x="3777428" y="3113283"/>
+                  </a:lnTo>
+                  <a:lnTo>
+                    <a:pt x="3855062" y="3123361"/>
+                  </a:lnTo>
+                  <a:lnTo>
+                    <a:pt x="3932696" y="3133251"/>
+                  </a:lnTo>
+                  <a:lnTo>
+                    <a:pt x="4010330" y="3142956"/>
+                  </a:lnTo>
+                  <a:lnTo>
+                    <a:pt x="4087964" y="3152480"/>
+                  </a:lnTo>
+                  <a:lnTo>
+                    <a:pt x="4165598" y="3161825"/>
+                  </a:lnTo>
+                  <a:lnTo>
+                    <a:pt x="4243232" y="3170996"/>
+                  </a:lnTo>
+                  <a:lnTo>
+                    <a:pt x="4320866" y="3179996"/>
+                  </a:lnTo>
+                  <a:lnTo>
+                    <a:pt x="4398500" y="3188827"/>
+                  </a:lnTo>
+                  <a:lnTo>
+                    <a:pt x="4476134" y="3197494"/>
+                  </a:lnTo>
+                  <a:lnTo>
+                    <a:pt x="4553768" y="3205998"/>
+                  </a:lnTo>
+                  <a:lnTo>
+                    <a:pt x="4631402" y="3214344"/>
+                  </a:lnTo>
+                  <a:lnTo>
+                    <a:pt x="4709036" y="3222534"/>
+                  </a:lnTo>
+                  <a:lnTo>
+                    <a:pt x="4786671" y="3230570"/>
+                  </a:lnTo>
+                  <a:lnTo>
+                    <a:pt x="4864305" y="3238457"/>
+                  </a:lnTo>
+                  <a:lnTo>
+                    <a:pt x="4941939" y="3246196"/>
+                  </a:lnTo>
+                  <a:lnTo>
+                    <a:pt x="5019573" y="3253791"/>
+                  </a:lnTo>
+                  <a:lnTo>
+                    <a:pt x="5097207" y="3261243"/>
+                  </a:lnTo>
+                  <a:lnTo>
+                    <a:pt x="5174841" y="3268557"/>
+                  </a:lnTo>
+                  <a:lnTo>
+                    <a:pt x="5252475" y="3275733"/>
+                  </a:lnTo>
+                  <a:lnTo>
+                    <a:pt x="5330109" y="3282776"/>
+                  </a:lnTo>
+                  <a:lnTo>
+                    <a:pt x="5407743" y="3289687"/>
+                  </a:lnTo>
+                  <a:lnTo>
+                    <a:pt x="5485377" y="3296469"/>
+                  </a:lnTo>
+                  <a:lnTo>
+                    <a:pt x="5563011" y="3303124"/>
+                  </a:lnTo>
+                  <a:lnTo>
+                    <a:pt x="5640645" y="3309655"/>
+                  </a:lnTo>
+                  <a:lnTo>
+                    <a:pt x="5718279" y="3316064"/>
+                  </a:lnTo>
+                  <a:lnTo>
+                    <a:pt x="5795913" y="3322353"/>
                   </a:lnTo>
                 </a:path>
               </a:pathLst>
@@ -3808,297 +3802,297 @@
           </p:nvSpPr>
           <p:spPr>
             <a:xfrm>
-              <a:off x="817517" y="3515240"/>
-              <a:ext cx="7370972" cy="1992992"/>
+              <a:off x="817517" y="3569251"/>
+              <a:ext cx="7370972" cy="1942932"/>
             </a:xfrm>
             <a:custGeom>
               <a:avLst/>
               <a:pathLst>
-                <a:path w="7370972" h="1992992">
+                <a:path w="7370972" h="1942932">
                   <a:moveTo>
-                    <a:pt x="7370972" y="1992992"/>
+                    <a:pt x="7370972" y="1942932"/>
                   </a:moveTo>
                   <a:lnTo>
-                    <a:pt x="7293338" y="1990479"/>
-                  </a:lnTo>
-                  <a:lnTo>
-                    <a:pt x="7215704" y="1987811"/>
-                  </a:lnTo>
-                  <a:lnTo>
-                    <a:pt x="7138070" y="1984981"/>
-                  </a:lnTo>
-                  <a:lnTo>
-                    <a:pt x="7060436" y="1981977"/>
-                  </a:lnTo>
-                  <a:lnTo>
-                    <a:pt x="6982802" y="1978788"/>
-                  </a:lnTo>
-                  <a:lnTo>
-                    <a:pt x="6905168" y="1975404"/>
-                  </a:lnTo>
-                  <a:lnTo>
-                    <a:pt x="6827534" y="1971813"/>
-                  </a:lnTo>
-                  <a:lnTo>
-                    <a:pt x="6749900" y="1968001"/>
-                  </a:lnTo>
-                  <a:lnTo>
-                    <a:pt x="6672266" y="1963955"/>
-                  </a:lnTo>
-                  <a:lnTo>
-                    <a:pt x="6594632" y="1959661"/>
-                  </a:lnTo>
-                  <a:lnTo>
-                    <a:pt x="6516998" y="1955104"/>
-                  </a:lnTo>
-                  <a:lnTo>
-                    <a:pt x="6439364" y="1950268"/>
-                  </a:lnTo>
-                  <a:lnTo>
-                    <a:pt x="6361730" y="1945135"/>
-                  </a:lnTo>
-                  <a:lnTo>
-                    <a:pt x="6284096" y="1939687"/>
-                  </a:lnTo>
-                  <a:lnTo>
-                    <a:pt x="6206462" y="1933904"/>
-                  </a:lnTo>
-                  <a:lnTo>
-                    <a:pt x="6128827" y="1927768"/>
-                  </a:lnTo>
-                  <a:lnTo>
-                    <a:pt x="6051193" y="1921255"/>
-                  </a:lnTo>
-                  <a:lnTo>
-                    <a:pt x="5973559" y="1914342"/>
-                  </a:lnTo>
-                  <a:lnTo>
-                    <a:pt x="5895925" y="1907006"/>
-                  </a:lnTo>
-                  <a:lnTo>
-                    <a:pt x="5818291" y="1899219"/>
-                  </a:lnTo>
-                  <a:lnTo>
-                    <a:pt x="5740657" y="1890955"/>
-                  </a:lnTo>
-                  <a:lnTo>
-                    <a:pt x="5663023" y="1882185"/>
-                  </a:lnTo>
-                  <a:lnTo>
-                    <a:pt x="5585389" y="1872876"/>
-                  </a:lnTo>
-                  <a:lnTo>
-                    <a:pt x="5507755" y="1862996"/>
-                  </a:lnTo>
-                  <a:lnTo>
-                    <a:pt x="5430121" y="1852511"/>
-                  </a:lnTo>
-                  <a:lnTo>
-                    <a:pt x="5352487" y="1841382"/>
-                  </a:lnTo>
-                  <a:lnTo>
-                    <a:pt x="5274853" y="1829571"/>
-                  </a:lnTo>
-                  <a:lnTo>
-                    <a:pt x="5197219" y="1817036"/>
-                  </a:lnTo>
-                  <a:lnTo>
-                    <a:pt x="5119585" y="1803732"/>
-                  </a:lnTo>
-                  <a:lnTo>
-                    <a:pt x="5041951" y="1789612"/>
-                  </a:lnTo>
-                  <a:lnTo>
-                    <a:pt x="4964317" y="1774626"/>
-                  </a:lnTo>
-                  <a:lnTo>
-                    <a:pt x="4886683" y="1758720"/>
-                  </a:lnTo>
-                  <a:lnTo>
-                    <a:pt x="4809049" y="1741840"/>
-                  </a:lnTo>
-                  <a:lnTo>
-                    <a:pt x="4731415" y="1723924"/>
-                  </a:lnTo>
-                  <a:lnTo>
-                    <a:pt x="4653781" y="1704909"/>
-                  </a:lnTo>
-                  <a:lnTo>
-                    <a:pt x="4576147" y="1684728"/>
-                  </a:lnTo>
-                  <a:lnTo>
-                    <a:pt x="4498513" y="1663310"/>
-                  </a:lnTo>
-                  <a:lnTo>
-                    <a:pt x="4420879" y="1640578"/>
-                  </a:lnTo>
-                  <a:lnTo>
-                    <a:pt x="4343244" y="1616451"/>
-                  </a:lnTo>
-                  <a:lnTo>
-                    <a:pt x="4265610" y="1590846"/>
-                  </a:lnTo>
-                  <a:lnTo>
-                    <a:pt x="4187976" y="1563669"/>
-                  </a:lnTo>
-                  <a:lnTo>
-                    <a:pt x="4110342" y="1534826"/>
-                  </a:lnTo>
-                  <a:lnTo>
-                    <a:pt x="4032708" y="1504215"/>
-                  </a:lnTo>
-                  <a:lnTo>
-                    <a:pt x="3955074" y="1471725"/>
-                  </a:lnTo>
-                  <a:lnTo>
-                    <a:pt x="3877440" y="1437243"/>
-                  </a:lnTo>
-                  <a:lnTo>
-                    <a:pt x="3799806" y="1400647"/>
-                  </a:lnTo>
-                  <a:lnTo>
-                    <a:pt x="3722172" y="1361806"/>
-                  </a:lnTo>
-                  <a:lnTo>
-                    <a:pt x="3644538" y="1320583"/>
-                  </a:lnTo>
-                  <a:lnTo>
-                    <a:pt x="3566904" y="1276831"/>
-                  </a:lnTo>
-                  <a:lnTo>
-                    <a:pt x="3489270" y="1230397"/>
-                  </a:lnTo>
-                  <a:lnTo>
-                    <a:pt x="3411636" y="1181115"/>
-                  </a:lnTo>
-                  <a:lnTo>
-                    <a:pt x="3334002" y="1152834"/>
-                  </a:lnTo>
-                  <a:lnTo>
-                    <a:pt x="3256368" y="1135502"/>
-                  </a:lnTo>
-                  <a:lnTo>
-                    <a:pt x="3178734" y="1117830"/>
-                  </a:lnTo>
-                  <a:lnTo>
-                    <a:pt x="3101100" y="1099809"/>
-                  </a:lnTo>
-                  <a:lnTo>
-                    <a:pt x="3023466" y="1081435"/>
-                  </a:lnTo>
-                  <a:lnTo>
-                    <a:pt x="2945832" y="1062698"/>
-                  </a:lnTo>
-                  <a:lnTo>
-                    <a:pt x="2868198" y="1043594"/>
-                  </a:lnTo>
-                  <a:lnTo>
-                    <a:pt x="2790564" y="1024113"/>
-                  </a:lnTo>
-                  <a:lnTo>
-                    <a:pt x="2712930" y="1004249"/>
-                  </a:lnTo>
-                  <a:lnTo>
-                    <a:pt x="2635295" y="983995"/>
-                  </a:lnTo>
-                  <a:lnTo>
-                    <a:pt x="2557661" y="963342"/>
-                  </a:lnTo>
-                  <a:lnTo>
-                    <a:pt x="2480027" y="942283"/>
-                  </a:lnTo>
-                  <a:lnTo>
-                    <a:pt x="2402393" y="920810"/>
-                  </a:lnTo>
-                  <a:lnTo>
-                    <a:pt x="2324759" y="898914"/>
-                  </a:lnTo>
-                  <a:lnTo>
-                    <a:pt x="2247125" y="876588"/>
-                  </a:lnTo>
-                  <a:lnTo>
-                    <a:pt x="2169491" y="853822"/>
-                  </a:lnTo>
-                  <a:lnTo>
-                    <a:pt x="2091857" y="830609"/>
-                  </a:lnTo>
-                  <a:lnTo>
-                    <a:pt x="2014223" y="806939"/>
-                  </a:lnTo>
-                  <a:lnTo>
-                    <a:pt x="1936589" y="782803"/>
-                  </a:lnTo>
-                  <a:lnTo>
-                    <a:pt x="1858955" y="758193"/>
-                  </a:lnTo>
-                  <a:lnTo>
-                    <a:pt x="1781321" y="733099"/>
-                  </a:lnTo>
-                  <a:lnTo>
-                    <a:pt x="1703687" y="707511"/>
-                  </a:lnTo>
-                  <a:lnTo>
-                    <a:pt x="1626053" y="681419"/>
-                  </a:lnTo>
-                  <a:lnTo>
-                    <a:pt x="1548419" y="654815"/>
-                  </a:lnTo>
-                  <a:lnTo>
-                    <a:pt x="1470785" y="627687"/>
-                  </a:lnTo>
-                  <a:lnTo>
-                    <a:pt x="1393151" y="600026"/>
-                  </a:lnTo>
-                  <a:lnTo>
-                    <a:pt x="1315517" y="571820"/>
-                  </a:lnTo>
-                  <a:lnTo>
-                    <a:pt x="1237883" y="543060"/>
-                  </a:lnTo>
-                  <a:lnTo>
-                    <a:pt x="1160249" y="513734"/>
-                  </a:lnTo>
-                  <a:lnTo>
-                    <a:pt x="1082615" y="483831"/>
-                  </a:lnTo>
-                  <a:lnTo>
-                    <a:pt x="1004981" y="453340"/>
-                  </a:lnTo>
-                  <a:lnTo>
-                    <a:pt x="927346" y="422249"/>
-                  </a:lnTo>
-                  <a:lnTo>
-                    <a:pt x="849712" y="390547"/>
-                  </a:lnTo>
-                  <a:lnTo>
-                    <a:pt x="772078" y="358221"/>
-                  </a:lnTo>
-                  <a:lnTo>
-                    <a:pt x="694444" y="325260"/>
-                  </a:lnTo>
-                  <a:lnTo>
-                    <a:pt x="616810" y="291649"/>
-                  </a:lnTo>
-                  <a:lnTo>
-                    <a:pt x="539176" y="257378"/>
-                  </a:lnTo>
-                  <a:lnTo>
-                    <a:pt x="461542" y="222433"/>
-                  </a:lnTo>
-                  <a:lnTo>
-                    <a:pt x="383908" y="186800"/>
-                  </a:lnTo>
-                  <a:lnTo>
-                    <a:pt x="306274" y="150467"/>
-                  </a:lnTo>
-                  <a:lnTo>
-                    <a:pt x="228640" y="113418"/>
-                  </a:lnTo>
-                  <a:lnTo>
-                    <a:pt x="151006" y="75641"/>
-                  </a:lnTo>
-                  <a:lnTo>
-                    <a:pt x="73372" y="37121"/>
+                    <a:pt x="7293338" y="1940583"/>
+                  </a:lnTo>
+                  <a:lnTo>
+                    <a:pt x="7215704" y="1938086"/>
+                  </a:lnTo>
+                  <a:lnTo>
+                    <a:pt x="7138070" y="1935430"/>
+                  </a:lnTo>
+                  <a:lnTo>
+                    <a:pt x="7060436" y="1932606"/>
+                  </a:lnTo>
+                  <a:lnTo>
+                    <a:pt x="6982802" y="1929603"/>
+                  </a:lnTo>
+                  <a:lnTo>
+                    <a:pt x="6905168" y="1926409"/>
+                  </a:lnTo>
+                  <a:lnTo>
+                    <a:pt x="6827534" y="1923013"/>
+                  </a:lnTo>
+                  <a:lnTo>
+                    <a:pt x="6749900" y="1919401"/>
+                  </a:lnTo>
+                  <a:lnTo>
+                    <a:pt x="6672266" y="1915560"/>
+                  </a:lnTo>
+                  <a:lnTo>
+                    <a:pt x="6594632" y="1911476"/>
+                  </a:lnTo>
+                  <a:lnTo>
+                    <a:pt x="6516998" y="1907133"/>
+                  </a:lnTo>
+                  <a:lnTo>
+                    <a:pt x="6439364" y="1902514"/>
+                  </a:lnTo>
+                  <a:lnTo>
+                    <a:pt x="6361730" y="1897602"/>
+                  </a:lnTo>
+                  <a:lnTo>
+                    <a:pt x="6284096" y="1892378"/>
+                  </a:lnTo>
+                  <a:lnTo>
+                    <a:pt x="6206462" y="1886823"/>
+                  </a:lnTo>
+                  <a:lnTo>
+                    <a:pt x="6128827" y="1880916"/>
+                  </a:lnTo>
+                  <a:lnTo>
+                    <a:pt x="6051193" y="1874634"/>
+                  </a:lnTo>
+                  <a:lnTo>
+                    <a:pt x="5973559" y="1867954"/>
+                  </a:lnTo>
+                  <a:lnTo>
+                    <a:pt x="5895925" y="1860850"/>
+                  </a:lnTo>
+                  <a:lnTo>
+                    <a:pt x="5818291" y="1853295"/>
+                  </a:lnTo>
+                  <a:lnTo>
+                    <a:pt x="5740657" y="1845261"/>
+                  </a:lnTo>
+                  <a:lnTo>
+                    <a:pt x="5663023" y="1836718"/>
+                  </a:lnTo>
+                  <a:lnTo>
+                    <a:pt x="5585389" y="1827633"/>
+                  </a:lnTo>
+                  <a:lnTo>
+                    <a:pt x="5507755" y="1817971"/>
+                  </a:lnTo>
+                  <a:lnTo>
+                    <a:pt x="5430121" y="1807697"/>
+                  </a:lnTo>
+                  <a:lnTo>
+                    <a:pt x="5352487" y="1796771"/>
+                  </a:lnTo>
+                  <a:lnTo>
+                    <a:pt x="5274853" y="1785152"/>
+                  </a:lnTo>
+                  <a:lnTo>
+                    <a:pt x="5197219" y="1772796"/>
+                  </a:lnTo>
+                  <a:lnTo>
+                    <a:pt x="5119585" y="1759656"/>
+                  </a:lnTo>
+                  <a:lnTo>
+                    <a:pt x="5041951" y="1745683"/>
+                  </a:lnTo>
+                  <a:lnTo>
+                    <a:pt x="4964317" y="1730824"/>
+                  </a:lnTo>
+                  <a:lnTo>
+                    <a:pt x="4886683" y="1715022"/>
+                  </a:lnTo>
+                  <a:lnTo>
+                    <a:pt x="4809049" y="1698217"/>
+                  </a:lnTo>
+                  <a:lnTo>
+                    <a:pt x="4731415" y="1680347"/>
+                  </a:lnTo>
+                  <a:lnTo>
+                    <a:pt x="4653781" y="1661344"/>
+                  </a:lnTo>
+                  <a:lnTo>
+                    <a:pt x="4576147" y="1641135"/>
+                  </a:lnTo>
+                  <a:lnTo>
+                    <a:pt x="4498513" y="1619644"/>
+                  </a:lnTo>
+                  <a:lnTo>
+                    <a:pt x="4420879" y="1596790"/>
+                  </a:lnTo>
+                  <a:lnTo>
+                    <a:pt x="4343244" y="1572487"/>
+                  </a:lnTo>
+                  <a:lnTo>
+                    <a:pt x="4265610" y="1546642"/>
+                  </a:lnTo>
+                  <a:lnTo>
+                    <a:pt x="4187976" y="1519157"/>
+                  </a:lnTo>
+                  <a:lnTo>
+                    <a:pt x="4110342" y="1489930"/>
+                  </a:lnTo>
+                  <a:lnTo>
+                    <a:pt x="4032708" y="1458849"/>
+                  </a:lnTo>
+                  <a:lnTo>
+                    <a:pt x="3955074" y="1425796"/>
+                  </a:lnTo>
+                  <a:lnTo>
+                    <a:pt x="3877440" y="1390646"/>
+                  </a:lnTo>
+                  <a:lnTo>
+                    <a:pt x="3799806" y="1353268"/>
+                  </a:lnTo>
+                  <a:lnTo>
+                    <a:pt x="3722172" y="1313518"/>
+                  </a:lnTo>
+                  <a:lnTo>
+                    <a:pt x="3644538" y="1271247"/>
+                  </a:lnTo>
+                  <a:lnTo>
+                    <a:pt x="3566904" y="1226295"/>
+                  </a:lnTo>
+                  <a:lnTo>
+                    <a:pt x="3489270" y="1178492"/>
+                  </a:lnTo>
+                  <a:lnTo>
+                    <a:pt x="3411636" y="1127656"/>
+                  </a:lnTo>
+                  <a:lnTo>
+                    <a:pt x="3334002" y="1099188"/>
+                  </a:lnTo>
+                  <a:lnTo>
+                    <a:pt x="3256368" y="1082417"/>
+                  </a:lnTo>
+                  <a:lnTo>
+                    <a:pt x="3178734" y="1065327"/>
+                  </a:lnTo>
+                  <a:lnTo>
+                    <a:pt x="3101100" y="1047912"/>
+                  </a:lnTo>
+                  <a:lnTo>
+                    <a:pt x="3023466" y="1030165"/>
+                  </a:lnTo>
+                  <a:lnTo>
+                    <a:pt x="2945832" y="1012080"/>
+                  </a:lnTo>
+                  <a:lnTo>
+                    <a:pt x="2868198" y="993651"/>
+                  </a:lnTo>
+                  <a:lnTo>
+                    <a:pt x="2790564" y="974871"/>
+                  </a:lnTo>
+                  <a:lnTo>
+                    <a:pt x="2712930" y="955733"/>
+                  </a:lnTo>
+                  <a:lnTo>
+                    <a:pt x="2635295" y="936231"/>
+                  </a:lnTo>
+                  <a:lnTo>
+                    <a:pt x="2557661" y="916357"/>
+                  </a:lnTo>
+                  <a:lnTo>
+                    <a:pt x="2480027" y="896106"/>
+                  </a:lnTo>
+                  <a:lnTo>
+                    <a:pt x="2402393" y="875468"/>
+                  </a:lnTo>
+                  <a:lnTo>
+                    <a:pt x="2324759" y="854438"/>
+                  </a:lnTo>
+                  <a:lnTo>
+                    <a:pt x="2247125" y="833007"/>
+                  </a:lnTo>
+                  <a:lnTo>
+                    <a:pt x="2169491" y="811168"/>
+                  </a:lnTo>
+                  <a:lnTo>
+                    <a:pt x="2091857" y="788913"/>
+                  </a:lnTo>
+                  <a:lnTo>
+                    <a:pt x="2014223" y="766234"/>
+                  </a:lnTo>
+                  <a:lnTo>
+                    <a:pt x="1936589" y="743124"/>
+                  </a:lnTo>
+                  <a:lnTo>
+                    <a:pt x="1858955" y="719574"/>
+                  </a:lnTo>
+                  <a:lnTo>
+                    <a:pt x="1781321" y="695575"/>
+                  </a:lnTo>
+                  <a:lnTo>
+                    <a:pt x="1703687" y="671119"/>
+                  </a:lnTo>
+                  <a:lnTo>
+                    <a:pt x="1626053" y="646197"/>
+                  </a:lnTo>
+                  <a:lnTo>
+                    <a:pt x="1548419" y="620801"/>
+                  </a:lnTo>
+                  <a:lnTo>
+                    <a:pt x="1470785" y="594922"/>
+                  </a:lnTo>
+                  <a:lnTo>
+                    <a:pt x="1393151" y="568550"/>
+                  </a:lnTo>
+                  <a:lnTo>
+                    <a:pt x="1315517" y="541675"/>
+                  </a:lnTo>
+                  <a:lnTo>
+                    <a:pt x="1237883" y="514289"/>
+                  </a:lnTo>
+                  <a:lnTo>
+                    <a:pt x="1160249" y="486381"/>
+                  </a:lnTo>
+                  <a:lnTo>
+                    <a:pt x="1082615" y="457942"/>
+                  </a:lnTo>
+                  <a:lnTo>
+                    <a:pt x="1004981" y="428962"/>
+                  </a:lnTo>
+                  <a:lnTo>
+                    <a:pt x="927346" y="399429"/>
+                  </a:lnTo>
+                  <a:lnTo>
+                    <a:pt x="849712" y="369335"/>
+                  </a:lnTo>
+                  <a:lnTo>
+                    <a:pt x="772078" y="338667"/>
+                  </a:lnTo>
+                  <a:lnTo>
+                    <a:pt x="694444" y="307415"/>
+                  </a:lnTo>
+                  <a:lnTo>
+                    <a:pt x="616810" y="275569"/>
+                  </a:lnTo>
+                  <a:lnTo>
+                    <a:pt x="539176" y="243115"/>
+                  </a:lnTo>
+                  <a:lnTo>
+                    <a:pt x="461542" y="210044"/>
+                  </a:lnTo>
+                  <a:lnTo>
+                    <a:pt x="383908" y="176344"/>
+                  </a:lnTo>
+                  <a:lnTo>
+                    <a:pt x="306274" y="142001"/>
+                  </a:lnTo>
+                  <a:lnTo>
+                    <a:pt x="228640" y="107005"/>
+                  </a:lnTo>
+                  <a:lnTo>
+                    <a:pt x="151006" y="71342"/>
+                  </a:lnTo>
+                  <a:lnTo>
+                    <a:pt x="73372" y="35000"/>
                   </a:lnTo>
                   <a:lnTo>
                     <a:pt x="0" y="0"/>
@@ -4121,279 +4115,279 @@
           </p:nvSpPr>
           <p:spPr>
             <a:xfrm>
-              <a:off x="1383515" y="1896563"/>
-              <a:ext cx="6804975" cy="3538137"/>
+              <a:off x="1430924" y="1896563"/>
+              <a:ext cx="6757566" cy="3542061"/>
             </a:xfrm>
             <a:custGeom>
               <a:avLst/>
               <a:pathLst>
-                <a:path w="6804975" h="3538137">
+                <a:path w="6757566" h="3542061">
                   <a:moveTo>
                     <a:pt x="0" y="0"/>
                   </a:moveTo>
                   <a:lnTo>
-                    <a:pt x="50813" y="93850"/>
-                  </a:lnTo>
-                  <a:lnTo>
-                    <a:pt x="128447" y="231684"/>
-                  </a:lnTo>
-                  <a:lnTo>
-                    <a:pt x="206081" y="364180"/>
-                  </a:lnTo>
-                  <a:lnTo>
-                    <a:pt x="283715" y="491544"/>
-                  </a:lnTo>
-                  <a:lnTo>
-                    <a:pt x="361349" y="613975"/>
-                  </a:lnTo>
-                  <a:lnTo>
-                    <a:pt x="438983" y="731665"/>
-                  </a:lnTo>
-                  <a:lnTo>
-                    <a:pt x="516617" y="844796"/>
-                  </a:lnTo>
-                  <a:lnTo>
-                    <a:pt x="594251" y="953545"/>
-                  </a:lnTo>
-                  <a:lnTo>
-                    <a:pt x="671885" y="1058083"/>
-                  </a:lnTo>
-                  <a:lnTo>
-                    <a:pt x="749519" y="1158572"/>
-                  </a:lnTo>
-                  <a:lnTo>
-                    <a:pt x="827153" y="1255169"/>
-                  </a:lnTo>
-                  <a:lnTo>
-                    <a:pt x="904787" y="1348024"/>
-                  </a:lnTo>
-                  <a:lnTo>
-                    <a:pt x="982422" y="1437283"/>
-                  </a:lnTo>
-                  <a:lnTo>
-                    <a:pt x="1060056" y="1523086"/>
-                  </a:lnTo>
-                  <a:lnTo>
-                    <a:pt x="1137690" y="1605565"/>
-                  </a:lnTo>
-                  <a:lnTo>
-                    <a:pt x="1215324" y="1684849"/>
-                  </a:lnTo>
-                  <a:lnTo>
-                    <a:pt x="1292958" y="1761063"/>
-                  </a:lnTo>
-                  <a:lnTo>
-                    <a:pt x="1370592" y="1834325"/>
-                  </a:lnTo>
-                  <a:lnTo>
-                    <a:pt x="1448226" y="1904749"/>
-                  </a:lnTo>
-                  <a:lnTo>
-                    <a:pt x="1525860" y="1972446"/>
-                  </a:lnTo>
-                  <a:lnTo>
-                    <a:pt x="1603494" y="2037521"/>
-                  </a:lnTo>
-                  <a:lnTo>
-                    <a:pt x="1681128" y="2100076"/>
-                  </a:lnTo>
-                  <a:lnTo>
-                    <a:pt x="1758762" y="2160208"/>
-                  </a:lnTo>
-                  <a:lnTo>
-                    <a:pt x="1836396" y="2218011"/>
-                  </a:lnTo>
-                  <a:lnTo>
-                    <a:pt x="1914030" y="2273575"/>
-                  </a:lnTo>
-                  <a:lnTo>
-                    <a:pt x="1991664" y="2326987"/>
-                  </a:lnTo>
-                  <a:lnTo>
-                    <a:pt x="2069298" y="2378330"/>
-                  </a:lnTo>
-                  <a:lnTo>
-                    <a:pt x="2146932" y="2427685"/>
-                  </a:lnTo>
-                  <a:lnTo>
-                    <a:pt x="2224566" y="2475128"/>
-                  </a:lnTo>
-                  <a:lnTo>
-                    <a:pt x="2302200" y="2520734"/>
-                  </a:lnTo>
-                  <a:lnTo>
-                    <a:pt x="2379834" y="2564574"/>
-                  </a:lnTo>
-                  <a:lnTo>
-                    <a:pt x="2457468" y="2606715"/>
-                  </a:lnTo>
-                  <a:lnTo>
-                    <a:pt x="2535102" y="2647225"/>
-                  </a:lnTo>
-                  <a:lnTo>
-                    <a:pt x="2612736" y="2686165"/>
-                  </a:lnTo>
-                  <a:lnTo>
-                    <a:pt x="2690371" y="2723597"/>
-                  </a:lnTo>
-                  <a:lnTo>
-                    <a:pt x="2768005" y="2759580"/>
-                  </a:lnTo>
-                  <a:lnTo>
-                    <a:pt x="2845639" y="2794169"/>
-                  </a:lnTo>
-                  <a:lnTo>
-                    <a:pt x="2923273" y="2827418"/>
-                  </a:lnTo>
-                  <a:lnTo>
-                    <a:pt x="3000907" y="2859379"/>
-                  </a:lnTo>
-                  <a:lnTo>
-                    <a:pt x="3078541" y="2890103"/>
-                  </a:lnTo>
-                  <a:lnTo>
-                    <a:pt x="3156175" y="2919637"/>
-                  </a:lnTo>
-                  <a:lnTo>
-                    <a:pt x="3233809" y="2948026"/>
-                  </a:lnTo>
-                  <a:lnTo>
-                    <a:pt x="3311443" y="2975317"/>
-                  </a:lnTo>
-                  <a:lnTo>
-                    <a:pt x="3389077" y="3001550"/>
-                  </a:lnTo>
-                  <a:lnTo>
-                    <a:pt x="3466711" y="3026767"/>
-                  </a:lnTo>
-                  <a:lnTo>
-                    <a:pt x="3544345" y="3051008"/>
-                  </a:lnTo>
-                  <a:lnTo>
-                    <a:pt x="3621979" y="3074309"/>
-                  </a:lnTo>
-                  <a:lnTo>
-                    <a:pt x="3699613" y="3096708"/>
-                  </a:lnTo>
-                  <a:lnTo>
-                    <a:pt x="3777247" y="3118240"/>
-                  </a:lnTo>
-                  <a:lnTo>
-                    <a:pt x="3854881" y="3138938"/>
-                  </a:lnTo>
-                  <a:lnTo>
-                    <a:pt x="3932515" y="3158834"/>
-                  </a:lnTo>
-                  <a:lnTo>
-                    <a:pt x="4010149" y="3177959"/>
-                  </a:lnTo>
-                  <a:lnTo>
-                    <a:pt x="4087783" y="3196344"/>
-                  </a:lnTo>
-                  <a:lnTo>
-                    <a:pt x="4165417" y="3214017"/>
-                  </a:lnTo>
-                  <a:lnTo>
-                    <a:pt x="4243051" y="3231005"/>
-                  </a:lnTo>
-                  <a:lnTo>
-                    <a:pt x="4320685" y="3247336"/>
-                  </a:lnTo>
-                  <a:lnTo>
-                    <a:pt x="4398319" y="3263033"/>
-                  </a:lnTo>
-                  <a:lnTo>
-                    <a:pt x="4475954" y="3278123"/>
-                  </a:lnTo>
-                  <a:lnTo>
-                    <a:pt x="4553588" y="3292629"/>
-                  </a:lnTo>
-                  <a:lnTo>
-                    <a:pt x="4631222" y="3306572"/>
-                  </a:lnTo>
-                  <a:lnTo>
-                    <a:pt x="4708856" y="3319976"/>
-                  </a:lnTo>
-                  <a:lnTo>
-                    <a:pt x="4786490" y="3332860"/>
-                  </a:lnTo>
-                  <a:lnTo>
-                    <a:pt x="4864124" y="3345245"/>
-                  </a:lnTo>
-                  <a:lnTo>
-                    <a:pt x="4941758" y="3357151"/>
-                  </a:lnTo>
-                  <a:lnTo>
-                    <a:pt x="5019392" y="3368596"/>
-                  </a:lnTo>
-                  <a:lnTo>
-                    <a:pt x="5097026" y="3379597"/>
-                  </a:lnTo>
-                  <a:lnTo>
-                    <a:pt x="5174660" y="3390172"/>
-                  </a:lnTo>
-                  <a:lnTo>
-                    <a:pt x="5252294" y="3400338"/>
-                  </a:lnTo>
-                  <a:lnTo>
-                    <a:pt x="5329928" y="3410110"/>
-                  </a:lnTo>
-                  <a:lnTo>
-                    <a:pt x="5407562" y="3419503"/>
-                  </a:lnTo>
-                  <a:lnTo>
-                    <a:pt x="5485196" y="3428533"/>
-                  </a:lnTo>
-                  <a:lnTo>
-                    <a:pt x="5562830" y="3437213"/>
-                  </a:lnTo>
-                  <a:lnTo>
-                    <a:pt x="5640464" y="3445557"/>
-                  </a:lnTo>
-                  <a:lnTo>
-                    <a:pt x="5718098" y="3453577"/>
-                  </a:lnTo>
-                  <a:lnTo>
-                    <a:pt x="5795732" y="3461287"/>
-                  </a:lnTo>
-                  <a:lnTo>
-                    <a:pt x="5873366" y="3468698"/>
-                  </a:lnTo>
-                  <a:lnTo>
-                    <a:pt x="5951000" y="3475823"/>
-                  </a:lnTo>
-                  <a:lnTo>
-                    <a:pt x="6028634" y="3482671"/>
-                  </a:lnTo>
-                  <a:lnTo>
-                    <a:pt x="6106268" y="3489254"/>
-                  </a:lnTo>
-                  <a:lnTo>
-                    <a:pt x="6183903" y="3495582"/>
-                  </a:lnTo>
-                  <a:lnTo>
-                    <a:pt x="6261537" y="3501665"/>
-                  </a:lnTo>
-                  <a:lnTo>
-                    <a:pt x="6339171" y="3507513"/>
-                  </a:lnTo>
-                  <a:lnTo>
-                    <a:pt x="6416805" y="3513134"/>
-                  </a:lnTo>
-                  <a:lnTo>
-                    <a:pt x="6494439" y="3518537"/>
-                  </a:lnTo>
-                  <a:lnTo>
-                    <a:pt x="6572073" y="3523731"/>
-                  </a:lnTo>
-                  <a:lnTo>
-                    <a:pt x="6649707" y="3528724"/>
-                  </a:lnTo>
-                  <a:lnTo>
-                    <a:pt x="6727341" y="3533523"/>
-                  </a:lnTo>
-                  <a:lnTo>
-                    <a:pt x="6804975" y="3538137"/>
+                    <a:pt x="3404" y="6555"/>
+                  </a:lnTo>
+                  <a:lnTo>
+                    <a:pt x="81038" y="150150"/>
+                  </a:lnTo>
+                  <a:lnTo>
+                    <a:pt x="158672" y="288090"/>
+                  </a:lnTo>
+                  <a:lnTo>
+                    <a:pt x="236306" y="420597"/>
+                  </a:lnTo>
+                  <a:lnTo>
+                    <a:pt x="313940" y="547886"/>
+                  </a:lnTo>
+                  <a:lnTo>
+                    <a:pt x="391574" y="670162"/>
+                  </a:lnTo>
+                  <a:lnTo>
+                    <a:pt x="469208" y="787622"/>
+                  </a:lnTo>
+                  <a:lnTo>
+                    <a:pt x="546842" y="900457"/>
+                  </a:lnTo>
+                  <a:lnTo>
+                    <a:pt x="624476" y="1008847"/>
+                  </a:lnTo>
+                  <a:lnTo>
+                    <a:pt x="702110" y="1112969"/>
+                  </a:lnTo>
+                  <a:lnTo>
+                    <a:pt x="779744" y="1212990"/>
+                  </a:lnTo>
+                  <a:lnTo>
+                    <a:pt x="857378" y="1309072"/>
+                  </a:lnTo>
+                  <a:lnTo>
+                    <a:pt x="935012" y="1401369"/>
+                  </a:lnTo>
+                  <a:lnTo>
+                    <a:pt x="1012647" y="1490032"/>
+                  </a:lnTo>
+                  <a:lnTo>
+                    <a:pt x="1090281" y="1575203"/>
+                  </a:lnTo>
+                  <a:lnTo>
+                    <a:pt x="1167915" y="1657020"/>
+                  </a:lnTo>
+                  <a:lnTo>
+                    <a:pt x="1245549" y="1735614"/>
+                  </a:lnTo>
+                  <a:lnTo>
+                    <a:pt x="1323183" y="1811113"/>
+                  </a:lnTo>
+                  <a:lnTo>
+                    <a:pt x="1400817" y="1883639"/>
+                  </a:lnTo>
+                  <a:lnTo>
+                    <a:pt x="1478451" y="1953308"/>
+                  </a:lnTo>
+                  <a:lnTo>
+                    <a:pt x="1556085" y="2020234"/>
+                  </a:lnTo>
+                  <a:lnTo>
+                    <a:pt x="1633719" y="2084524"/>
+                  </a:lnTo>
+                  <a:lnTo>
+                    <a:pt x="1711353" y="2146282"/>
+                  </a:lnTo>
+                  <a:lnTo>
+                    <a:pt x="1788987" y="2205607"/>
+                  </a:lnTo>
+                  <a:lnTo>
+                    <a:pt x="1866621" y="2262596"/>
+                  </a:lnTo>
+                  <a:lnTo>
+                    <a:pt x="1944255" y="2317341"/>
+                  </a:lnTo>
+                  <a:lnTo>
+                    <a:pt x="2021889" y="2369930"/>
+                  </a:lnTo>
+                  <a:lnTo>
+                    <a:pt x="2099523" y="2420447"/>
+                  </a:lnTo>
+                  <a:lnTo>
+                    <a:pt x="2177157" y="2468975"/>
+                  </a:lnTo>
+                  <a:lnTo>
+                    <a:pt x="2254791" y="2515592"/>
+                  </a:lnTo>
+                  <a:lnTo>
+                    <a:pt x="2332425" y="2560373"/>
+                  </a:lnTo>
+                  <a:lnTo>
+                    <a:pt x="2410059" y="2603390"/>
+                  </a:lnTo>
+                  <a:lnTo>
+                    <a:pt x="2487693" y="2644714"/>
+                  </a:lnTo>
+                  <a:lnTo>
+                    <a:pt x="2565327" y="2684409"/>
+                  </a:lnTo>
+                  <a:lnTo>
+                    <a:pt x="2642961" y="2722542"/>
+                  </a:lnTo>
+                  <a:lnTo>
+                    <a:pt x="2720596" y="2759172"/>
+                  </a:lnTo>
+                  <a:lnTo>
+                    <a:pt x="2798230" y="2794360"/>
+                  </a:lnTo>
+                  <a:lnTo>
+                    <a:pt x="2875864" y="2828162"/>
+                  </a:lnTo>
+                  <a:lnTo>
+                    <a:pt x="2953498" y="2860633"/>
+                  </a:lnTo>
+                  <a:lnTo>
+                    <a:pt x="3031132" y="2891825"/>
+                  </a:lnTo>
+                  <a:lnTo>
+                    <a:pt x="3108766" y="2921789"/>
+                  </a:lnTo>
+                  <a:lnTo>
+                    <a:pt x="3186400" y="2950572"/>
+                  </a:lnTo>
+                  <a:lnTo>
+                    <a:pt x="3264034" y="2978222"/>
+                  </a:lnTo>
+                  <a:lnTo>
+                    <a:pt x="3341668" y="3004783"/>
+                  </a:lnTo>
+                  <a:lnTo>
+                    <a:pt x="3419302" y="3030298"/>
+                  </a:lnTo>
+                  <a:lnTo>
+                    <a:pt x="3496936" y="3054808"/>
+                  </a:lnTo>
+                  <a:lnTo>
+                    <a:pt x="3574570" y="3078353"/>
+                  </a:lnTo>
+                  <a:lnTo>
+                    <a:pt x="3652204" y="3100970"/>
+                  </a:lnTo>
+                  <a:lnTo>
+                    <a:pt x="3729838" y="3122697"/>
+                  </a:lnTo>
+                  <a:lnTo>
+                    <a:pt x="3807472" y="3143568"/>
+                  </a:lnTo>
+                  <a:lnTo>
+                    <a:pt x="3885106" y="3163617"/>
+                  </a:lnTo>
+                  <a:lnTo>
+                    <a:pt x="3962740" y="3182877"/>
+                  </a:lnTo>
+                  <a:lnTo>
+                    <a:pt x="4040374" y="3201378"/>
+                  </a:lnTo>
+                  <a:lnTo>
+                    <a:pt x="4118008" y="3219150"/>
+                  </a:lnTo>
+                  <a:lnTo>
+                    <a:pt x="4195642" y="3236223"/>
+                  </a:lnTo>
+                  <a:lnTo>
+                    <a:pt x="4273276" y="3252623"/>
+                  </a:lnTo>
+                  <a:lnTo>
+                    <a:pt x="4350910" y="3268377"/>
+                  </a:lnTo>
+                  <a:lnTo>
+                    <a:pt x="4428544" y="3283511"/>
+                  </a:lnTo>
+                  <a:lnTo>
+                    <a:pt x="4506179" y="3298048"/>
+                  </a:lnTo>
+                  <a:lnTo>
+                    <a:pt x="4583813" y="3312013"/>
+                  </a:lnTo>
+                  <a:lnTo>
+                    <a:pt x="4661447" y="3325429"/>
+                  </a:lnTo>
+                  <a:lnTo>
+                    <a:pt x="4739081" y="3338315"/>
+                  </a:lnTo>
+                  <a:lnTo>
+                    <a:pt x="4816715" y="3350695"/>
+                  </a:lnTo>
+                  <a:lnTo>
+                    <a:pt x="4894349" y="3362586"/>
+                  </a:lnTo>
+                  <a:lnTo>
+                    <a:pt x="4971983" y="3374010"/>
+                  </a:lnTo>
+                  <a:lnTo>
+                    <a:pt x="5049617" y="3384983"/>
+                  </a:lnTo>
+                  <a:lnTo>
+                    <a:pt x="5127251" y="3395525"/>
+                  </a:lnTo>
+                  <a:lnTo>
+                    <a:pt x="5204885" y="3405651"/>
+                  </a:lnTo>
+                  <a:lnTo>
+                    <a:pt x="5282519" y="3415378"/>
+                  </a:lnTo>
+                  <a:lnTo>
+                    <a:pt x="5360153" y="3424723"/>
+                  </a:lnTo>
+                  <a:lnTo>
+                    <a:pt x="5437787" y="3433699"/>
+                  </a:lnTo>
+                  <a:lnTo>
+                    <a:pt x="5515421" y="3442322"/>
+                  </a:lnTo>
+                  <a:lnTo>
+                    <a:pt x="5593055" y="3450605"/>
+                  </a:lnTo>
+                  <a:lnTo>
+                    <a:pt x="5670689" y="3458562"/>
+                  </a:lnTo>
+                  <a:lnTo>
+                    <a:pt x="5748323" y="3466205"/>
+                  </a:lnTo>
+                  <a:lnTo>
+                    <a:pt x="5825957" y="3473548"/>
+                  </a:lnTo>
+                  <a:lnTo>
+                    <a:pt x="5903591" y="3480601"/>
+                  </a:lnTo>
+                  <a:lnTo>
+                    <a:pt x="5981225" y="3487377"/>
+                  </a:lnTo>
+                  <a:lnTo>
+                    <a:pt x="6058859" y="3493886"/>
+                  </a:lnTo>
+                  <a:lnTo>
+                    <a:pt x="6136493" y="3500138"/>
+                  </a:lnTo>
+                  <a:lnTo>
+                    <a:pt x="6214128" y="3506144"/>
+                  </a:lnTo>
+                  <a:lnTo>
+                    <a:pt x="6291762" y="3511914"/>
+                  </a:lnTo>
+                  <a:lnTo>
+                    <a:pt x="6369396" y="3517456"/>
+                  </a:lnTo>
+                  <a:lnTo>
+                    <a:pt x="6447030" y="3522780"/>
+                  </a:lnTo>
+                  <a:lnTo>
+                    <a:pt x="6524664" y="3527895"/>
+                  </a:lnTo>
+                  <a:lnTo>
+                    <a:pt x="6602298" y="3532808"/>
+                  </a:lnTo>
+                  <a:lnTo>
+                    <a:pt x="6679932" y="3537527"/>
+                  </a:lnTo>
+                  <a:lnTo>
+                    <a:pt x="6757566" y="3542061"/>
                   </a:lnTo>
                 </a:path>
               </a:pathLst>

--- a/docs/plots/carbo/jx_carbo_linsubhr_ratio_sideeffect.pptx
+++ b/docs/plots/carbo/jx_carbo_linsubhr_ratio_sideeffect.pptx
@@ -3003,527 +3003,530 @@
           <p:spPr>
             <a:xfrm>
               <a:off x="817517" y="1896563"/>
-              <a:ext cx="7370972" cy="3615620"/>
+              <a:ext cx="7370972" cy="3611669"/>
             </a:xfrm>
             <a:custGeom>
               <a:avLst/>
               <a:pathLst>
-                <a:path w="7370972" h="3615620">
+                <a:path w="7370972" h="3611669">
                   <a:moveTo>
-                    <a:pt x="1575059" y="0"/>
+                    <a:pt x="1514958" y="0"/>
                   </a:moveTo>
                   <a:lnTo>
-                    <a:pt x="1626053" y="146093"/>
-                  </a:lnTo>
-                  <a:lnTo>
-                    <a:pt x="1703687" y="355242"/>
-                  </a:lnTo>
-                  <a:lnTo>
-                    <a:pt x="1781321" y="551915"/>
-                  </a:lnTo>
-                  <a:lnTo>
-                    <a:pt x="1858955" y="736858"/>
-                  </a:lnTo>
-                  <a:lnTo>
-                    <a:pt x="1936589" y="910770"/>
-                  </a:lnTo>
-                  <a:lnTo>
-                    <a:pt x="2014223" y="1074310"/>
-                  </a:lnTo>
-                  <a:lnTo>
-                    <a:pt x="2091857" y="1228094"/>
-                  </a:lnTo>
-                  <a:lnTo>
-                    <a:pt x="2169491" y="1372707"/>
-                  </a:lnTo>
-                  <a:lnTo>
-                    <a:pt x="2247125" y="1508694"/>
-                  </a:lnTo>
-                  <a:lnTo>
-                    <a:pt x="2324759" y="1636570"/>
-                  </a:lnTo>
-                  <a:lnTo>
-                    <a:pt x="2402393" y="1756818"/>
-                  </a:lnTo>
-                  <a:lnTo>
-                    <a:pt x="2480027" y="1869895"/>
-                  </a:lnTo>
-                  <a:lnTo>
-                    <a:pt x="2557661" y="1976227"/>
-                  </a:lnTo>
-                  <a:lnTo>
-                    <a:pt x="2635295" y="2076217"/>
-                  </a:lnTo>
-                  <a:lnTo>
-                    <a:pt x="2712930" y="2170243"/>
-                  </a:lnTo>
-                  <a:lnTo>
-                    <a:pt x="2790564" y="2258661"/>
-                  </a:lnTo>
-                  <a:lnTo>
-                    <a:pt x="2868198" y="2341805"/>
-                  </a:lnTo>
-                  <a:lnTo>
-                    <a:pt x="2945832" y="2419990"/>
-                  </a:lnTo>
-                  <a:lnTo>
-                    <a:pt x="3023466" y="2493512"/>
-                  </a:lnTo>
-                  <a:lnTo>
-                    <a:pt x="3101100" y="2562648"/>
-                  </a:lnTo>
-                  <a:lnTo>
-                    <a:pt x="3178734" y="2627661"/>
-                  </a:lnTo>
-                  <a:lnTo>
-                    <a:pt x="3256368" y="2688796"/>
-                  </a:lnTo>
-                  <a:lnTo>
-                    <a:pt x="3334002" y="2746285"/>
-                  </a:lnTo>
-                  <a:lnTo>
-                    <a:pt x="3411636" y="2788334"/>
-                  </a:lnTo>
-                  <a:lnTo>
-                    <a:pt x="3489270" y="2804483"/>
-                  </a:lnTo>
-                  <a:lnTo>
-                    <a:pt x="3566904" y="2820331"/>
-                  </a:lnTo>
-                  <a:lnTo>
-                    <a:pt x="3644538" y="2835883"/>
-                  </a:lnTo>
-                  <a:lnTo>
-                    <a:pt x="3722172" y="2851145"/>
-                  </a:lnTo>
-                  <a:lnTo>
-                    <a:pt x="3799806" y="2866121"/>
-                  </a:lnTo>
-                  <a:lnTo>
-                    <a:pt x="3877440" y="2880817"/>
-                  </a:lnTo>
-                  <a:lnTo>
-                    <a:pt x="3955074" y="2895239"/>
-                  </a:lnTo>
-                  <a:lnTo>
-                    <a:pt x="4032708" y="2909391"/>
-                  </a:lnTo>
-                  <a:lnTo>
-                    <a:pt x="4110342" y="2923279"/>
-                  </a:lnTo>
-                  <a:lnTo>
-                    <a:pt x="4187976" y="2936907"/>
-                  </a:lnTo>
-                  <a:lnTo>
-                    <a:pt x="4265610" y="2950281"/>
-                  </a:lnTo>
-                  <a:lnTo>
-                    <a:pt x="4343244" y="2963404"/>
-                  </a:lnTo>
-                  <a:lnTo>
-                    <a:pt x="4420879" y="2976283"/>
-                  </a:lnTo>
-                  <a:lnTo>
-                    <a:pt x="4498513" y="2988921"/>
-                  </a:lnTo>
-                  <a:lnTo>
-                    <a:pt x="4576147" y="3001323"/>
-                  </a:lnTo>
-                  <a:lnTo>
-                    <a:pt x="4653781" y="3013493"/>
-                  </a:lnTo>
-                  <a:lnTo>
-                    <a:pt x="4731415" y="3025435"/>
-                  </a:lnTo>
-                  <a:lnTo>
-                    <a:pt x="4809049" y="3037155"/>
-                  </a:lnTo>
-                  <a:lnTo>
-                    <a:pt x="4886683" y="3048655"/>
-                  </a:lnTo>
-                  <a:lnTo>
-                    <a:pt x="4964317" y="3059941"/>
-                  </a:lnTo>
-                  <a:lnTo>
-                    <a:pt x="5041951" y="3071016"/>
-                  </a:lnTo>
-                  <a:lnTo>
-                    <a:pt x="5119585" y="3081883"/>
-                  </a:lnTo>
-                  <a:lnTo>
-                    <a:pt x="5197219" y="3092548"/>
-                  </a:lnTo>
-                  <a:lnTo>
-                    <a:pt x="5274853" y="3103014"/>
-                  </a:lnTo>
-                  <a:lnTo>
-                    <a:pt x="5352487" y="3113283"/>
-                  </a:lnTo>
-                  <a:lnTo>
-                    <a:pt x="5430121" y="3123361"/>
-                  </a:lnTo>
-                  <a:lnTo>
-                    <a:pt x="5507755" y="3133251"/>
-                  </a:lnTo>
-                  <a:lnTo>
-                    <a:pt x="5585389" y="3142956"/>
-                  </a:lnTo>
-                  <a:lnTo>
-                    <a:pt x="5663023" y="3152480"/>
-                  </a:lnTo>
-                  <a:lnTo>
-                    <a:pt x="5740657" y="3161825"/>
-                  </a:lnTo>
-                  <a:lnTo>
-                    <a:pt x="5818291" y="3170996"/>
-                  </a:lnTo>
-                  <a:lnTo>
-                    <a:pt x="5895925" y="3179996"/>
-                  </a:lnTo>
-                  <a:lnTo>
-                    <a:pt x="5973559" y="3188827"/>
-                  </a:lnTo>
-                  <a:lnTo>
-                    <a:pt x="6051193" y="3197494"/>
-                  </a:lnTo>
-                  <a:lnTo>
-                    <a:pt x="6128827" y="3205998"/>
-                  </a:lnTo>
-                  <a:lnTo>
-                    <a:pt x="6206462" y="3214344"/>
-                  </a:lnTo>
-                  <a:lnTo>
-                    <a:pt x="6284096" y="3222534"/>
-                  </a:lnTo>
-                  <a:lnTo>
-                    <a:pt x="6361730" y="3230570"/>
-                  </a:lnTo>
-                  <a:lnTo>
-                    <a:pt x="6439364" y="3238457"/>
-                  </a:lnTo>
-                  <a:lnTo>
-                    <a:pt x="6516998" y="3246196"/>
-                  </a:lnTo>
-                  <a:lnTo>
-                    <a:pt x="6594632" y="3253791"/>
-                  </a:lnTo>
-                  <a:lnTo>
-                    <a:pt x="6672266" y="3261243"/>
-                  </a:lnTo>
-                  <a:lnTo>
-                    <a:pt x="6749900" y="3268557"/>
-                  </a:lnTo>
-                  <a:lnTo>
-                    <a:pt x="6827534" y="3275733"/>
-                  </a:lnTo>
-                  <a:lnTo>
-                    <a:pt x="6905168" y="3282776"/>
-                  </a:lnTo>
-                  <a:lnTo>
-                    <a:pt x="6982802" y="3289687"/>
-                  </a:lnTo>
-                  <a:lnTo>
-                    <a:pt x="7060436" y="3296469"/>
-                  </a:lnTo>
-                  <a:lnTo>
-                    <a:pt x="7138070" y="3303124"/>
-                  </a:lnTo>
-                  <a:lnTo>
-                    <a:pt x="7215704" y="3309655"/>
-                  </a:lnTo>
-                  <a:lnTo>
-                    <a:pt x="7293338" y="3316064"/>
-                  </a:lnTo>
-                  <a:lnTo>
-                    <a:pt x="7370972" y="3322353"/>
-                  </a:lnTo>
-                  <a:lnTo>
-                    <a:pt x="7370972" y="3615620"/>
-                  </a:lnTo>
-                  <a:lnTo>
-                    <a:pt x="7293338" y="3613272"/>
-                  </a:lnTo>
-                  <a:lnTo>
-                    <a:pt x="7215704" y="3610774"/>
-                  </a:lnTo>
-                  <a:lnTo>
-                    <a:pt x="7138070" y="3608119"/>
-                  </a:lnTo>
-                  <a:lnTo>
-                    <a:pt x="7060436" y="3605295"/>
-                  </a:lnTo>
-                  <a:lnTo>
-                    <a:pt x="6982802" y="3602291"/>
-                  </a:lnTo>
-                  <a:lnTo>
-                    <a:pt x="6905168" y="3599098"/>
-                  </a:lnTo>
-                  <a:lnTo>
-                    <a:pt x="6827534" y="3595701"/>
-                  </a:lnTo>
-                  <a:lnTo>
-                    <a:pt x="6749900" y="3592090"/>
-                  </a:lnTo>
-                  <a:lnTo>
-                    <a:pt x="6672266" y="3588249"/>
-                  </a:lnTo>
-                  <a:lnTo>
-                    <a:pt x="6594632" y="3584164"/>
-                  </a:lnTo>
-                  <a:lnTo>
-                    <a:pt x="6516998" y="3579821"/>
-                  </a:lnTo>
-                  <a:lnTo>
-                    <a:pt x="6439364" y="3575202"/>
-                  </a:lnTo>
-                  <a:lnTo>
-                    <a:pt x="6361730" y="3570290"/>
-                  </a:lnTo>
-                  <a:lnTo>
-                    <a:pt x="6284096" y="3565066"/>
-                  </a:lnTo>
-                  <a:lnTo>
-                    <a:pt x="6206462" y="3559512"/>
-                  </a:lnTo>
-                  <a:lnTo>
-                    <a:pt x="6128827" y="3553604"/>
-                  </a:lnTo>
-                  <a:lnTo>
-                    <a:pt x="6051193" y="3547323"/>
-                  </a:lnTo>
-                  <a:lnTo>
-                    <a:pt x="5973559" y="3540642"/>
-                  </a:lnTo>
-                  <a:lnTo>
-                    <a:pt x="5895925" y="3533538"/>
-                  </a:lnTo>
-                  <a:lnTo>
-                    <a:pt x="5818291" y="3525984"/>
-                  </a:lnTo>
-                  <a:lnTo>
-                    <a:pt x="5740657" y="3517950"/>
-                  </a:lnTo>
-                  <a:lnTo>
-                    <a:pt x="5663023" y="3509407"/>
-                  </a:lnTo>
-                  <a:lnTo>
-                    <a:pt x="5585389" y="3500321"/>
-                  </a:lnTo>
-                  <a:lnTo>
-                    <a:pt x="5507755" y="3490660"/>
-                  </a:lnTo>
-                  <a:lnTo>
-                    <a:pt x="5430121" y="3480385"/>
-                  </a:lnTo>
-                  <a:lnTo>
-                    <a:pt x="5352487" y="3469459"/>
-                  </a:lnTo>
-                  <a:lnTo>
-                    <a:pt x="5274853" y="3457840"/>
-                  </a:lnTo>
-                  <a:lnTo>
-                    <a:pt x="5197219" y="3445484"/>
-                  </a:lnTo>
-                  <a:lnTo>
-                    <a:pt x="5119585" y="3432345"/>
-                  </a:lnTo>
-                  <a:lnTo>
-                    <a:pt x="5041951" y="3418371"/>
-                  </a:lnTo>
-                  <a:lnTo>
-                    <a:pt x="4964317" y="3403512"/>
-                  </a:lnTo>
-                  <a:lnTo>
-                    <a:pt x="4886683" y="3387710"/>
-                  </a:lnTo>
-                  <a:lnTo>
-                    <a:pt x="4809049" y="3370906"/>
-                  </a:lnTo>
-                  <a:lnTo>
-                    <a:pt x="4731415" y="3353036"/>
-                  </a:lnTo>
-                  <a:lnTo>
-                    <a:pt x="4653781" y="3334032"/>
-                  </a:lnTo>
-                  <a:lnTo>
-                    <a:pt x="4576147" y="3313823"/>
-                  </a:lnTo>
-                  <a:lnTo>
-                    <a:pt x="4498513" y="3292332"/>
-                  </a:lnTo>
-                  <a:lnTo>
-                    <a:pt x="4420879" y="3269479"/>
-                  </a:lnTo>
-                  <a:lnTo>
-                    <a:pt x="4343244" y="3245175"/>
-                  </a:lnTo>
-                  <a:lnTo>
-                    <a:pt x="4265610" y="3219330"/>
-                  </a:lnTo>
-                  <a:lnTo>
-                    <a:pt x="4187976" y="3191846"/>
-                  </a:lnTo>
-                  <a:lnTo>
-                    <a:pt x="4110342" y="3162618"/>
-                  </a:lnTo>
-                  <a:lnTo>
-                    <a:pt x="4032708" y="3131537"/>
-                  </a:lnTo>
-                  <a:lnTo>
-                    <a:pt x="3955074" y="3098484"/>
-                  </a:lnTo>
-                  <a:lnTo>
-                    <a:pt x="3877440" y="3063335"/>
-                  </a:lnTo>
-                  <a:lnTo>
-                    <a:pt x="3799806" y="3025956"/>
-                  </a:lnTo>
-                  <a:lnTo>
-                    <a:pt x="3722172" y="2986206"/>
-                  </a:lnTo>
-                  <a:lnTo>
-                    <a:pt x="3644538" y="2943935"/>
-                  </a:lnTo>
-                  <a:lnTo>
-                    <a:pt x="3566904" y="2898983"/>
-                  </a:lnTo>
-                  <a:lnTo>
-                    <a:pt x="3489270" y="2851180"/>
-                  </a:lnTo>
-                  <a:lnTo>
-                    <a:pt x="3411636" y="2800345"/>
-                  </a:lnTo>
-                  <a:lnTo>
-                    <a:pt x="3334002" y="2771876"/>
-                  </a:lnTo>
-                  <a:lnTo>
-                    <a:pt x="3256368" y="2755106"/>
-                  </a:lnTo>
-                  <a:lnTo>
-                    <a:pt x="3178734" y="2738016"/>
-                  </a:lnTo>
-                  <a:lnTo>
-                    <a:pt x="3101100" y="2720600"/>
-                  </a:lnTo>
-                  <a:lnTo>
-                    <a:pt x="3023466" y="2702853"/>
-                  </a:lnTo>
-                  <a:lnTo>
-                    <a:pt x="2945832" y="2684769"/>
-                  </a:lnTo>
-                  <a:lnTo>
-                    <a:pt x="2868198" y="2666339"/>
-                  </a:lnTo>
-                  <a:lnTo>
-                    <a:pt x="2790564" y="2647559"/>
-                  </a:lnTo>
-                  <a:lnTo>
-                    <a:pt x="2712930" y="2628421"/>
-                  </a:lnTo>
-                  <a:lnTo>
-                    <a:pt x="2635295" y="2608919"/>
-                  </a:lnTo>
-                  <a:lnTo>
-                    <a:pt x="2557661" y="2589046"/>
-                  </a:lnTo>
-                  <a:lnTo>
-                    <a:pt x="2480027" y="2568794"/>
-                  </a:lnTo>
-                  <a:lnTo>
-                    <a:pt x="2402393" y="2548156"/>
-                  </a:lnTo>
-                  <a:lnTo>
-                    <a:pt x="2324759" y="2527126"/>
-                  </a:lnTo>
-                  <a:lnTo>
-                    <a:pt x="2247125" y="2505695"/>
-                  </a:lnTo>
-                  <a:lnTo>
-                    <a:pt x="2169491" y="2483856"/>
-                  </a:lnTo>
-                  <a:lnTo>
-                    <a:pt x="2091857" y="2461601"/>
-                  </a:lnTo>
-                  <a:lnTo>
-                    <a:pt x="2014223" y="2438923"/>
-                  </a:lnTo>
-                  <a:lnTo>
-                    <a:pt x="1936589" y="2415812"/>
-                  </a:lnTo>
-                  <a:lnTo>
-                    <a:pt x="1858955" y="2392262"/>
-                  </a:lnTo>
-                  <a:lnTo>
-                    <a:pt x="1781321" y="2368263"/>
-                  </a:lnTo>
-                  <a:lnTo>
-                    <a:pt x="1703687" y="2343807"/>
-                  </a:lnTo>
-                  <a:lnTo>
-                    <a:pt x="1626053" y="2318886"/>
-                  </a:lnTo>
-                  <a:lnTo>
-                    <a:pt x="1548419" y="2293490"/>
-                  </a:lnTo>
-                  <a:lnTo>
-                    <a:pt x="1470785" y="2267610"/>
-                  </a:lnTo>
-                  <a:lnTo>
-                    <a:pt x="1393151" y="2241238"/>
-                  </a:lnTo>
-                  <a:lnTo>
-                    <a:pt x="1315517" y="2214364"/>
-                  </a:lnTo>
-                  <a:lnTo>
-                    <a:pt x="1237883" y="2186977"/>
-                  </a:lnTo>
-                  <a:lnTo>
-                    <a:pt x="1160249" y="2159070"/>
-                  </a:lnTo>
-                  <a:lnTo>
-                    <a:pt x="1082615" y="2130631"/>
-                  </a:lnTo>
-                  <a:lnTo>
-                    <a:pt x="1004981" y="2101650"/>
-                  </a:lnTo>
-                  <a:lnTo>
-                    <a:pt x="927346" y="2072118"/>
-                  </a:lnTo>
-                  <a:lnTo>
-                    <a:pt x="849712" y="2042023"/>
-                  </a:lnTo>
-                  <a:lnTo>
-                    <a:pt x="772078" y="2011355"/>
-                  </a:lnTo>
-                  <a:lnTo>
-                    <a:pt x="694444" y="1980104"/>
-                  </a:lnTo>
-                  <a:lnTo>
-                    <a:pt x="616810" y="1948257"/>
-                  </a:lnTo>
-                  <a:lnTo>
-                    <a:pt x="539176" y="1915804"/>
-                  </a:lnTo>
-                  <a:lnTo>
-                    <a:pt x="461542" y="1882733"/>
-                  </a:lnTo>
-                  <a:lnTo>
-                    <a:pt x="383908" y="1849032"/>
-                  </a:lnTo>
-                  <a:lnTo>
-                    <a:pt x="306274" y="1814690"/>
-                  </a:lnTo>
-                  <a:lnTo>
-                    <a:pt x="228640" y="1779693"/>
-                  </a:lnTo>
-                  <a:lnTo>
-                    <a:pt x="151006" y="1744031"/>
-                  </a:lnTo>
-                  <a:lnTo>
-                    <a:pt x="73372" y="1707689"/>
-                  </a:lnTo>
-                  <a:lnTo>
-                    <a:pt x="0" y="1672688"/>
+                    <a:pt x="1548419" y="94064"/>
+                  </a:lnTo>
+                  <a:lnTo>
+                    <a:pt x="1626053" y="299697"/>
+                  </a:lnTo>
+                  <a:lnTo>
+                    <a:pt x="1703687" y="493448"/>
+                  </a:lnTo>
+                  <a:lnTo>
+                    <a:pt x="1781321" y="676003"/>
+                  </a:lnTo>
+                  <a:lnTo>
+                    <a:pt x="1858955" y="848010"/>
+                  </a:lnTo>
+                  <a:lnTo>
+                    <a:pt x="1936589" y="1010076"/>
+                  </a:lnTo>
+                  <a:lnTo>
+                    <a:pt x="2014223" y="1162778"/>
+                  </a:lnTo>
+                  <a:lnTo>
+                    <a:pt x="2091857" y="1306655"/>
+                  </a:lnTo>
+                  <a:lnTo>
+                    <a:pt x="2169491" y="1442219"/>
+                  </a:lnTo>
+                  <a:lnTo>
+                    <a:pt x="2247125" y="1569949"/>
+                  </a:lnTo>
+                  <a:lnTo>
+                    <a:pt x="2324759" y="1690298"/>
+                  </a:lnTo>
+                  <a:lnTo>
+                    <a:pt x="2402393" y="1803693"/>
+                  </a:lnTo>
+                  <a:lnTo>
+                    <a:pt x="2480027" y="1910535"/>
+                  </a:lnTo>
+                  <a:lnTo>
+                    <a:pt x="2557661" y="2011204"/>
+                  </a:lnTo>
+                  <a:lnTo>
+                    <a:pt x="2635295" y="2106055"/>
+                  </a:lnTo>
+                  <a:lnTo>
+                    <a:pt x="2712930" y="2195425"/>
+                  </a:lnTo>
+                  <a:lnTo>
+                    <a:pt x="2790564" y="2279631"/>
+                  </a:lnTo>
+                  <a:lnTo>
+                    <a:pt x="2868198" y="2358971"/>
+                  </a:lnTo>
+                  <a:lnTo>
+                    <a:pt x="2945832" y="2433726"/>
+                  </a:lnTo>
+                  <a:lnTo>
+                    <a:pt x="3023466" y="2504161"/>
+                  </a:lnTo>
+                  <a:lnTo>
+                    <a:pt x="3101100" y="2570527"/>
+                  </a:lnTo>
+                  <a:lnTo>
+                    <a:pt x="3178734" y="2633057"/>
+                  </a:lnTo>
+                  <a:lnTo>
+                    <a:pt x="3256368" y="2691974"/>
+                  </a:lnTo>
+                  <a:lnTo>
+                    <a:pt x="3334002" y="2747487"/>
+                  </a:lnTo>
+                  <a:lnTo>
+                    <a:pt x="3411636" y="2788509"/>
+                  </a:lnTo>
+                  <a:lnTo>
+                    <a:pt x="3489270" y="2805178"/>
+                  </a:lnTo>
+                  <a:lnTo>
+                    <a:pt x="3566904" y="2821526"/>
+                  </a:lnTo>
+                  <a:lnTo>
+                    <a:pt x="3644538" y="2837559"/>
+                  </a:lnTo>
+                  <a:lnTo>
+                    <a:pt x="3722172" y="2853282"/>
+                  </a:lnTo>
+                  <a:lnTo>
+                    <a:pt x="3799806" y="2868702"/>
+                  </a:lnTo>
+                  <a:lnTo>
+                    <a:pt x="3877440" y="2883825"/>
+                  </a:lnTo>
+                  <a:lnTo>
+                    <a:pt x="3955074" y="2898656"/>
+                  </a:lnTo>
+                  <a:lnTo>
+                    <a:pt x="4032708" y="2913201"/>
+                  </a:lnTo>
+                  <a:lnTo>
+                    <a:pt x="4110342" y="2927465"/>
+                  </a:lnTo>
+                  <a:lnTo>
+                    <a:pt x="4187976" y="2941454"/>
+                  </a:lnTo>
+                  <a:lnTo>
+                    <a:pt x="4265610" y="2955173"/>
+                  </a:lnTo>
+                  <a:lnTo>
+                    <a:pt x="4343244" y="2968627"/>
+                  </a:lnTo>
+                  <a:lnTo>
+                    <a:pt x="4420879" y="2981822"/>
+                  </a:lnTo>
+                  <a:lnTo>
+                    <a:pt x="4498513" y="2994763"/>
+                  </a:lnTo>
+                  <a:lnTo>
+                    <a:pt x="4576147" y="3007454"/>
+                  </a:lnTo>
+                  <a:lnTo>
+                    <a:pt x="4653781" y="3019900"/>
+                  </a:lnTo>
+                  <a:lnTo>
+                    <a:pt x="4731415" y="3032106"/>
+                  </a:lnTo>
+                  <a:lnTo>
+                    <a:pt x="4809049" y="3044076"/>
+                  </a:lnTo>
+                  <a:lnTo>
+                    <a:pt x="4886683" y="3055816"/>
+                  </a:lnTo>
+                  <a:lnTo>
+                    <a:pt x="4964317" y="3067329"/>
+                  </a:lnTo>
+                  <a:lnTo>
+                    <a:pt x="5041951" y="3078620"/>
+                  </a:lnTo>
+                  <a:lnTo>
+                    <a:pt x="5119585" y="3089693"/>
+                  </a:lnTo>
+                  <a:lnTo>
+                    <a:pt x="5197219" y="3100552"/>
+                  </a:lnTo>
+                  <a:lnTo>
+                    <a:pt x="5274853" y="3111203"/>
+                  </a:lnTo>
+                  <a:lnTo>
+                    <a:pt x="5352487" y="3121647"/>
+                  </a:lnTo>
+                  <a:lnTo>
+                    <a:pt x="5430121" y="3131890"/>
+                  </a:lnTo>
+                  <a:lnTo>
+                    <a:pt x="5507755" y="3141936"/>
+                  </a:lnTo>
+                  <a:lnTo>
+                    <a:pt x="5585389" y="3151788"/>
+                  </a:lnTo>
+                  <a:lnTo>
+                    <a:pt x="5663023" y="3161449"/>
+                  </a:lnTo>
+                  <a:lnTo>
+                    <a:pt x="5740657" y="3170925"/>
+                  </a:lnTo>
+                  <a:lnTo>
+                    <a:pt x="5818291" y="3180217"/>
+                  </a:lnTo>
+                  <a:lnTo>
+                    <a:pt x="5895925" y="3189331"/>
+                  </a:lnTo>
+                  <a:lnTo>
+                    <a:pt x="5973559" y="3198268"/>
+                  </a:lnTo>
+                  <a:lnTo>
+                    <a:pt x="6051193" y="3207033"/>
+                  </a:lnTo>
+                  <a:lnTo>
+                    <a:pt x="6128827" y="3215629"/>
+                  </a:lnTo>
+                  <a:lnTo>
+                    <a:pt x="6206462" y="3224060"/>
+                  </a:lnTo>
+                  <a:lnTo>
+                    <a:pt x="6284096" y="3232327"/>
+                  </a:lnTo>
+                  <a:lnTo>
+                    <a:pt x="6361730" y="3240435"/>
+                  </a:lnTo>
+                  <a:lnTo>
+                    <a:pt x="6439364" y="3248387"/>
+                  </a:lnTo>
+                  <a:lnTo>
+                    <a:pt x="6516998" y="3256185"/>
+                  </a:lnTo>
+                  <a:lnTo>
+                    <a:pt x="6594632" y="3263833"/>
+                  </a:lnTo>
+                  <a:lnTo>
+                    <a:pt x="6672266" y="3271333"/>
+                  </a:lnTo>
+                  <a:lnTo>
+                    <a:pt x="6749900" y="3278689"/>
+                  </a:lnTo>
+                  <a:lnTo>
+                    <a:pt x="6827534" y="3285903"/>
+                  </a:lnTo>
+                  <a:lnTo>
+                    <a:pt x="6905168" y="3292977"/>
+                  </a:lnTo>
+                  <a:lnTo>
+                    <a:pt x="6982802" y="3299916"/>
+                  </a:lnTo>
+                  <a:lnTo>
+                    <a:pt x="7060436" y="3306720"/>
+                  </a:lnTo>
+                  <a:lnTo>
+                    <a:pt x="7138070" y="3313393"/>
+                  </a:lnTo>
+                  <a:lnTo>
+                    <a:pt x="7215704" y="3319937"/>
+                  </a:lnTo>
+                  <a:lnTo>
+                    <a:pt x="7293338" y="3326355"/>
+                  </a:lnTo>
+                  <a:lnTo>
+                    <a:pt x="7370972" y="3332649"/>
+                  </a:lnTo>
+                  <a:lnTo>
+                    <a:pt x="7370972" y="3611669"/>
+                  </a:lnTo>
+                  <a:lnTo>
+                    <a:pt x="7293338" y="3609156"/>
+                  </a:lnTo>
+                  <a:lnTo>
+                    <a:pt x="7215704" y="3606488"/>
+                  </a:lnTo>
+                  <a:lnTo>
+                    <a:pt x="7138070" y="3603658"/>
+                  </a:lnTo>
+                  <a:lnTo>
+                    <a:pt x="7060436" y="3600654"/>
+                  </a:lnTo>
+                  <a:lnTo>
+                    <a:pt x="6982802" y="3597465"/>
+                  </a:lnTo>
+                  <a:lnTo>
+                    <a:pt x="6905168" y="3594081"/>
+                  </a:lnTo>
+                  <a:lnTo>
+                    <a:pt x="6827534" y="3590490"/>
+                  </a:lnTo>
+                  <a:lnTo>
+                    <a:pt x="6749900" y="3586678"/>
+                  </a:lnTo>
+                  <a:lnTo>
+                    <a:pt x="6672266" y="3582632"/>
+                  </a:lnTo>
+                  <a:lnTo>
+                    <a:pt x="6594632" y="3578338"/>
+                  </a:lnTo>
+                  <a:lnTo>
+                    <a:pt x="6516998" y="3573781"/>
+                  </a:lnTo>
+                  <a:lnTo>
+                    <a:pt x="6439364" y="3568945"/>
+                  </a:lnTo>
+                  <a:lnTo>
+                    <a:pt x="6361730" y="3563812"/>
+                  </a:lnTo>
+                  <a:lnTo>
+                    <a:pt x="6284096" y="3558364"/>
+                  </a:lnTo>
+                  <a:lnTo>
+                    <a:pt x="6206462" y="3552581"/>
+                  </a:lnTo>
+                  <a:lnTo>
+                    <a:pt x="6128827" y="3546445"/>
+                  </a:lnTo>
+                  <a:lnTo>
+                    <a:pt x="6051193" y="3539932"/>
+                  </a:lnTo>
+                  <a:lnTo>
+                    <a:pt x="5973559" y="3533019"/>
+                  </a:lnTo>
+                  <a:lnTo>
+                    <a:pt x="5895925" y="3525683"/>
+                  </a:lnTo>
+                  <a:lnTo>
+                    <a:pt x="5818291" y="3517896"/>
+                  </a:lnTo>
+                  <a:lnTo>
+                    <a:pt x="5740657" y="3509632"/>
+                  </a:lnTo>
+                  <a:lnTo>
+                    <a:pt x="5663023" y="3500862"/>
+                  </a:lnTo>
+                  <a:lnTo>
+                    <a:pt x="5585389" y="3491553"/>
+                  </a:lnTo>
+                  <a:lnTo>
+                    <a:pt x="5507755" y="3481673"/>
+                  </a:lnTo>
+                  <a:lnTo>
+                    <a:pt x="5430121" y="3471188"/>
+                  </a:lnTo>
+                  <a:lnTo>
+                    <a:pt x="5352487" y="3460059"/>
+                  </a:lnTo>
+                  <a:lnTo>
+                    <a:pt x="5274853" y="3448248"/>
+                  </a:lnTo>
+                  <a:lnTo>
+                    <a:pt x="5197219" y="3435713"/>
+                  </a:lnTo>
+                  <a:lnTo>
+                    <a:pt x="5119585" y="3422409"/>
+                  </a:lnTo>
+                  <a:lnTo>
+                    <a:pt x="5041951" y="3408289"/>
+                  </a:lnTo>
+                  <a:lnTo>
+                    <a:pt x="4964317" y="3393303"/>
+                  </a:lnTo>
+                  <a:lnTo>
+                    <a:pt x="4886683" y="3377397"/>
+                  </a:lnTo>
+                  <a:lnTo>
+                    <a:pt x="4809049" y="3360517"/>
+                  </a:lnTo>
+                  <a:lnTo>
+                    <a:pt x="4731415" y="3342601"/>
+                  </a:lnTo>
+                  <a:lnTo>
+                    <a:pt x="4653781" y="3323586"/>
+                  </a:lnTo>
+                  <a:lnTo>
+                    <a:pt x="4576147" y="3303405"/>
+                  </a:lnTo>
+                  <a:lnTo>
+                    <a:pt x="4498513" y="3281987"/>
+                  </a:lnTo>
+                  <a:lnTo>
+                    <a:pt x="4420879" y="3259255"/>
+                  </a:lnTo>
+                  <a:lnTo>
+                    <a:pt x="4343244" y="3235129"/>
+                  </a:lnTo>
+                  <a:lnTo>
+                    <a:pt x="4265610" y="3209523"/>
+                  </a:lnTo>
+                  <a:lnTo>
+                    <a:pt x="4187976" y="3182346"/>
+                  </a:lnTo>
+                  <a:lnTo>
+                    <a:pt x="4110342" y="3153503"/>
+                  </a:lnTo>
+                  <a:lnTo>
+                    <a:pt x="4032708" y="3122892"/>
+                  </a:lnTo>
+                  <a:lnTo>
+                    <a:pt x="3955074" y="3090402"/>
+                  </a:lnTo>
+                  <a:lnTo>
+                    <a:pt x="3877440" y="3055920"/>
+                  </a:lnTo>
+                  <a:lnTo>
+                    <a:pt x="3799806" y="3019324"/>
+                  </a:lnTo>
+                  <a:lnTo>
+                    <a:pt x="3722172" y="2980483"/>
+                  </a:lnTo>
+                  <a:lnTo>
+                    <a:pt x="3644538" y="2939260"/>
+                  </a:lnTo>
+                  <a:lnTo>
+                    <a:pt x="3566904" y="2895508"/>
+                  </a:lnTo>
+                  <a:lnTo>
+                    <a:pt x="3489270" y="2849074"/>
+                  </a:lnTo>
+                  <a:lnTo>
+                    <a:pt x="3411636" y="2799792"/>
+                  </a:lnTo>
+                  <a:lnTo>
+                    <a:pt x="3334002" y="2771511"/>
+                  </a:lnTo>
+                  <a:lnTo>
+                    <a:pt x="3256368" y="2754179"/>
+                  </a:lnTo>
+                  <a:lnTo>
+                    <a:pt x="3178734" y="2736507"/>
+                  </a:lnTo>
+                  <a:lnTo>
+                    <a:pt x="3101100" y="2718486"/>
+                  </a:lnTo>
+                  <a:lnTo>
+                    <a:pt x="3023466" y="2700112"/>
+                  </a:lnTo>
+                  <a:lnTo>
+                    <a:pt x="2945832" y="2681375"/>
+                  </a:lnTo>
+                  <a:lnTo>
+                    <a:pt x="2868198" y="2662271"/>
+                  </a:lnTo>
+                  <a:lnTo>
+                    <a:pt x="2790564" y="2642790"/>
+                  </a:lnTo>
+                  <a:lnTo>
+                    <a:pt x="2712930" y="2622926"/>
+                  </a:lnTo>
+                  <a:lnTo>
+                    <a:pt x="2635295" y="2602672"/>
+                  </a:lnTo>
+                  <a:lnTo>
+                    <a:pt x="2557661" y="2582019"/>
+                  </a:lnTo>
+                  <a:lnTo>
+                    <a:pt x="2480027" y="2560960"/>
+                  </a:lnTo>
+                  <a:lnTo>
+                    <a:pt x="2402393" y="2539487"/>
+                  </a:lnTo>
+                  <a:lnTo>
+                    <a:pt x="2324759" y="2517591"/>
+                  </a:lnTo>
+                  <a:lnTo>
+                    <a:pt x="2247125" y="2495265"/>
+                  </a:lnTo>
+                  <a:lnTo>
+                    <a:pt x="2169491" y="2472499"/>
+                  </a:lnTo>
+                  <a:lnTo>
+                    <a:pt x="2091857" y="2449286"/>
+                  </a:lnTo>
+                  <a:lnTo>
+                    <a:pt x="2014223" y="2425616"/>
+                  </a:lnTo>
+                  <a:lnTo>
+                    <a:pt x="1936589" y="2401480"/>
+                  </a:lnTo>
+                  <a:lnTo>
+                    <a:pt x="1858955" y="2376870"/>
+                  </a:lnTo>
+                  <a:lnTo>
+                    <a:pt x="1781321" y="2351776"/>
+                  </a:lnTo>
+                  <a:lnTo>
+                    <a:pt x="1703687" y="2326188"/>
+                  </a:lnTo>
+                  <a:lnTo>
+                    <a:pt x="1626053" y="2300096"/>
+                  </a:lnTo>
+                  <a:lnTo>
+                    <a:pt x="1548419" y="2273492"/>
+                  </a:lnTo>
+                  <a:lnTo>
+                    <a:pt x="1470785" y="2246364"/>
+                  </a:lnTo>
+                  <a:lnTo>
+                    <a:pt x="1393151" y="2218703"/>
+                  </a:lnTo>
+                  <a:lnTo>
+                    <a:pt x="1315517" y="2190497"/>
+                  </a:lnTo>
+                  <a:lnTo>
+                    <a:pt x="1237883" y="2161737"/>
+                  </a:lnTo>
+                  <a:lnTo>
+                    <a:pt x="1160249" y="2132411"/>
+                  </a:lnTo>
+                  <a:lnTo>
+                    <a:pt x="1082615" y="2102508"/>
+                  </a:lnTo>
+                  <a:lnTo>
+                    <a:pt x="1004981" y="2072017"/>
+                  </a:lnTo>
+                  <a:lnTo>
+                    <a:pt x="927346" y="2040926"/>
+                  </a:lnTo>
+                  <a:lnTo>
+                    <a:pt x="849712" y="2009224"/>
+                  </a:lnTo>
+                  <a:lnTo>
+                    <a:pt x="772078" y="1976898"/>
+                  </a:lnTo>
+                  <a:lnTo>
+                    <a:pt x="694444" y="1943937"/>
+                  </a:lnTo>
+                  <a:lnTo>
+                    <a:pt x="616810" y="1910326"/>
+                  </a:lnTo>
+                  <a:lnTo>
+                    <a:pt x="539176" y="1876055"/>
+                  </a:lnTo>
+                  <a:lnTo>
+                    <a:pt x="461542" y="1841110"/>
+                  </a:lnTo>
+                  <a:lnTo>
+                    <a:pt x="383908" y="1805477"/>
+                  </a:lnTo>
+                  <a:lnTo>
+                    <a:pt x="306274" y="1769144"/>
+                  </a:lnTo>
+                  <a:lnTo>
+                    <a:pt x="228640" y="1732095"/>
+                  </a:lnTo>
+                  <a:lnTo>
+                    <a:pt x="151006" y="1694318"/>
+                  </a:lnTo>
+                  <a:lnTo>
+                    <a:pt x="73372" y="1655798"/>
+                  </a:lnTo>
+                  <a:lnTo>
+                    <a:pt x="0" y="1618677"/>
                   </a:lnTo>
                   <a:close/>
                 </a:path>
@@ -3549,240 +3552,243 @@
           </p:nvSpPr>
           <p:spPr>
             <a:xfrm>
-              <a:off x="2392576" y="1896563"/>
-              <a:ext cx="5795913" cy="3322353"/>
+              <a:off x="2332476" y="1896563"/>
+              <a:ext cx="5856013" cy="3332649"/>
             </a:xfrm>
             <a:custGeom>
               <a:avLst/>
               <a:pathLst>
-                <a:path w="5795913" h="3322353">
+                <a:path w="5856013" h="3332649">
                   <a:moveTo>
                     <a:pt x="0" y="0"/>
                   </a:moveTo>
                   <a:lnTo>
-                    <a:pt x="50994" y="146093"/>
-                  </a:lnTo>
-                  <a:lnTo>
-                    <a:pt x="128628" y="355242"/>
-                  </a:lnTo>
-                  <a:lnTo>
-                    <a:pt x="206262" y="551915"/>
-                  </a:lnTo>
-                  <a:lnTo>
-                    <a:pt x="283896" y="736858"/>
-                  </a:lnTo>
-                  <a:lnTo>
-                    <a:pt x="361530" y="910770"/>
-                  </a:lnTo>
-                  <a:lnTo>
-                    <a:pt x="439164" y="1074310"/>
-                  </a:lnTo>
-                  <a:lnTo>
-                    <a:pt x="516798" y="1228094"/>
-                  </a:lnTo>
-                  <a:lnTo>
-                    <a:pt x="594432" y="1372707"/>
-                  </a:lnTo>
-                  <a:lnTo>
-                    <a:pt x="672066" y="1508694"/>
-                  </a:lnTo>
-                  <a:lnTo>
-                    <a:pt x="749700" y="1636570"/>
-                  </a:lnTo>
-                  <a:lnTo>
-                    <a:pt x="827334" y="1756818"/>
-                  </a:lnTo>
-                  <a:lnTo>
-                    <a:pt x="904968" y="1869895"/>
-                  </a:lnTo>
-                  <a:lnTo>
-                    <a:pt x="982602" y="1976227"/>
-                  </a:lnTo>
-                  <a:lnTo>
-                    <a:pt x="1060236" y="2076217"/>
-                  </a:lnTo>
-                  <a:lnTo>
-                    <a:pt x="1137870" y="2170243"/>
-                  </a:lnTo>
-                  <a:lnTo>
-                    <a:pt x="1215504" y="2258661"/>
-                  </a:lnTo>
-                  <a:lnTo>
-                    <a:pt x="1293138" y="2341805"/>
-                  </a:lnTo>
-                  <a:lnTo>
-                    <a:pt x="1370773" y="2419990"/>
-                  </a:lnTo>
-                  <a:lnTo>
-                    <a:pt x="1448407" y="2493512"/>
-                  </a:lnTo>
-                  <a:lnTo>
-                    <a:pt x="1526041" y="2562648"/>
-                  </a:lnTo>
-                  <a:lnTo>
-                    <a:pt x="1603675" y="2627661"/>
-                  </a:lnTo>
-                  <a:lnTo>
-                    <a:pt x="1681309" y="2688796"/>
-                  </a:lnTo>
-                  <a:lnTo>
-                    <a:pt x="1758943" y="2746285"/>
-                  </a:lnTo>
-                  <a:lnTo>
-                    <a:pt x="1836577" y="2788334"/>
-                  </a:lnTo>
-                  <a:lnTo>
-                    <a:pt x="1914211" y="2804483"/>
-                  </a:lnTo>
-                  <a:lnTo>
-                    <a:pt x="1991845" y="2820331"/>
-                  </a:lnTo>
-                  <a:lnTo>
-                    <a:pt x="2069479" y="2835883"/>
-                  </a:lnTo>
-                  <a:lnTo>
-                    <a:pt x="2147113" y="2851145"/>
-                  </a:lnTo>
-                  <a:lnTo>
-                    <a:pt x="2224747" y="2866121"/>
-                  </a:lnTo>
-                  <a:lnTo>
-                    <a:pt x="2302381" y="2880817"/>
-                  </a:lnTo>
-                  <a:lnTo>
-                    <a:pt x="2380015" y="2895239"/>
-                  </a:lnTo>
-                  <a:lnTo>
-                    <a:pt x="2457649" y="2909391"/>
-                  </a:lnTo>
-                  <a:lnTo>
-                    <a:pt x="2535283" y="2923279"/>
-                  </a:lnTo>
-                  <a:lnTo>
-                    <a:pt x="2612917" y="2936907"/>
-                  </a:lnTo>
-                  <a:lnTo>
-                    <a:pt x="2690551" y="2950281"/>
-                  </a:lnTo>
-                  <a:lnTo>
-                    <a:pt x="2768185" y="2963404"/>
-                  </a:lnTo>
-                  <a:lnTo>
-                    <a:pt x="2845819" y="2976283"/>
-                  </a:lnTo>
-                  <a:lnTo>
-                    <a:pt x="2923453" y="2988921"/>
-                  </a:lnTo>
-                  <a:lnTo>
-                    <a:pt x="3001087" y="3001323"/>
-                  </a:lnTo>
-                  <a:lnTo>
-                    <a:pt x="3078722" y="3013493"/>
-                  </a:lnTo>
-                  <a:lnTo>
-                    <a:pt x="3156356" y="3025435"/>
-                  </a:lnTo>
-                  <a:lnTo>
-                    <a:pt x="3233990" y="3037155"/>
-                  </a:lnTo>
-                  <a:lnTo>
-                    <a:pt x="3311624" y="3048655"/>
-                  </a:lnTo>
-                  <a:lnTo>
-                    <a:pt x="3389258" y="3059941"/>
-                  </a:lnTo>
-                  <a:lnTo>
-                    <a:pt x="3466892" y="3071016"/>
-                  </a:lnTo>
-                  <a:lnTo>
-                    <a:pt x="3544526" y="3081883"/>
-                  </a:lnTo>
-                  <a:lnTo>
-                    <a:pt x="3622160" y="3092548"/>
-                  </a:lnTo>
-                  <a:lnTo>
-                    <a:pt x="3699794" y="3103014"/>
-                  </a:lnTo>
-                  <a:lnTo>
-                    <a:pt x="3777428" y="3113283"/>
-                  </a:lnTo>
-                  <a:lnTo>
-                    <a:pt x="3855062" y="3123361"/>
-                  </a:lnTo>
-                  <a:lnTo>
-                    <a:pt x="3932696" y="3133251"/>
-                  </a:lnTo>
-                  <a:lnTo>
-                    <a:pt x="4010330" y="3142956"/>
-                  </a:lnTo>
-                  <a:lnTo>
-                    <a:pt x="4087964" y="3152480"/>
-                  </a:lnTo>
-                  <a:lnTo>
-                    <a:pt x="4165598" y="3161825"/>
-                  </a:lnTo>
-                  <a:lnTo>
-                    <a:pt x="4243232" y="3170996"/>
-                  </a:lnTo>
-                  <a:lnTo>
-                    <a:pt x="4320866" y="3179996"/>
-                  </a:lnTo>
-                  <a:lnTo>
-                    <a:pt x="4398500" y="3188827"/>
-                  </a:lnTo>
-                  <a:lnTo>
-                    <a:pt x="4476134" y="3197494"/>
-                  </a:lnTo>
-                  <a:lnTo>
-                    <a:pt x="4553768" y="3205998"/>
-                  </a:lnTo>
-                  <a:lnTo>
-                    <a:pt x="4631402" y="3214344"/>
-                  </a:lnTo>
-                  <a:lnTo>
-                    <a:pt x="4709036" y="3222534"/>
-                  </a:lnTo>
-                  <a:lnTo>
-                    <a:pt x="4786671" y="3230570"/>
-                  </a:lnTo>
-                  <a:lnTo>
-                    <a:pt x="4864305" y="3238457"/>
-                  </a:lnTo>
-                  <a:lnTo>
-                    <a:pt x="4941939" y="3246196"/>
-                  </a:lnTo>
-                  <a:lnTo>
-                    <a:pt x="5019573" y="3253791"/>
-                  </a:lnTo>
-                  <a:lnTo>
-                    <a:pt x="5097207" y="3261243"/>
-                  </a:lnTo>
-                  <a:lnTo>
-                    <a:pt x="5174841" y="3268557"/>
-                  </a:lnTo>
-                  <a:lnTo>
-                    <a:pt x="5252475" y="3275733"/>
-                  </a:lnTo>
-                  <a:lnTo>
-                    <a:pt x="5330109" y="3282776"/>
-                  </a:lnTo>
-                  <a:lnTo>
-                    <a:pt x="5407743" y="3289687"/>
-                  </a:lnTo>
-                  <a:lnTo>
-                    <a:pt x="5485377" y="3296469"/>
-                  </a:lnTo>
-                  <a:lnTo>
-                    <a:pt x="5563011" y="3303124"/>
-                  </a:lnTo>
-                  <a:lnTo>
-                    <a:pt x="5640645" y="3309655"/>
-                  </a:lnTo>
-                  <a:lnTo>
-                    <a:pt x="5718279" y="3316064"/>
-                  </a:lnTo>
-                  <a:lnTo>
-                    <a:pt x="5795913" y="3322353"/>
+                    <a:pt x="33460" y="94064"/>
+                  </a:lnTo>
+                  <a:lnTo>
+                    <a:pt x="111094" y="299697"/>
+                  </a:lnTo>
+                  <a:lnTo>
+                    <a:pt x="188728" y="493448"/>
+                  </a:lnTo>
+                  <a:lnTo>
+                    <a:pt x="266362" y="676003"/>
+                  </a:lnTo>
+                  <a:lnTo>
+                    <a:pt x="343996" y="848010"/>
+                  </a:lnTo>
+                  <a:lnTo>
+                    <a:pt x="421630" y="1010076"/>
+                  </a:lnTo>
+                  <a:lnTo>
+                    <a:pt x="499264" y="1162778"/>
+                  </a:lnTo>
+                  <a:lnTo>
+                    <a:pt x="576898" y="1306655"/>
+                  </a:lnTo>
+                  <a:lnTo>
+                    <a:pt x="654532" y="1442219"/>
+                  </a:lnTo>
+                  <a:lnTo>
+                    <a:pt x="732166" y="1569949"/>
+                  </a:lnTo>
+                  <a:lnTo>
+                    <a:pt x="809800" y="1690298"/>
+                  </a:lnTo>
+                  <a:lnTo>
+                    <a:pt x="887434" y="1803693"/>
+                  </a:lnTo>
+                  <a:lnTo>
+                    <a:pt x="965069" y="1910535"/>
+                  </a:lnTo>
+                  <a:lnTo>
+                    <a:pt x="1042703" y="2011204"/>
+                  </a:lnTo>
+                  <a:lnTo>
+                    <a:pt x="1120337" y="2106055"/>
+                  </a:lnTo>
+                  <a:lnTo>
+                    <a:pt x="1197971" y="2195425"/>
+                  </a:lnTo>
+                  <a:lnTo>
+                    <a:pt x="1275605" y="2279631"/>
+                  </a:lnTo>
+                  <a:lnTo>
+                    <a:pt x="1353239" y="2358971"/>
+                  </a:lnTo>
+                  <a:lnTo>
+                    <a:pt x="1430873" y="2433726"/>
+                  </a:lnTo>
+                  <a:lnTo>
+                    <a:pt x="1508507" y="2504161"/>
+                  </a:lnTo>
+                  <a:lnTo>
+                    <a:pt x="1586141" y="2570527"/>
+                  </a:lnTo>
+                  <a:lnTo>
+                    <a:pt x="1663775" y="2633057"/>
+                  </a:lnTo>
+                  <a:lnTo>
+                    <a:pt x="1741409" y="2691974"/>
+                  </a:lnTo>
+                  <a:lnTo>
+                    <a:pt x="1819043" y="2747487"/>
+                  </a:lnTo>
+                  <a:lnTo>
+                    <a:pt x="1896677" y="2788509"/>
+                  </a:lnTo>
+                  <a:lnTo>
+                    <a:pt x="1974311" y="2805178"/>
+                  </a:lnTo>
+                  <a:lnTo>
+                    <a:pt x="2051945" y="2821526"/>
+                  </a:lnTo>
+                  <a:lnTo>
+                    <a:pt x="2129579" y="2837559"/>
+                  </a:lnTo>
+                  <a:lnTo>
+                    <a:pt x="2207213" y="2853282"/>
+                  </a:lnTo>
+                  <a:lnTo>
+                    <a:pt x="2284847" y="2868702"/>
+                  </a:lnTo>
+                  <a:lnTo>
+                    <a:pt x="2362481" y="2883825"/>
+                  </a:lnTo>
+                  <a:lnTo>
+                    <a:pt x="2440115" y="2898656"/>
+                  </a:lnTo>
+                  <a:lnTo>
+                    <a:pt x="2517749" y="2913201"/>
+                  </a:lnTo>
+                  <a:lnTo>
+                    <a:pt x="2595383" y="2927465"/>
+                  </a:lnTo>
+                  <a:lnTo>
+                    <a:pt x="2673018" y="2941454"/>
+                  </a:lnTo>
+                  <a:lnTo>
+                    <a:pt x="2750652" y="2955173"/>
+                  </a:lnTo>
+                  <a:lnTo>
+                    <a:pt x="2828286" y="2968627"/>
+                  </a:lnTo>
+                  <a:lnTo>
+                    <a:pt x="2905920" y="2981822"/>
+                  </a:lnTo>
+                  <a:lnTo>
+                    <a:pt x="2983554" y="2994763"/>
+                  </a:lnTo>
+                  <a:lnTo>
+                    <a:pt x="3061188" y="3007454"/>
+                  </a:lnTo>
+                  <a:lnTo>
+                    <a:pt x="3138822" y="3019900"/>
+                  </a:lnTo>
+                  <a:lnTo>
+                    <a:pt x="3216456" y="3032106"/>
+                  </a:lnTo>
+                  <a:lnTo>
+                    <a:pt x="3294090" y="3044076"/>
+                  </a:lnTo>
+                  <a:lnTo>
+                    <a:pt x="3371724" y="3055816"/>
+                  </a:lnTo>
+                  <a:lnTo>
+                    <a:pt x="3449358" y="3067329"/>
+                  </a:lnTo>
+                  <a:lnTo>
+                    <a:pt x="3526992" y="3078620"/>
+                  </a:lnTo>
+                  <a:lnTo>
+                    <a:pt x="3604626" y="3089693"/>
+                  </a:lnTo>
+                  <a:lnTo>
+                    <a:pt x="3682260" y="3100552"/>
+                  </a:lnTo>
+                  <a:lnTo>
+                    <a:pt x="3759894" y="3111203"/>
+                  </a:lnTo>
+                  <a:lnTo>
+                    <a:pt x="3837528" y="3121647"/>
+                  </a:lnTo>
+                  <a:lnTo>
+                    <a:pt x="3915162" y="3131890"/>
+                  </a:lnTo>
+                  <a:lnTo>
+                    <a:pt x="3992796" y="3141936"/>
+                  </a:lnTo>
+                  <a:lnTo>
+                    <a:pt x="4070430" y="3151788"/>
+                  </a:lnTo>
+                  <a:lnTo>
+                    <a:pt x="4148064" y="3161449"/>
+                  </a:lnTo>
+                  <a:lnTo>
+                    <a:pt x="4225698" y="3170925"/>
+                  </a:lnTo>
+                  <a:lnTo>
+                    <a:pt x="4303332" y="3180217"/>
+                  </a:lnTo>
+                  <a:lnTo>
+                    <a:pt x="4380966" y="3189331"/>
+                  </a:lnTo>
+                  <a:lnTo>
+                    <a:pt x="4458601" y="3198268"/>
+                  </a:lnTo>
+                  <a:lnTo>
+                    <a:pt x="4536235" y="3207033"/>
+                  </a:lnTo>
+                  <a:lnTo>
+                    <a:pt x="4613869" y="3215629"/>
+                  </a:lnTo>
+                  <a:lnTo>
+                    <a:pt x="4691503" y="3224060"/>
+                  </a:lnTo>
+                  <a:lnTo>
+                    <a:pt x="4769137" y="3232327"/>
+                  </a:lnTo>
+                  <a:lnTo>
+                    <a:pt x="4846771" y="3240435"/>
+                  </a:lnTo>
+                  <a:lnTo>
+                    <a:pt x="4924405" y="3248387"/>
+                  </a:lnTo>
+                  <a:lnTo>
+                    <a:pt x="5002039" y="3256185"/>
+                  </a:lnTo>
+                  <a:lnTo>
+                    <a:pt x="5079673" y="3263833"/>
+                  </a:lnTo>
+                  <a:lnTo>
+                    <a:pt x="5157307" y="3271333"/>
+                  </a:lnTo>
+                  <a:lnTo>
+                    <a:pt x="5234941" y="3278689"/>
+                  </a:lnTo>
+                  <a:lnTo>
+                    <a:pt x="5312575" y="3285903"/>
+                  </a:lnTo>
+                  <a:lnTo>
+                    <a:pt x="5390209" y="3292977"/>
+                  </a:lnTo>
+                  <a:lnTo>
+                    <a:pt x="5467843" y="3299916"/>
+                  </a:lnTo>
+                  <a:lnTo>
+                    <a:pt x="5545477" y="3306720"/>
+                  </a:lnTo>
+                  <a:lnTo>
+                    <a:pt x="5623111" y="3313393"/>
+                  </a:lnTo>
+                  <a:lnTo>
+                    <a:pt x="5700745" y="3319937"/>
+                  </a:lnTo>
+                  <a:lnTo>
+                    <a:pt x="5778379" y="3326355"/>
+                  </a:lnTo>
+                  <a:lnTo>
+                    <a:pt x="5856013" y="3332649"/>
                   </a:lnTo>
                 </a:path>
               </a:pathLst>
@@ -3802,297 +3808,297 @@
           </p:nvSpPr>
           <p:spPr>
             <a:xfrm>
-              <a:off x="817517" y="3569251"/>
-              <a:ext cx="7370972" cy="1942932"/>
+              <a:off x="817517" y="3515240"/>
+              <a:ext cx="7370972" cy="1992992"/>
             </a:xfrm>
             <a:custGeom>
               <a:avLst/>
               <a:pathLst>
-                <a:path w="7370972" h="1942932">
+                <a:path w="7370972" h="1992992">
                   <a:moveTo>
-                    <a:pt x="7370972" y="1942932"/>
+                    <a:pt x="7370972" y="1992992"/>
                   </a:moveTo>
                   <a:lnTo>
-                    <a:pt x="7293338" y="1940583"/>
-                  </a:lnTo>
-                  <a:lnTo>
-                    <a:pt x="7215704" y="1938086"/>
-                  </a:lnTo>
-                  <a:lnTo>
-                    <a:pt x="7138070" y="1935430"/>
-                  </a:lnTo>
-                  <a:lnTo>
-                    <a:pt x="7060436" y="1932606"/>
-                  </a:lnTo>
-                  <a:lnTo>
-                    <a:pt x="6982802" y="1929603"/>
-                  </a:lnTo>
-                  <a:lnTo>
-                    <a:pt x="6905168" y="1926409"/>
-                  </a:lnTo>
-                  <a:lnTo>
-                    <a:pt x="6827534" y="1923013"/>
-                  </a:lnTo>
-                  <a:lnTo>
-                    <a:pt x="6749900" y="1919401"/>
-                  </a:lnTo>
-                  <a:lnTo>
-                    <a:pt x="6672266" y="1915560"/>
-                  </a:lnTo>
-                  <a:lnTo>
-                    <a:pt x="6594632" y="1911476"/>
-                  </a:lnTo>
-                  <a:lnTo>
-                    <a:pt x="6516998" y="1907133"/>
-                  </a:lnTo>
-                  <a:lnTo>
-                    <a:pt x="6439364" y="1902514"/>
-                  </a:lnTo>
-                  <a:lnTo>
-                    <a:pt x="6361730" y="1897602"/>
-                  </a:lnTo>
-                  <a:lnTo>
-                    <a:pt x="6284096" y="1892378"/>
-                  </a:lnTo>
-                  <a:lnTo>
-                    <a:pt x="6206462" y="1886823"/>
-                  </a:lnTo>
-                  <a:lnTo>
-                    <a:pt x="6128827" y="1880916"/>
-                  </a:lnTo>
-                  <a:lnTo>
-                    <a:pt x="6051193" y="1874634"/>
-                  </a:lnTo>
-                  <a:lnTo>
-                    <a:pt x="5973559" y="1867954"/>
-                  </a:lnTo>
-                  <a:lnTo>
-                    <a:pt x="5895925" y="1860850"/>
-                  </a:lnTo>
-                  <a:lnTo>
-                    <a:pt x="5818291" y="1853295"/>
-                  </a:lnTo>
-                  <a:lnTo>
-                    <a:pt x="5740657" y="1845261"/>
-                  </a:lnTo>
-                  <a:lnTo>
-                    <a:pt x="5663023" y="1836718"/>
-                  </a:lnTo>
-                  <a:lnTo>
-                    <a:pt x="5585389" y="1827633"/>
-                  </a:lnTo>
-                  <a:lnTo>
-                    <a:pt x="5507755" y="1817971"/>
-                  </a:lnTo>
-                  <a:lnTo>
-                    <a:pt x="5430121" y="1807697"/>
-                  </a:lnTo>
-                  <a:lnTo>
-                    <a:pt x="5352487" y="1796771"/>
-                  </a:lnTo>
-                  <a:lnTo>
-                    <a:pt x="5274853" y="1785152"/>
-                  </a:lnTo>
-                  <a:lnTo>
-                    <a:pt x="5197219" y="1772796"/>
-                  </a:lnTo>
-                  <a:lnTo>
-                    <a:pt x="5119585" y="1759656"/>
-                  </a:lnTo>
-                  <a:lnTo>
-                    <a:pt x="5041951" y="1745683"/>
-                  </a:lnTo>
-                  <a:lnTo>
-                    <a:pt x="4964317" y="1730824"/>
-                  </a:lnTo>
-                  <a:lnTo>
-                    <a:pt x="4886683" y="1715022"/>
-                  </a:lnTo>
-                  <a:lnTo>
-                    <a:pt x="4809049" y="1698217"/>
-                  </a:lnTo>
-                  <a:lnTo>
-                    <a:pt x="4731415" y="1680347"/>
-                  </a:lnTo>
-                  <a:lnTo>
-                    <a:pt x="4653781" y="1661344"/>
-                  </a:lnTo>
-                  <a:lnTo>
-                    <a:pt x="4576147" y="1641135"/>
-                  </a:lnTo>
-                  <a:lnTo>
-                    <a:pt x="4498513" y="1619644"/>
-                  </a:lnTo>
-                  <a:lnTo>
-                    <a:pt x="4420879" y="1596790"/>
-                  </a:lnTo>
-                  <a:lnTo>
-                    <a:pt x="4343244" y="1572487"/>
-                  </a:lnTo>
-                  <a:lnTo>
-                    <a:pt x="4265610" y="1546642"/>
-                  </a:lnTo>
-                  <a:lnTo>
-                    <a:pt x="4187976" y="1519157"/>
-                  </a:lnTo>
-                  <a:lnTo>
-                    <a:pt x="4110342" y="1489930"/>
-                  </a:lnTo>
-                  <a:lnTo>
-                    <a:pt x="4032708" y="1458849"/>
-                  </a:lnTo>
-                  <a:lnTo>
-                    <a:pt x="3955074" y="1425796"/>
-                  </a:lnTo>
-                  <a:lnTo>
-                    <a:pt x="3877440" y="1390646"/>
-                  </a:lnTo>
-                  <a:lnTo>
-                    <a:pt x="3799806" y="1353268"/>
-                  </a:lnTo>
-                  <a:lnTo>
-                    <a:pt x="3722172" y="1313518"/>
-                  </a:lnTo>
-                  <a:lnTo>
-                    <a:pt x="3644538" y="1271247"/>
-                  </a:lnTo>
-                  <a:lnTo>
-                    <a:pt x="3566904" y="1226295"/>
-                  </a:lnTo>
-                  <a:lnTo>
-                    <a:pt x="3489270" y="1178492"/>
-                  </a:lnTo>
-                  <a:lnTo>
-                    <a:pt x="3411636" y="1127656"/>
-                  </a:lnTo>
-                  <a:lnTo>
-                    <a:pt x="3334002" y="1099188"/>
-                  </a:lnTo>
-                  <a:lnTo>
-                    <a:pt x="3256368" y="1082417"/>
-                  </a:lnTo>
-                  <a:lnTo>
-                    <a:pt x="3178734" y="1065327"/>
-                  </a:lnTo>
-                  <a:lnTo>
-                    <a:pt x="3101100" y="1047912"/>
-                  </a:lnTo>
-                  <a:lnTo>
-                    <a:pt x="3023466" y="1030165"/>
-                  </a:lnTo>
-                  <a:lnTo>
-                    <a:pt x="2945832" y="1012080"/>
-                  </a:lnTo>
-                  <a:lnTo>
-                    <a:pt x="2868198" y="993651"/>
-                  </a:lnTo>
-                  <a:lnTo>
-                    <a:pt x="2790564" y="974871"/>
-                  </a:lnTo>
-                  <a:lnTo>
-                    <a:pt x="2712930" y="955733"/>
-                  </a:lnTo>
-                  <a:lnTo>
-                    <a:pt x="2635295" y="936231"/>
-                  </a:lnTo>
-                  <a:lnTo>
-                    <a:pt x="2557661" y="916357"/>
-                  </a:lnTo>
-                  <a:lnTo>
-                    <a:pt x="2480027" y="896106"/>
-                  </a:lnTo>
-                  <a:lnTo>
-                    <a:pt x="2402393" y="875468"/>
-                  </a:lnTo>
-                  <a:lnTo>
-                    <a:pt x="2324759" y="854438"/>
-                  </a:lnTo>
-                  <a:lnTo>
-                    <a:pt x="2247125" y="833007"/>
-                  </a:lnTo>
-                  <a:lnTo>
-                    <a:pt x="2169491" y="811168"/>
-                  </a:lnTo>
-                  <a:lnTo>
-                    <a:pt x="2091857" y="788913"/>
-                  </a:lnTo>
-                  <a:lnTo>
-                    <a:pt x="2014223" y="766234"/>
-                  </a:lnTo>
-                  <a:lnTo>
-                    <a:pt x="1936589" y="743124"/>
-                  </a:lnTo>
-                  <a:lnTo>
-                    <a:pt x="1858955" y="719574"/>
-                  </a:lnTo>
-                  <a:lnTo>
-                    <a:pt x="1781321" y="695575"/>
-                  </a:lnTo>
-                  <a:lnTo>
-                    <a:pt x="1703687" y="671119"/>
-                  </a:lnTo>
-                  <a:lnTo>
-                    <a:pt x="1626053" y="646197"/>
-                  </a:lnTo>
-                  <a:lnTo>
-                    <a:pt x="1548419" y="620801"/>
-                  </a:lnTo>
-                  <a:lnTo>
-                    <a:pt x="1470785" y="594922"/>
-                  </a:lnTo>
-                  <a:lnTo>
-                    <a:pt x="1393151" y="568550"/>
-                  </a:lnTo>
-                  <a:lnTo>
-                    <a:pt x="1315517" y="541675"/>
-                  </a:lnTo>
-                  <a:lnTo>
-                    <a:pt x="1237883" y="514289"/>
-                  </a:lnTo>
-                  <a:lnTo>
-                    <a:pt x="1160249" y="486381"/>
-                  </a:lnTo>
-                  <a:lnTo>
-                    <a:pt x="1082615" y="457942"/>
-                  </a:lnTo>
-                  <a:lnTo>
-                    <a:pt x="1004981" y="428962"/>
-                  </a:lnTo>
-                  <a:lnTo>
-                    <a:pt x="927346" y="399429"/>
-                  </a:lnTo>
-                  <a:lnTo>
-                    <a:pt x="849712" y="369335"/>
-                  </a:lnTo>
-                  <a:lnTo>
-                    <a:pt x="772078" y="338667"/>
-                  </a:lnTo>
-                  <a:lnTo>
-                    <a:pt x="694444" y="307415"/>
-                  </a:lnTo>
-                  <a:lnTo>
-                    <a:pt x="616810" y="275569"/>
-                  </a:lnTo>
-                  <a:lnTo>
-                    <a:pt x="539176" y="243115"/>
-                  </a:lnTo>
-                  <a:lnTo>
-                    <a:pt x="461542" y="210044"/>
-                  </a:lnTo>
-                  <a:lnTo>
-                    <a:pt x="383908" y="176344"/>
-                  </a:lnTo>
-                  <a:lnTo>
-                    <a:pt x="306274" y="142001"/>
-                  </a:lnTo>
-                  <a:lnTo>
-                    <a:pt x="228640" y="107005"/>
-                  </a:lnTo>
-                  <a:lnTo>
-                    <a:pt x="151006" y="71342"/>
-                  </a:lnTo>
-                  <a:lnTo>
-                    <a:pt x="73372" y="35000"/>
+                    <a:pt x="7293338" y="1990479"/>
+                  </a:lnTo>
+                  <a:lnTo>
+                    <a:pt x="7215704" y="1987811"/>
+                  </a:lnTo>
+                  <a:lnTo>
+                    <a:pt x="7138070" y="1984981"/>
+                  </a:lnTo>
+                  <a:lnTo>
+                    <a:pt x="7060436" y="1981977"/>
+                  </a:lnTo>
+                  <a:lnTo>
+                    <a:pt x="6982802" y="1978788"/>
+                  </a:lnTo>
+                  <a:lnTo>
+                    <a:pt x="6905168" y="1975404"/>
+                  </a:lnTo>
+                  <a:lnTo>
+                    <a:pt x="6827534" y="1971813"/>
+                  </a:lnTo>
+                  <a:lnTo>
+                    <a:pt x="6749900" y="1968001"/>
+                  </a:lnTo>
+                  <a:lnTo>
+                    <a:pt x="6672266" y="1963955"/>
+                  </a:lnTo>
+                  <a:lnTo>
+                    <a:pt x="6594632" y="1959661"/>
+                  </a:lnTo>
+                  <a:lnTo>
+                    <a:pt x="6516998" y="1955104"/>
+                  </a:lnTo>
+                  <a:lnTo>
+                    <a:pt x="6439364" y="1950268"/>
+                  </a:lnTo>
+                  <a:lnTo>
+                    <a:pt x="6361730" y="1945135"/>
+                  </a:lnTo>
+                  <a:lnTo>
+                    <a:pt x="6284096" y="1939687"/>
+                  </a:lnTo>
+                  <a:lnTo>
+                    <a:pt x="6206462" y="1933904"/>
+                  </a:lnTo>
+                  <a:lnTo>
+                    <a:pt x="6128827" y="1927768"/>
+                  </a:lnTo>
+                  <a:lnTo>
+                    <a:pt x="6051193" y="1921255"/>
+                  </a:lnTo>
+                  <a:lnTo>
+                    <a:pt x="5973559" y="1914342"/>
+                  </a:lnTo>
+                  <a:lnTo>
+                    <a:pt x="5895925" y="1907006"/>
+                  </a:lnTo>
+                  <a:lnTo>
+                    <a:pt x="5818291" y="1899219"/>
+                  </a:lnTo>
+                  <a:lnTo>
+                    <a:pt x="5740657" y="1890955"/>
+                  </a:lnTo>
+                  <a:lnTo>
+                    <a:pt x="5663023" y="1882185"/>
+                  </a:lnTo>
+                  <a:lnTo>
+                    <a:pt x="5585389" y="1872876"/>
+                  </a:lnTo>
+                  <a:lnTo>
+                    <a:pt x="5507755" y="1862996"/>
+                  </a:lnTo>
+                  <a:lnTo>
+                    <a:pt x="5430121" y="1852511"/>
+                  </a:lnTo>
+                  <a:lnTo>
+                    <a:pt x="5352487" y="1841382"/>
+                  </a:lnTo>
+                  <a:lnTo>
+                    <a:pt x="5274853" y="1829571"/>
+                  </a:lnTo>
+                  <a:lnTo>
+                    <a:pt x="5197219" y="1817036"/>
+                  </a:lnTo>
+                  <a:lnTo>
+                    <a:pt x="5119585" y="1803732"/>
+                  </a:lnTo>
+                  <a:lnTo>
+                    <a:pt x="5041951" y="1789612"/>
+                  </a:lnTo>
+                  <a:lnTo>
+                    <a:pt x="4964317" y="1774626"/>
+                  </a:lnTo>
+                  <a:lnTo>
+                    <a:pt x="4886683" y="1758720"/>
+                  </a:lnTo>
+                  <a:lnTo>
+                    <a:pt x="4809049" y="1741840"/>
+                  </a:lnTo>
+                  <a:lnTo>
+                    <a:pt x="4731415" y="1723924"/>
+                  </a:lnTo>
+                  <a:lnTo>
+                    <a:pt x="4653781" y="1704909"/>
+                  </a:lnTo>
+                  <a:lnTo>
+                    <a:pt x="4576147" y="1684728"/>
+                  </a:lnTo>
+                  <a:lnTo>
+                    <a:pt x="4498513" y="1663310"/>
+                  </a:lnTo>
+                  <a:lnTo>
+                    <a:pt x="4420879" y="1640578"/>
+                  </a:lnTo>
+                  <a:lnTo>
+                    <a:pt x="4343244" y="1616451"/>
+                  </a:lnTo>
+                  <a:lnTo>
+                    <a:pt x="4265610" y="1590846"/>
+                  </a:lnTo>
+                  <a:lnTo>
+                    <a:pt x="4187976" y="1563669"/>
+                  </a:lnTo>
+                  <a:lnTo>
+                    <a:pt x="4110342" y="1534826"/>
+                  </a:lnTo>
+                  <a:lnTo>
+                    <a:pt x="4032708" y="1504215"/>
+                  </a:lnTo>
+                  <a:lnTo>
+                    <a:pt x="3955074" y="1471725"/>
+                  </a:lnTo>
+                  <a:lnTo>
+                    <a:pt x="3877440" y="1437243"/>
+                  </a:lnTo>
+                  <a:lnTo>
+                    <a:pt x="3799806" y="1400647"/>
+                  </a:lnTo>
+                  <a:lnTo>
+                    <a:pt x="3722172" y="1361806"/>
+                  </a:lnTo>
+                  <a:lnTo>
+                    <a:pt x="3644538" y="1320583"/>
+                  </a:lnTo>
+                  <a:lnTo>
+                    <a:pt x="3566904" y="1276831"/>
+                  </a:lnTo>
+                  <a:lnTo>
+                    <a:pt x="3489270" y="1230397"/>
+                  </a:lnTo>
+                  <a:lnTo>
+                    <a:pt x="3411636" y="1181115"/>
+                  </a:lnTo>
+                  <a:lnTo>
+                    <a:pt x="3334002" y="1152834"/>
+                  </a:lnTo>
+                  <a:lnTo>
+                    <a:pt x="3256368" y="1135502"/>
+                  </a:lnTo>
+                  <a:lnTo>
+                    <a:pt x="3178734" y="1117830"/>
+                  </a:lnTo>
+                  <a:lnTo>
+                    <a:pt x="3101100" y="1099809"/>
+                  </a:lnTo>
+                  <a:lnTo>
+                    <a:pt x="3023466" y="1081435"/>
+                  </a:lnTo>
+                  <a:lnTo>
+                    <a:pt x="2945832" y="1062698"/>
+                  </a:lnTo>
+                  <a:lnTo>
+                    <a:pt x="2868198" y="1043594"/>
+                  </a:lnTo>
+                  <a:lnTo>
+                    <a:pt x="2790564" y="1024113"/>
+                  </a:lnTo>
+                  <a:lnTo>
+                    <a:pt x="2712930" y="1004249"/>
+                  </a:lnTo>
+                  <a:lnTo>
+                    <a:pt x="2635295" y="983995"/>
+                  </a:lnTo>
+                  <a:lnTo>
+                    <a:pt x="2557661" y="963342"/>
+                  </a:lnTo>
+                  <a:lnTo>
+                    <a:pt x="2480027" y="942283"/>
+                  </a:lnTo>
+                  <a:lnTo>
+                    <a:pt x="2402393" y="920810"/>
+                  </a:lnTo>
+                  <a:lnTo>
+                    <a:pt x="2324759" y="898914"/>
+                  </a:lnTo>
+                  <a:lnTo>
+                    <a:pt x="2247125" y="876588"/>
+                  </a:lnTo>
+                  <a:lnTo>
+                    <a:pt x="2169491" y="853822"/>
+                  </a:lnTo>
+                  <a:lnTo>
+                    <a:pt x="2091857" y="830609"/>
+                  </a:lnTo>
+                  <a:lnTo>
+                    <a:pt x="2014223" y="806939"/>
+                  </a:lnTo>
+                  <a:lnTo>
+                    <a:pt x="1936589" y="782803"/>
+                  </a:lnTo>
+                  <a:lnTo>
+                    <a:pt x="1858955" y="758193"/>
+                  </a:lnTo>
+                  <a:lnTo>
+                    <a:pt x="1781321" y="733099"/>
+                  </a:lnTo>
+                  <a:lnTo>
+                    <a:pt x="1703687" y="707511"/>
+                  </a:lnTo>
+                  <a:lnTo>
+                    <a:pt x="1626053" y="681419"/>
+                  </a:lnTo>
+                  <a:lnTo>
+                    <a:pt x="1548419" y="654815"/>
+                  </a:lnTo>
+                  <a:lnTo>
+                    <a:pt x="1470785" y="627687"/>
+                  </a:lnTo>
+                  <a:lnTo>
+                    <a:pt x="1393151" y="600026"/>
+                  </a:lnTo>
+                  <a:lnTo>
+                    <a:pt x="1315517" y="571820"/>
+                  </a:lnTo>
+                  <a:lnTo>
+                    <a:pt x="1237883" y="543060"/>
+                  </a:lnTo>
+                  <a:lnTo>
+                    <a:pt x="1160249" y="513734"/>
+                  </a:lnTo>
+                  <a:lnTo>
+                    <a:pt x="1082615" y="483831"/>
+                  </a:lnTo>
+                  <a:lnTo>
+                    <a:pt x="1004981" y="453340"/>
+                  </a:lnTo>
+                  <a:lnTo>
+                    <a:pt x="927346" y="422249"/>
+                  </a:lnTo>
+                  <a:lnTo>
+                    <a:pt x="849712" y="390547"/>
+                  </a:lnTo>
+                  <a:lnTo>
+                    <a:pt x="772078" y="358221"/>
+                  </a:lnTo>
+                  <a:lnTo>
+                    <a:pt x="694444" y="325260"/>
+                  </a:lnTo>
+                  <a:lnTo>
+                    <a:pt x="616810" y="291649"/>
+                  </a:lnTo>
+                  <a:lnTo>
+                    <a:pt x="539176" y="257378"/>
+                  </a:lnTo>
+                  <a:lnTo>
+                    <a:pt x="461542" y="222433"/>
+                  </a:lnTo>
+                  <a:lnTo>
+                    <a:pt x="383908" y="186800"/>
+                  </a:lnTo>
+                  <a:lnTo>
+                    <a:pt x="306274" y="150467"/>
+                  </a:lnTo>
+                  <a:lnTo>
+                    <a:pt x="228640" y="113418"/>
+                  </a:lnTo>
+                  <a:lnTo>
+                    <a:pt x="151006" y="75641"/>
+                  </a:lnTo>
+                  <a:lnTo>
+                    <a:pt x="73372" y="37121"/>
                   </a:lnTo>
                   <a:lnTo>
                     <a:pt x="0" y="0"/>
@@ -4115,279 +4121,279 @@
           </p:nvSpPr>
           <p:spPr>
             <a:xfrm>
-              <a:off x="1430924" y="1896563"/>
-              <a:ext cx="6757566" cy="3542061"/>
+              <a:off x="1383515" y="1896563"/>
+              <a:ext cx="6804975" cy="3538137"/>
             </a:xfrm>
             <a:custGeom>
               <a:avLst/>
               <a:pathLst>
-                <a:path w="6757566" h="3542061">
+                <a:path w="6804975" h="3538137">
                   <a:moveTo>
                     <a:pt x="0" y="0"/>
                   </a:moveTo>
                   <a:lnTo>
-                    <a:pt x="3404" y="6555"/>
-                  </a:lnTo>
-                  <a:lnTo>
-                    <a:pt x="81038" y="150150"/>
-                  </a:lnTo>
-                  <a:lnTo>
-                    <a:pt x="158672" y="288090"/>
-                  </a:lnTo>
-                  <a:lnTo>
-                    <a:pt x="236306" y="420597"/>
-                  </a:lnTo>
-                  <a:lnTo>
-                    <a:pt x="313940" y="547886"/>
-                  </a:lnTo>
-                  <a:lnTo>
-                    <a:pt x="391574" y="670162"/>
-                  </a:lnTo>
-                  <a:lnTo>
-                    <a:pt x="469208" y="787622"/>
-                  </a:lnTo>
-                  <a:lnTo>
-                    <a:pt x="546842" y="900457"/>
-                  </a:lnTo>
-                  <a:lnTo>
-                    <a:pt x="624476" y="1008847"/>
-                  </a:lnTo>
-                  <a:lnTo>
-                    <a:pt x="702110" y="1112969"/>
-                  </a:lnTo>
-                  <a:lnTo>
-                    <a:pt x="779744" y="1212990"/>
-                  </a:lnTo>
-                  <a:lnTo>
-                    <a:pt x="857378" y="1309072"/>
-                  </a:lnTo>
-                  <a:lnTo>
-                    <a:pt x="935012" y="1401369"/>
-                  </a:lnTo>
-                  <a:lnTo>
-                    <a:pt x="1012647" y="1490032"/>
-                  </a:lnTo>
-                  <a:lnTo>
-                    <a:pt x="1090281" y="1575203"/>
-                  </a:lnTo>
-                  <a:lnTo>
-                    <a:pt x="1167915" y="1657020"/>
-                  </a:lnTo>
-                  <a:lnTo>
-                    <a:pt x="1245549" y="1735614"/>
-                  </a:lnTo>
-                  <a:lnTo>
-                    <a:pt x="1323183" y="1811113"/>
-                  </a:lnTo>
-                  <a:lnTo>
-                    <a:pt x="1400817" y="1883639"/>
-                  </a:lnTo>
-                  <a:lnTo>
-                    <a:pt x="1478451" y="1953308"/>
-                  </a:lnTo>
-                  <a:lnTo>
-                    <a:pt x="1556085" y="2020234"/>
-                  </a:lnTo>
-                  <a:lnTo>
-                    <a:pt x="1633719" y="2084524"/>
-                  </a:lnTo>
-                  <a:lnTo>
-                    <a:pt x="1711353" y="2146282"/>
-                  </a:lnTo>
-                  <a:lnTo>
-                    <a:pt x="1788987" y="2205607"/>
-                  </a:lnTo>
-                  <a:lnTo>
-                    <a:pt x="1866621" y="2262596"/>
-                  </a:lnTo>
-                  <a:lnTo>
-                    <a:pt x="1944255" y="2317341"/>
-                  </a:lnTo>
-                  <a:lnTo>
-                    <a:pt x="2021889" y="2369930"/>
-                  </a:lnTo>
-                  <a:lnTo>
-                    <a:pt x="2099523" y="2420447"/>
-                  </a:lnTo>
-                  <a:lnTo>
-                    <a:pt x="2177157" y="2468975"/>
-                  </a:lnTo>
-                  <a:lnTo>
-                    <a:pt x="2254791" y="2515592"/>
-                  </a:lnTo>
-                  <a:lnTo>
-                    <a:pt x="2332425" y="2560373"/>
-                  </a:lnTo>
-                  <a:lnTo>
-                    <a:pt x="2410059" y="2603390"/>
-                  </a:lnTo>
-                  <a:lnTo>
-                    <a:pt x="2487693" y="2644714"/>
-                  </a:lnTo>
-                  <a:lnTo>
-                    <a:pt x="2565327" y="2684409"/>
-                  </a:lnTo>
-                  <a:lnTo>
-                    <a:pt x="2642961" y="2722542"/>
-                  </a:lnTo>
-                  <a:lnTo>
-                    <a:pt x="2720596" y="2759172"/>
-                  </a:lnTo>
-                  <a:lnTo>
-                    <a:pt x="2798230" y="2794360"/>
-                  </a:lnTo>
-                  <a:lnTo>
-                    <a:pt x="2875864" y="2828162"/>
-                  </a:lnTo>
-                  <a:lnTo>
-                    <a:pt x="2953498" y="2860633"/>
-                  </a:lnTo>
-                  <a:lnTo>
-                    <a:pt x="3031132" y="2891825"/>
-                  </a:lnTo>
-                  <a:lnTo>
-                    <a:pt x="3108766" y="2921789"/>
-                  </a:lnTo>
-                  <a:lnTo>
-                    <a:pt x="3186400" y="2950572"/>
-                  </a:lnTo>
-                  <a:lnTo>
-                    <a:pt x="3264034" y="2978222"/>
-                  </a:lnTo>
-                  <a:lnTo>
-                    <a:pt x="3341668" y="3004783"/>
-                  </a:lnTo>
-                  <a:lnTo>
-                    <a:pt x="3419302" y="3030298"/>
-                  </a:lnTo>
-                  <a:lnTo>
-                    <a:pt x="3496936" y="3054808"/>
-                  </a:lnTo>
-                  <a:lnTo>
-                    <a:pt x="3574570" y="3078353"/>
-                  </a:lnTo>
-                  <a:lnTo>
-                    <a:pt x="3652204" y="3100970"/>
-                  </a:lnTo>
-                  <a:lnTo>
-                    <a:pt x="3729838" y="3122697"/>
-                  </a:lnTo>
-                  <a:lnTo>
-                    <a:pt x="3807472" y="3143568"/>
-                  </a:lnTo>
-                  <a:lnTo>
-                    <a:pt x="3885106" y="3163617"/>
-                  </a:lnTo>
-                  <a:lnTo>
-                    <a:pt x="3962740" y="3182877"/>
-                  </a:lnTo>
-                  <a:lnTo>
-                    <a:pt x="4040374" y="3201378"/>
-                  </a:lnTo>
-                  <a:lnTo>
-                    <a:pt x="4118008" y="3219150"/>
-                  </a:lnTo>
-                  <a:lnTo>
-                    <a:pt x="4195642" y="3236223"/>
-                  </a:lnTo>
-                  <a:lnTo>
-                    <a:pt x="4273276" y="3252623"/>
-                  </a:lnTo>
-                  <a:lnTo>
-                    <a:pt x="4350910" y="3268377"/>
-                  </a:lnTo>
-                  <a:lnTo>
-                    <a:pt x="4428544" y="3283511"/>
-                  </a:lnTo>
-                  <a:lnTo>
-                    <a:pt x="4506179" y="3298048"/>
-                  </a:lnTo>
-                  <a:lnTo>
-                    <a:pt x="4583813" y="3312013"/>
-                  </a:lnTo>
-                  <a:lnTo>
-                    <a:pt x="4661447" y="3325429"/>
-                  </a:lnTo>
-                  <a:lnTo>
-                    <a:pt x="4739081" y="3338315"/>
-                  </a:lnTo>
-                  <a:lnTo>
-                    <a:pt x="4816715" y="3350695"/>
-                  </a:lnTo>
-                  <a:lnTo>
-                    <a:pt x="4894349" y="3362586"/>
-                  </a:lnTo>
-                  <a:lnTo>
-                    <a:pt x="4971983" y="3374010"/>
-                  </a:lnTo>
-                  <a:lnTo>
-                    <a:pt x="5049617" y="3384983"/>
-                  </a:lnTo>
-                  <a:lnTo>
-                    <a:pt x="5127251" y="3395525"/>
-                  </a:lnTo>
-                  <a:lnTo>
-                    <a:pt x="5204885" y="3405651"/>
-                  </a:lnTo>
-                  <a:lnTo>
-                    <a:pt x="5282519" y="3415378"/>
-                  </a:lnTo>
-                  <a:lnTo>
-                    <a:pt x="5360153" y="3424723"/>
-                  </a:lnTo>
-                  <a:lnTo>
-                    <a:pt x="5437787" y="3433699"/>
-                  </a:lnTo>
-                  <a:lnTo>
-                    <a:pt x="5515421" y="3442322"/>
-                  </a:lnTo>
-                  <a:lnTo>
-                    <a:pt x="5593055" y="3450605"/>
-                  </a:lnTo>
-                  <a:lnTo>
-                    <a:pt x="5670689" y="3458562"/>
-                  </a:lnTo>
-                  <a:lnTo>
-                    <a:pt x="5748323" y="3466205"/>
-                  </a:lnTo>
-                  <a:lnTo>
-                    <a:pt x="5825957" y="3473548"/>
-                  </a:lnTo>
-                  <a:lnTo>
-                    <a:pt x="5903591" y="3480601"/>
-                  </a:lnTo>
-                  <a:lnTo>
-                    <a:pt x="5981225" y="3487377"/>
-                  </a:lnTo>
-                  <a:lnTo>
-                    <a:pt x="6058859" y="3493886"/>
-                  </a:lnTo>
-                  <a:lnTo>
-                    <a:pt x="6136493" y="3500138"/>
-                  </a:lnTo>
-                  <a:lnTo>
-                    <a:pt x="6214128" y="3506144"/>
-                  </a:lnTo>
-                  <a:lnTo>
-                    <a:pt x="6291762" y="3511914"/>
-                  </a:lnTo>
-                  <a:lnTo>
-                    <a:pt x="6369396" y="3517456"/>
-                  </a:lnTo>
-                  <a:lnTo>
-                    <a:pt x="6447030" y="3522780"/>
-                  </a:lnTo>
-                  <a:lnTo>
-                    <a:pt x="6524664" y="3527895"/>
-                  </a:lnTo>
-                  <a:lnTo>
-                    <a:pt x="6602298" y="3532808"/>
-                  </a:lnTo>
-                  <a:lnTo>
-                    <a:pt x="6679932" y="3537527"/>
-                  </a:lnTo>
-                  <a:lnTo>
-                    <a:pt x="6757566" y="3542061"/>
+                    <a:pt x="50813" y="93850"/>
+                  </a:lnTo>
+                  <a:lnTo>
+                    <a:pt x="128447" y="231684"/>
+                  </a:lnTo>
+                  <a:lnTo>
+                    <a:pt x="206081" y="364180"/>
+                  </a:lnTo>
+                  <a:lnTo>
+                    <a:pt x="283715" y="491544"/>
+                  </a:lnTo>
+                  <a:lnTo>
+                    <a:pt x="361349" y="613975"/>
+                  </a:lnTo>
+                  <a:lnTo>
+                    <a:pt x="438983" y="731665"/>
+                  </a:lnTo>
+                  <a:lnTo>
+                    <a:pt x="516617" y="844796"/>
+                  </a:lnTo>
+                  <a:lnTo>
+                    <a:pt x="594251" y="953545"/>
+                  </a:lnTo>
+                  <a:lnTo>
+                    <a:pt x="671885" y="1058083"/>
+                  </a:lnTo>
+                  <a:lnTo>
+                    <a:pt x="749519" y="1158572"/>
+                  </a:lnTo>
+                  <a:lnTo>
+                    <a:pt x="827153" y="1255169"/>
+                  </a:lnTo>
+                  <a:lnTo>
+                    <a:pt x="904787" y="1348024"/>
+                  </a:lnTo>
+                  <a:lnTo>
+                    <a:pt x="982422" y="1437283"/>
+                  </a:lnTo>
+                  <a:lnTo>
+                    <a:pt x="1060056" y="1523086"/>
+                  </a:lnTo>
+                  <a:lnTo>
+                    <a:pt x="1137690" y="1605565"/>
+                  </a:lnTo>
+                  <a:lnTo>
+                    <a:pt x="1215324" y="1684849"/>
+                  </a:lnTo>
+                  <a:lnTo>
+                    <a:pt x="1292958" y="1761063"/>
+                  </a:lnTo>
+                  <a:lnTo>
+                    <a:pt x="1370592" y="1834325"/>
+                  </a:lnTo>
+                  <a:lnTo>
+                    <a:pt x="1448226" y="1904749"/>
+                  </a:lnTo>
+                  <a:lnTo>
+                    <a:pt x="1525860" y="1972446"/>
+                  </a:lnTo>
+                  <a:lnTo>
+                    <a:pt x="1603494" y="2037521"/>
+                  </a:lnTo>
+                  <a:lnTo>
+                    <a:pt x="1681128" y="2100076"/>
+                  </a:lnTo>
+                  <a:lnTo>
+                    <a:pt x="1758762" y="2160208"/>
+                  </a:lnTo>
+                  <a:lnTo>
+                    <a:pt x="1836396" y="2218011"/>
+                  </a:lnTo>
+                  <a:lnTo>
+                    <a:pt x="1914030" y="2273575"/>
+                  </a:lnTo>
+                  <a:lnTo>
+                    <a:pt x="1991664" y="2326987"/>
+                  </a:lnTo>
+                  <a:lnTo>
+                    <a:pt x="2069298" y="2378330"/>
+                  </a:lnTo>
+                  <a:lnTo>
+                    <a:pt x="2146932" y="2427685"/>
+                  </a:lnTo>
+                  <a:lnTo>
+                    <a:pt x="2224566" y="2475128"/>
+                  </a:lnTo>
+                  <a:lnTo>
+                    <a:pt x="2302200" y="2520734"/>
+                  </a:lnTo>
+                  <a:lnTo>
+                    <a:pt x="2379834" y="2564574"/>
+                  </a:lnTo>
+                  <a:lnTo>
+                    <a:pt x="2457468" y="2606715"/>
+                  </a:lnTo>
+                  <a:lnTo>
+                    <a:pt x="2535102" y="2647225"/>
+                  </a:lnTo>
+                  <a:lnTo>
+                    <a:pt x="2612736" y="2686165"/>
+                  </a:lnTo>
+                  <a:lnTo>
+                    <a:pt x="2690371" y="2723597"/>
+                  </a:lnTo>
+                  <a:lnTo>
+                    <a:pt x="2768005" y="2759580"/>
+                  </a:lnTo>
+                  <a:lnTo>
+                    <a:pt x="2845639" y="2794169"/>
+                  </a:lnTo>
+                  <a:lnTo>
+                    <a:pt x="2923273" y="2827418"/>
+                  </a:lnTo>
+                  <a:lnTo>
+                    <a:pt x="3000907" y="2859379"/>
+                  </a:lnTo>
+                  <a:lnTo>
+                    <a:pt x="3078541" y="2890103"/>
+                  </a:lnTo>
+                  <a:lnTo>
+                    <a:pt x="3156175" y="2919637"/>
+                  </a:lnTo>
+                  <a:lnTo>
+                    <a:pt x="3233809" y="2948026"/>
+                  </a:lnTo>
+                  <a:lnTo>
+                    <a:pt x="3311443" y="2975317"/>
+                  </a:lnTo>
+                  <a:lnTo>
+                    <a:pt x="3389077" y="3001550"/>
+                  </a:lnTo>
+                  <a:lnTo>
+                    <a:pt x="3466711" y="3026767"/>
+                  </a:lnTo>
+                  <a:lnTo>
+                    <a:pt x="3544345" y="3051008"/>
+                  </a:lnTo>
+                  <a:lnTo>
+                    <a:pt x="3621979" y="3074309"/>
+                  </a:lnTo>
+                  <a:lnTo>
+                    <a:pt x="3699613" y="3096708"/>
+                  </a:lnTo>
+                  <a:lnTo>
+                    <a:pt x="3777247" y="3118240"/>
+                  </a:lnTo>
+                  <a:lnTo>
+                    <a:pt x="3854881" y="3138938"/>
+                  </a:lnTo>
+                  <a:lnTo>
+                    <a:pt x="3932515" y="3158834"/>
+                  </a:lnTo>
+                  <a:lnTo>
+                    <a:pt x="4010149" y="3177959"/>
+                  </a:lnTo>
+                  <a:lnTo>
+                    <a:pt x="4087783" y="3196344"/>
+                  </a:lnTo>
+                  <a:lnTo>
+                    <a:pt x="4165417" y="3214017"/>
+                  </a:lnTo>
+                  <a:lnTo>
+                    <a:pt x="4243051" y="3231005"/>
+                  </a:lnTo>
+                  <a:lnTo>
+                    <a:pt x="4320685" y="3247336"/>
+                  </a:lnTo>
+                  <a:lnTo>
+                    <a:pt x="4398319" y="3263033"/>
+                  </a:lnTo>
+                  <a:lnTo>
+                    <a:pt x="4475954" y="3278123"/>
+                  </a:lnTo>
+                  <a:lnTo>
+                    <a:pt x="4553588" y="3292629"/>
+                  </a:lnTo>
+                  <a:lnTo>
+                    <a:pt x="4631222" y="3306572"/>
+                  </a:lnTo>
+                  <a:lnTo>
+                    <a:pt x="4708856" y="3319976"/>
+                  </a:lnTo>
+                  <a:lnTo>
+                    <a:pt x="4786490" y="3332860"/>
+                  </a:lnTo>
+                  <a:lnTo>
+                    <a:pt x="4864124" y="3345245"/>
+                  </a:lnTo>
+                  <a:lnTo>
+                    <a:pt x="4941758" y="3357151"/>
+                  </a:lnTo>
+                  <a:lnTo>
+                    <a:pt x="5019392" y="3368596"/>
+                  </a:lnTo>
+                  <a:lnTo>
+                    <a:pt x="5097026" y="3379597"/>
+                  </a:lnTo>
+                  <a:lnTo>
+                    <a:pt x="5174660" y="3390172"/>
+                  </a:lnTo>
+                  <a:lnTo>
+                    <a:pt x="5252294" y="3400338"/>
+                  </a:lnTo>
+                  <a:lnTo>
+                    <a:pt x="5329928" y="3410110"/>
+                  </a:lnTo>
+                  <a:lnTo>
+                    <a:pt x="5407562" y="3419503"/>
+                  </a:lnTo>
+                  <a:lnTo>
+                    <a:pt x="5485196" y="3428533"/>
+                  </a:lnTo>
+                  <a:lnTo>
+                    <a:pt x="5562830" y="3437213"/>
+                  </a:lnTo>
+                  <a:lnTo>
+                    <a:pt x="5640464" y="3445557"/>
+                  </a:lnTo>
+                  <a:lnTo>
+                    <a:pt x="5718098" y="3453577"/>
+                  </a:lnTo>
+                  <a:lnTo>
+                    <a:pt x="5795732" y="3461287"/>
+                  </a:lnTo>
+                  <a:lnTo>
+                    <a:pt x="5873366" y="3468698"/>
+                  </a:lnTo>
+                  <a:lnTo>
+                    <a:pt x="5951000" y="3475823"/>
+                  </a:lnTo>
+                  <a:lnTo>
+                    <a:pt x="6028634" y="3482671"/>
+                  </a:lnTo>
+                  <a:lnTo>
+                    <a:pt x="6106268" y="3489254"/>
+                  </a:lnTo>
+                  <a:lnTo>
+                    <a:pt x="6183903" y="3495582"/>
+                  </a:lnTo>
+                  <a:lnTo>
+                    <a:pt x="6261537" y="3501665"/>
+                  </a:lnTo>
+                  <a:lnTo>
+                    <a:pt x="6339171" y="3507513"/>
+                  </a:lnTo>
+                  <a:lnTo>
+                    <a:pt x="6416805" y="3513134"/>
+                  </a:lnTo>
+                  <a:lnTo>
+                    <a:pt x="6494439" y="3518537"/>
+                  </a:lnTo>
+                  <a:lnTo>
+                    <a:pt x="6572073" y="3523731"/>
+                  </a:lnTo>
+                  <a:lnTo>
+                    <a:pt x="6649707" y="3528724"/>
+                  </a:lnTo>
+                  <a:lnTo>
+                    <a:pt x="6727341" y="3533523"/>
+                  </a:lnTo>
+                  <a:lnTo>
+                    <a:pt x="6804975" y="3538137"/>
                   </a:lnTo>
                 </a:path>
               </a:pathLst>

--- a/docs/plots/carbo/jx_carbo_linsubhr_ratio_sideeffect.pptx
+++ b/docs/plots/carbo/jx_carbo_linsubhr_ratio_sideeffect.pptx
@@ -3463,7 +3463,7 @@
                     <a:pt x="1703687" y="2326188"/>
                   </a:lnTo>
                   <a:lnTo>
-                    <a:pt x="1626053" y="2300096"/>
+                    <a:pt x="1626053" y="2300097"/>
                   </a:lnTo>
                   <a:lnTo>
                     <a:pt x="1548419" y="2273492"/>
@@ -3665,7 +3665,7 @@
                     <a:pt x="2595383" y="2927465"/>
                   </a:lnTo>
                   <a:lnTo>
-                    <a:pt x="2673018" y="2941454"/>
+                    <a:pt x="2673017" y="2941454"/>
                   </a:lnTo>
                   <a:lnTo>
                     <a:pt x="2750652" y="2955173"/>
@@ -4074,7 +4074,7 @@
                     <a:pt x="772078" y="358221"/>
                   </a:lnTo>
                   <a:lnTo>
-                    <a:pt x="694444" y="325260"/>
+                    <a:pt x="694444" y="325259"/>
                   </a:lnTo>
                   <a:lnTo>
                     <a:pt x="616810" y="291649"/>
@@ -4234,7 +4234,7 @@
                     <a:pt x="2612736" y="2686165"/>
                   </a:lnTo>
                   <a:lnTo>
-                    <a:pt x="2690371" y="2723597"/>
+                    <a:pt x="2690370" y="2723597"/>
                   </a:lnTo>
                   <a:lnTo>
                     <a:pt x="2768005" y="2759580"/>

--- a/docs/plots/carbo/jx_carbo_linsubhr_ratio_sideeffect.pptx
+++ b/docs/plots/carbo/jx_carbo_linsubhr_ratio_sideeffect.pptx
@@ -2271,7 +2271,7 @@
           </p:nvSpPr>
           <p:spPr>
             <a:xfrm>
-              <a:off x="817517" y="5114368"/>
+              <a:off x="817517" y="5142518"/>
               <a:ext cx="7799693" cy="0"/>
             </a:xfrm>
             <a:custGeom>
@@ -2314,7 +2314,7 @@
           </p:nvSpPr>
           <p:spPr>
             <a:xfrm>
-              <a:off x="817517" y="4244691"/>
+              <a:off x="817517" y="4313054"/>
               <a:ext cx="7799693" cy="0"/>
             </a:xfrm>
             <a:custGeom>
@@ -2357,7 +2357,7 @@
           </p:nvSpPr>
           <p:spPr>
             <a:xfrm>
-              <a:off x="817517" y="3375014"/>
+              <a:off x="817517" y="3483591"/>
               <a:ext cx="7799693" cy="0"/>
             </a:xfrm>
             <a:custGeom>
@@ -2400,7 +2400,7 @@
           </p:nvSpPr>
           <p:spPr>
             <a:xfrm>
-              <a:off x="817517" y="2505337"/>
+              <a:off x="817517" y="2654127"/>
               <a:ext cx="7799693" cy="0"/>
             </a:xfrm>
             <a:custGeom>
@@ -2443,15 +2443,15 @@
           </p:nvSpPr>
           <p:spPr>
             <a:xfrm>
-              <a:off x="1615213" y="1896563"/>
-              <a:ext cx="0" cy="3826579"/>
+              <a:off x="1615213" y="2073503"/>
+              <a:ext cx="0" cy="3649639"/>
             </a:xfrm>
             <a:custGeom>
               <a:avLst/>
               <a:pathLst>
-                <a:path w="0" h="3826579">
+                <a:path w="0" h="3649639">
                   <a:moveTo>
-                    <a:pt x="0" y="3826579"/>
+                    <a:pt x="0" y="3649639"/>
                   </a:moveTo>
                   <a:lnTo>
                     <a:pt x="0" y="0"/>
@@ -2486,15 +2486,15 @@
           </p:nvSpPr>
           <p:spPr>
             <a:xfrm>
-              <a:off x="3387871" y="1896563"/>
-              <a:ext cx="0" cy="3826579"/>
+              <a:off x="3387871" y="2073503"/>
+              <a:ext cx="0" cy="3649639"/>
             </a:xfrm>
             <a:custGeom>
               <a:avLst/>
               <a:pathLst>
-                <a:path w="0" h="3826579">
+                <a:path w="0" h="3649639">
                   <a:moveTo>
-                    <a:pt x="0" y="3826579"/>
+                    <a:pt x="0" y="3649639"/>
                   </a:moveTo>
                   <a:lnTo>
                     <a:pt x="0" y="0"/>
@@ -2529,15 +2529,15 @@
           </p:nvSpPr>
           <p:spPr>
             <a:xfrm>
-              <a:off x="5160528" y="1896563"/>
-              <a:ext cx="0" cy="3826579"/>
+              <a:off x="5160528" y="2073503"/>
+              <a:ext cx="0" cy="3649639"/>
             </a:xfrm>
             <a:custGeom>
               <a:avLst/>
               <a:pathLst>
-                <a:path w="0" h="3826579">
+                <a:path w="0" h="3649639">
                   <a:moveTo>
-                    <a:pt x="0" y="3826579"/>
+                    <a:pt x="0" y="3649639"/>
                   </a:moveTo>
                   <a:lnTo>
                     <a:pt x="0" y="0"/>
@@ -2572,15 +2572,15 @@
           </p:nvSpPr>
           <p:spPr>
             <a:xfrm>
-              <a:off x="6933186" y="1896563"/>
-              <a:ext cx="0" cy="3826579"/>
+              <a:off x="6933186" y="2073503"/>
+              <a:ext cx="0" cy="3649639"/>
             </a:xfrm>
             <a:custGeom>
               <a:avLst/>
               <a:pathLst>
-                <a:path w="0" h="3826579">
+                <a:path w="0" h="3649639">
                   <a:moveTo>
-                    <a:pt x="0" y="3826579"/>
+                    <a:pt x="0" y="3649639"/>
                   </a:moveTo>
                   <a:lnTo>
                     <a:pt x="0" y="0"/>
@@ -2615,7 +2615,7 @@
           </p:nvSpPr>
           <p:spPr>
             <a:xfrm>
-              <a:off x="817517" y="5549207"/>
+              <a:off x="817517" y="5557249"/>
               <a:ext cx="7799693" cy="0"/>
             </a:xfrm>
             <a:custGeom>
@@ -2658,7 +2658,7 @@
           </p:nvSpPr>
           <p:spPr>
             <a:xfrm>
-              <a:off x="817517" y="4679530"/>
+              <a:off x="817517" y="4727786"/>
               <a:ext cx="7799693" cy="0"/>
             </a:xfrm>
             <a:custGeom>
@@ -2701,7 +2701,7 @@
           </p:nvSpPr>
           <p:spPr>
             <a:xfrm>
-              <a:off x="817517" y="3809853"/>
+              <a:off x="817517" y="3898322"/>
               <a:ext cx="7799693" cy="0"/>
             </a:xfrm>
             <a:custGeom>
@@ -2744,7 +2744,7 @@
           </p:nvSpPr>
           <p:spPr>
             <a:xfrm>
-              <a:off x="817517" y="2940175"/>
+              <a:off x="817517" y="3068859"/>
               <a:ext cx="7799693" cy="0"/>
             </a:xfrm>
             <a:custGeom>
@@ -2787,7 +2787,7 @@
           </p:nvSpPr>
           <p:spPr>
             <a:xfrm>
-              <a:off x="817517" y="2070498"/>
+              <a:off x="817517" y="2239395"/>
               <a:ext cx="7799693" cy="0"/>
             </a:xfrm>
             <a:custGeom>
@@ -2830,15 +2830,15 @@
           </p:nvSpPr>
           <p:spPr>
             <a:xfrm>
-              <a:off x="2501542" y="1896563"/>
-              <a:ext cx="0" cy="3826579"/>
+              <a:off x="2501542" y="2073503"/>
+              <a:ext cx="0" cy="3649639"/>
             </a:xfrm>
             <a:custGeom>
               <a:avLst/>
               <a:pathLst>
-                <a:path w="0" h="3826579">
+                <a:path w="0" h="3649639">
                   <a:moveTo>
-                    <a:pt x="0" y="3826579"/>
+                    <a:pt x="0" y="3649639"/>
                   </a:moveTo>
                   <a:lnTo>
                     <a:pt x="0" y="0"/>
@@ -2873,15 +2873,15 @@
           </p:nvSpPr>
           <p:spPr>
             <a:xfrm>
-              <a:off x="4274200" y="1896563"/>
-              <a:ext cx="0" cy="3826579"/>
+              <a:off x="4274200" y="2073503"/>
+              <a:ext cx="0" cy="3649639"/>
             </a:xfrm>
             <a:custGeom>
               <a:avLst/>
               <a:pathLst>
-                <a:path w="0" h="3826579">
+                <a:path w="0" h="3649639">
                   <a:moveTo>
-                    <a:pt x="0" y="3826579"/>
+                    <a:pt x="0" y="3649639"/>
                   </a:moveTo>
                   <a:lnTo>
                     <a:pt x="0" y="0"/>
@@ -2916,15 +2916,15 @@
           </p:nvSpPr>
           <p:spPr>
             <a:xfrm>
-              <a:off x="6046857" y="1896563"/>
-              <a:ext cx="0" cy="3826579"/>
+              <a:off x="6046857" y="2073503"/>
+              <a:ext cx="0" cy="3649639"/>
             </a:xfrm>
             <a:custGeom>
               <a:avLst/>
               <a:pathLst>
-                <a:path w="0" h="3826579">
+                <a:path w="0" h="3649639">
                   <a:moveTo>
-                    <a:pt x="0" y="3826579"/>
+                    <a:pt x="0" y="3649639"/>
                   </a:moveTo>
                   <a:lnTo>
                     <a:pt x="0" y="0"/>
@@ -2959,15 +2959,15 @@
           </p:nvSpPr>
           <p:spPr>
             <a:xfrm>
-              <a:off x="7819515" y="1896563"/>
-              <a:ext cx="0" cy="3826579"/>
+              <a:off x="7819515" y="2073503"/>
+              <a:ext cx="0" cy="3649639"/>
             </a:xfrm>
             <a:custGeom>
               <a:avLst/>
               <a:pathLst>
-                <a:path w="0" h="3826579">
+                <a:path w="0" h="3649639">
                   <a:moveTo>
-                    <a:pt x="0" y="3826579"/>
+                    <a:pt x="0" y="3649639"/>
                   </a:moveTo>
                   <a:lnTo>
                     <a:pt x="0" y="0"/>
@@ -3002,531 +3002,531 @@
           </p:nvSpPr>
           <p:spPr>
             <a:xfrm>
-              <a:off x="817517" y="1896563"/>
-              <a:ext cx="7370972" cy="3611669"/>
+              <a:off x="817517" y="2073503"/>
+              <a:ext cx="7370972" cy="3444666"/>
             </a:xfrm>
             <a:custGeom>
               <a:avLst/>
               <a:pathLst>
-                <a:path w="7370972" h="3611669">
+                <a:path w="7370972" h="3444666">
                   <a:moveTo>
                     <a:pt x="1514958" y="0"/>
                   </a:moveTo>
                   <a:lnTo>
-                    <a:pt x="1548419" y="94064"/>
-                  </a:lnTo>
-                  <a:lnTo>
-                    <a:pt x="1626053" y="299697"/>
-                  </a:lnTo>
-                  <a:lnTo>
-                    <a:pt x="1703687" y="493448"/>
-                  </a:lnTo>
-                  <a:lnTo>
-                    <a:pt x="1781321" y="676003"/>
-                  </a:lnTo>
-                  <a:lnTo>
-                    <a:pt x="1858955" y="848010"/>
-                  </a:lnTo>
-                  <a:lnTo>
-                    <a:pt x="1936589" y="1010076"/>
-                  </a:lnTo>
-                  <a:lnTo>
-                    <a:pt x="2014223" y="1162778"/>
-                  </a:lnTo>
-                  <a:lnTo>
-                    <a:pt x="2091857" y="1306655"/>
-                  </a:lnTo>
-                  <a:lnTo>
-                    <a:pt x="2169491" y="1442219"/>
-                  </a:lnTo>
-                  <a:lnTo>
-                    <a:pt x="2247125" y="1569949"/>
-                  </a:lnTo>
-                  <a:lnTo>
-                    <a:pt x="2324759" y="1690298"/>
-                  </a:lnTo>
-                  <a:lnTo>
-                    <a:pt x="2402393" y="1803693"/>
-                  </a:lnTo>
-                  <a:lnTo>
-                    <a:pt x="2480027" y="1910535"/>
-                  </a:lnTo>
-                  <a:lnTo>
-                    <a:pt x="2557661" y="2011204"/>
-                  </a:lnTo>
-                  <a:lnTo>
-                    <a:pt x="2635295" y="2106055"/>
-                  </a:lnTo>
-                  <a:lnTo>
-                    <a:pt x="2712930" y="2195425"/>
-                  </a:lnTo>
-                  <a:lnTo>
-                    <a:pt x="2790564" y="2279631"/>
-                  </a:lnTo>
-                  <a:lnTo>
-                    <a:pt x="2868198" y="2358971"/>
-                  </a:lnTo>
-                  <a:lnTo>
-                    <a:pt x="2945832" y="2433726"/>
-                  </a:lnTo>
-                  <a:lnTo>
-                    <a:pt x="3023466" y="2504161"/>
-                  </a:lnTo>
-                  <a:lnTo>
-                    <a:pt x="3101100" y="2570527"/>
-                  </a:lnTo>
-                  <a:lnTo>
-                    <a:pt x="3178734" y="2633057"/>
-                  </a:lnTo>
-                  <a:lnTo>
-                    <a:pt x="3256368" y="2691974"/>
-                  </a:lnTo>
-                  <a:lnTo>
-                    <a:pt x="3334002" y="2747487"/>
-                  </a:lnTo>
-                  <a:lnTo>
-                    <a:pt x="3411636" y="2788509"/>
-                  </a:lnTo>
-                  <a:lnTo>
-                    <a:pt x="3489270" y="2805178"/>
-                  </a:lnTo>
-                  <a:lnTo>
-                    <a:pt x="3566904" y="2821526"/>
-                  </a:lnTo>
-                  <a:lnTo>
-                    <a:pt x="3644538" y="2837559"/>
-                  </a:lnTo>
-                  <a:lnTo>
-                    <a:pt x="3722172" y="2853282"/>
-                  </a:lnTo>
-                  <a:lnTo>
-                    <a:pt x="3799806" y="2868702"/>
-                  </a:lnTo>
-                  <a:lnTo>
-                    <a:pt x="3877440" y="2883825"/>
-                  </a:lnTo>
-                  <a:lnTo>
-                    <a:pt x="3955074" y="2898656"/>
-                  </a:lnTo>
-                  <a:lnTo>
-                    <a:pt x="4032708" y="2913201"/>
-                  </a:lnTo>
-                  <a:lnTo>
-                    <a:pt x="4110342" y="2927465"/>
-                  </a:lnTo>
-                  <a:lnTo>
-                    <a:pt x="4187976" y="2941454"/>
-                  </a:lnTo>
-                  <a:lnTo>
-                    <a:pt x="4265610" y="2955173"/>
-                  </a:lnTo>
-                  <a:lnTo>
-                    <a:pt x="4343244" y="2968627"/>
-                  </a:lnTo>
-                  <a:lnTo>
-                    <a:pt x="4420879" y="2981822"/>
-                  </a:lnTo>
-                  <a:lnTo>
-                    <a:pt x="4498513" y="2994763"/>
-                  </a:lnTo>
-                  <a:lnTo>
-                    <a:pt x="4576147" y="3007454"/>
-                  </a:lnTo>
-                  <a:lnTo>
-                    <a:pt x="4653781" y="3019900"/>
-                  </a:lnTo>
-                  <a:lnTo>
-                    <a:pt x="4731415" y="3032106"/>
-                  </a:lnTo>
-                  <a:lnTo>
-                    <a:pt x="4809049" y="3044076"/>
-                  </a:lnTo>
-                  <a:lnTo>
-                    <a:pt x="4886683" y="3055816"/>
-                  </a:lnTo>
-                  <a:lnTo>
-                    <a:pt x="4964317" y="3067329"/>
-                  </a:lnTo>
-                  <a:lnTo>
-                    <a:pt x="5041951" y="3078620"/>
-                  </a:lnTo>
-                  <a:lnTo>
-                    <a:pt x="5119585" y="3089693"/>
-                  </a:lnTo>
-                  <a:lnTo>
-                    <a:pt x="5197219" y="3100552"/>
-                  </a:lnTo>
-                  <a:lnTo>
-                    <a:pt x="5274853" y="3111203"/>
-                  </a:lnTo>
-                  <a:lnTo>
-                    <a:pt x="5352487" y="3121647"/>
-                  </a:lnTo>
-                  <a:lnTo>
-                    <a:pt x="5430121" y="3131890"/>
-                  </a:lnTo>
-                  <a:lnTo>
-                    <a:pt x="5507755" y="3141936"/>
-                  </a:lnTo>
-                  <a:lnTo>
-                    <a:pt x="5585389" y="3151788"/>
-                  </a:lnTo>
-                  <a:lnTo>
-                    <a:pt x="5663023" y="3161449"/>
-                  </a:lnTo>
-                  <a:lnTo>
-                    <a:pt x="5740657" y="3170925"/>
-                  </a:lnTo>
-                  <a:lnTo>
-                    <a:pt x="5818291" y="3180217"/>
-                  </a:lnTo>
-                  <a:lnTo>
-                    <a:pt x="5895925" y="3189331"/>
-                  </a:lnTo>
-                  <a:lnTo>
-                    <a:pt x="5973559" y="3198268"/>
-                  </a:lnTo>
-                  <a:lnTo>
-                    <a:pt x="6051193" y="3207033"/>
-                  </a:lnTo>
-                  <a:lnTo>
-                    <a:pt x="6128827" y="3215629"/>
-                  </a:lnTo>
-                  <a:lnTo>
-                    <a:pt x="6206462" y="3224060"/>
-                  </a:lnTo>
-                  <a:lnTo>
-                    <a:pt x="6284096" y="3232327"/>
-                  </a:lnTo>
-                  <a:lnTo>
-                    <a:pt x="6361730" y="3240435"/>
-                  </a:lnTo>
-                  <a:lnTo>
-                    <a:pt x="6439364" y="3248387"/>
-                  </a:lnTo>
-                  <a:lnTo>
-                    <a:pt x="6516998" y="3256185"/>
-                  </a:lnTo>
-                  <a:lnTo>
-                    <a:pt x="6594632" y="3263833"/>
-                  </a:lnTo>
-                  <a:lnTo>
-                    <a:pt x="6672266" y="3271333"/>
-                  </a:lnTo>
-                  <a:lnTo>
-                    <a:pt x="6749900" y="3278689"/>
-                  </a:lnTo>
-                  <a:lnTo>
-                    <a:pt x="6827534" y="3285903"/>
-                  </a:lnTo>
-                  <a:lnTo>
-                    <a:pt x="6905168" y="3292977"/>
-                  </a:lnTo>
-                  <a:lnTo>
-                    <a:pt x="6982802" y="3299916"/>
-                  </a:lnTo>
-                  <a:lnTo>
-                    <a:pt x="7060436" y="3306720"/>
-                  </a:lnTo>
-                  <a:lnTo>
-                    <a:pt x="7138070" y="3313393"/>
-                  </a:lnTo>
-                  <a:lnTo>
-                    <a:pt x="7215704" y="3319937"/>
-                  </a:lnTo>
-                  <a:lnTo>
-                    <a:pt x="7293338" y="3326355"/>
-                  </a:lnTo>
-                  <a:lnTo>
-                    <a:pt x="7370972" y="3332649"/>
-                  </a:lnTo>
-                  <a:lnTo>
-                    <a:pt x="7370972" y="3611669"/>
-                  </a:lnTo>
-                  <a:lnTo>
-                    <a:pt x="7293338" y="3609156"/>
-                  </a:lnTo>
-                  <a:lnTo>
-                    <a:pt x="7215704" y="3606488"/>
-                  </a:lnTo>
-                  <a:lnTo>
-                    <a:pt x="7138070" y="3603658"/>
-                  </a:lnTo>
-                  <a:lnTo>
-                    <a:pt x="7060436" y="3600654"/>
-                  </a:lnTo>
-                  <a:lnTo>
-                    <a:pt x="6982802" y="3597465"/>
-                  </a:lnTo>
-                  <a:lnTo>
-                    <a:pt x="6905168" y="3594081"/>
-                  </a:lnTo>
-                  <a:lnTo>
-                    <a:pt x="6827534" y="3590490"/>
-                  </a:lnTo>
-                  <a:lnTo>
-                    <a:pt x="6749900" y="3586678"/>
-                  </a:lnTo>
-                  <a:lnTo>
-                    <a:pt x="6672266" y="3582632"/>
-                  </a:lnTo>
-                  <a:lnTo>
-                    <a:pt x="6594632" y="3578338"/>
-                  </a:lnTo>
-                  <a:lnTo>
-                    <a:pt x="6516998" y="3573781"/>
-                  </a:lnTo>
-                  <a:lnTo>
-                    <a:pt x="6439364" y="3568945"/>
-                  </a:lnTo>
-                  <a:lnTo>
-                    <a:pt x="6361730" y="3563812"/>
-                  </a:lnTo>
-                  <a:lnTo>
-                    <a:pt x="6284096" y="3558364"/>
-                  </a:lnTo>
-                  <a:lnTo>
-                    <a:pt x="6206462" y="3552581"/>
-                  </a:lnTo>
-                  <a:lnTo>
-                    <a:pt x="6128827" y="3546445"/>
-                  </a:lnTo>
-                  <a:lnTo>
-                    <a:pt x="6051193" y="3539932"/>
-                  </a:lnTo>
-                  <a:lnTo>
-                    <a:pt x="5973559" y="3533019"/>
-                  </a:lnTo>
-                  <a:lnTo>
-                    <a:pt x="5895925" y="3525683"/>
-                  </a:lnTo>
-                  <a:lnTo>
-                    <a:pt x="5818291" y="3517896"/>
-                  </a:lnTo>
-                  <a:lnTo>
-                    <a:pt x="5740657" y="3509632"/>
-                  </a:lnTo>
-                  <a:lnTo>
-                    <a:pt x="5663023" y="3500862"/>
-                  </a:lnTo>
-                  <a:lnTo>
-                    <a:pt x="5585389" y="3491553"/>
-                  </a:lnTo>
-                  <a:lnTo>
-                    <a:pt x="5507755" y="3481673"/>
-                  </a:lnTo>
-                  <a:lnTo>
-                    <a:pt x="5430121" y="3471188"/>
-                  </a:lnTo>
-                  <a:lnTo>
-                    <a:pt x="5352487" y="3460059"/>
-                  </a:lnTo>
-                  <a:lnTo>
-                    <a:pt x="5274853" y="3448248"/>
-                  </a:lnTo>
-                  <a:lnTo>
-                    <a:pt x="5197219" y="3435713"/>
-                  </a:lnTo>
-                  <a:lnTo>
-                    <a:pt x="5119585" y="3422409"/>
-                  </a:lnTo>
-                  <a:lnTo>
-                    <a:pt x="5041951" y="3408289"/>
-                  </a:lnTo>
-                  <a:lnTo>
-                    <a:pt x="4964317" y="3393303"/>
-                  </a:lnTo>
-                  <a:lnTo>
-                    <a:pt x="4886683" y="3377397"/>
-                  </a:lnTo>
-                  <a:lnTo>
-                    <a:pt x="4809049" y="3360517"/>
-                  </a:lnTo>
-                  <a:lnTo>
-                    <a:pt x="4731415" y="3342601"/>
-                  </a:lnTo>
-                  <a:lnTo>
-                    <a:pt x="4653781" y="3323586"/>
-                  </a:lnTo>
-                  <a:lnTo>
-                    <a:pt x="4576147" y="3303405"/>
-                  </a:lnTo>
-                  <a:lnTo>
-                    <a:pt x="4498513" y="3281987"/>
-                  </a:lnTo>
-                  <a:lnTo>
-                    <a:pt x="4420879" y="3259255"/>
-                  </a:lnTo>
-                  <a:lnTo>
-                    <a:pt x="4343244" y="3235129"/>
-                  </a:lnTo>
-                  <a:lnTo>
-                    <a:pt x="4265610" y="3209523"/>
-                  </a:lnTo>
-                  <a:lnTo>
-                    <a:pt x="4187976" y="3182346"/>
-                  </a:lnTo>
-                  <a:lnTo>
-                    <a:pt x="4110342" y="3153503"/>
-                  </a:lnTo>
-                  <a:lnTo>
-                    <a:pt x="4032708" y="3122892"/>
-                  </a:lnTo>
-                  <a:lnTo>
-                    <a:pt x="3955074" y="3090402"/>
-                  </a:lnTo>
-                  <a:lnTo>
-                    <a:pt x="3877440" y="3055920"/>
-                  </a:lnTo>
-                  <a:lnTo>
-                    <a:pt x="3799806" y="3019324"/>
-                  </a:lnTo>
-                  <a:lnTo>
-                    <a:pt x="3722172" y="2980483"/>
-                  </a:lnTo>
-                  <a:lnTo>
-                    <a:pt x="3644538" y="2939260"/>
-                  </a:lnTo>
-                  <a:lnTo>
-                    <a:pt x="3566904" y="2895508"/>
-                  </a:lnTo>
-                  <a:lnTo>
-                    <a:pt x="3489270" y="2849074"/>
-                  </a:lnTo>
-                  <a:lnTo>
-                    <a:pt x="3411636" y="2799792"/>
-                  </a:lnTo>
-                  <a:lnTo>
-                    <a:pt x="3334002" y="2771511"/>
-                  </a:lnTo>
-                  <a:lnTo>
-                    <a:pt x="3256368" y="2754179"/>
-                  </a:lnTo>
-                  <a:lnTo>
-                    <a:pt x="3178734" y="2736507"/>
-                  </a:lnTo>
-                  <a:lnTo>
-                    <a:pt x="3101100" y="2718486"/>
-                  </a:lnTo>
-                  <a:lnTo>
-                    <a:pt x="3023466" y="2700112"/>
-                  </a:lnTo>
-                  <a:lnTo>
-                    <a:pt x="2945832" y="2681375"/>
-                  </a:lnTo>
-                  <a:lnTo>
-                    <a:pt x="2868198" y="2662271"/>
-                  </a:lnTo>
-                  <a:lnTo>
-                    <a:pt x="2790564" y="2642790"/>
-                  </a:lnTo>
-                  <a:lnTo>
-                    <a:pt x="2712930" y="2622926"/>
-                  </a:lnTo>
-                  <a:lnTo>
-                    <a:pt x="2635295" y="2602672"/>
-                  </a:lnTo>
-                  <a:lnTo>
-                    <a:pt x="2557661" y="2582019"/>
-                  </a:lnTo>
-                  <a:lnTo>
-                    <a:pt x="2480027" y="2560960"/>
-                  </a:lnTo>
-                  <a:lnTo>
-                    <a:pt x="2402393" y="2539487"/>
-                  </a:lnTo>
-                  <a:lnTo>
-                    <a:pt x="2324759" y="2517591"/>
-                  </a:lnTo>
-                  <a:lnTo>
-                    <a:pt x="2247125" y="2495265"/>
-                  </a:lnTo>
-                  <a:lnTo>
-                    <a:pt x="2169491" y="2472499"/>
-                  </a:lnTo>
-                  <a:lnTo>
-                    <a:pt x="2091857" y="2449286"/>
-                  </a:lnTo>
-                  <a:lnTo>
-                    <a:pt x="2014223" y="2425616"/>
-                  </a:lnTo>
-                  <a:lnTo>
-                    <a:pt x="1936589" y="2401480"/>
-                  </a:lnTo>
-                  <a:lnTo>
-                    <a:pt x="1858955" y="2376870"/>
-                  </a:lnTo>
-                  <a:lnTo>
-                    <a:pt x="1781321" y="2351776"/>
-                  </a:lnTo>
-                  <a:lnTo>
-                    <a:pt x="1703687" y="2326188"/>
-                  </a:lnTo>
-                  <a:lnTo>
-                    <a:pt x="1626053" y="2300097"/>
-                  </a:lnTo>
-                  <a:lnTo>
-                    <a:pt x="1548419" y="2273492"/>
-                  </a:lnTo>
-                  <a:lnTo>
-                    <a:pt x="1470785" y="2246364"/>
-                  </a:lnTo>
-                  <a:lnTo>
-                    <a:pt x="1393151" y="2218703"/>
-                  </a:lnTo>
-                  <a:lnTo>
-                    <a:pt x="1315517" y="2190497"/>
-                  </a:lnTo>
-                  <a:lnTo>
-                    <a:pt x="1237883" y="2161737"/>
-                  </a:lnTo>
-                  <a:lnTo>
-                    <a:pt x="1160249" y="2132411"/>
-                  </a:lnTo>
-                  <a:lnTo>
-                    <a:pt x="1082615" y="2102508"/>
-                  </a:lnTo>
-                  <a:lnTo>
-                    <a:pt x="1004981" y="2072017"/>
-                  </a:lnTo>
-                  <a:lnTo>
-                    <a:pt x="927346" y="2040926"/>
-                  </a:lnTo>
-                  <a:lnTo>
-                    <a:pt x="849712" y="2009224"/>
-                  </a:lnTo>
-                  <a:lnTo>
-                    <a:pt x="772078" y="1976898"/>
-                  </a:lnTo>
-                  <a:lnTo>
-                    <a:pt x="694444" y="1943937"/>
-                  </a:lnTo>
-                  <a:lnTo>
-                    <a:pt x="616810" y="1910326"/>
-                  </a:lnTo>
-                  <a:lnTo>
-                    <a:pt x="539176" y="1876055"/>
-                  </a:lnTo>
-                  <a:lnTo>
-                    <a:pt x="461542" y="1841110"/>
-                  </a:lnTo>
-                  <a:lnTo>
-                    <a:pt x="383908" y="1805477"/>
-                  </a:lnTo>
-                  <a:lnTo>
-                    <a:pt x="306274" y="1769144"/>
-                  </a:lnTo>
-                  <a:lnTo>
-                    <a:pt x="228640" y="1732095"/>
-                  </a:lnTo>
-                  <a:lnTo>
-                    <a:pt x="151006" y="1694318"/>
-                  </a:lnTo>
-                  <a:lnTo>
-                    <a:pt x="73372" y="1655798"/>
-                  </a:lnTo>
-                  <a:lnTo>
-                    <a:pt x="0" y="1618677"/>
+                    <a:pt x="1548419" y="89714"/>
+                  </a:lnTo>
+                  <a:lnTo>
+                    <a:pt x="1626053" y="285839"/>
+                  </a:lnTo>
+                  <a:lnTo>
+                    <a:pt x="1703687" y="470631"/>
+                  </a:lnTo>
+                  <a:lnTo>
+                    <a:pt x="1781321" y="644745"/>
+                  </a:lnTo>
+                  <a:lnTo>
+                    <a:pt x="1858955" y="808798"/>
+                  </a:lnTo>
+                  <a:lnTo>
+                    <a:pt x="1936589" y="963371"/>
+                  </a:lnTo>
+                  <a:lnTo>
+                    <a:pt x="2014223" y="1109011"/>
+                  </a:lnTo>
+                  <a:lnTo>
+                    <a:pt x="2091857" y="1246236"/>
+                  </a:lnTo>
+                  <a:lnTo>
+                    <a:pt x="2169491" y="1375531"/>
+                  </a:lnTo>
+                  <a:lnTo>
+                    <a:pt x="2247125" y="1497355"/>
+                  </a:lnTo>
+                  <a:lnTo>
+                    <a:pt x="2324759" y="1612140"/>
+                  </a:lnTo>
+                  <a:lnTo>
+                    <a:pt x="2402393" y="1720291"/>
+                  </a:lnTo>
+                  <a:lnTo>
+                    <a:pt x="2480027" y="1822193"/>
+                  </a:lnTo>
+                  <a:lnTo>
+                    <a:pt x="2557661" y="1918206"/>
+                  </a:lnTo>
+                  <a:lnTo>
+                    <a:pt x="2635295" y="2008671"/>
+                  </a:lnTo>
+                  <a:lnTo>
+                    <a:pt x="2712930" y="2093909"/>
+                  </a:lnTo>
+                  <a:lnTo>
+                    <a:pt x="2790564" y="2174221"/>
+                  </a:lnTo>
+                  <a:lnTo>
+                    <a:pt x="2868198" y="2249893"/>
+                  </a:lnTo>
+                  <a:lnTo>
+                    <a:pt x="2945832" y="2321191"/>
+                  </a:lnTo>
+                  <a:lnTo>
+                    <a:pt x="3023466" y="2388370"/>
+                  </a:lnTo>
+                  <a:lnTo>
+                    <a:pt x="3101100" y="2451667"/>
+                  </a:lnTo>
+                  <a:lnTo>
+                    <a:pt x="3178734" y="2511306"/>
+                  </a:lnTo>
+                  <a:lnTo>
+                    <a:pt x="3256368" y="2567498"/>
+                  </a:lnTo>
+                  <a:lnTo>
+                    <a:pt x="3334002" y="2620444"/>
+                  </a:lnTo>
+                  <a:lnTo>
+                    <a:pt x="3411636" y="2659569"/>
+                  </a:lnTo>
+                  <a:lnTo>
+                    <a:pt x="3489270" y="2675468"/>
+                  </a:lnTo>
+                  <a:lnTo>
+                    <a:pt x="3566904" y="2691060"/>
+                  </a:lnTo>
+                  <a:lnTo>
+                    <a:pt x="3644538" y="2706351"/>
+                  </a:lnTo>
+                  <a:lnTo>
+                    <a:pt x="3722172" y="2721347"/>
+                  </a:lnTo>
+                  <a:lnTo>
+                    <a:pt x="3799806" y="2736055"/>
+                  </a:lnTo>
+                  <a:lnTo>
+                    <a:pt x="3877440" y="2750478"/>
+                  </a:lnTo>
+                  <a:lnTo>
+                    <a:pt x="3955074" y="2764623"/>
+                  </a:lnTo>
+                  <a:lnTo>
+                    <a:pt x="4032708" y="2778495"/>
+                  </a:lnTo>
+                  <a:lnTo>
+                    <a:pt x="4110342" y="2792100"/>
+                  </a:lnTo>
+                  <a:lnTo>
+                    <a:pt x="4187976" y="2805442"/>
+                  </a:lnTo>
+                  <a:lnTo>
+                    <a:pt x="4265610" y="2818527"/>
+                  </a:lnTo>
+                  <a:lnTo>
+                    <a:pt x="4343244" y="2831359"/>
+                  </a:lnTo>
+                  <a:lnTo>
+                    <a:pt x="4420879" y="2843944"/>
+                  </a:lnTo>
+                  <a:lnTo>
+                    <a:pt x="4498513" y="2856286"/>
+                  </a:lnTo>
+                  <a:lnTo>
+                    <a:pt x="4576147" y="2868390"/>
+                  </a:lnTo>
+                  <a:lnTo>
+                    <a:pt x="4653781" y="2880261"/>
+                  </a:lnTo>
+                  <a:lnTo>
+                    <a:pt x="4731415" y="2891902"/>
+                  </a:lnTo>
+                  <a:lnTo>
+                    <a:pt x="4809049" y="2903319"/>
+                  </a:lnTo>
+                  <a:lnTo>
+                    <a:pt x="4886683" y="2914516"/>
+                  </a:lnTo>
+                  <a:lnTo>
+                    <a:pt x="4964317" y="2925497"/>
+                  </a:lnTo>
+                  <a:lnTo>
+                    <a:pt x="5041951" y="2936265"/>
+                  </a:lnTo>
+                  <a:lnTo>
+                    <a:pt x="5119585" y="2946827"/>
+                  </a:lnTo>
+                  <a:lnTo>
+                    <a:pt x="5197219" y="2957184"/>
+                  </a:lnTo>
+                  <a:lnTo>
+                    <a:pt x="5274853" y="2967342"/>
+                  </a:lnTo>
+                  <a:lnTo>
+                    <a:pt x="5352487" y="2977303"/>
+                  </a:lnTo>
+                  <a:lnTo>
+                    <a:pt x="5430121" y="2987073"/>
+                  </a:lnTo>
+                  <a:lnTo>
+                    <a:pt x="5507755" y="2996654"/>
+                  </a:lnTo>
+                  <a:lnTo>
+                    <a:pt x="5585389" y="3006050"/>
+                  </a:lnTo>
+                  <a:lnTo>
+                    <a:pt x="5663023" y="3015265"/>
+                  </a:lnTo>
+                  <a:lnTo>
+                    <a:pt x="5740657" y="3024302"/>
+                  </a:lnTo>
+                  <a:lnTo>
+                    <a:pt x="5818291" y="3033165"/>
+                  </a:lnTo>
+                  <a:lnTo>
+                    <a:pt x="5895925" y="3041857"/>
+                  </a:lnTo>
+                  <a:lnTo>
+                    <a:pt x="5973559" y="3050381"/>
+                  </a:lnTo>
+                  <a:lnTo>
+                    <a:pt x="6051193" y="3058741"/>
+                  </a:lnTo>
+                  <a:lnTo>
+                    <a:pt x="6128827" y="3066940"/>
+                  </a:lnTo>
+                  <a:lnTo>
+                    <a:pt x="6206462" y="3074980"/>
+                  </a:lnTo>
+                  <a:lnTo>
+                    <a:pt x="6284096" y="3082866"/>
+                  </a:lnTo>
+                  <a:lnTo>
+                    <a:pt x="6361730" y="3090599"/>
+                  </a:lnTo>
+                  <a:lnTo>
+                    <a:pt x="6439364" y="3098183"/>
+                  </a:lnTo>
+                  <a:lnTo>
+                    <a:pt x="6516998" y="3105620"/>
+                  </a:lnTo>
+                  <a:lnTo>
+                    <a:pt x="6594632" y="3112915"/>
+                  </a:lnTo>
+                  <a:lnTo>
+                    <a:pt x="6672266" y="3120068"/>
+                  </a:lnTo>
+                  <a:lnTo>
+                    <a:pt x="6749900" y="3127084"/>
+                  </a:lnTo>
+                  <a:lnTo>
+                    <a:pt x="6827534" y="3133964"/>
+                  </a:lnTo>
+                  <a:lnTo>
+                    <a:pt x="6905168" y="3140711"/>
+                  </a:lnTo>
+                  <a:lnTo>
+                    <a:pt x="6982802" y="3147329"/>
+                  </a:lnTo>
+                  <a:lnTo>
+                    <a:pt x="7060436" y="3153818"/>
+                  </a:lnTo>
+                  <a:lnTo>
+                    <a:pt x="7138070" y="3160183"/>
+                  </a:lnTo>
+                  <a:lnTo>
+                    <a:pt x="7215704" y="3166424"/>
+                  </a:lnTo>
+                  <a:lnTo>
+                    <a:pt x="7293338" y="3172546"/>
+                  </a:lnTo>
+                  <a:lnTo>
+                    <a:pt x="7370972" y="3178549"/>
+                  </a:lnTo>
+                  <a:lnTo>
+                    <a:pt x="7370972" y="3444666"/>
+                  </a:lnTo>
+                  <a:lnTo>
+                    <a:pt x="7293338" y="3442270"/>
+                  </a:lnTo>
+                  <a:lnTo>
+                    <a:pt x="7215704" y="3439726"/>
+                  </a:lnTo>
+                  <a:lnTo>
+                    <a:pt x="7138070" y="3437026"/>
+                  </a:lnTo>
+                  <a:lnTo>
+                    <a:pt x="7060436" y="3434161"/>
+                  </a:lnTo>
+                  <a:lnTo>
+                    <a:pt x="6982802" y="3431120"/>
+                  </a:lnTo>
+                  <a:lnTo>
+                    <a:pt x="6905168" y="3427892"/>
+                  </a:lnTo>
+                  <a:lnTo>
+                    <a:pt x="6827534" y="3424467"/>
+                  </a:lnTo>
+                  <a:lnTo>
+                    <a:pt x="6749900" y="3420831"/>
+                  </a:lnTo>
+                  <a:lnTo>
+                    <a:pt x="6672266" y="3416972"/>
+                  </a:lnTo>
+                  <a:lnTo>
+                    <a:pt x="6594632" y="3412877"/>
+                  </a:lnTo>
+                  <a:lnTo>
+                    <a:pt x="6516998" y="3408531"/>
+                  </a:lnTo>
+                  <a:lnTo>
+                    <a:pt x="6439364" y="3403918"/>
+                  </a:lnTo>
+                  <a:lnTo>
+                    <a:pt x="6361730" y="3399022"/>
+                  </a:lnTo>
+                  <a:lnTo>
+                    <a:pt x="6284096" y="3393826"/>
+                  </a:lnTo>
+                  <a:lnTo>
+                    <a:pt x="6206462" y="3388311"/>
+                  </a:lnTo>
+                  <a:lnTo>
+                    <a:pt x="6128827" y="3382458"/>
+                  </a:lnTo>
+                  <a:lnTo>
+                    <a:pt x="6051193" y="3376246"/>
+                  </a:lnTo>
+                  <a:lnTo>
+                    <a:pt x="5973559" y="3369654"/>
+                  </a:lnTo>
+                  <a:lnTo>
+                    <a:pt x="5895925" y="3362656"/>
+                  </a:lnTo>
+                  <a:lnTo>
+                    <a:pt x="5818291" y="3355230"/>
+                  </a:lnTo>
+                  <a:lnTo>
+                    <a:pt x="5740657" y="3347348"/>
+                  </a:lnTo>
+                  <a:lnTo>
+                    <a:pt x="5663023" y="3338983"/>
+                  </a:lnTo>
+                  <a:lnTo>
+                    <a:pt x="5585389" y="3330105"/>
+                  </a:lnTo>
+                  <a:lnTo>
+                    <a:pt x="5507755" y="3320682"/>
+                  </a:lnTo>
+                  <a:lnTo>
+                    <a:pt x="5430121" y="3310681"/>
+                  </a:lnTo>
+                  <a:lnTo>
+                    <a:pt x="5352487" y="3300067"/>
+                  </a:lnTo>
+                  <a:lnTo>
+                    <a:pt x="5274853" y="3288803"/>
+                  </a:lnTo>
+                  <a:lnTo>
+                    <a:pt x="5197219" y="3276847"/>
+                  </a:lnTo>
+                  <a:lnTo>
+                    <a:pt x="5119585" y="3264158"/>
+                  </a:lnTo>
+                  <a:lnTo>
+                    <a:pt x="5041951" y="3250691"/>
+                  </a:lnTo>
+                  <a:lnTo>
+                    <a:pt x="4964317" y="3236397"/>
+                  </a:lnTo>
+                  <a:lnTo>
+                    <a:pt x="4886683" y="3221228"/>
+                  </a:lnTo>
+                  <a:lnTo>
+                    <a:pt x="4809049" y="3205128"/>
+                  </a:lnTo>
+                  <a:lnTo>
+                    <a:pt x="4731415" y="3188040"/>
+                  </a:lnTo>
+                  <a:lnTo>
+                    <a:pt x="4653781" y="3169905"/>
+                  </a:lnTo>
+                  <a:lnTo>
+                    <a:pt x="4576147" y="3150657"/>
+                  </a:lnTo>
+                  <a:lnTo>
+                    <a:pt x="4498513" y="3130229"/>
+                  </a:lnTo>
+                  <a:lnTo>
+                    <a:pt x="4420879" y="3108548"/>
+                  </a:lnTo>
+                  <a:lnTo>
+                    <a:pt x="4343244" y="3085537"/>
+                  </a:lnTo>
+                  <a:lnTo>
+                    <a:pt x="4265610" y="3061115"/>
+                  </a:lnTo>
+                  <a:lnTo>
+                    <a:pt x="4187976" y="3035196"/>
+                  </a:lnTo>
+                  <a:lnTo>
+                    <a:pt x="4110342" y="3007687"/>
+                  </a:lnTo>
+                  <a:lnTo>
+                    <a:pt x="4032708" y="2978490"/>
+                  </a:lnTo>
+                  <a:lnTo>
+                    <a:pt x="3955074" y="2947503"/>
+                  </a:lnTo>
+                  <a:lnTo>
+                    <a:pt x="3877440" y="2914616"/>
+                  </a:lnTo>
+                  <a:lnTo>
+                    <a:pt x="3799806" y="2879711"/>
+                  </a:lnTo>
+                  <a:lnTo>
+                    <a:pt x="3722172" y="2842666"/>
+                  </a:lnTo>
+                  <a:lnTo>
+                    <a:pt x="3644538" y="2803349"/>
+                  </a:lnTo>
+                  <a:lnTo>
+                    <a:pt x="3566904" y="2761621"/>
+                  </a:lnTo>
+                  <a:lnTo>
+                    <a:pt x="3489270" y="2717334"/>
+                  </a:lnTo>
+                  <a:lnTo>
+                    <a:pt x="3411636" y="2670330"/>
+                  </a:lnTo>
+                  <a:lnTo>
+                    <a:pt x="3334002" y="2643358"/>
+                  </a:lnTo>
+                  <a:lnTo>
+                    <a:pt x="3256368" y="2626827"/>
+                  </a:lnTo>
+                  <a:lnTo>
+                    <a:pt x="3178734" y="2609972"/>
+                  </a:lnTo>
+                  <a:lnTo>
+                    <a:pt x="3101100" y="2592785"/>
+                  </a:lnTo>
+                  <a:lnTo>
+                    <a:pt x="3023466" y="2575259"/>
+                  </a:lnTo>
+                  <a:lnTo>
+                    <a:pt x="2945832" y="2557390"/>
+                  </a:lnTo>
+                  <a:lnTo>
+                    <a:pt x="2868198" y="2539168"/>
+                  </a:lnTo>
+                  <a:lnTo>
+                    <a:pt x="2790564" y="2520588"/>
+                  </a:lnTo>
+                  <a:lnTo>
+                    <a:pt x="2712930" y="2501643"/>
+                  </a:lnTo>
+                  <a:lnTo>
+                    <a:pt x="2635295" y="2482325"/>
+                  </a:lnTo>
+                  <a:lnTo>
+                    <a:pt x="2557661" y="2462627"/>
+                  </a:lnTo>
+                  <a:lnTo>
+                    <a:pt x="2480027" y="2442542"/>
+                  </a:lnTo>
+                  <a:lnTo>
+                    <a:pt x="2402393" y="2422062"/>
+                  </a:lnTo>
+                  <a:lnTo>
+                    <a:pt x="2324759" y="2401179"/>
+                  </a:lnTo>
+                  <a:lnTo>
+                    <a:pt x="2247125" y="2379885"/>
+                  </a:lnTo>
+                  <a:lnTo>
+                    <a:pt x="2169491" y="2358172"/>
+                  </a:lnTo>
+                  <a:lnTo>
+                    <a:pt x="2091857" y="2336032"/>
+                  </a:lnTo>
+                  <a:lnTo>
+                    <a:pt x="2014223" y="2313456"/>
+                  </a:lnTo>
+                  <a:lnTo>
+                    <a:pt x="1936589" y="2290437"/>
+                  </a:lnTo>
+                  <a:lnTo>
+                    <a:pt x="1858955" y="2266964"/>
+                  </a:lnTo>
+                  <a:lnTo>
+                    <a:pt x="1781321" y="2243030"/>
+                  </a:lnTo>
+                  <a:lnTo>
+                    <a:pt x="1703687" y="2218626"/>
+                  </a:lnTo>
+                  <a:lnTo>
+                    <a:pt x="1626053" y="2193741"/>
+                  </a:lnTo>
+                  <a:lnTo>
+                    <a:pt x="1548419" y="2168367"/>
+                  </a:lnTo>
+                  <a:lnTo>
+                    <a:pt x="1470785" y="2142493"/>
+                  </a:lnTo>
+                  <a:lnTo>
+                    <a:pt x="1393151" y="2116111"/>
+                  </a:lnTo>
+                  <a:lnTo>
+                    <a:pt x="1315517" y="2089210"/>
+                  </a:lnTo>
+                  <a:lnTo>
+                    <a:pt x="1237883" y="2061779"/>
+                  </a:lnTo>
+                  <a:lnTo>
+                    <a:pt x="1160249" y="2033809"/>
+                  </a:lnTo>
+                  <a:lnTo>
+                    <a:pt x="1082615" y="2005289"/>
+                  </a:lnTo>
+                  <a:lnTo>
+                    <a:pt x="1004981" y="1976208"/>
+                  </a:lnTo>
+                  <a:lnTo>
+                    <a:pt x="927346" y="1946555"/>
+                  </a:lnTo>
+                  <a:lnTo>
+                    <a:pt x="849712" y="1916318"/>
+                  </a:lnTo>
+                  <a:lnTo>
+                    <a:pt x="772078" y="1885487"/>
+                  </a:lnTo>
+                  <a:lnTo>
+                    <a:pt x="694444" y="1854050"/>
+                  </a:lnTo>
+                  <a:lnTo>
+                    <a:pt x="616810" y="1821994"/>
+                  </a:lnTo>
+                  <a:lnTo>
+                    <a:pt x="539176" y="1789307"/>
+                  </a:lnTo>
+                  <a:lnTo>
+                    <a:pt x="461542" y="1755978"/>
+                  </a:lnTo>
+                  <a:lnTo>
+                    <a:pt x="383908" y="1721993"/>
+                  </a:lnTo>
+                  <a:lnTo>
+                    <a:pt x="306274" y="1687339"/>
+                  </a:lnTo>
+                  <a:lnTo>
+                    <a:pt x="228640" y="1652004"/>
+                  </a:lnTo>
+                  <a:lnTo>
+                    <a:pt x="151006" y="1615974"/>
+                  </a:lnTo>
+                  <a:lnTo>
+                    <a:pt x="73372" y="1579235"/>
+                  </a:lnTo>
+                  <a:lnTo>
+                    <a:pt x="0" y="1543829"/>
                   </a:lnTo>
                   <a:close/>
                 </a:path>
@@ -3552,243 +3552,243 @@
           </p:nvSpPr>
           <p:spPr>
             <a:xfrm>
-              <a:off x="2332476" y="1896563"/>
-              <a:ext cx="5856013" cy="3332649"/>
+              <a:off x="2332476" y="2073503"/>
+              <a:ext cx="5856013" cy="3178549"/>
             </a:xfrm>
             <a:custGeom>
               <a:avLst/>
               <a:pathLst>
-                <a:path w="5856013" h="3332649">
+                <a:path w="5856013" h="3178549">
                   <a:moveTo>
                     <a:pt x="0" y="0"/>
                   </a:moveTo>
                   <a:lnTo>
-                    <a:pt x="33460" y="94064"/>
-                  </a:lnTo>
-                  <a:lnTo>
-                    <a:pt x="111094" y="299697"/>
-                  </a:lnTo>
-                  <a:lnTo>
-                    <a:pt x="188728" y="493448"/>
-                  </a:lnTo>
-                  <a:lnTo>
-                    <a:pt x="266362" y="676003"/>
-                  </a:lnTo>
-                  <a:lnTo>
-                    <a:pt x="343996" y="848010"/>
-                  </a:lnTo>
-                  <a:lnTo>
-                    <a:pt x="421630" y="1010076"/>
-                  </a:lnTo>
-                  <a:lnTo>
-                    <a:pt x="499264" y="1162778"/>
-                  </a:lnTo>
-                  <a:lnTo>
-                    <a:pt x="576898" y="1306655"/>
-                  </a:lnTo>
-                  <a:lnTo>
-                    <a:pt x="654532" y="1442219"/>
-                  </a:lnTo>
-                  <a:lnTo>
-                    <a:pt x="732166" y="1569949"/>
-                  </a:lnTo>
-                  <a:lnTo>
-                    <a:pt x="809800" y="1690298"/>
-                  </a:lnTo>
-                  <a:lnTo>
-                    <a:pt x="887434" y="1803693"/>
-                  </a:lnTo>
-                  <a:lnTo>
-                    <a:pt x="965069" y="1910535"/>
-                  </a:lnTo>
-                  <a:lnTo>
-                    <a:pt x="1042703" y="2011204"/>
-                  </a:lnTo>
-                  <a:lnTo>
-                    <a:pt x="1120337" y="2106055"/>
-                  </a:lnTo>
-                  <a:lnTo>
-                    <a:pt x="1197971" y="2195425"/>
-                  </a:lnTo>
-                  <a:lnTo>
-                    <a:pt x="1275605" y="2279631"/>
-                  </a:lnTo>
-                  <a:lnTo>
-                    <a:pt x="1353239" y="2358971"/>
-                  </a:lnTo>
-                  <a:lnTo>
-                    <a:pt x="1430873" y="2433726"/>
-                  </a:lnTo>
-                  <a:lnTo>
-                    <a:pt x="1508507" y="2504161"/>
-                  </a:lnTo>
-                  <a:lnTo>
-                    <a:pt x="1586141" y="2570527"/>
-                  </a:lnTo>
-                  <a:lnTo>
-                    <a:pt x="1663775" y="2633057"/>
-                  </a:lnTo>
-                  <a:lnTo>
-                    <a:pt x="1741409" y="2691974"/>
-                  </a:lnTo>
-                  <a:lnTo>
-                    <a:pt x="1819043" y="2747487"/>
-                  </a:lnTo>
-                  <a:lnTo>
-                    <a:pt x="1896677" y="2788509"/>
-                  </a:lnTo>
-                  <a:lnTo>
-                    <a:pt x="1974311" y="2805178"/>
-                  </a:lnTo>
-                  <a:lnTo>
-                    <a:pt x="2051945" y="2821526"/>
-                  </a:lnTo>
-                  <a:lnTo>
-                    <a:pt x="2129579" y="2837559"/>
-                  </a:lnTo>
-                  <a:lnTo>
-                    <a:pt x="2207213" y="2853282"/>
-                  </a:lnTo>
-                  <a:lnTo>
-                    <a:pt x="2284847" y="2868702"/>
-                  </a:lnTo>
-                  <a:lnTo>
-                    <a:pt x="2362481" y="2883825"/>
-                  </a:lnTo>
-                  <a:lnTo>
-                    <a:pt x="2440115" y="2898656"/>
-                  </a:lnTo>
-                  <a:lnTo>
-                    <a:pt x="2517749" y="2913201"/>
-                  </a:lnTo>
-                  <a:lnTo>
-                    <a:pt x="2595383" y="2927465"/>
-                  </a:lnTo>
-                  <a:lnTo>
-                    <a:pt x="2673017" y="2941454"/>
-                  </a:lnTo>
-                  <a:lnTo>
-                    <a:pt x="2750652" y="2955173"/>
-                  </a:lnTo>
-                  <a:lnTo>
-                    <a:pt x="2828286" y="2968627"/>
-                  </a:lnTo>
-                  <a:lnTo>
-                    <a:pt x="2905920" y="2981822"/>
-                  </a:lnTo>
-                  <a:lnTo>
-                    <a:pt x="2983554" y="2994763"/>
-                  </a:lnTo>
-                  <a:lnTo>
-                    <a:pt x="3061188" y="3007454"/>
-                  </a:lnTo>
-                  <a:lnTo>
-                    <a:pt x="3138822" y="3019900"/>
-                  </a:lnTo>
-                  <a:lnTo>
-                    <a:pt x="3216456" y="3032106"/>
-                  </a:lnTo>
-                  <a:lnTo>
-                    <a:pt x="3294090" y="3044076"/>
-                  </a:lnTo>
-                  <a:lnTo>
-                    <a:pt x="3371724" y="3055816"/>
-                  </a:lnTo>
-                  <a:lnTo>
-                    <a:pt x="3449358" y="3067329"/>
-                  </a:lnTo>
-                  <a:lnTo>
-                    <a:pt x="3526992" y="3078620"/>
-                  </a:lnTo>
-                  <a:lnTo>
-                    <a:pt x="3604626" y="3089693"/>
-                  </a:lnTo>
-                  <a:lnTo>
-                    <a:pt x="3682260" y="3100552"/>
-                  </a:lnTo>
-                  <a:lnTo>
-                    <a:pt x="3759894" y="3111203"/>
-                  </a:lnTo>
-                  <a:lnTo>
-                    <a:pt x="3837528" y="3121647"/>
-                  </a:lnTo>
-                  <a:lnTo>
-                    <a:pt x="3915162" y="3131890"/>
-                  </a:lnTo>
-                  <a:lnTo>
-                    <a:pt x="3992796" y="3141936"/>
-                  </a:lnTo>
-                  <a:lnTo>
-                    <a:pt x="4070430" y="3151788"/>
-                  </a:lnTo>
-                  <a:lnTo>
-                    <a:pt x="4148064" y="3161449"/>
-                  </a:lnTo>
-                  <a:lnTo>
-                    <a:pt x="4225698" y="3170925"/>
-                  </a:lnTo>
-                  <a:lnTo>
-                    <a:pt x="4303332" y="3180217"/>
-                  </a:lnTo>
-                  <a:lnTo>
-                    <a:pt x="4380966" y="3189331"/>
-                  </a:lnTo>
-                  <a:lnTo>
-                    <a:pt x="4458601" y="3198268"/>
-                  </a:lnTo>
-                  <a:lnTo>
-                    <a:pt x="4536235" y="3207033"/>
-                  </a:lnTo>
-                  <a:lnTo>
-                    <a:pt x="4613869" y="3215629"/>
-                  </a:lnTo>
-                  <a:lnTo>
-                    <a:pt x="4691503" y="3224060"/>
-                  </a:lnTo>
-                  <a:lnTo>
-                    <a:pt x="4769137" y="3232327"/>
-                  </a:lnTo>
-                  <a:lnTo>
-                    <a:pt x="4846771" y="3240435"/>
-                  </a:lnTo>
-                  <a:lnTo>
-                    <a:pt x="4924405" y="3248387"/>
-                  </a:lnTo>
-                  <a:lnTo>
-                    <a:pt x="5002039" y="3256185"/>
-                  </a:lnTo>
-                  <a:lnTo>
-                    <a:pt x="5079673" y="3263833"/>
-                  </a:lnTo>
-                  <a:lnTo>
-                    <a:pt x="5157307" y="3271333"/>
-                  </a:lnTo>
-                  <a:lnTo>
-                    <a:pt x="5234941" y="3278689"/>
-                  </a:lnTo>
-                  <a:lnTo>
-                    <a:pt x="5312575" y="3285903"/>
-                  </a:lnTo>
-                  <a:lnTo>
-                    <a:pt x="5390209" y="3292977"/>
-                  </a:lnTo>
-                  <a:lnTo>
-                    <a:pt x="5467843" y="3299916"/>
-                  </a:lnTo>
-                  <a:lnTo>
-                    <a:pt x="5545477" y="3306720"/>
-                  </a:lnTo>
-                  <a:lnTo>
-                    <a:pt x="5623111" y="3313393"/>
-                  </a:lnTo>
-                  <a:lnTo>
-                    <a:pt x="5700745" y="3319937"/>
-                  </a:lnTo>
-                  <a:lnTo>
-                    <a:pt x="5778379" y="3326355"/>
-                  </a:lnTo>
-                  <a:lnTo>
-                    <a:pt x="5856013" y="3332649"/>
+                    <a:pt x="33460" y="89714"/>
+                  </a:lnTo>
+                  <a:lnTo>
+                    <a:pt x="111094" y="285839"/>
+                  </a:lnTo>
+                  <a:lnTo>
+                    <a:pt x="188728" y="470631"/>
+                  </a:lnTo>
+                  <a:lnTo>
+                    <a:pt x="266362" y="644745"/>
+                  </a:lnTo>
+                  <a:lnTo>
+                    <a:pt x="343996" y="808798"/>
+                  </a:lnTo>
+                  <a:lnTo>
+                    <a:pt x="421630" y="963371"/>
+                  </a:lnTo>
+                  <a:lnTo>
+                    <a:pt x="499264" y="1109011"/>
+                  </a:lnTo>
+                  <a:lnTo>
+                    <a:pt x="576898" y="1246236"/>
+                  </a:lnTo>
+                  <a:lnTo>
+                    <a:pt x="654532" y="1375531"/>
+                  </a:lnTo>
+                  <a:lnTo>
+                    <a:pt x="732166" y="1497355"/>
+                  </a:lnTo>
+                  <a:lnTo>
+                    <a:pt x="809800" y="1612140"/>
+                  </a:lnTo>
+                  <a:lnTo>
+                    <a:pt x="887434" y="1720291"/>
+                  </a:lnTo>
+                  <a:lnTo>
+                    <a:pt x="965069" y="1822193"/>
+                  </a:lnTo>
+                  <a:lnTo>
+                    <a:pt x="1042703" y="1918206"/>
+                  </a:lnTo>
+                  <a:lnTo>
+                    <a:pt x="1120337" y="2008671"/>
+                  </a:lnTo>
+                  <a:lnTo>
+                    <a:pt x="1197971" y="2093909"/>
+                  </a:lnTo>
+                  <a:lnTo>
+                    <a:pt x="1275605" y="2174221"/>
+                  </a:lnTo>
+                  <a:lnTo>
+                    <a:pt x="1353239" y="2249893"/>
+                  </a:lnTo>
+                  <a:lnTo>
+                    <a:pt x="1430873" y="2321191"/>
+                  </a:lnTo>
+                  <a:lnTo>
+                    <a:pt x="1508507" y="2388370"/>
+                  </a:lnTo>
+                  <a:lnTo>
+                    <a:pt x="1586141" y="2451667"/>
+                  </a:lnTo>
+                  <a:lnTo>
+                    <a:pt x="1663775" y="2511306"/>
+                  </a:lnTo>
+                  <a:lnTo>
+                    <a:pt x="1741409" y="2567498"/>
+                  </a:lnTo>
+                  <a:lnTo>
+                    <a:pt x="1819043" y="2620444"/>
+                  </a:lnTo>
+                  <a:lnTo>
+                    <a:pt x="1896677" y="2659569"/>
+                  </a:lnTo>
+                  <a:lnTo>
+                    <a:pt x="1974311" y="2675468"/>
+                  </a:lnTo>
+                  <a:lnTo>
+                    <a:pt x="2051945" y="2691060"/>
+                  </a:lnTo>
+                  <a:lnTo>
+                    <a:pt x="2129579" y="2706351"/>
+                  </a:lnTo>
+                  <a:lnTo>
+                    <a:pt x="2207213" y="2721347"/>
+                  </a:lnTo>
+                  <a:lnTo>
+                    <a:pt x="2284847" y="2736055"/>
+                  </a:lnTo>
+                  <a:lnTo>
+                    <a:pt x="2362481" y="2750478"/>
+                  </a:lnTo>
+                  <a:lnTo>
+                    <a:pt x="2440115" y="2764623"/>
+                  </a:lnTo>
+                  <a:lnTo>
+                    <a:pt x="2517749" y="2778495"/>
+                  </a:lnTo>
+                  <a:lnTo>
+                    <a:pt x="2595383" y="2792100"/>
+                  </a:lnTo>
+                  <a:lnTo>
+                    <a:pt x="2673017" y="2805442"/>
+                  </a:lnTo>
+                  <a:lnTo>
+                    <a:pt x="2750652" y="2818527"/>
+                  </a:lnTo>
+                  <a:lnTo>
+                    <a:pt x="2828286" y="2831359"/>
+                  </a:lnTo>
+                  <a:lnTo>
+                    <a:pt x="2905920" y="2843944"/>
+                  </a:lnTo>
+                  <a:lnTo>
+                    <a:pt x="2983554" y="2856286"/>
+                  </a:lnTo>
+                  <a:lnTo>
+                    <a:pt x="3061188" y="2868390"/>
+                  </a:lnTo>
+                  <a:lnTo>
+                    <a:pt x="3138822" y="2880261"/>
+                  </a:lnTo>
+                  <a:lnTo>
+                    <a:pt x="3216456" y="2891902"/>
+                  </a:lnTo>
+                  <a:lnTo>
+                    <a:pt x="3294090" y="2903319"/>
+                  </a:lnTo>
+                  <a:lnTo>
+                    <a:pt x="3371724" y="2914516"/>
+                  </a:lnTo>
+                  <a:lnTo>
+                    <a:pt x="3449358" y="2925497"/>
+                  </a:lnTo>
+                  <a:lnTo>
+                    <a:pt x="3526992" y="2936265"/>
+                  </a:lnTo>
+                  <a:lnTo>
+                    <a:pt x="3604626" y="2946827"/>
+                  </a:lnTo>
+                  <a:lnTo>
+                    <a:pt x="3682260" y="2957184"/>
+                  </a:lnTo>
+                  <a:lnTo>
+                    <a:pt x="3759894" y="2967342"/>
+                  </a:lnTo>
+                  <a:lnTo>
+                    <a:pt x="3837528" y="2977303"/>
+                  </a:lnTo>
+                  <a:lnTo>
+                    <a:pt x="3915162" y="2987073"/>
+                  </a:lnTo>
+                  <a:lnTo>
+                    <a:pt x="3992796" y="2996654"/>
+                  </a:lnTo>
+                  <a:lnTo>
+                    <a:pt x="4070430" y="3006050"/>
+                  </a:lnTo>
+                  <a:lnTo>
+                    <a:pt x="4148064" y="3015265"/>
+                  </a:lnTo>
+                  <a:lnTo>
+                    <a:pt x="4225698" y="3024302"/>
+                  </a:lnTo>
+                  <a:lnTo>
+                    <a:pt x="4303332" y="3033165"/>
+                  </a:lnTo>
+                  <a:lnTo>
+                    <a:pt x="4380966" y="3041857"/>
+                  </a:lnTo>
+                  <a:lnTo>
+                    <a:pt x="4458601" y="3050381"/>
+                  </a:lnTo>
+                  <a:lnTo>
+                    <a:pt x="4536235" y="3058741"/>
+                  </a:lnTo>
+                  <a:lnTo>
+                    <a:pt x="4613869" y="3066940"/>
+                  </a:lnTo>
+                  <a:lnTo>
+                    <a:pt x="4691503" y="3074980"/>
+                  </a:lnTo>
+                  <a:lnTo>
+                    <a:pt x="4769137" y="3082866"/>
+                  </a:lnTo>
+                  <a:lnTo>
+                    <a:pt x="4846771" y="3090599"/>
+                  </a:lnTo>
+                  <a:lnTo>
+                    <a:pt x="4924405" y="3098183"/>
+                  </a:lnTo>
+                  <a:lnTo>
+                    <a:pt x="5002039" y="3105620"/>
+                  </a:lnTo>
+                  <a:lnTo>
+                    <a:pt x="5079673" y="3112915"/>
+                  </a:lnTo>
+                  <a:lnTo>
+                    <a:pt x="5157307" y="3120068"/>
+                  </a:lnTo>
+                  <a:lnTo>
+                    <a:pt x="5234941" y="3127084"/>
+                  </a:lnTo>
+                  <a:lnTo>
+                    <a:pt x="5312575" y="3133964"/>
+                  </a:lnTo>
+                  <a:lnTo>
+                    <a:pt x="5390209" y="3140711"/>
+                  </a:lnTo>
+                  <a:lnTo>
+                    <a:pt x="5467843" y="3147329"/>
+                  </a:lnTo>
+                  <a:lnTo>
+                    <a:pt x="5545477" y="3153818"/>
+                  </a:lnTo>
+                  <a:lnTo>
+                    <a:pt x="5623111" y="3160183"/>
+                  </a:lnTo>
+                  <a:lnTo>
+                    <a:pt x="5700745" y="3166424"/>
+                  </a:lnTo>
+                  <a:lnTo>
+                    <a:pt x="5778379" y="3172546"/>
+                  </a:lnTo>
+                  <a:lnTo>
+                    <a:pt x="5856013" y="3178549"/>
                   </a:lnTo>
                 </a:path>
               </a:pathLst>
@@ -3808,297 +3808,297 @@
           </p:nvSpPr>
           <p:spPr>
             <a:xfrm>
-              <a:off x="817517" y="3515240"/>
-              <a:ext cx="7370972" cy="1992992"/>
+              <a:off x="817517" y="3617333"/>
+              <a:ext cx="7370972" cy="1900836"/>
             </a:xfrm>
             <a:custGeom>
               <a:avLst/>
               <a:pathLst>
-                <a:path w="7370972" h="1992992">
+                <a:path w="7370972" h="1900836">
                   <a:moveTo>
-                    <a:pt x="7370972" y="1992992"/>
+                    <a:pt x="7370972" y="1900836"/>
                   </a:moveTo>
                   <a:lnTo>
-                    <a:pt x="7293338" y="1990479"/>
-                  </a:lnTo>
-                  <a:lnTo>
-                    <a:pt x="7215704" y="1987811"/>
-                  </a:lnTo>
-                  <a:lnTo>
-                    <a:pt x="7138070" y="1984981"/>
-                  </a:lnTo>
-                  <a:lnTo>
-                    <a:pt x="7060436" y="1981977"/>
-                  </a:lnTo>
-                  <a:lnTo>
-                    <a:pt x="6982802" y="1978788"/>
-                  </a:lnTo>
-                  <a:lnTo>
-                    <a:pt x="6905168" y="1975404"/>
-                  </a:lnTo>
-                  <a:lnTo>
-                    <a:pt x="6827534" y="1971813"/>
-                  </a:lnTo>
-                  <a:lnTo>
-                    <a:pt x="6749900" y="1968001"/>
-                  </a:lnTo>
-                  <a:lnTo>
-                    <a:pt x="6672266" y="1963955"/>
-                  </a:lnTo>
-                  <a:lnTo>
-                    <a:pt x="6594632" y="1959661"/>
-                  </a:lnTo>
-                  <a:lnTo>
-                    <a:pt x="6516998" y="1955104"/>
-                  </a:lnTo>
-                  <a:lnTo>
-                    <a:pt x="6439364" y="1950268"/>
-                  </a:lnTo>
-                  <a:lnTo>
-                    <a:pt x="6361730" y="1945135"/>
-                  </a:lnTo>
-                  <a:lnTo>
-                    <a:pt x="6284096" y="1939687"/>
-                  </a:lnTo>
-                  <a:lnTo>
-                    <a:pt x="6206462" y="1933904"/>
-                  </a:lnTo>
-                  <a:lnTo>
-                    <a:pt x="6128827" y="1927768"/>
-                  </a:lnTo>
-                  <a:lnTo>
-                    <a:pt x="6051193" y="1921255"/>
-                  </a:lnTo>
-                  <a:lnTo>
-                    <a:pt x="5973559" y="1914342"/>
-                  </a:lnTo>
-                  <a:lnTo>
-                    <a:pt x="5895925" y="1907006"/>
-                  </a:lnTo>
-                  <a:lnTo>
-                    <a:pt x="5818291" y="1899219"/>
-                  </a:lnTo>
-                  <a:lnTo>
-                    <a:pt x="5740657" y="1890955"/>
-                  </a:lnTo>
-                  <a:lnTo>
-                    <a:pt x="5663023" y="1882185"/>
-                  </a:lnTo>
-                  <a:lnTo>
-                    <a:pt x="5585389" y="1872876"/>
-                  </a:lnTo>
-                  <a:lnTo>
-                    <a:pt x="5507755" y="1862996"/>
-                  </a:lnTo>
-                  <a:lnTo>
-                    <a:pt x="5430121" y="1852511"/>
-                  </a:lnTo>
-                  <a:lnTo>
-                    <a:pt x="5352487" y="1841382"/>
-                  </a:lnTo>
-                  <a:lnTo>
-                    <a:pt x="5274853" y="1829571"/>
-                  </a:lnTo>
-                  <a:lnTo>
-                    <a:pt x="5197219" y="1817036"/>
-                  </a:lnTo>
-                  <a:lnTo>
-                    <a:pt x="5119585" y="1803732"/>
-                  </a:lnTo>
-                  <a:lnTo>
-                    <a:pt x="5041951" y="1789612"/>
-                  </a:lnTo>
-                  <a:lnTo>
-                    <a:pt x="4964317" y="1774626"/>
-                  </a:lnTo>
-                  <a:lnTo>
-                    <a:pt x="4886683" y="1758720"/>
-                  </a:lnTo>
-                  <a:lnTo>
-                    <a:pt x="4809049" y="1741840"/>
-                  </a:lnTo>
-                  <a:lnTo>
-                    <a:pt x="4731415" y="1723924"/>
-                  </a:lnTo>
-                  <a:lnTo>
-                    <a:pt x="4653781" y="1704909"/>
-                  </a:lnTo>
-                  <a:lnTo>
-                    <a:pt x="4576147" y="1684728"/>
-                  </a:lnTo>
-                  <a:lnTo>
-                    <a:pt x="4498513" y="1663310"/>
-                  </a:lnTo>
-                  <a:lnTo>
-                    <a:pt x="4420879" y="1640578"/>
-                  </a:lnTo>
-                  <a:lnTo>
-                    <a:pt x="4343244" y="1616451"/>
-                  </a:lnTo>
-                  <a:lnTo>
-                    <a:pt x="4265610" y="1590846"/>
-                  </a:lnTo>
-                  <a:lnTo>
-                    <a:pt x="4187976" y="1563669"/>
-                  </a:lnTo>
-                  <a:lnTo>
-                    <a:pt x="4110342" y="1534826"/>
-                  </a:lnTo>
-                  <a:lnTo>
-                    <a:pt x="4032708" y="1504215"/>
-                  </a:lnTo>
-                  <a:lnTo>
-                    <a:pt x="3955074" y="1471725"/>
-                  </a:lnTo>
-                  <a:lnTo>
-                    <a:pt x="3877440" y="1437243"/>
-                  </a:lnTo>
-                  <a:lnTo>
-                    <a:pt x="3799806" y="1400647"/>
-                  </a:lnTo>
-                  <a:lnTo>
-                    <a:pt x="3722172" y="1361806"/>
-                  </a:lnTo>
-                  <a:lnTo>
-                    <a:pt x="3644538" y="1320583"/>
-                  </a:lnTo>
-                  <a:lnTo>
-                    <a:pt x="3566904" y="1276831"/>
-                  </a:lnTo>
-                  <a:lnTo>
-                    <a:pt x="3489270" y="1230397"/>
-                  </a:lnTo>
-                  <a:lnTo>
-                    <a:pt x="3411636" y="1181115"/>
-                  </a:lnTo>
-                  <a:lnTo>
-                    <a:pt x="3334002" y="1152834"/>
-                  </a:lnTo>
-                  <a:lnTo>
-                    <a:pt x="3256368" y="1135502"/>
-                  </a:lnTo>
-                  <a:lnTo>
-                    <a:pt x="3178734" y="1117830"/>
-                  </a:lnTo>
-                  <a:lnTo>
-                    <a:pt x="3101100" y="1099809"/>
-                  </a:lnTo>
-                  <a:lnTo>
-                    <a:pt x="3023466" y="1081435"/>
-                  </a:lnTo>
-                  <a:lnTo>
-                    <a:pt x="2945832" y="1062698"/>
-                  </a:lnTo>
-                  <a:lnTo>
-                    <a:pt x="2868198" y="1043594"/>
-                  </a:lnTo>
-                  <a:lnTo>
-                    <a:pt x="2790564" y="1024113"/>
-                  </a:lnTo>
-                  <a:lnTo>
-                    <a:pt x="2712930" y="1004249"/>
-                  </a:lnTo>
-                  <a:lnTo>
-                    <a:pt x="2635295" y="983995"/>
-                  </a:lnTo>
-                  <a:lnTo>
-                    <a:pt x="2557661" y="963342"/>
-                  </a:lnTo>
-                  <a:lnTo>
-                    <a:pt x="2480027" y="942283"/>
-                  </a:lnTo>
-                  <a:lnTo>
-                    <a:pt x="2402393" y="920810"/>
-                  </a:lnTo>
-                  <a:lnTo>
-                    <a:pt x="2324759" y="898914"/>
-                  </a:lnTo>
-                  <a:lnTo>
-                    <a:pt x="2247125" y="876588"/>
-                  </a:lnTo>
-                  <a:lnTo>
-                    <a:pt x="2169491" y="853822"/>
-                  </a:lnTo>
-                  <a:lnTo>
-                    <a:pt x="2091857" y="830609"/>
-                  </a:lnTo>
-                  <a:lnTo>
-                    <a:pt x="2014223" y="806939"/>
-                  </a:lnTo>
-                  <a:lnTo>
-                    <a:pt x="1936589" y="782803"/>
-                  </a:lnTo>
-                  <a:lnTo>
-                    <a:pt x="1858955" y="758193"/>
-                  </a:lnTo>
-                  <a:lnTo>
-                    <a:pt x="1781321" y="733099"/>
-                  </a:lnTo>
-                  <a:lnTo>
-                    <a:pt x="1703687" y="707511"/>
-                  </a:lnTo>
-                  <a:lnTo>
-                    <a:pt x="1626053" y="681419"/>
-                  </a:lnTo>
-                  <a:lnTo>
-                    <a:pt x="1548419" y="654815"/>
-                  </a:lnTo>
-                  <a:lnTo>
-                    <a:pt x="1470785" y="627687"/>
-                  </a:lnTo>
-                  <a:lnTo>
-                    <a:pt x="1393151" y="600026"/>
-                  </a:lnTo>
-                  <a:lnTo>
-                    <a:pt x="1315517" y="571820"/>
-                  </a:lnTo>
-                  <a:lnTo>
-                    <a:pt x="1237883" y="543060"/>
-                  </a:lnTo>
-                  <a:lnTo>
-                    <a:pt x="1160249" y="513734"/>
-                  </a:lnTo>
-                  <a:lnTo>
-                    <a:pt x="1082615" y="483831"/>
-                  </a:lnTo>
-                  <a:lnTo>
-                    <a:pt x="1004981" y="453340"/>
-                  </a:lnTo>
-                  <a:lnTo>
-                    <a:pt x="927346" y="422249"/>
-                  </a:lnTo>
-                  <a:lnTo>
-                    <a:pt x="849712" y="390547"/>
-                  </a:lnTo>
-                  <a:lnTo>
-                    <a:pt x="772078" y="358221"/>
-                  </a:lnTo>
-                  <a:lnTo>
-                    <a:pt x="694444" y="325259"/>
-                  </a:lnTo>
-                  <a:lnTo>
-                    <a:pt x="616810" y="291649"/>
-                  </a:lnTo>
-                  <a:lnTo>
-                    <a:pt x="539176" y="257378"/>
-                  </a:lnTo>
-                  <a:lnTo>
-                    <a:pt x="461542" y="222433"/>
-                  </a:lnTo>
-                  <a:lnTo>
-                    <a:pt x="383908" y="186800"/>
-                  </a:lnTo>
-                  <a:lnTo>
-                    <a:pt x="306274" y="150467"/>
-                  </a:lnTo>
-                  <a:lnTo>
-                    <a:pt x="228640" y="113418"/>
-                  </a:lnTo>
-                  <a:lnTo>
-                    <a:pt x="151006" y="75641"/>
-                  </a:lnTo>
-                  <a:lnTo>
-                    <a:pt x="73372" y="37121"/>
+                    <a:pt x="7293338" y="1898440"/>
+                  </a:lnTo>
+                  <a:lnTo>
+                    <a:pt x="7215704" y="1895896"/>
+                  </a:lnTo>
+                  <a:lnTo>
+                    <a:pt x="7138070" y="1893196"/>
+                  </a:lnTo>
+                  <a:lnTo>
+                    <a:pt x="7060436" y="1890331"/>
+                  </a:lnTo>
+                  <a:lnTo>
+                    <a:pt x="6982802" y="1887290"/>
+                  </a:lnTo>
+                  <a:lnTo>
+                    <a:pt x="6905168" y="1884062"/>
+                  </a:lnTo>
+                  <a:lnTo>
+                    <a:pt x="6827534" y="1880637"/>
+                  </a:lnTo>
+                  <a:lnTo>
+                    <a:pt x="6749900" y="1877001"/>
+                  </a:lnTo>
+                  <a:lnTo>
+                    <a:pt x="6672266" y="1873142"/>
+                  </a:lnTo>
+                  <a:lnTo>
+                    <a:pt x="6594632" y="1869047"/>
+                  </a:lnTo>
+                  <a:lnTo>
+                    <a:pt x="6516998" y="1864701"/>
+                  </a:lnTo>
+                  <a:lnTo>
+                    <a:pt x="6439364" y="1860088"/>
+                  </a:lnTo>
+                  <a:lnTo>
+                    <a:pt x="6361730" y="1855192"/>
+                  </a:lnTo>
+                  <a:lnTo>
+                    <a:pt x="6284096" y="1849996"/>
+                  </a:lnTo>
+                  <a:lnTo>
+                    <a:pt x="6206462" y="1844481"/>
+                  </a:lnTo>
+                  <a:lnTo>
+                    <a:pt x="6128827" y="1838628"/>
+                  </a:lnTo>
+                  <a:lnTo>
+                    <a:pt x="6051193" y="1832416"/>
+                  </a:lnTo>
+                  <a:lnTo>
+                    <a:pt x="5973559" y="1825824"/>
+                  </a:lnTo>
+                  <a:lnTo>
+                    <a:pt x="5895925" y="1818826"/>
+                  </a:lnTo>
+                  <a:lnTo>
+                    <a:pt x="5818291" y="1811400"/>
+                  </a:lnTo>
+                  <a:lnTo>
+                    <a:pt x="5740657" y="1803518"/>
+                  </a:lnTo>
+                  <a:lnTo>
+                    <a:pt x="5663023" y="1795153"/>
+                  </a:lnTo>
+                  <a:lnTo>
+                    <a:pt x="5585389" y="1786275"/>
+                  </a:lnTo>
+                  <a:lnTo>
+                    <a:pt x="5507755" y="1776852"/>
+                  </a:lnTo>
+                  <a:lnTo>
+                    <a:pt x="5430121" y="1766851"/>
+                  </a:lnTo>
+                  <a:lnTo>
+                    <a:pt x="5352487" y="1756237"/>
+                  </a:lnTo>
+                  <a:lnTo>
+                    <a:pt x="5274853" y="1744973"/>
+                  </a:lnTo>
+                  <a:lnTo>
+                    <a:pt x="5197219" y="1733017"/>
+                  </a:lnTo>
+                  <a:lnTo>
+                    <a:pt x="5119585" y="1720328"/>
+                  </a:lnTo>
+                  <a:lnTo>
+                    <a:pt x="5041951" y="1706861"/>
+                  </a:lnTo>
+                  <a:lnTo>
+                    <a:pt x="4964317" y="1692567"/>
+                  </a:lnTo>
+                  <a:lnTo>
+                    <a:pt x="4886683" y="1677398"/>
+                  </a:lnTo>
+                  <a:lnTo>
+                    <a:pt x="4809049" y="1661298"/>
+                  </a:lnTo>
+                  <a:lnTo>
+                    <a:pt x="4731415" y="1644210"/>
+                  </a:lnTo>
+                  <a:lnTo>
+                    <a:pt x="4653781" y="1626075"/>
+                  </a:lnTo>
+                  <a:lnTo>
+                    <a:pt x="4576147" y="1606827"/>
+                  </a:lnTo>
+                  <a:lnTo>
+                    <a:pt x="4498513" y="1586399"/>
+                  </a:lnTo>
+                  <a:lnTo>
+                    <a:pt x="4420879" y="1564718"/>
+                  </a:lnTo>
+                  <a:lnTo>
+                    <a:pt x="4343244" y="1541707"/>
+                  </a:lnTo>
+                  <a:lnTo>
+                    <a:pt x="4265610" y="1517285"/>
+                  </a:lnTo>
+                  <a:lnTo>
+                    <a:pt x="4187976" y="1491366"/>
+                  </a:lnTo>
+                  <a:lnTo>
+                    <a:pt x="4110342" y="1463857"/>
+                  </a:lnTo>
+                  <a:lnTo>
+                    <a:pt x="4032708" y="1434660"/>
+                  </a:lnTo>
+                  <a:lnTo>
+                    <a:pt x="3955074" y="1403673"/>
+                  </a:lnTo>
+                  <a:lnTo>
+                    <a:pt x="3877440" y="1370786"/>
+                  </a:lnTo>
+                  <a:lnTo>
+                    <a:pt x="3799806" y="1335881"/>
+                  </a:lnTo>
+                  <a:lnTo>
+                    <a:pt x="3722172" y="1298836"/>
+                  </a:lnTo>
+                  <a:lnTo>
+                    <a:pt x="3644538" y="1259519"/>
+                  </a:lnTo>
+                  <a:lnTo>
+                    <a:pt x="3566904" y="1217791"/>
+                  </a:lnTo>
+                  <a:lnTo>
+                    <a:pt x="3489270" y="1173504"/>
+                  </a:lnTo>
+                  <a:lnTo>
+                    <a:pt x="3411636" y="1126500"/>
+                  </a:lnTo>
+                  <a:lnTo>
+                    <a:pt x="3334002" y="1099528"/>
+                  </a:lnTo>
+                  <a:lnTo>
+                    <a:pt x="3256368" y="1082997"/>
+                  </a:lnTo>
+                  <a:lnTo>
+                    <a:pt x="3178734" y="1066142"/>
+                  </a:lnTo>
+                  <a:lnTo>
+                    <a:pt x="3101100" y="1048955"/>
+                  </a:lnTo>
+                  <a:lnTo>
+                    <a:pt x="3023466" y="1031429"/>
+                  </a:lnTo>
+                  <a:lnTo>
+                    <a:pt x="2945832" y="1013560"/>
+                  </a:lnTo>
+                  <a:lnTo>
+                    <a:pt x="2868198" y="995338"/>
+                  </a:lnTo>
+                  <a:lnTo>
+                    <a:pt x="2790564" y="976758"/>
+                  </a:lnTo>
+                  <a:lnTo>
+                    <a:pt x="2712930" y="957813"/>
+                  </a:lnTo>
+                  <a:lnTo>
+                    <a:pt x="2635295" y="938495"/>
+                  </a:lnTo>
+                  <a:lnTo>
+                    <a:pt x="2557661" y="918797"/>
+                  </a:lnTo>
+                  <a:lnTo>
+                    <a:pt x="2480027" y="898712"/>
+                  </a:lnTo>
+                  <a:lnTo>
+                    <a:pt x="2402393" y="878232"/>
+                  </a:lnTo>
+                  <a:lnTo>
+                    <a:pt x="2324759" y="857349"/>
+                  </a:lnTo>
+                  <a:lnTo>
+                    <a:pt x="2247125" y="836055"/>
+                  </a:lnTo>
+                  <a:lnTo>
+                    <a:pt x="2169491" y="814342"/>
+                  </a:lnTo>
+                  <a:lnTo>
+                    <a:pt x="2091857" y="792202"/>
+                  </a:lnTo>
+                  <a:lnTo>
+                    <a:pt x="2014223" y="769626"/>
+                  </a:lnTo>
+                  <a:lnTo>
+                    <a:pt x="1936589" y="746607"/>
+                  </a:lnTo>
+                  <a:lnTo>
+                    <a:pt x="1858955" y="723134"/>
+                  </a:lnTo>
+                  <a:lnTo>
+                    <a:pt x="1781321" y="699200"/>
+                  </a:lnTo>
+                  <a:lnTo>
+                    <a:pt x="1703687" y="674796"/>
+                  </a:lnTo>
+                  <a:lnTo>
+                    <a:pt x="1626053" y="649911"/>
+                  </a:lnTo>
+                  <a:lnTo>
+                    <a:pt x="1548419" y="624537"/>
+                  </a:lnTo>
+                  <a:lnTo>
+                    <a:pt x="1470785" y="598663"/>
+                  </a:lnTo>
+                  <a:lnTo>
+                    <a:pt x="1393151" y="572281"/>
+                  </a:lnTo>
+                  <a:lnTo>
+                    <a:pt x="1315517" y="545380"/>
+                  </a:lnTo>
+                  <a:lnTo>
+                    <a:pt x="1237883" y="517949"/>
+                  </a:lnTo>
+                  <a:lnTo>
+                    <a:pt x="1160249" y="489979"/>
+                  </a:lnTo>
+                  <a:lnTo>
+                    <a:pt x="1082615" y="461459"/>
+                  </a:lnTo>
+                  <a:lnTo>
+                    <a:pt x="1004981" y="432378"/>
+                  </a:lnTo>
+                  <a:lnTo>
+                    <a:pt x="927346" y="402725"/>
+                  </a:lnTo>
+                  <a:lnTo>
+                    <a:pt x="849712" y="372488"/>
+                  </a:lnTo>
+                  <a:lnTo>
+                    <a:pt x="772078" y="341657"/>
+                  </a:lnTo>
+                  <a:lnTo>
+                    <a:pt x="694444" y="310220"/>
+                  </a:lnTo>
+                  <a:lnTo>
+                    <a:pt x="616810" y="278164"/>
+                  </a:lnTo>
+                  <a:lnTo>
+                    <a:pt x="539176" y="245477"/>
+                  </a:lnTo>
+                  <a:lnTo>
+                    <a:pt x="461542" y="212148"/>
+                  </a:lnTo>
+                  <a:lnTo>
+                    <a:pt x="383908" y="178163"/>
+                  </a:lnTo>
+                  <a:lnTo>
+                    <a:pt x="306274" y="143509"/>
+                  </a:lnTo>
+                  <a:lnTo>
+                    <a:pt x="228640" y="108174"/>
+                  </a:lnTo>
+                  <a:lnTo>
+                    <a:pt x="151006" y="72144"/>
+                  </a:lnTo>
+                  <a:lnTo>
+                    <a:pt x="73372" y="35405"/>
                   </a:lnTo>
                   <a:lnTo>
                     <a:pt x="0" y="0"/>
@@ -4121,279 +4121,279 @@
           </p:nvSpPr>
           <p:spPr>
             <a:xfrm>
-              <a:off x="1383515" y="1896563"/>
-              <a:ext cx="6804975" cy="3538137"/>
+              <a:off x="1383515" y="2073503"/>
+              <a:ext cx="6804975" cy="3374535"/>
             </a:xfrm>
             <a:custGeom>
               <a:avLst/>
               <a:pathLst>
-                <a:path w="6804975" h="3538137">
+                <a:path w="6804975" h="3374535">
                   <a:moveTo>
                     <a:pt x="0" y="0"/>
                   </a:moveTo>
                   <a:lnTo>
-                    <a:pt x="50813" y="93850"/>
-                  </a:lnTo>
-                  <a:lnTo>
-                    <a:pt x="128447" y="231684"/>
-                  </a:lnTo>
-                  <a:lnTo>
-                    <a:pt x="206081" y="364180"/>
-                  </a:lnTo>
-                  <a:lnTo>
-                    <a:pt x="283715" y="491544"/>
-                  </a:lnTo>
-                  <a:lnTo>
-                    <a:pt x="361349" y="613975"/>
-                  </a:lnTo>
-                  <a:lnTo>
-                    <a:pt x="438983" y="731665"/>
-                  </a:lnTo>
-                  <a:lnTo>
-                    <a:pt x="516617" y="844796"/>
-                  </a:lnTo>
-                  <a:lnTo>
-                    <a:pt x="594251" y="953545"/>
-                  </a:lnTo>
-                  <a:lnTo>
-                    <a:pt x="671885" y="1058083"/>
-                  </a:lnTo>
-                  <a:lnTo>
-                    <a:pt x="749519" y="1158572"/>
-                  </a:lnTo>
-                  <a:lnTo>
-                    <a:pt x="827153" y="1255169"/>
-                  </a:lnTo>
-                  <a:lnTo>
-                    <a:pt x="904787" y="1348024"/>
-                  </a:lnTo>
-                  <a:lnTo>
-                    <a:pt x="982422" y="1437283"/>
-                  </a:lnTo>
-                  <a:lnTo>
-                    <a:pt x="1060056" y="1523086"/>
-                  </a:lnTo>
-                  <a:lnTo>
-                    <a:pt x="1137690" y="1605565"/>
-                  </a:lnTo>
-                  <a:lnTo>
-                    <a:pt x="1215324" y="1684849"/>
-                  </a:lnTo>
-                  <a:lnTo>
-                    <a:pt x="1292958" y="1761063"/>
-                  </a:lnTo>
-                  <a:lnTo>
-                    <a:pt x="1370592" y="1834325"/>
-                  </a:lnTo>
-                  <a:lnTo>
-                    <a:pt x="1448226" y="1904749"/>
-                  </a:lnTo>
-                  <a:lnTo>
-                    <a:pt x="1525860" y="1972446"/>
-                  </a:lnTo>
-                  <a:lnTo>
-                    <a:pt x="1603494" y="2037521"/>
-                  </a:lnTo>
-                  <a:lnTo>
-                    <a:pt x="1681128" y="2100076"/>
-                  </a:lnTo>
-                  <a:lnTo>
-                    <a:pt x="1758762" y="2160208"/>
-                  </a:lnTo>
-                  <a:lnTo>
-                    <a:pt x="1836396" y="2218011"/>
-                  </a:lnTo>
-                  <a:lnTo>
-                    <a:pt x="1914030" y="2273575"/>
-                  </a:lnTo>
-                  <a:lnTo>
-                    <a:pt x="1991664" y="2326987"/>
-                  </a:lnTo>
-                  <a:lnTo>
-                    <a:pt x="2069298" y="2378330"/>
-                  </a:lnTo>
-                  <a:lnTo>
-                    <a:pt x="2146932" y="2427685"/>
-                  </a:lnTo>
-                  <a:lnTo>
-                    <a:pt x="2224566" y="2475128"/>
-                  </a:lnTo>
-                  <a:lnTo>
-                    <a:pt x="2302200" y="2520734"/>
-                  </a:lnTo>
-                  <a:lnTo>
-                    <a:pt x="2379834" y="2564574"/>
-                  </a:lnTo>
-                  <a:lnTo>
-                    <a:pt x="2457468" y="2606715"/>
-                  </a:lnTo>
-                  <a:lnTo>
-                    <a:pt x="2535102" y="2647225"/>
-                  </a:lnTo>
-                  <a:lnTo>
-                    <a:pt x="2612736" y="2686165"/>
-                  </a:lnTo>
-                  <a:lnTo>
-                    <a:pt x="2690370" y="2723597"/>
-                  </a:lnTo>
-                  <a:lnTo>
-                    <a:pt x="2768005" y="2759580"/>
-                  </a:lnTo>
-                  <a:lnTo>
-                    <a:pt x="2845639" y="2794169"/>
-                  </a:lnTo>
-                  <a:lnTo>
-                    <a:pt x="2923273" y="2827418"/>
-                  </a:lnTo>
-                  <a:lnTo>
-                    <a:pt x="3000907" y="2859379"/>
-                  </a:lnTo>
-                  <a:lnTo>
-                    <a:pt x="3078541" y="2890103"/>
-                  </a:lnTo>
-                  <a:lnTo>
-                    <a:pt x="3156175" y="2919637"/>
-                  </a:lnTo>
-                  <a:lnTo>
-                    <a:pt x="3233809" y="2948026"/>
-                  </a:lnTo>
-                  <a:lnTo>
-                    <a:pt x="3311443" y="2975317"/>
-                  </a:lnTo>
-                  <a:lnTo>
-                    <a:pt x="3389077" y="3001550"/>
-                  </a:lnTo>
-                  <a:lnTo>
-                    <a:pt x="3466711" y="3026767"/>
-                  </a:lnTo>
-                  <a:lnTo>
-                    <a:pt x="3544345" y="3051008"/>
-                  </a:lnTo>
-                  <a:lnTo>
-                    <a:pt x="3621979" y="3074309"/>
-                  </a:lnTo>
-                  <a:lnTo>
-                    <a:pt x="3699613" y="3096708"/>
-                  </a:lnTo>
-                  <a:lnTo>
-                    <a:pt x="3777247" y="3118240"/>
-                  </a:lnTo>
-                  <a:lnTo>
-                    <a:pt x="3854881" y="3138938"/>
-                  </a:lnTo>
-                  <a:lnTo>
-                    <a:pt x="3932515" y="3158834"/>
-                  </a:lnTo>
-                  <a:lnTo>
-                    <a:pt x="4010149" y="3177959"/>
-                  </a:lnTo>
-                  <a:lnTo>
-                    <a:pt x="4087783" y="3196344"/>
-                  </a:lnTo>
-                  <a:lnTo>
-                    <a:pt x="4165417" y="3214017"/>
-                  </a:lnTo>
-                  <a:lnTo>
-                    <a:pt x="4243051" y="3231005"/>
-                  </a:lnTo>
-                  <a:lnTo>
-                    <a:pt x="4320685" y="3247336"/>
-                  </a:lnTo>
-                  <a:lnTo>
-                    <a:pt x="4398319" y="3263033"/>
-                  </a:lnTo>
-                  <a:lnTo>
-                    <a:pt x="4475954" y="3278123"/>
-                  </a:lnTo>
-                  <a:lnTo>
-                    <a:pt x="4553588" y="3292629"/>
-                  </a:lnTo>
-                  <a:lnTo>
-                    <a:pt x="4631222" y="3306572"/>
-                  </a:lnTo>
-                  <a:lnTo>
-                    <a:pt x="4708856" y="3319976"/>
-                  </a:lnTo>
-                  <a:lnTo>
-                    <a:pt x="4786490" y="3332860"/>
-                  </a:lnTo>
-                  <a:lnTo>
-                    <a:pt x="4864124" y="3345245"/>
-                  </a:lnTo>
-                  <a:lnTo>
-                    <a:pt x="4941758" y="3357151"/>
-                  </a:lnTo>
-                  <a:lnTo>
-                    <a:pt x="5019392" y="3368596"/>
-                  </a:lnTo>
-                  <a:lnTo>
-                    <a:pt x="5097026" y="3379597"/>
-                  </a:lnTo>
-                  <a:lnTo>
-                    <a:pt x="5174660" y="3390172"/>
-                  </a:lnTo>
-                  <a:lnTo>
-                    <a:pt x="5252294" y="3400338"/>
-                  </a:lnTo>
-                  <a:lnTo>
-                    <a:pt x="5329928" y="3410110"/>
-                  </a:lnTo>
-                  <a:lnTo>
-                    <a:pt x="5407562" y="3419503"/>
-                  </a:lnTo>
-                  <a:lnTo>
-                    <a:pt x="5485196" y="3428533"/>
-                  </a:lnTo>
-                  <a:lnTo>
-                    <a:pt x="5562830" y="3437213"/>
-                  </a:lnTo>
-                  <a:lnTo>
-                    <a:pt x="5640464" y="3445557"/>
-                  </a:lnTo>
-                  <a:lnTo>
-                    <a:pt x="5718098" y="3453577"/>
-                  </a:lnTo>
-                  <a:lnTo>
-                    <a:pt x="5795732" y="3461287"/>
-                  </a:lnTo>
-                  <a:lnTo>
-                    <a:pt x="5873366" y="3468698"/>
-                  </a:lnTo>
-                  <a:lnTo>
-                    <a:pt x="5951000" y="3475823"/>
-                  </a:lnTo>
-                  <a:lnTo>
-                    <a:pt x="6028634" y="3482671"/>
-                  </a:lnTo>
-                  <a:lnTo>
-                    <a:pt x="6106268" y="3489254"/>
-                  </a:lnTo>
-                  <a:lnTo>
-                    <a:pt x="6183903" y="3495582"/>
-                  </a:lnTo>
-                  <a:lnTo>
-                    <a:pt x="6261537" y="3501665"/>
-                  </a:lnTo>
-                  <a:lnTo>
-                    <a:pt x="6339171" y="3507513"/>
-                  </a:lnTo>
-                  <a:lnTo>
-                    <a:pt x="6416805" y="3513134"/>
-                  </a:lnTo>
-                  <a:lnTo>
-                    <a:pt x="6494439" y="3518537"/>
-                  </a:lnTo>
-                  <a:lnTo>
-                    <a:pt x="6572073" y="3523731"/>
-                  </a:lnTo>
-                  <a:lnTo>
-                    <a:pt x="6649707" y="3528724"/>
-                  </a:lnTo>
-                  <a:lnTo>
-                    <a:pt x="6727341" y="3533523"/>
-                  </a:lnTo>
-                  <a:lnTo>
-                    <a:pt x="6804975" y="3538137"/>
+                    <a:pt x="50813" y="89511"/>
+                  </a:lnTo>
+                  <a:lnTo>
+                    <a:pt x="128447" y="220971"/>
+                  </a:lnTo>
+                  <a:lnTo>
+                    <a:pt x="206081" y="347341"/>
+                  </a:lnTo>
+                  <a:lnTo>
+                    <a:pt x="283715" y="468815"/>
+                  </a:lnTo>
+                  <a:lnTo>
+                    <a:pt x="361349" y="585585"/>
+                  </a:lnTo>
+                  <a:lnTo>
+                    <a:pt x="438983" y="697833"/>
+                  </a:lnTo>
+                  <a:lnTo>
+                    <a:pt x="516617" y="805733"/>
+                  </a:lnTo>
+                  <a:lnTo>
+                    <a:pt x="594251" y="909454"/>
+                  </a:lnTo>
+                  <a:lnTo>
+                    <a:pt x="671885" y="1009158"/>
+                  </a:lnTo>
+                  <a:lnTo>
+                    <a:pt x="749519" y="1105000"/>
+                  </a:lnTo>
+                  <a:lnTo>
+                    <a:pt x="827153" y="1197130"/>
+                  </a:lnTo>
+                  <a:lnTo>
+                    <a:pt x="904787" y="1285692"/>
+                  </a:lnTo>
+                  <a:lnTo>
+                    <a:pt x="982422" y="1370824"/>
+                  </a:lnTo>
+                  <a:lnTo>
+                    <a:pt x="1060056" y="1452659"/>
+                  </a:lnTo>
+                  <a:lnTo>
+                    <a:pt x="1137690" y="1531324"/>
+                  </a:lnTo>
+                  <a:lnTo>
+                    <a:pt x="1215324" y="1606942"/>
+                  </a:lnTo>
+                  <a:lnTo>
+                    <a:pt x="1292958" y="1679632"/>
+                  </a:lnTo>
+                  <a:lnTo>
+                    <a:pt x="1370592" y="1749506"/>
+                  </a:lnTo>
+                  <a:lnTo>
+                    <a:pt x="1448226" y="1816674"/>
+                  </a:lnTo>
+                  <a:lnTo>
+                    <a:pt x="1525860" y="1881241"/>
+                  </a:lnTo>
+                  <a:lnTo>
+                    <a:pt x="1603494" y="1943307"/>
+                  </a:lnTo>
+                  <a:lnTo>
+                    <a:pt x="1681128" y="2002969"/>
+                  </a:lnTo>
+                  <a:lnTo>
+                    <a:pt x="1758762" y="2060320"/>
+                  </a:lnTo>
+                  <a:lnTo>
+                    <a:pt x="1836396" y="2115451"/>
+                  </a:lnTo>
+                  <a:lnTo>
+                    <a:pt x="1914030" y="2168445"/>
+                  </a:lnTo>
+                  <a:lnTo>
+                    <a:pt x="1991664" y="2219388"/>
+                  </a:lnTo>
+                  <a:lnTo>
+                    <a:pt x="2069298" y="2268357"/>
+                  </a:lnTo>
+                  <a:lnTo>
+                    <a:pt x="2146932" y="2315430"/>
+                  </a:lnTo>
+                  <a:lnTo>
+                    <a:pt x="2224566" y="2360679"/>
+                  </a:lnTo>
+                  <a:lnTo>
+                    <a:pt x="2302200" y="2404176"/>
+                  </a:lnTo>
+                  <a:lnTo>
+                    <a:pt x="2379834" y="2445989"/>
+                  </a:lnTo>
+                  <a:lnTo>
+                    <a:pt x="2457468" y="2486182"/>
+                  </a:lnTo>
+                  <a:lnTo>
+                    <a:pt x="2535102" y="2524818"/>
+                  </a:lnTo>
+                  <a:lnTo>
+                    <a:pt x="2612736" y="2561958"/>
+                  </a:lnTo>
+                  <a:lnTo>
+                    <a:pt x="2690370" y="2597659"/>
+                  </a:lnTo>
+                  <a:lnTo>
+                    <a:pt x="2768005" y="2631978"/>
+                  </a:lnTo>
+                  <a:lnTo>
+                    <a:pt x="2845639" y="2664967"/>
+                  </a:lnTo>
+                  <a:lnTo>
+                    <a:pt x="2923273" y="2696679"/>
+                  </a:lnTo>
+                  <a:lnTo>
+                    <a:pt x="3000907" y="2727163"/>
+                  </a:lnTo>
+                  <a:lnTo>
+                    <a:pt x="3078541" y="2756466"/>
+                  </a:lnTo>
+                  <a:lnTo>
+                    <a:pt x="3156175" y="2784634"/>
+                  </a:lnTo>
+                  <a:lnTo>
+                    <a:pt x="3233809" y="2811711"/>
+                  </a:lnTo>
+                  <a:lnTo>
+                    <a:pt x="3311443" y="2837739"/>
+                  </a:lnTo>
+                  <a:lnTo>
+                    <a:pt x="3389077" y="2862759"/>
+                  </a:lnTo>
+                  <a:lnTo>
+                    <a:pt x="3466711" y="2886810"/>
+                  </a:lnTo>
+                  <a:lnTo>
+                    <a:pt x="3544345" y="2909930"/>
+                  </a:lnTo>
+                  <a:lnTo>
+                    <a:pt x="3621979" y="2932154"/>
+                  </a:lnTo>
+                  <a:lnTo>
+                    <a:pt x="3699613" y="2953518"/>
+                  </a:lnTo>
+                  <a:lnTo>
+                    <a:pt x="3777247" y="2974054"/>
+                  </a:lnTo>
+                  <a:lnTo>
+                    <a:pt x="3854881" y="2993795"/>
+                  </a:lnTo>
+                  <a:lnTo>
+                    <a:pt x="3932515" y="3012771"/>
+                  </a:lnTo>
+                  <a:lnTo>
+                    <a:pt x="4010149" y="3031012"/>
+                  </a:lnTo>
+                  <a:lnTo>
+                    <a:pt x="4087783" y="3048546"/>
+                  </a:lnTo>
+                  <a:lnTo>
+                    <a:pt x="4165417" y="3065402"/>
+                  </a:lnTo>
+                  <a:lnTo>
+                    <a:pt x="4243051" y="3081605"/>
+                  </a:lnTo>
+                  <a:lnTo>
+                    <a:pt x="4320685" y="3097180"/>
+                  </a:lnTo>
+                  <a:lnTo>
+                    <a:pt x="4398319" y="3112152"/>
+                  </a:lnTo>
+                  <a:lnTo>
+                    <a:pt x="4475954" y="3126544"/>
+                  </a:lnTo>
+                  <a:lnTo>
+                    <a:pt x="4553588" y="3140379"/>
+                  </a:lnTo>
+                  <a:lnTo>
+                    <a:pt x="4631222" y="3153677"/>
+                  </a:lnTo>
+                  <a:lnTo>
+                    <a:pt x="4708856" y="3166461"/>
+                  </a:lnTo>
+                  <a:lnTo>
+                    <a:pt x="4786490" y="3178750"/>
+                  </a:lnTo>
+                  <a:lnTo>
+                    <a:pt x="4864124" y="3190562"/>
+                  </a:lnTo>
+                  <a:lnTo>
+                    <a:pt x="4941758" y="3201918"/>
+                  </a:lnTo>
+                  <a:lnTo>
+                    <a:pt x="5019392" y="3212833"/>
+                  </a:lnTo>
+                  <a:lnTo>
+                    <a:pt x="5097026" y="3223326"/>
+                  </a:lnTo>
+                  <a:lnTo>
+                    <a:pt x="5174660" y="3233412"/>
+                  </a:lnTo>
+                  <a:lnTo>
+                    <a:pt x="5252294" y="3243108"/>
+                  </a:lnTo>
+                  <a:lnTo>
+                    <a:pt x="5329928" y="3252428"/>
+                  </a:lnTo>
+                  <a:lnTo>
+                    <a:pt x="5407562" y="3261387"/>
+                  </a:lnTo>
+                  <a:lnTo>
+                    <a:pt x="5485196" y="3269999"/>
+                  </a:lnTo>
+                  <a:lnTo>
+                    <a:pt x="5562830" y="3278277"/>
+                  </a:lnTo>
+                  <a:lnTo>
+                    <a:pt x="5640464" y="3286235"/>
+                  </a:lnTo>
+                  <a:lnTo>
+                    <a:pt x="5718098" y="3293885"/>
+                  </a:lnTo>
+                  <a:lnTo>
+                    <a:pt x="5795732" y="3301238"/>
+                  </a:lnTo>
+                  <a:lnTo>
+                    <a:pt x="5873366" y="3308307"/>
+                  </a:lnTo>
+                  <a:lnTo>
+                    <a:pt x="5951000" y="3315102"/>
+                  </a:lnTo>
+                  <a:lnTo>
+                    <a:pt x="6028634" y="3321634"/>
+                  </a:lnTo>
+                  <a:lnTo>
+                    <a:pt x="6106268" y="3327912"/>
+                  </a:lnTo>
+                  <a:lnTo>
+                    <a:pt x="6183903" y="3333948"/>
+                  </a:lnTo>
+                  <a:lnTo>
+                    <a:pt x="6261537" y="3339750"/>
+                  </a:lnTo>
+                  <a:lnTo>
+                    <a:pt x="6339171" y="3345327"/>
+                  </a:lnTo>
+                  <a:lnTo>
+                    <a:pt x="6416805" y="3350688"/>
+                  </a:lnTo>
+                  <a:lnTo>
+                    <a:pt x="6494439" y="3355841"/>
+                  </a:lnTo>
+                  <a:lnTo>
+                    <a:pt x="6572073" y="3360795"/>
+                  </a:lnTo>
+                  <a:lnTo>
+                    <a:pt x="6649707" y="3365557"/>
+                  </a:lnTo>
+                  <a:lnTo>
+                    <a:pt x="6727341" y="3370135"/>
+                  </a:lnTo>
+                  <a:lnTo>
+                    <a:pt x="6804975" y="3374535"/>
                   </a:lnTo>
                 </a:path>
               </a:pathLst>
@@ -4422,7 +4422,7 @@
           </p:nvSpPr>
           <p:spPr>
             <a:xfrm>
-              <a:off x="817517" y="4679530"/>
+              <a:off x="817517" y="4727786"/>
               <a:ext cx="7799693" cy="0"/>
             </a:xfrm>
             <a:custGeom>
@@ -4465,15 +4465,15 @@
           </p:nvSpPr>
           <p:spPr>
             <a:xfrm>
-              <a:off x="4203673" y="1896563"/>
-              <a:ext cx="0" cy="3826579"/>
+              <a:off x="4203673" y="2073503"/>
+              <a:ext cx="0" cy="3649639"/>
             </a:xfrm>
             <a:custGeom>
               <a:avLst/>
               <a:pathLst>
-                <a:path w="0" h="3826579">
+                <a:path w="0" h="3649639">
                   <a:moveTo>
-                    <a:pt x="0" y="3826579"/>
+                    <a:pt x="0" y="3649639"/>
                   </a:moveTo>
                   <a:lnTo>
                     <a:pt x="0" y="0"/>
@@ -4508,7 +4508,7 @@
           </p:nvSpPr>
           <p:spPr>
             <a:xfrm>
-              <a:off x="692708" y="5509156"/>
+              <a:off x="692708" y="5517199"/>
               <a:ext cx="62179" cy="80101"/>
             </a:xfrm>
             <a:prstGeom prst="rect">
@@ -4554,7 +4554,7 @@
           </p:nvSpPr>
           <p:spPr>
             <a:xfrm>
-              <a:off x="692708" y="4639479"/>
+              <a:off x="692708" y="4687735"/>
               <a:ext cx="62179" cy="80101"/>
             </a:xfrm>
             <a:prstGeom prst="rect">
@@ -4600,7 +4600,7 @@
           </p:nvSpPr>
           <p:spPr>
             <a:xfrm>
-              <a:off x="692708" y="3769802"/>
+              <a:off x="692708" y="3858272"/>
               <a:ext cx="62179" cy="80101"/>
             </a:xfrm>
             <a:prstGeom prst="rect">
@@ -4646,7 +4646,7 @@
           </p:nvSpPr>
           <p:spPr>
             <a:xfrm>
-              <a:off x="692708" y="2900125"/>
+              <a:off x="692708" y="3028808"/>
               <a:ext cx="62179" cy="80101"/>
             </a:xfrm>
             <a:prstGeom prst="rect">
@@ -4692,7 +4692,7 @@
           </p:nvSpPr>
           <p:spPr>
             <a:xfrm>
-              <a:off x="692708" y="2030448"/>
+              <a:off x="692708" y="2199345"/>
               <a:ext cx="62179" cy="80101"/>
             </a:xfrm>
             <a:prstGeom prst="rect">
@@ -4968,7 +4968,7 @@
           </p:nvSpPr>
           <p:spPr>
             <a:xfrm rot="-5400000">
-              <a:off x="68446" y="3759743"/>
+              <a:off x="68446" y="3848213"/>
               <a:ext cx="1016904" cy="100218"/>
             </a:xfrm>
             <a:prstGeom prst="rect">
@@ -5009,6 +5009,52 @@
         <p:sp>
           <p:nvSpPr>
             <p:cNvPr id="38" name="tx38"/>
+            <p:cNvSpPr/>
+            <p:nvPr/>
+          </p:nvSpPr>
+          <p:spPr>
+            <a:xfrm>
+              <a:off x="817517" y="1896563"/>
+              <a:ext cx="4233214" cy="82021"/>
+            </a:xfrm>
+            <a:prstGeom prst="rect">
+              <a:avLst/>
+            </a:prstGeom>
+            <a:noFill/>
+          </p:spPr>
+          <p:txBody>
+            <a:bodyPr lIns="0" rIns="0" tIns="0" bIns="0" anchorCtr="1" anchor="ctr" wrap="none"/>
+            <a:lstStyle/>
+            <a:p>
+              <a:pPr algn="l" marL="0" marR="0" indent="0">
+                <a:lnSpc>
+                  <a:spcPts val="900"/>
+                </a:lnSpc>
+                <a:spcBef>
+                  <a:spcPts val="0"/>
+                </a:spcBef>
+                <a:spcAft>
+                  <a:spcPts val="0"/>
+                </a:spcAft>
+              </a:pPr>
+              <a:r>
+                <a:rPr sz="900">
+                  <a:solidFill>
+                    <a:srgbClr val="404040">
+                      <a:alpha val="100000"/>
+                    </a:srgbClr>
+                  </a:solidFill>
+                  <a:latin typeface="Helvetica"/>
+                  <a:cs typeface="Helvetica"/>
+                </a:rPr>
+                <a:t>subHR = 0.64 (95% CI 0.51-0.80), p = &lt;0.001   (per 0.1-unit increase in eGFR ratio)</a:t>
+              </a:r>
+            </a:p>
+          </p:txBody>
+        </p:sp>
+        <p:sp>
+          <p:nvSpPr>
+            <p:cNvPr id="39" name="tx39"/>
             <p:cNvSpPr/>
             <p:nvPr/>
           </p:nvSpPr>

--- a/docs/plots/carbo/jx_carbo_linsubhr_ratio_sideeffect.pptx
+++ b/docs/plots/carbo/jx_carbo_linsubhr_ratio_sideeffect.pptx
@@ -2271,26 +2271,26 @@
           </p:nvSpPr>
           <p:spPr>
             <a:xfrm>
-              <a:off x="817517" y="5142518"/>
-              <a:ext cx="7799693" cy="0"/>
+              <a:off x="915645" y="5071743"/>
+              <a:ext cx="7682587" cy="0"/>
             </a:xfrm>
             <a:custGeom>
               <a:avLst/>
               <a:pathLst>
-                <a:path w="7799693" h="0">
+                <a:path w="7682587" h="0">
                   <a:moveTo>
                     <a:pt x="0" y="0"/>
                   </a:moveTo>
                   <a:lnTo>
-                    <a:pt x="7799693" y="0"/>
-                  </a:lnTo>
-                  <a:lnTo>
-                    <a:pt x="7799693" y="0"/>
+                    <a:pt x="7682587" y="0"/>
+                  </a:lnTo>
+                  <a:lnTo>
+                    <a:pt x="7682587" y="0"/>
                   </a:lnTo>
                 </a:path>
               </a:pathLst>
             </a:custGeom>
-            <a:ln w="6775" cap="flat">
+            <a:ln w="8623" cap="flat">
               <a:solidFill>
                 <a:srgbClr val="EBEBEB">
                   <a:alpha val="100000"/>
@@ -2314,26 +2314,26 @@
           </p:nvSpPr>
           <p:spPr>
             <a:xfrm>
-              <a:off x="817517" y="4313054"/>
-              <a:ext cx="7799693" cy="0"/>
+              <a:off x="915645" y="4298074"/>
+              <a:ext cx="7682587" cy="0"/>
             </a:xfrm>
             <a:custGeom>
               <a:avLst/>
               <a:pathLst>
-                <a:path w="7799693" h="0">
+                <a:path w="7682587" h="0">
                   <a:moveTo>
                     <a:pt x="0" y="0"/>
                   </a:moveTo>
                   <a:lnTo>
-                    <a:pt x="7799693" y="0"/>
-                  </a:lnTo>
-                  <a:lnTo>
-                    <a:pt x="7799693" y="0"/>
+                    <a:pt x="7682587" y="0"/>
+                  </a:lnTo>
+                  <a:lnTo>
+                    <a:pt x="7682587" y="0"/>
                   </a:lnTo>
                 </a:path>
               </a:pathLst>
             </a:custGeom>
-            <a:ln w="6775" cap="flat">
+            <a:ln w="8623" cap="flat">
               <a:solidFill>
                 <a:srgbClr val="EBEBEB">
                   <a:alpha val="100000"/>
@@ -2357,26 +2357,26 @@
           </p:nvSpPr>
           <p:spPr>
             <a:xfrm>
-              <a:off x="817517" y="3483591"/>
-              <a:ext cx="7799693" cy="0"/>
+              <a:off x="915645" y="3524405"/>
+              <a:ext cx="7682587" cy="0"/>
             </a:xfrm>
             <a:custGeom>
               <a:avLst/>
               <a:pathLst>
-                <a:path w="7799693" h="0">
+                <a:path w="7682587" h="0">
                   <a:moveTo>
                     <a:pt x="0" y="0"/>
                   </a:moveTo>
                   <a:lnTo>
-                    <a:pt x="7799693" y="0"/>
-                  </a:lnTo>
-                  <a:lnTo>
-                    <a:pt x="7799693" y="0"/>
+                    <a:pt x="7682587" y="0"/>
+                  </a:lnTo>
+                  <a:lnTo>
+                    <a:pt x="7682587" y="0"/>
                   </a:lnTo>
                 </a:path>
               </a:pathLst>
             </a:custGeom>
-            <a:ln w="6775" cap="flat">
+            <a:ln w="8623" cap="flat">
               <a:solidFill>
                 <a:srgbClr val="EBEBEB">
                   <a:alpha val="100000"/>
@@ -2400,26 +2400,26 @@
           </p:nvSpPr>
           <p:spPr>
             <a:xfrm>
-              <a:off x="817517" y="2654127"/>
-              <a:ext cx="7799693" cy="0"/>
+              <a:off x="915645" y="2750737"/>
+              <a:ext cx="7682587" cy="0"/>
             </a:xfrm>
             <a:custGeom>
               <a:avLst/>
               <a:pathLst>
-                <a:path w="7799693" h="0">
+                <a:path w="7682587" h="0">
                   <a:moveTo>
                     <a:pt x="0" y="0"/>
                   </a:moveTo>
                   <a:lnTo>
-                    <a:pt x="7799693" y="0"/>
-                  </a:lnTo>
-                  <a:lnTo>
-                    <a:pt x="7799693" y="0"/>
+                    <a:pt x="7682587" y="0"/>
+                  </a:lnTo>
+                  <a:lnTo>
+                    <a:pt x="7682587" y="0"/>
                   </a:lnTo>
                 </a:path>
               </a:pathLst>
             </a:custGeom>
-            <a:ln w="6775" cap="flat">
+            <a:ln w="8623" cap="flat">
               <a:solidFill>
                 <a:srgbClr val="EBEBEB">
                   <a:alpha val="100000"/>
@@ -2443,15 +2443,15 @@
           </p:nvSpPr>
           <p:spPr>
             <a:xfrm>
-              <a:off x="1615213" y="2073503"/>
-              <a:ext cx="0" cy="3649639"/>
+              <a:off x="1701364" y="2209169"/>
+              <a:ext cx="0" cy="3404141"/>
             </a:xfrm>
             <a:custGeom>
               <a:avLst/>
               <a:pathLst>
-                <a:path w="0" h="3649639">
+                <a:path w="0" h="3404141">
                   <a:moveTo>
-                    <a:pt x="0" y="3649639"/>
+                    <a:pt x="0" y="3404141"/>
                   </a:moveTo>
                   <a:lnTo>
                     <a:pt x="0" y="0"/>
@@ -2462,7 +2462,7 @@
                 </a:path>
               </a:pathLst>
             </a:custGeom>
-            <a:ln w="6775" cap="flat">
+            <a:ln w="8623" cap="flat">
               <a:solidFill>
                 <a:srgbClr val="EBEBEB">
                   <a:alpha val="100000"/>
@@ -2486,15 +2486,15 @@
           </p:nvSpPr>
           <p:spPr>
             <a:xfrm>
-              <a:off x="3387871" y="2073503"/>
-              <a:ext cx="0" cy="3649639"/>
+              <a:off x="3447406" y="2209169"/>
+              <a:ext cx="0" cy="3404141"/>
             </a:xfrm>
             <a:custGeom>
               <a:avLst/>
               <a:pathLst>
-                <a:path w="0" h="3649639">
+                <a:path w="0" h="3404141">
                   <a:moveTo>
-                    <a:pt x="0" y="3649639"/>
+                    <a:pt x="0" y="3404141"/>
                   </a:moveTo>
                   <a:lnTo>
                     <a:pt x="0" y="0"/>
@@ -2505,7 +2505,7 @@
                 </a:path>
               </a:pathLst>
             </a:custGeom>
-            <a:ln w="6775" cap="flat">
+            <a:ln w="8623" cap="flat">
               <a:solidFill>
                 <a:srgbClr val="EBEBEB">
                   <a:alpha val="100000"/>
@@ -2529,15 +2529,15 @@
           </p:nvSpPr>
           <p:spPr>
             <a:xfrm>
-              <a:off x="5160528" y="2073503"/>
-              <a:ext cx="0" cy="3649639"/>
+              <a:off x="5193449" y="2209169"/>
+              <a:ext cx="0" cy="3404141"/>
             </a:xfrm>
             <a:custGeom>
               <a:avLst/>
               <a:pathLst>
-                <a:path w="0" h="3649639">
+                <a:path w="0" h="3404141">
                   <a:moveTo>
-                    <a:pt x="0" y="3649639"/>
+                    <a:pt x="0" y="3404141"/>
                   </a:moveTo>
                   <a:lnTo>
                     <a:pt x="0" y="0"/>
@@ -2548,7 +2548,7 @@
                 </a:path>
               </a:pathLst>
             </a:custGeom>
-            <a:ln w="6775" cap="flat">
+            <a:ln w="8623" cap="flat">
               <a:solidFill>
                 <a:srgbClr val="EBEBEB">
                   <a:alpha val="100000"/>
@@ -2572,15 +2572,15 @@
           </p:nvSpPr>
           <p:spPr>
             <a:xfrm>
-              <a:off x="6933186" y="2073503"/>
-              <a:ext cx="0" cy="3649639"/>
+              <a:off x="6939491" y="2209169"/>
+              <a:ext cx="0" cy="3404141"/>
             </a:xfrm>
             <a:custGeom>
               <a:avLst/>
               <a:pathLst>
-                <a:path w="0" h="3649639">
+                <a:path w="0" h="3404141">
                   <a:moveTo>
-                    <a:pt x="0" y="3649639"/>
+                    <a:pt x="0" y="3404141"/>
                   </a:moveTo>
                   <a:lnTo>
                     <a:pt x="0" y="0"/>
@@ -2591,7 +2591,7 @@
                 </a:path>
               </a:pathLst>
             </a:custGeom>
-            <a:ln w="6775" cap="flat">
+            <a:ln w="8623" cap="flat">
               <a:solidFill>
                 <a:srgbClr val="EBEBEB">
                   <a:alpha val="100000"/>
@@ -2615,26 +2615,26 @@
           </p:nvSpPr>
           <p:spPr>
             <a:xfrm>
-              <a:off x="817517" y="5557249"/>
-              <a:ext cx="7799693" cy="0"/>
+              <a:off x="915645" y="5458577"/>
+              <a:ext cx="7682587" cy="0"/>
             </a:xfrm>
             <a:custGeom>
               <a:avLst/>
               <a:pathLst>
-                <a:path w="7799693" h="0">
+                <a:path w="7682587" h="0">
                   <a:moveTo>
                     <a:pt x="0" y="0"/>
                   </a:moveTo>
                   <a:lnTo>
-                    <a:pt x="7799693" y="0"/>
-                  </a:lnTo>
-                  <a:lnTo>
-                    <a:pt x="7799693" y="0"/>
+                    <a:pt x="7682587" y="0"/>
+                  </a:lnTo>
+                  <a:lnTo>
+                    <a:pt x="7682587" y="0"/>
                   </a:lnTo>
                 </a:path>
               </a:pathLst>
             </a:custGeom>
-            <a:ln w="13550" cap="flat">
+            <a:ln w="17246" cap="flat">
               <a:solidFill>
                 <a:srgbClr val="EBEBEB">
                   <a:alpha val="100000"/>
@@ -2658,26 +2658,26 @@
           </p:nvSpPr>
           <p:spPr>
             <a:xfrm>
-              <a:off x="817517" y="4727786"/>
-              <a:ext cx="7799693" cy="0"/>
+              <a:off x="915645" y="4684908"/>
+              <a:ext cx="7682587" cy="0"/>
             </a:xfrm>
             <a:custGeom>
               <a:avLst/>
               <a:pathLst>
-                <a:path w="7799693" h="0">
+                <a:path w="7682587" h="0">
                   <a:moveTo>
                     <a:pt x="0" y="0"/>
                   </a:moveTo>
                   <a:lnTo>
-                    <a:pt x="7799693" y="0"/>
-                  </a:lnTo>
-                  <a:lnTo>
-                    <a:pt x="7799693" y="0"/>
+                    <a:pt x="7682587" y="0"/>
+                  </a:lnTo>
+                  <a:lnTo>
+                    <a:pt x="7682587" y="0"/>
                   </a:lnTo>
                 </a:path>
               </a:pathLst>
             </a:custGeom>
-            <a:ln w="13550" cap="flat">
+            <a:ln w="17246" cap="flat">
               <a:solidFill>
                 <a:srgbClr val="EBEBEB">
                   <a:alpha val="100000"/>
@@ -2701,26 +2701,26 @@
           </p:nvSpPr>
           <p:spPr>
             <a:xfrm>
-              <a:off x="817517" y="3898322"/>
-              <a:ext cx="7799693" cy="0"/>
+              <a:off x="915645" y="3911240"/>
+              <a:ext cx="7682587" cy="0"/>
             </a:xfrm>
             <a:custGeom>
               <a:avLst/>
               <a:pathLst>
-                <a:path w="7799693" h="0">
+                <a:path w="7682587" h="0">
                   <a:moveTo>
                     <a:pt x="0" y="0"/>
                   </a:moveTo>
                   <a:lnTo>
-                    <a:pt x="7799693" y="0"/>
-                  </a:lnTo>
-                  <a:lnTo>
-                    <a:pt x="7799693" y="0"/>
+                    <a:pt x="7682587" y="0"/>
+                  </a:lnTo>
+                  <a:lnTo>
+                    <a:pt x="7682587" y="0"/>
                   </a:lnTo>
                 </a:path>
               </a:pathLst>
             </a:custGeom>
-            <a:ln w="13550" cap="flat">
+            <a:ln w="17246" cap="flat">
               <a:solidFill>
                 <a:srgbClr val="EBEBEB">
                   <a:alpha val="100000"/>
@@ -2744,26 +2744,26 @@
           </p:nvSpPr>
           <p:spPr>
             <a:xfrm>
-              <a:off x="817517" y="3068859"/>
-              <a:ext cx="7799693" cy="0"/>
+              <a:off x="915645" y="3137571"/>
+              <a:ext cx="7682587" cy="0"/>
             </a:xfrm>
             <a:custGeom>
               <a:avLst/>
               <a:pathLst>
-                <a:path w="7799693" h="0">
+                <a:path w="7682587" h="0">
                   <a:moveTo>
                     <a:pt x="0" y="0"/>
                   </a:moveTo>
                   <a:lnTo>
-                    <a:pt x="7799693" y="0"/>
-                  </a:lnTo>
-                  <a:lnTo>
-                    <a:pt x="7799693" y="0"/>
+                    <a:pt x="7682587" y="0"/>
+                  </a:lnTo>
+                  <a:lnTo>
+                    <a:pt x="7682587" y="0"/>
                   </a:lnTo>
                 </a:path>
               </a:pathLst>
             </a:custGeom>
-            <a:ln w="13550" cap="flat">
+            <a:ln w="17246" cap="flat">
               <a:solidFill>
                 <a:srgbClr val="EBEBEB">
                   <a:alpha val="100000"/>
@@ -2787,26 +2787,26 @@
           </p:nvSpPr>
           <p:spPr>
             <a:xfrm>
-              <a:off x="817517" y="2239395"/>
-              <a:ext cx="7799693" cy="0"/>
+              <a:off x="915645" y="2363903"/>
+              <a:ext cx="7682587" cy="0"/>
             </a:xfrm>
             <a:custGeom>
               <a:avLst/>
               <a:pathLst>
-                <a:path w="7799693" h="0">
+                <a:path w="7682587" h="0">
                   <a:moveTo>
                     <a:pt x="0" y="0"/>
                   </a:moveTo>
                   <a:lnTo>
-                    <a:pt x="7799693" y="0"/>
-                  </a:lnTo>
-                  <a:lnTo>
-                    <a:pt x="7799693" y="0"/>
+                    <a:pt x="7682587" y="0"/>
+                  </a:lnTo>
+                  <a:lnTo>
+                    <a:pt x="7682587" y="0"/>
                   </a:lnTo>
                 </a:path>
               </a:pathLst>
             </a:custGeom>
-            <a:ln w="13550" cap="flat">
+            <a:ln w="17246" cap="flat">
               <a:solidFill>
                 <a:srgbClr val="EBEBEB">
                   <a:alpha val="100000"/>
@@ -2830,15 +2830,15 @@
           </p:nvSpPr>
           <p:spPr>
             <a:xfrm>
-              <a:off x="2501542" y="2073503"/>
-              <a:ext cx="0" cy="3649639"/>
+              <a:off x="2574385" y="2209169"/>
+              <a:ext cx="0" cy="3404141"/>
             </a:xfrm>
             <a:custGeom>
               <a:avLst/>
               <a:pathLst>
-                <a:path w="0" h="3649639">
+                <a:path w="0" h="3404141">
                   <a:moveTo>
-                    <a:pt x="0" y="3649639"/>
+                    <a:pt x="0" y="3404141"/>
                   </a:moveTo>
                   <a:lnTo>
                     <a:pt x="0" y="0"/>
@@ -2849,7 +2849,7 @@
                 </a:path>
               </a:pathLst>
             </a:custGeom>
-            <a:ln w="13550" cap="flat">
+            <a:ln w="17246" cap="flat">
               <a:solidFill>
                 <a:srgbClr val="EBEBEB">
                   <a:alpha val="100000"/>
@@ -2873,15 +2873,15 @@
           </p:nvSpPr>
           <p:spPr>
             <a:xfrm>
-              <a:off x="4274200" y="2073503"/>
-              <a:ext cx="0" cy="3649639"/>
+              <a:off x="4320427" y="2209169"/>
+              <a:ext cx="0" cy="3404141"/>
             </a:xfrm>
             <a:custGeom>
               <a:avLst/>
               <a:pathLst>
-                <a:path w="0" h="3649639">
+                <a:path w="0" h="3404141">
                   <a:moveTo>
-                    <a:pt x="0" y="3649639"/>
+                    <a:pt x="0" y="3404141"/>
                   </a:moveTo>
                   <a:lnTo>
                     <a:pt x="0" y="0"/>
@@ -2892,7 +2892,7 @@
                 </a:path>
               </a:pathLst>
             </a:custGeom>
-            <a:ln w="13550" cap="flat">
+            <a:ln w="17246" cap="flat">
               <a:solidFill>
                 <a:srgbClr val="EBEBEB">
                   <a:alpha val="100000"/>
@@ -2916,15 +2916,15 @@
           </p:nvSpPr>
           <p:spPr>
             <a:xfrm>
-              <a:off x="6046857" y="2073503"/>
-              <a:ext cx="0" cy="3649639"/>
+              <a:off x="6066470" y="2209169"/>
+              <a:ext cx="0" cy="3404141"/>
             </a:xfrm>
             <a:custGeom>
               <a:avLst/>
               <a:pathLst>
-                <a:path w="0" h="3649639">
+                <a:path w="0" h="3404141">
                   <a:moveTo>
-                    <a:pt x="0" y="3649639"/>
+                    <a:pt x="0" y="3404141"/>
                   </a:moveTo>
                   <a:lnTo>
                     <a:pt x="0" y="0"/>
@@ -2935,7 +2935,7 @@
                 </a:path>
               </a:pathLst>
             </a:custGeom>
-            <a:ln w="13550" cap="flat">
+            <a:ln w="17246" cap="flat">
               <a:solidFill>
                 <a:srgbClr val="EBEBEB">
                   <a:alpha val="100000"/>
@@ -2959,15 +2959,15 @@
           </p:nvSpPr>
           <p:spPr>
             <a:xfrm>
-              <a:off x="7819515" y="2073503"/>
-              <a:ext cx="0" cy="3649639"/>
+              <a:off x="7812512" y="2209169"/>
+              <a:ext cx="0" cy="3404141"/>
             </a:xfrm>
             <a:custGeom>
               <a:avLst/>
               <a:pathLst>
-                <a:path w="0" h="3649639">
+                <a:path w="0" h="3404141">
                   <a:moveTo>
-                    <a:pt x="0" y="3649639"/>
+                    <a:pt x="0" y="3404141"/>
                   </a:moveTo>
                   <a:lnTo>
                     <a:pt x="0" y="0"/>
@@ -2978,7 +2978,7 @@
                 </a:path>
               </a:pathLst>
             </a:custGeom>
-            <a:ln w="13550" cap="flat">
+            <a:ln w="17246" cap="flat">
               <a:solidFill>
                 <a:srgbClr val="EBEBEB">
                   <a:alpha val="100000"/>
@@ -3002,531 +3002,531 @@
           </p:nvSpPr>
           <p:spPr>
             <a:xfrm>
-              <a:off x="817517" y="2073503"/>
-              <a:ext cx="7370972" cy="3444666"/>
+              <a:off x="915645" y="2209169"/>
+              <a:ext cx="7260303" cy="3212956"/>
             </a:xfrm>
             <a:custGeom>
               <a:avLst/>
               <a:pathLst>
-                <a:path w="7370972" h="3444666">
+                <a:path w="7260303" h="3212956">
                   <a:moveTo>
-                    <a:pt x="1514958" y="0"/>
+                    <a:pt x="1492213" y="0"/>
                   </a:moveTo>
                   <a:lnTo>
-                    <a:pt x="1548419" y="89714"/>
-                  </a:lnTo>
-                  <a:lnTo>
-                    <a:pt x="1626053" y="285839"/>
-                  </a:lnTo>
-                  <a:lnTo>
-                    <a:pt x="1703687" y="470631"/>
-                  </a:lnTo>
-                  <a:lnTo>
-                    <a:pt x="1781321" y="644745"/>
-                  </a:lnTo>
-                  <a:lnTo>
-                    <a:pt x="1858955" y="808798"/>
-                  </a:lnTo>
-                  <a:lnTo>
-                    <a:pt x="1936589" y="963371"/>
-                  </a:lnTo>
-                  <a:lnTo>
-                    <a:pt x="2014223" y="1109011"/>
-                  </a:lnTo>
-                  <a:lnTo>
-                    <a:pt x="2091857" y="1246236"/>
-                  </a:lnTo>
-                  <a:lnTo>
-                    <a:pt x="2169491" y="1375531"/>
-                  </a:lnTo>
-                  <a:lnTo>
-                    <a:pt x="2247125" y="1497355"/>
-                  </a:lnTo>
-                  <a:lnTo>
-                    <a:pt x="2324759" y="1612140"/>
-                  </a:lnTo>
-                  <a:lnTo>
-                    <a:pt x="2402393" y="1720291"/>
-                  </a:lnTo>
-                  <a:lnTo>
-                    <a:pt x="2480027" y="1822193"/>
-                  </a:lnTo>
-                  <a:lnTo>
-                    <a:pt x="2557661" y="1918206"/>
-                  </a:lnTo>
-                  <a:lnTo>
-                    <a:pt x="2635295" y="2008671"/>
-                  </a:lnTo>
-                  <a:lnTo>
-                    <a:pt x="2712930" y="2093909"/>
-                  </a:lnTo>
-                  <a:lnTo>
-                    <a:pt x="2790564" y="2174221"/>
-                  </a:lnTo>
-                  <a:lnTo>
-                    <a:pt x="2868198" y="2249893"/>
-                  </a:lnTo>
-                  <a:lnTo>
-                    <a:pt x="2945832" y="2321191"/>
-                  </a:lnTo>
-                  <a:lnTo>
-                    <a:pt x="3023466" y="2388370"/>
-                  </a:lnTo>
-                  <a:lnTo>
-                    <a:pt x="3101100" y="2451667"/>
-                  </a:lnTo>
-                  <a:lnTo>
-                    <a:pt x="3178734" y="2511306"/>
-                  </a:lnTo>
-                  <a:lnTo>
-                    <a:pt x="3256368" y="2567498"/>
-                  </a:lnTo>
-                  <a:lnTo>
-                    <a:pt x="3334002" y="2620444"/>
-                  </a:lnTo>
-                  <a:lnTo>
-                    <a:pt x="3411636" y="2659569"/>
-                  </a:lnTo>
-                  <a:lnTo>
-                    <a:pt x="3489270" y="2675468"/>
-                  </a:lnTo>
-                  <a:lnTo>
-                    <a:pt x="3566904" y="2691060"/>
-                  </a:lnTo>
-                  <a:lnTo>
-                    <a:pt x="3644538" y="2706351"/>
-                  </a:lnTo>
-                  <a:lnTo>
-                    <a:pt x="3722172" y="2721347"/>
-                  </a:lnTo>
-                  <a:lnTo>
-                    <a:pt x="3799806" y="2736055"/>
-                  </a:lnTo>
-                  <a:lnTo>
-                    <a:pt x="3877440" y="2750478"/>
-                  </a:lnTo>
-                  <a:lnTo>
-                    <a:pt x="3955074" y="2764623"/>
-                  </a:lnTo>
-                  <a:lnTo>
-                    <a:pt x="4032708" y="2778495"/>
-                  </a:lnTo>
-                  <a:lnTo>
-                    <a:pt x="4110342" y="2792100"/>
-                  </a:lnTo>
-                  <a:lnTo>
-                    <a:pt x="4187976" y="2805442"/>
-                  </a:lnTo>
-                  <a:lnTo>
-                    <a:pt x="4265610" y="2818527"/>
-                  </a:lnTo>
-                  <a:lnTo>
-                    <a:pt x="4343244" y="2831359"/>
-                  </a:lnTo>
-                  <a:lnTo>
-                    <a:pt x="4420879" y="2843944"/>
-                  </a:lnTo>
-                  <a:lnTo>
-                    <a:pt x="4498513" y="2856286"/>
-                  </a:lnTo>
-                  <a:lnTo>
-                    <a:pt x="4576147" y="2868390"/>
-                  </a:lnTo>
-                  <a:lnTo>
-                    <a:pt x="4653781" y="2880261"/>
-                  </a:lnTo>
-                  <a:lnTo>
-                    <a:pt x="4731415" y="2891902"/>
-                  </a:lnTo>
-                  <a:lnTo>
-                    <a:pt x="4809049" y="2903319"/>
-                  </a:lnTo>
-                  <a:lnTo>
-                    <a:pt x="4886683" y="2914516"/>
-                  </a:lnTo>
-                  <a:lnTo>
-                    <a:pt x="4964317" y="2925497"/>
-                  </a:lnTo>
-                  <a:lnTo>
-                    <a:pt x="5041951" y="2936265"/>
-                  </a:lnTo>
-                  <a:lnTo>
-                    <a:pt x="5119585" y="2946827"/>
-                  </a:lnTo>
-                  <a:lnTo>
-                    <a:pt x="5197219" y="2957184"/>
-                  </a:lnTo>
-                  <a:lnTo>
-                    <a:pt x="5274853" y="2967342"/>
-                  </a:lnTo>
-                  <a:lnTo>
-                    <a:pt x="5352487" y="2977303"/>
-                  </a:lnTo>
-                  <a:lnTo>
-                    <a:pt x="5430121" y="2987073"/>
-                  </a:lnTo>
-                  <a:lnTo>
-                    <a:pt x="5507755" y="2996654"/>
-                  </a:lnTo>
-                  <a:lnTo>
-                    <a:pt x="5585389" y="3006050"/>
-                  </a:lnTo>
-                  <a:lnTo>
-                    <a:pt x="5663023" y="3015265"/>
-                  </a:lnTo>
-                  <a:lnTo>
-                    <a:pt x="5740657" y="3024302"/>
-                  </a:lnTo>
-                  <a:lnTo>
-                    <a:pt x="5818291" y="3033165"/>
-                  </a:lnTo>
-                  <a:lnTo>
-                    <a:pt x="5895925" y="3041857"/>
-                  </a:lnTo>
-                  <a:lnTo>
-                    <a:pt x="5973559" y="3050381"/>
-                  </a:lnTo>
-                  <a:lnTo>
-                    <a:pt x="6051193" y="3058741"/>
-                  </a:lnTo>
-                  <a:lnTo>
-                    <a:pt x="6128827" y="3066940"/>
-                  </a:lnTo>
-                  <a:lnTo>
-                    <a:pt x="6206462" y="3074980"/>
-                  </a:lnTo>
-                  <a:lnTo>
-                    <a:pt x="6284096" y="3082866"/>
-                  </a:lnTo>
-                  <a:lnTo>
-                    <a:pt x="6361730" y="3090599"/>
-                  </a:lnTo>
-                  <a:lnTo>
-                    <a:pt x="6439364" y="3098183"/>
-                  </a:lnTo>
-                  <a:lnTo>
-                    <a:pt x="6516998" y="3105620"/>
-                  </a:lnTo>
-                  <a:lnTo>
-                    <a:pt x="6594632" y="3112915"/>
-                  </a:lnTo>
-                  <a:lnTo>
-                    <a:pt x="6672266" y="3120068"/>
-                  </a:lnTo>
-                  <a:lnTo>
-                    <a:pt x="6749900" y="3127084"/>
-                  </a:lnTo>
-                  <a:lnTo>
-                    <a:pt x="6827534" y="3133964"/>
-                  </a:lnTo>
-                  <a:lnTo>
-                    <a:pt x="6905168" y="3140711"/>
-                  </a:lnTo>
-                  <a:lnTo>
-                    <a:pt x="6982802" y="3147329"/>
-                  </a:lnTo>
-                  <a:lnTo>
-                    <a:pt x="7060436" y="3153818"/>
-                  </a:lnTo>
-                  <a:lnTo>
-                    <a:pt x="7138070" y="3160183"/>
-                  </a:lnTo>
-                  <a:lnTo>
-                    <a:pt x="7215704" y="3166424"/>
-                  </a:lnTo>
-                  <a:lnTo>
-                    <a:pt x="7293338" y="3172546"/>
-                  </a:lnTo>
-                  <a:lnTo>
-                    <a:pt x="7370972" y="3178549"/>
-                  </a:lnTo>
-                  <a:lnTo>
-                    <a:pt x="7370972" y="3444666"/>
-                  </a:lnTo>
-                  <a:lnTo>
-                    <a:pt x="7293338" y="3442270"/>
-                  </a:lnTo>
-                  <a:lnTo>
-                    <a:pt x="7215704" y="3439726"/>
-                  </a:lnTo>
-                  <a:lnTo>
-                    <a:pt x="7138070" y="3437026"/>
-                  </a:lnTo>
-                  <a:lnTo>
-                    <a:pt x="7060436" y="3434161"/>
-                  </a:lnTo>
-                  <a:lnTo>
-                    <a:pt x="6982802" y="3431120"/>
-                  </a:lnTo>
-                  <a:lnTo>
-                    <a:pt x="6905168" y="3427892"/>
-                  </a:lnTo>
-                  <a:lnTo>
-                    <a:pt x="6827534" y="3424467"/>
-                  </a:lnTo>
-                  <a:lnTo>
-                    <a:pt x="6749900" y="3420831"/>
-                  </a:lnTo>
-                  <a:lnTo>
-                    <a:pt x="6672266" y="3416972"/>
-                  </a:lnTo>
-                  <a:lnTo>
-                    <a:pt x="6594632" y="3412877"/>
-                  </a:lnTo>
-                  <a:lnTo>
-                    <a:pt x="6516998" y="3408531"/>
-                  </a:lnTo>
-                  <a:lnTo>
-                    <a:pt x="6439364" y="3403918"/>
-                  </a:lnTo>
-                  <a:lnTo>
-                    <a:pt x="6361730" y="3399022"/>
-                  </a:lnTo>
-                  <a:lnTo>
-                    <a:pt x="6284096" y="3393826"/>
-                  </a:lnTo>
-                  <a:lnTo>
-                    <a:pt x="6206462" y="3388311"/>
-                  </a:lnTo>
-                  <a:lnTo>
-                    <a:pt x="6128827" y="3382458"/>
-                  </a:lnTo>
-                  <a:lnTo>
-                    <a:pt x="6051193" y="3376246"/>
-                  </a:lnTo>
-                  <a:lnTo>
-                    <a:pt x="5973559" y="3369654"/>
-                  </a:lnTo>
-                  <a:lnTo>
-                    <a:pt x="5895925" y="3362656"/>
-                  </a:lnTo>
-                  <a:lnTo>
-                    <a:pt x="5818291" y="3355230"/>
-                  </a:lnTo>
-                  <a:lnTo>
-                    <a:pt x="5740657" y="3347348"/>
-                  </a:lnTo>
-                  <a:lnTo>
-                    <a:pt x="5663023" y="3338983"/>
-                  </a:lnTo>
-                  <a:lnTo>
-                    <a:pt x="5585389" y="3330105"/>
-                  </a:lnTo>
-                  <a:lnTo>
-                    <a:pt x="5507755" y="3320682"/>
-                  </a:lnTo>
-                  <a:lnTo>
-                    <a:pt x="5430121" y="3310681"/>
-                  </a:lnTo>
-                  <a:lnTo>
-                    <a:pt x="5352487" y="3300067"/>
-                  </a:lnTo>
-                  <a:lnTo>
-                    <a:pt x="5274853" y="3288803"/>
-                  </a:lnTo>
-                  <a:lnTo>
-                    <a:pt x="5197219" y="3276847"/>
-                  </a:lnTo>
-                  <a:lnTo>
-                    <a:pt x="5119585" y="3264158"/>
-                  </a:lnTo>
-                  <a:lnTo>
-                    <a:pt x="5041951" y="3250691"/>
-                  </a:lnTo>
-                  <a:lnTo>
-                    <a:pt x="4964317" y="3236397"/>
-                  </a:lnTo>
-                  <a:lnTo>
-                    <a:pt x="4886683" y="3221228"/>
-                  </a:lnTo>
-                  <a:lnTo>
-                    <a:pt x="4809049" y="3205128"/>
-                  </a:lnTo>
-                  <a:lnTo>
-                    <a:pt x="4731415" y="3188040"/>
-                  </a:lnTo>
-                  <a:lnTo>
-                    <a:pt x="4653781" y="3169905"/>
-                  </a:lnTo>
-                  <a:lnTo>
-                    <a:pt x="4576147" y="3150657"/>
-                  </a:lnTo>
-                  <a:lnTo>
-                    <a:pt x="4498513" y="3130229"/>
-                  </a:lnTo>
-                  <a:lnTo>
-                    <a:pt x="4420879" y="3108548"/>
-                  </a:lnTo>
-                  <a:lnTo>
-                    <a:pt x="4343244" y="3085537"/>
-                  </a:lnTo>
-                  <a:lnTo>
-                    <a:pt x="4265610" y="3061115"/>
-                  </a:lnTo>
-                  <a:lnTo>
-                    <a:pt x="4187976" y="3035196"/>
-                  </a:lnTo>
-                  <a:lnTo>
-                    <a:pt x="4110342" y="3007687"/>
-                  </a:lnTo>
-                  <a:lnTo>
-                    <a:pt x="4032708" y="2978490"/>
-                  </a:lnTo>
-                  <a:lnTo>
-                    <a:pt x="3955074" y="2947503"/>
-                  </a:lnTo>
-                  <a:lnTo>
-                    <a:pt x="3877440" y="2914616"/>
-                  </a:lnTo>
-                  <a:lnTo>
-                    <a:pt x="3799806" y="2879711"/>
-                  </a:lnTo>
-                  <a:lnTo>
-                    <a:pt x="3722172" y="2842666"/>
-                  </a:lnTo>
-                  <a:lnTo>
-                    <a:pt x="3644538" y="2803349"/>
-                  </a:lnTo>
-                  <a:lnTo>
-                    <a:pt x="3566904" y="2761621"/>
-                  </a:lnTo>
-                  <a:lnTo>
-                    <a:pt x="3489270" y="2717334"/>
-                  </a:lnTo>
-                  <a:lnTo>
-                    <a:pt x="3411636" y="2670330"/>
-                  </a:lnTo>
-                  <a:lnTo>
-                    <a:pt x="3334002" y="2643358"/>
-                  </a:lnTo>
-                  <a:lnTo>
-                    <a:pt x="3256368" y="2626827"/>
-                  </a:lnTo>
-                  <a:lnTo>
-                    <a:pt x="3178734" y="2609972"/>
-                  </a:lnTo>
-                  <a:lnTo>
-                    <a:pt x="3101100" y="2592785"/>
-                  </a:lnTo>
-                  <a:lnTo>
-                    <a:pt x="3023466" y="2575259"/>
-                  </a:lnTo>
-                  <a:lnTo>
-                    <a:pt x="2945832" y="2557390"/>
-                  </a:lnTo>
-                  <a:lnTo>
-                    <a:pt x="2868198" y="2539168"/>
-                  </a:lnTo>
-                  <a:lnTo>
-                    <a:pt x="2790564" y="2520588"/>
-                  </a:lnTo>
-                  <a:lnTo>
-                    <a:pt x="2712930" y="2501643"/>
-                  </a:lnTo>
-                  <a:lnTo>
-                    <a:pt x="2635295" y="2482325"/>
-                  </a:lnTo>
-                  <a:lnTo>
-                    <a:pt x="2557661" y="2462627"/>
-                  </a:lnTo>
-                  <a:lnTo>
-                    <a:pt x="2480027" y="2442542"/>
-                  </a:lnTo>
-                  <a:lnTo>
-                    <a:pt x="2402393" y="2422062"/>
-                  </a:lnTo>
-                  <a:lnTo>
-                    <a:pt x="2324759" y="2401179"/>
-                  </a:lnTo>
-                  <a:lnTo>
-                    <a:pt x="2247125" y="2379885"/>
-                  </a:lnTo>
-                  <a:lnTo>
-                    <a:pt x="2169491" y="2358172"/>
-                  </a:lnTo>
-                  <a:lnTo>
-                    <a:pt x="2091857" y="2336032"/>
-                  </a:lnTo>
-                  <a:lnTo>
-                    <a:pt x="2014223" y="2313456"/>
-                  </a:lnTo>
-                  <a:lnTo>
-                    <a:pt x="1936589" y="2290437"/>
-                  </a:lnTo>
-                  <a:lnTo>
-                    <a:pt x="1858955" y="2266964"/>
-                  </a:lnTo>
-                  <a:lnTo>
-                    <a:pt x="1781321" y="2243030"/>
-                  </a:lnTo>
-                  <a:lnTo>
-                    <a:pt x="1703687" y="2218626"/>
-                  </a:lnTo>
-                  <a:lnTo>
-                    <a:pt x="1626053" y="2193741"/>
-                  </a:lnTo>
-                  <a:lnTo>
-                    <a:pt x="1548419" y="2168367"/>
-                  </a:lnTo>
-                  <a:lnTo>
-                    <a:pt x="1470785" y="2142493"/>
-                  </a:lnTo>
-                  <a:lnTo>
-                    <a:pt x="1393151" y="2116111"/>
-                  </a:lnTo>
-                  <a:lnTo>
-                    <a:pt x="1315517" y="2089210"/>
-                  </a:lnTo>
-                  <a:lnTo>
-                    <a:pt x="1237883" y="2061779"/>
-                  </a:lnTo>
-                  <a:lnTo>
-                    <a:pt x="1160249" y="2033809"/>
-                  </a:lnTo>
-                  <a:lnTo>
-                    <a:pt x="1082615" y="2005289"/>
-                  </a:lnTo>
-                  <a:lnTo>
-                    <a:pt x="1004981" y="1976208"/>
-                  </a:lnTo>
-                  <a:lnTo>
-                    <a:pt x="927346" y="1946555"/>
-                  </a:lnTo>
-                  <a:lnTo>
-                    <a:pt x="849712" y="1916318"/>
-                  </a:lnTo>
-                  <a:lnTo>
-                    <a:pt x="772078" y="1885487"/>
-                  </a:lnTo>
-                  <a:lnTo>
-                    <a:pt x="694444" y="1854050"/>
-                  </a:lnTo>
-                  <a:lnTo>
-                    <a:pt x="616810" y="1821994"/>
-                  </a:lnTo>
-                  <a:lnTo>
-                    <a:pt x="539176" y="1789307"/>
-                  </a:lnTo>
-                  <a:lnTo>
-                    <a:pt x="461542" y="1755978"/>
-                  </a:lnTo>
-                  <a:lnTo>
-                    <a:pt x="383908" y="1721993"/>
-                  </a:lnTo>
-                  <a:lnTo>
-                    <a:pt x="306274" y="1687339"/>
-                  </a:lnTo>
-                  <a:lnTo>
-                    <a:pt x="228640" y="1652004"/>
-                  </a:lnTo>
-                  <a:lnTo>
-                    <a:pt x="151006" y="1615974"/>
-                  </a:lnTo>
-                  <a:lnTo>
-                    <a:pt x="73372" y="1579235"/>
-                  </a:lnTo>
-                  <a:lnTo>
-                    <a:pt x="0" y="1543829"/>
+                    <a:pt x="1525171" y="83679"/>
+                  </a:lnTo>
+                  <a:lnTo>
+                    <a:pt x="1601639" y="266612"/>
+                  </a:lnTo>
+                  <a:lnTo>
+                    <a:pt x="1678107" y="438974"/>
+                  </a:lnTo>
+                  <a:lnTo>
+                    <a:pt x="1754576" y="601376"/>
+                  </a:lnTo>
+                  <a:lnTo>
+                    <a:pt x="1831044" y="754393"/>
+                  </a:lnTo>
+                  <a:lnTo>
+                    <a:pt x="1907513" y="898568"/>
+                  </a:lnTo>
+                  <a:lnTo>
+                    <a:pt x="1983981" y="1034412"/>
+                  </a:lnTo>
+                  <a:lnTo>
+                    <a:pt x="2060450" y="1162406"/>
+                  </a:lnTo>
+                  <a:lnTo>
+                    <a:pt x="2136918" y="1283004"/>
+                  </a:lnTo>
+                  <a:lnTo>
+                    <a:pt x="2213386" y="1396634"/>
+                  </a:lnTo>
+                  <a:lnTo>
+                    <a:pt x="2289855" y="1503697"/>
+                  </a:lnTo>
+                  <a:lnTo>
+                    <a:pt x="2366323" y="1604573"/>
+                  </a:lnTo>
+                  <a:lnTo>
+                    <a:pt x="2442792" y="1699621"/>
+                  </a:lnTo>
+                  <a:lnTo>
+                    <a:pt x="2519260" y="1789175"/>
+                  </a:lnTo>
+                  <a:lnTo>
+                    <a:pt x="2595729" y="1873555"/>
+                  </a:lnTo>
+                  <a:lnTo>
+                    <a:pt x="2672197" y="1953060"/>
+                  </a:lnTo>
+                  <a:lnTo>
+                    <a:pt x="2748666" y="2027969"/>
+                  </a:lnTo>
+                  <a:lnTo>
+                    <a:pt x="2825134" y="2098551"/>
+                  </a:lnTo>
+                  <a:lnTo>
+                    <a:pt x="2901602" y="2165053"/>
+                  </a:lnTo>
+                  <a:lnTo>
+                    <a:pt x="2978071" y="2227713"/>
+                  </a:lnTo>
+                  <a:lnTo>
+                    <a:pt x="3054539" y="2286752"/>
+                  </a:lnTo>
+                  <a:lnTo>
+                    <a:pt x="3131008" y="2342379"/>
+                  </a:lnTo>
+                  <a:lnTo>
+                    <a:pt x="3207476" y="2394792"/>
+                  </a:lnTo>
+                  <a:lnTo>
+                    <a:pt x="3283945" y="2444176"/>
+                  </a:lnTo>
+                  <a:lnTo>
+                    <a:pt x="3360413" y="2480670"/>
+                  </a:lnTo>
+                  <a:lnTo>
+                    <a:pt x="3436881" y="2495499"/>
+                  </a:lnTo>
+                  <a:lnTo>
+                    <a:pt x="3513350" y="2510042"/>
+                  </a:lnTo>
+                  <a:lnTo>
+                    <a:pt x="3589818" y="2524305"/>
+                  </a:lnTo>
+                  <a:lnTo>
+                    <a:pt x="3666287" y="2538292"/>
+                  </a:lnTo>
+                  <a:lnTo>
+                    <a:pt x="3742755" y="2552010"/>
+                  </a:lnTo>
+                  <a:lnTo>
+                    <a:pt x="3819224" y="2565463"/>
+                  </a:lnTo>
+                  <a:lnTo>
+                    <a:pt x="3895692" y="2578657"/>
+                  </a:lnTo>
+                  <a:lnTo>
+                    <a:pt x="3972160" y="2591596"/>
+                  </a:lnTo>
+                  <a:lnTo>
+                    <a:pt x="4048629" y="2604285"/>
+                  </a:lnTo>
+                  <a:lnTo>
+                    <a:pt x="4125097" y="2616730"/>
+                  </a:lnTo>
+                  <a:lnTo>
+                    <a:pt x="4201566" y="2628935"/>
+                  </a:lnTo>
+                  <a:lnTo>
+                    <a:pt x="4278034" y="2640904"/>
+                  </a:lnTo>
+                  <a:lnTo>
+                    <a:pt x="4354503" y="2652642"/>
+                  </a:lnTo>
+                  <a:lnTo>
+                    <a:pt x="4430971" y="2664154"/>
+                  </a:lnTo>
+                  <a:lnTo>
+                    <a:pt x="4507439" y="2675444"/>
+                  </a:lnTo>
+                  <a:lnTo>
+                    <a:pt x="4583908" y="2686516"/>
+                  </a:lnTo>
+                  <a:lnTo>
+                    <a:pt x="4660376" y="2697375"/>
+                  </a:lnTo>
+                  <a:lnTo>
+                    <a:pt x="4736845" y="2708023"/>
+                  </a:lnTo>
+                  <a:lnTo>
+                    <a:pt x="4813313" y="2718467"/>
+                  </a:lnTo>
+                  <a:lnTo>
+                    <a:pt x="4889782" y="2728709"/>
+                  </a:lnTo>
+                  <a:lnTo>
+                    <a:pt x="4966250" y="2738754"/>
+                  </a:lnTo>
+                  <a:lnTo>
+                    <a:pt x="5042719" y="2748604"/>
+                  </a:lnTo>
+                  <a:lnTo>
+                    <a:pt x="5119187" y="2758265"/>
+                  </a:lnTo>
+                  <a:lnTo>
+                    <a:pt x="5195655" y="2767739"/>
+                  </a:lnTo>
+                  <a:lnTo>
+                    <a:pt x="5272124" y="2777031"/>
+                  </a:lnTo>
+                  <a:lnTo>
+                    <a:pt x="5348592" y="2786143"/>
+                  </a:lnTo>
+                  <a:lnTo>
+                    <a:pt x="5425061" y="2795080"/>
+                  </a:lnTo>
+                  <a:lnTo>
+                    <a:pt x="5501529" y="2803844"/>
+                  </a:lnTo>
+                  <a:lnTo>
+                    <a:pt x="5577998" y="2812439"/>
+                  </a:lnTo>
+                  <a:lnTo>
+                    <a:pt x="5654466" y="2820869"/>
+                  </a:lnTo>
+                  <a:lnTo>
+                    <a:pt x="5730934" y="2829135"/>
+                  </a:lnTo>
+                  <a:lnTo>
+                    <a:pt x="5807403" y="2837243"/>
+                  </a:lnTo>
+                  <a:lnTo>
+                    <a:pt x="5883871" y="2845193"/>
+                  </a:lnTo>
+                  <a:lnTo>
+                    <a:pt x="5960340" y="2852991"/>
+                  </a:lnTo>
+                  <a:lnTo>
+                    <a:pt x="6036808" y="2860638"/>
+                  </a:lnTo>
+                  <a:lnTo>
+                    <a:pt x="6113277" y="2868138"/>
+                  </a:lnTo>
+                  <a:lnTo>
+                    <a:pt x="6189745" y="2875492"/>
+                  </a:lnTo>
+                  <a:lnTo>
+                    <a:pt x="6266213" y="2882705"/>
+                  </a:lnTo>
+                  <a:lnTo>
+                    <a:pt x="6342682" y="2889779"/>
+                  </a:lnTo>
+                  <a:lnTo>
+                    <a:pt x="6419150" y="2896717"/>
+                  </a:lnTo>
+                  <a:lnTo>
+                    <a:pt x="6495619" y="2903520"/>
+                  </a:lnTo>
+                  <a:lnTo>
+                    <a:pt x="6572087" y="2910193"/>
+                  </a:lnTo>
+                  <a:lnTo>
+                    <a:pt x="6648556" y="2916736"/>
+                  </a:lnTo>
+                  <a:lnTo>
+                    <a:pt x="6725024" y="2923154"/>
+                  </a:lnTo>
+                  <a:lnTo>
+                    <a:pt x="6801492" y="2929447"/>
+                  </a:lnTo>
+                  <a:lnTo>
+                    <a:pt x="6877961" y="2935619"/>
+                  </a:lnTo>
+                  <a:lnTo>
+                    <a:pt x="6954429" y="2941673"/>
+                  </a:lnTo>
+                  <a:lnTo>
+                    <a:pt x="7030898" y="2947609"/>
+                  </a:lnTo>
+                  <a:lnTo>
+                    <a:pt x="7107366" y="2953431"/>
+                  </a:lnTo>
+                  <a:lnTo>
+                    <a:pt x="7183835" y="2959140"/>
+                  </a:lnTo>
+                  <a:lnTo>
+                    <a:pt x="7260303" y="2964740"/>
+                  </a:lnTo>
+                  <a:lnTo>
+                    <a:pt x="7260303" y="3212956"/>
+                  </a:lnTo>
+                  <a:lnTo>
+                    <a:pt x="7183835" y="3210721"/>
+                  </a:lnTo>
+                  <a:lnTo>
+                    <a:pt x="7107366" y="3208348"/>
+                  </a:lnTo>
+                  <a:lnTo>
+                    <a:pt x="7030898" y="3205830"/>
+                  </a:lnTo>
+                  <a:lnTo>
+                    <a:pt x="6954429" y="3203157"/>
+                  </a:lnTo>
+                  <a:lnTo>
+                    <a:pt x="6877961" y="3200321"/>
+                  </a:lnTo>
+                  <a:lnTo>
+                    <a:pt x="6801492" y="3197310"/>
+                  </a:lnTo>
+                  <a:lnTo>
+                    <a:pt x="6725024" y="3194115"/>
+                  </a:lnTo>
+                  <a:lnTo>
+                    <a:pt x="6648556" y="3190724"/>
+                  </a:lnTo>
+                  <a:lnTo>
+                    <a:pt x="6572087" y="3187125"/>
+                  </a:lnTo>
+                  <a:lnTo>
+                    <a:pt x="6495619" y="3183306"/>
+                  </a:lnTo>
+                  <a:lnTo>
+                    <a:pt x="6419150" y="3179252"/>
+                  </a:lnTo>
+                  <a:lnTo>
+                    <a:pt x="6342682" y="3174949"/>
+                  </a:lnTo>
+                  <a:lnTo>
+                    <a:pt x="6266213" y="3170382"/>
+                  </a:lnTo>
+                  <a:lnTo>
+                    <a:pt x="6189745" y="3165536"/>
+                  </a:lnTo>
+                  <a:lnTo>
+                    <a:pt x="6113277" y="3160392"/>
+                  </a:lnTo>
+                  <a:lnTo>
+                    <a:pt x="6036808" y="3154933"/>
+                  </a:lnTo>
+                  <a:lnTo>
+                    <a:pt x="5960340" y="3149139"/>
+                  </a:lnTo>
+                  <a:lnTo>
+                    <a:pt x="5883871" y="3142989"/>
+                  </a:lnTo>
+                  <a:lnTo>
+                    <a:pt x="5807403" y="3136463"/>
+                  </a:lnTo>
+                  <a:lnTo>
+                    <a:pt x="5730934" y="3129536"/>
+                  </a:lnTo>
+                  <a:lnTo>
+                    <a:pt x="5654466" y="3122184"/>
+                  </a:lnTo>
+                  <a:lnTo>
+                    <a:pt x="5577998" y="3114382"/>
+                  </a:lnTo>
+                  <a:lnTo>
+                    <a:pt x="5501529" y="3106101"/>
+                  </a:lnTo>
+                  <a:lnTo>
+                    <a:pt x="5425061" y="3097312"/>
+                  </a:lnTo>
+                  <a:lnTo>
+                    <a:pt x="5348592" y="3087984"/>
+                  </a:lnTo>
+                  <a:lnTo>
+                    <a:pt x="5272124" y="3078084"/>
+                  </a:lnTo>
+                  <a:lnTo>
+                    <a:pt x="5195655" y="3067577"/>
+                  </a:lnTo>
+                  <a:lnTo>
+                    <a:pt x="5119187" y="3056425"/>
+                  </a:lnTo>
+                  <a:lnTo>
+                    <a:pt x="5042719" y="3044590"/>
+                  </a:lnTo>
+                  <a:lnTo>
+                    <a:pt x="4966250" y="3032029"/>
+                  </a:lnTo>
+                  <a:lnTo>
+                    <a:pt x="4889782" y="3018697"/>
+                  </a:lnTo>
+                  <a:lnTo>
+                    <a:pt x="4813313" y="3004548"/>
+                  </a:lnTo>
+                  <a:lnTo>
+                    <a:pt x="4736845" y="2989530"/>
+                  </a:lnTo>
+                  <a:lnTo>
+                    <a:pt x="4660376" y="2973592"/>
+                  </a:lnTo>
+                  <a:lnTo>
+                    <a:pt x="4583908" y="2956677"/>
+                  </a:lnTo>
+                  <a:lnTo>
+                    <a:pt x="4507439" y="2938724"/>
+                  </a:lnTo>
+                  <a:lnTo>
+                    <a:pt x="4430971" y="2919670"/>
+                  </a:lnTo>
+                  <a:lnTo>
+                    <a:pt x="4354503" y="2899447"/>
+                  </a:lnTo>
+                  <a:lnTo>
+                    <a:pt x="4278034" y="2877985"/>
+                  </a:lnTo>
+                  <a:lnTo>
+                    <a:pt x="4201566" y="2855205"/>
+                  </a:lnTo>
+                  <a:lnTo>
+                    <a:pt x="4125097" y="2831029"/>
+                  </a:lnTo>
+                  <a:lnTo>
+                    <a:pt x="4048629" y="2805371"/>
+                  </a:lnTo>
+                  <a:lnTo>
+                    <a:pt x="3972160" y="2778138"/>
+                  </a:lnTo>
+                  <a:lnTo>
+                    <a:pt x="3895692" y="2749235"/>
+                  </a:lnTo>
+                  <a:lnTo>
+                    <a:pt x="3819224" y="2718560"/>
+                  </a:lnTo>
+                  <a:lnTo>
+                    <a:pt x="3742755" y="2686004"/>
+                  </a:lnTo>
+                  <a:lnTo>
+                    <a:pt x="3666287" y="2651451"/>
+                  </a:lnTo>
+                  <a:lnTo>
+                    <a:pt x="3589818" y="2614778"/>
+                  </a:lnTo>
+                  <a:lnTo>
+                    <a:pt x="3513350" y="2575857"/>
+                  </a:lnTo>
+                  <a:lnTo>
+                    <a:pt x="3436881" y="2534549"/>
+                  </a:lnTo>
+                  <a:lnTo>
+                    <a:pt x="3360413" y="2490707"/>
+                  </a:lnTo>
+                  <a:lnTo>
+                    <a:pt x="3283945" y="2465549"/>
+                  </a:lnTo>
+                  <a:lnTo>
+                    <a:pt x="3207476" y="2450130"/>
+                  </a:lnTo>
+                  <a:lnTo>
+                    <a:pt x="3131008" y="2434408"/>
+                  </a:lnTo>
+                  <a:lnTo>
+                    <a:pt x="3054539" y="2418377"/>
+                  </a:lnTo>
+                  <a:lnTo>
+                    <a:pt x="2978071" y="2402031"/>
+                  </a:lnTo>
+                  <a:lnTo>
+                    <a:pt x="2901602" y="2385363"/>
+                  </a:lnTo>
+                  <a:lnTo>
+                    <a:pt x="2825134" y="2368368"/>
+                  </a:lnTo>
+                  <a:lnTo>
+                    <a:pt x="2748666" y="2351038"/>
+                  </a:lnTo>
+                  <a:lnTo>
+                    <a:pt x="2672197" y="2333367"/>
+                  </a:lnTo>
+                  <a:lnTo>
+                    <a:pt x="2595729" y="2315348"/>
+                  </a:lnTo>
+                  <a:lnTo>
+                    <a:pt x="2519260" y="2296976"/>
+                  </a:lnTo>
+                  <a:lnTo>
+                    <a:pt x="2442792" y="2278241"/>
+                  </a:lnTo>
+                  <a:lnTo>
+                    <a:pt x="2366323" y="2259139"/>
+                  </a:lnTo>
+                  <a:lnTo>
+                    <a:pt x="2289855" y="2239660"/>
+                  </a:lnTo>
+                  <a:lnTo>
+                    <a:pt x="2213386" y="2219798"/>
+                  </a:lnTo>
+                  <a:lnTo>
+                    <a:pt x="2136918" y="2199546"/>
+                  </a:lnTo>
+                  <a:lnTo>
+                    <a:pt x="2060450" y="2178895"/>
+                  </a:lnTo>
+                  <a:lnTo>
+                    <a:pt x="1983981" y="2157839"/>
+                  </a:lnTo>
+                  <a:lnTo>
+                    <a:pt x="1907513" y="2136367"/>
+                  </a:lnTo>
+                  <a:lnTo>
+                    <a:pt x="1831044" y="2114474"/>
+                  </a:lnTo>
+                  <a:lnTo>
+                    <a:pt x="1754576" y="2092150"/>
+                  </a:lnTo>
+                  <a:lnTo>
+                    <a:pt x="1678107" y="2069387"/>
+                  </a:lnTo>
+                  <a:lnTo>
+                    <a:pt x="1601639" y="2046176"/>
+                  </a:lnTo>
+                  <a:lnTo>
+                    <a:pt x="1525171" y="2022508"/>
+                  </a:lnTo>
+                  <a:lnTo>
+                    <a:pt x="1448702" y="1998376"/>
+                  </a:lnTo>
+                  <a:lnTo>
+                    <a:pt x="1372234" y="1973768"/>
+                  </a:lnTo>
+                  <a:lnTo>
+                    <a:pt x="1295765" y="1948676"/>
+                  </a:lnTo>
+                  <a:lnTo>
+                    <a:pt x="1219297" y="1923091"/>
+                  </a:lnTo>
+                  <a:lnTo>
+                    <a:pt x="1142828" y="1897002"/>
+                  </a:lnTo>
+                  <a:lnTo>
+                    <a:pt x="1066360" y="1870401"/>
+                  </a:lnTo>
+                  <a:lnTo>
+                    <a:pt x="989892" y="1843276"/>
+                  </a:lnTo>
+                  <a:lnTo>
+                    <a:pt x="913423" y="1815617"/>
+                  </a:lnTo>
+                  <a:lnTo>
+                    <a:pt x="836955" y="1787415"/>
+                  </a:lnTo>
+                  <a:lnTo>
+                    <a:pt x="760486" y="1758657"/>
+                  </a:lnTo>
+                  <a:lnTo>
+                    <a:pt x="684018" y="1729334"/>
+                  </a:lnTo>
+                  <a:lnTo>
+                    <a:pt x="607549" y="1699435"/>
+                  </a:lnTo>
+                  <a:lnTo>
+                    <a:pt x="531081" y="1668947"/>
+                  </a:lnTo>
+                  <a:lnTo>
+                    <a:pt x="454613" y="1637859"/>
+                  </a:lnTo>
+                  <a:lnTo>
+                    <a:pt x="378144" y="1606160"/>
+                  </a:lnTo>
+                  <a:lnTo>
+                    <a:pt x="301676" y="1573838"/>
+                  </a:lnTo>
+                  <a:lnTo>
+                    <a:pt x="225207" y="1540880"/>
+                  </a:lnTo>
+                  <a:lnTo>
+                    <a:pt x="148739" y="1507273"/>
+                  </a:lnTo>
+                  <a:lnTo>
+                    <a:pt x="72270" y="1473005"/>
+                  </a:lnTo>
+                  <a:lnTo>
+                    <a:pt x="0" y="1439982"/>
                   </a:lnTo>
                   <a:close/>
                 </a:path>
@@ -3552,243 +3552,243 @@
           </p:nvSpPr>
           <p:spPr>
             <a:xfrm>
-              <a:off x="2332476" y="2073503"/>
-              <a:ext cx="5856013" cy="3178549"/>
+              <a:off x="2407858" y="2209169"/>
+              <a:ext cx="5768090" cy="2964740"/>
             </a:xfrm>
             <a:custGeom>
               <a:avLst/>
               <a:pathLst>
-                <a:path w="5856013" h="3178549">
+                <a:path w="5768090" h="2964740">
                   <a:moveTo>
                     <a:pt x="0" y="0"/>
                   </a:moveTo>
                   <a:lnTo>
-                    <a:pt x="33460" y="89714"/>
-                  </a:lnTo>
-                  <a:lnTo>
-                    <a:pt x="111094" y="285839"/>
-                  </a:lnTo>
-                  <a:lnTo>
-                    <a:pt x="188728" y="470631"/>
-                  </a:lnTo>
-                  <a:lnTo>
-                    <a:pt x="266362" y="644745"/>
-                  </a:lnTo>
-                  <a:lnTo>
-                    <a:pt x="343996" y="808798"/>
-                  </a:lnTo>
-                  <a:lnTo>
-                    <a:pt x="421630" y="963371"/>
-                  </a:lnTo>
-                  <a:lnTo>
-                    <a:pt x="499264" y="1109011"/>
-                  </a:lnTo>
-                  <a:lnTo>
-                    <a:pt x="576898" y="1246236"/>
-                  </a:lnTo>
-                  <a:lnTo>
-                    <a:pt x="654532" y="1375531"/>
-                  </a:lnTo>
-                  <a:lnTo>
-                    <a:pt x="732166" y="1497355"/>
-                  </a:lnTo>
-                  <a:lnTo>
-                    <a:pt x="809800" y="1612140"/>
-                  </a:lnTo>
-                  <a:lnTo>
-                    <a:pt x="887434" y="1720291"/>
-                  </a:lnTo>
-                  <a:lnTo>
-                    <a:pt x="965069" y="1822193"/>
-                  </a:lnTo>
-                  <a:lnTo>
-                    <a:pt x="1042703" y="1918206"/>
-                  </a:lnTo>
-                  <a:lnTo>
-                    <a:pt x="1120337" y="2008671"/>
-                  </a:lnTo>
-                  <a:lnTo>
-                    <a:pt x="1197971" y="2093909"/>
-                  </a:lnTo>
-                  <a:lnTo>
-                    <a:pt x="1275605" y="2174221"/>
-                  </a:lnTo>
-                  <a:lnTo>
-                    <a:pt x="1353239" y="2249893"/>
-                  </a:lnTo>
-                  <a:lnTo>
-                    <a:pt x="1430873" y="2321191"/>
-                  </a:lnTo>
-                  <a:lnTo>
-                    <a:pt x="1508507" y="2388370"/>
-                  </a:lnTo>
-                  <a:lnTo>
-                    <a:pt x="1586141" y="2451667"/>
-                  </a:lnTo>
-                  <a:lnTo>
-                    <a:pt x="1663775" y="2511306"/>
-                  </a:lnTo>
-                  <a:lnTo>
-                    <a:pt x="1741409" y="2567498"/>
-                  </a:lnTo>
-                  <a:lnTo>
-                    <a:pt x="1819043" y="2620444"/>
-                  </a:lnTo>
-                  <a:lnTo>
-                    <a:pt x="1896677" y="2659569"/>
-                  </a:lnTo>
-                  <a:lnTo>
-                    <a:pt x="1974311" y="2675468"/>
-                  </a:lnTo>
-                  <a:lnTo>
-                    <a:pt x="2051945" y="2691060"/>
-                  </a:lnTo>
-                  <a:lnTo>
-                    <a:pt x="2129579" y="2706351"/>
-                  </a:lnTo>
-                  <a:lnTo>
-                    <a:pt x="2207213" y="2721347"/>
-                  </a:lnTo>
-                  <a:lnTo>
-                    <a:pt x="2284847" y="2736055"/>
-                  </a:lnTo>
-                  <a:lnTo>
-                    <a:pt x="2362481" y="2750478"/>
-                  </a:lnTo>
-                  <a:lnTo>
-                    <a:pt x="2440115" y="2764623"/>
-                  </a:lnTo>
-                  <a:lnTo>
-                    <a:pt x="2517749" y="2778495"/>
-                  </a:lnTo>
-                  <a:lnTo>
-                    <a:pt x="2595383" y="2792100"/>
-                  </a:lnTo>
-                  <a:lnTo>
-                    <a:pt x="2673017" y="2805442"/>
-                  </a:lnTo>
-                  <a:lnTo>
-                    <a:pt x="2750652" y="2818527"/>
-                  </a:lnTo>
-                  <a:lnTo>
-                    <a:pt x="2828286" y="2831359"/>
-                  </a:lnTo>
-                  <a:lnTo>
-                    <a:pt x="2905920" y="2843944"/>
-                  </a:lnTo>
-                  <a:lnTo>
-                    <a:pt x="2983554" y="2856286"/>
-                  </a:lnTo>
-                  <a:lnTo>
-                    <a:pt x="3061188" y="2868390"/>
-                  </a:lnTo>
-                  <a:lnTo>
-                    <a:pt x="3138822" y="2880261"/>
-                  </a:lnTo>
-                  <a:lnTo>
-                    <a:pt x="3216456" y="2891902"/>
-                  </a:lnTo>
-                  <a:lnTo>
-                    <a:pt x="3294090" y="2903319"/>
-                  </a:lnTo>
-                  <a:lnTo>
-                    <a:pt x="3371724" y="2914516"/>
-                  </a:lnTo>
-                  <a:lnTo>
-                    <a:pt x="3449358" y="2925497"/>
-                  </a:lnTo>
-                  <a:lnTo>
-                    <a:pt x="3526992" y="2936265"/>
-                  </a:lnTo>
-                  <a:lnTo>
-                    <a:pt x="3604626" y="2946827"/>
-                  </a:lnTo>
-                  <a:lnTo>
-                    <a:pt x="3682260" y="2957184"/>
-                  </a:lnTo>
-                  <a:lnTo>
-                    <a:pt x="3759894" y="2967342"/>
-                  </a:lnTo>
-                  <a:lnTo>
-                    <a:pt x="3837528" y="2977303"/>
-                  </a:lnTo>
-                  <a:lnTo>
-                    <a:pt x="3915162" y="2987073"/>
-                  </a:lnTo>
-                  <a:lnTo>
-                    <a:pt x="3992796" y="2996654"/>
-                  </a:lnTo>
-                  <a:lnTo>
-                    <a:pt x="4070430" y="3006050"/>
-                  </a:lnTo>
-                  <a:lnTo>
-                    <a:pt x="4148064" y="3015265"/>
-                  </a:lnTo>
-                  <a:lnTo>
-                    <a:pt x="4225698" y="3024302"/>
-                  </a:lnTo>
-                  <a:lnTo>
-                    <a:pt x="4303332" y="3033165"/>
-                  </a:lnTo>
-                  <a:lnTo>
-                    <a:pt x="4380966" y="3041857"/>
-                  </a:lnTo>
-                  <a:lnTo>
-                    <a:pt x="4458601" y="3050381"/>
-                  </a:lnTo>
-                  <a:lnTo>
-                    <a:pt x="4536235" y="3058741"/>
-                  </a:lnTo>
-                  <a:lnTo>
-                    <a:pt x="4613869" y="3066940"/>
-                  </a:lnTo>
-                  <a:lnTo>
-                    <a:pt x="4691503" y="3074980"/>
-                  </a:lnTo>
-                  <a:lnTo>
-                    <a:pt x="4769137" y="3082866"/>
-                  </a:lnTo>
-                  <a:lnTo>
-                    <a:pt x="4846771" y="3090599"/>
-                  </a:lnTo>
-                  <a:lnTo>
-                    <a:pt x="4924405" y="3098183"/>
-                  </a:lnTo>
-                  <a:lnTo>
-                    <a:pt x="5002039" y="3105620"/>
-                  </a:lnTo>
-                  <a:lnTo>
-                    <a:pt x="5079673" y="3112915"/>
-                  </a:lnTo>
-                  <a:lnTo>
-                    <a:pt x="5157307" y="3120068"/>
-                  </a:lnTo>
-                  <a:lnTo>
-                    <a:pt x="5234941" y="3127084"/>
-                  </a:lnTo>
-                  <a:lnTo>
-                    <a:pt x="5312575" y="3133964"/>
-                  </a:lnTo>
-                  <a:lnTo>
-                    <a:pt x="5390209" y="3140711"/>
-                  </a:lnTo>
-                  <a:lnTo>
-                    <a:pt x="5467843" y="3147329"/>
-                  </a:lnTo>
-                  <a:lnTo>
-                    <a:pt x="5545477" y="3153818"/>
-                  </a:lnTo>
-                  <a:lnTo>
-                    <a:pt x="5623111" y="3160183"/>
-                  </a:lnTo>
-                  <a:lnTo>
-                    <a:pt x="5700745" y="3166424"/>
-                  </a:lnTo>
-                  <a:lnTo>
-                    <a:pt x="5778379" y="3172546"/>
-                  </a:lnTo>
-                  <a:lnTo>
-                    <a:pt x="5856013" y="3178549"/>
+                    <a:pt x="32958" y="83679"/>
+                  </a:lnTo>
+                  <a:lnTo>
+                    <a:pt x="109426" y="266612"/>
+                  </a:lnTo>
+                  <a:lnTo>
+                    <a:pt x="185894" y="438974"/>
+                  </a:lnTo>
+                  <a:lnTo>
+                    <a:pt x="262363" y="601376"/>
+                  </a:lnTo>
+                  <a:lnTo>
+                    <a:pt x="338831" y="754393"/>
+                  </a:lnTo>
+                  <a:lnTo>
+                    <a:pt x="415300" y="898568"/>
+                  </a:lnTo>
+                  <a:lnTo>
+                    <a:pt x="491768" y="1034412"/>
+                  </a:lnTo>
+                  <a:lnTo>
+                    <a:pt x="568237" y="1162406"/>
+                  </a:lnTo>
+                  <a:lnTo>
+                    <a:pt x="644705" y="1283004"/>
+                  </a:lnTo>
+                  <a:lnTo>
+                    <a:pt x="721173" y="1396634"/>
+                  </a:lnTo>
+                  <a:lnTo>
+                    <a:pt x="797642" y="1503697"/>
+                  </a:lnTo>
+                  <a:lnTo>
+                    <a:pt x="874110" y="1604573"/>
+                  </a:lnTo>
+                  <a:lnTo>
+                    <a:pt x="950579" y="1699621"/>
+                  </a:lnTo>
+                  <a:lnTo>
+                    <a:pt x="1027047" y="1789175"/>
+                  </a:lnTo>
+                  <a:lnTo>
+                    <a:pt x="1103516" y="1873555"/>
+                  </a:lnTo>
+                  <a:lnTo>
+                    <a:pt x="1179984" y="1953060"/>
+                  </a:lnTo>
+                  <a:lnTo>
+                    <a:pt x="1256453" y="2027969"/>
+                  </a:lnTo>
+                  <a:lnTo>
+                    <a:pt x="1332921" y="2098551"/>
+                  </a:lnTo>
+                  <a:lnTo>
+                    <a:pt x="1409389" y="2165053"/>
+                  </a:lnTo>
+                  <a:lnTo>
+                    <a:pt x="1485858" y="2227713"/>
+                  </a:lnTo>
+                  <a:lnTo>
+                    <a:pt x="1562326" y="2286752"/>
+                  </a:lnTo>
+                  <a:lnTo>
+                    <a:pt x="1638795" y="2342379"/>
+                  </a:lnTo>
+                  <a:lnTo>
+                    <a:pt x="1715263" y="2394792"/>
+                  </a:lnTo>
+                  <a:lnTo>
+                    <a:pt x="1791732" y="2444176"/>
+                  </a:lnTo>
+                  <a:lnTo>
+                    <a:pt x="1868200" y="2480670"/>
+                  </a:lnTo>
+                  <a:lnTo>
+                    <a:pt x="1944668" y="2495499"/>
+                  </a:lnTo>
+                  <a:lnTo>
+                    <a:pt x="2021137" y="2510042"/>
+                  </a:lnTo>
+                  <a:lnTo>
+                    <a:pt x="2097605" y="2524305"/>
+                  </a:lnTo>
+                  <a:lnTo>
+                    <a:pt x="2174074" y="2538292"/>
+                  </a:lnTo>
+                  <a:lnTo>
+                    <a:pt x="2250542" y="2552010"/>
+                  </a:lnTo>
+                  <a:lnTo>
+                    <a:pt x="2327011" y="2565463"/>
+                  </a:lnTo>
+                  <a:lnTo>
+                    <a:pt x="2403479" y="2578657"/>
+                  </a:lnTo>
+                  <a:lnTo>
+                    <a:pt x="2479947" y="2591596"/>
+                  </a:lnTo>
+                  <a:lnTo>
+                    <a:pt x="2556416" y="2604285"/>
+                  </a:lnTo>
+                  <a:lnTo>
+                    <a:pt x="2632884" y="2616730"/>
+                  </a:lnTo>
+                  <a:lnTo>
+                    <a:pt x="2709353" y="2628935"/>
+                  </a:lnTo>
+                  <a:lnTo>
+                    <a:pt x="2785821" y="2640904"/>
+                  </a:lnTo>
+                  <a:lnTo>
+                    <a:pt x="2862290" y="2652642"/>
+                  </a:lnTo>
+                  <a:lnTo>
+                    <a:pt x="2938758" y="2664154"/>
+                  </a:lnTo>
+                  <a:lnTo>
+                    <a:pt x="3015226" y="2675444"/>
+                  </a:lnTo>
+                  <a:lnTo>
+                    <a:pt x="3091695" y="2686516"/>
+                  </a:lnTo>
+                  <a:lnTo>
+                    <a:pt x="3168163" y="2697375"/>
+                  </a:lnTo>
+                  <a:lnTo>
+                    <a:pt x="3244632" y="2708023"/>
+                  </a:lnTo>
+                  <a:lnTo>
+                    <a:pt x="3321100" y="2718467"/>
+                  </a:lnTo>
+                  <a:lnTo>
+                    <a:pt x="3397569" y="2728709"/>
+                  </a:lnTo>
+                  <a:lnTo>
+                    <a:pt x="3474037" y="2738754"/>
+                  </a:lnTo>
+                  <a:lnTo>
+                    <a:pt x="3550506" y="2748604"/>
+                  </a:lnTo>
+                  <a:lnTo>
+                    <a:pt x="3626974" y="2758265"/>
+                  </a:lnTo>
+                  <a:lnTo>
+                    <a:pt x="3703442" y="2767739"/>
+                  </a:lnTo>
+                  <a:lnTo>
+                    <a:pt x="3779911" y="2777031"/>
+                  </a:lnTo>
+                  <a:lnTo>
+                    <a:pt x="3856379" y="2786143"/>
+                  </a:lnTo>
+                  <a:lnTo>
+                    <a:pt x="3932848" y="2795080"/>
+                  </a:lnTo>
+                  <a:lnTo>
+                    <a:pt x="4009316" y="2803844"/>
+                  </a:lnTo>
+                  <a:lnTo>
+                    <a:pt x="4085785" y="2812439"/>
+                  </a:lnTo>
+                  <a:lnTo>
+                    <a:pt x="4162253" y="2820869"/>
+                  </a:lnTo>
+                  <a:lnTo>
+                    <a:pt x="4238721" y="2829135"/>
+                  </a:lnTo>
+                  <a:lnTo>
+                    <a:pt x="4315190" y="2837243"/>
+                  </a:lnTo>
+                  <a:lnTo>
+                    <a:pt x="4391658" y="2845193"/>
+                  </a:lnTo>
+                  <a:lnTo>
+                    <a:pt x="4468127" y="2852991"/>
+                  </a:lnTo>
+                  <a:lnTo>
+                    <a:pt x="4544595" y="2860638"/>
+                  </a:lnTo>
+                  <a:lnTo>
+                    <a:pt x="4621064" y="2868138"/>
+                  </a:lnTo>
+                  <a:lnTo>
+                    <a:pt x="4697532" y="2875492"/>
+                  </a:lnTo>
+                  <a:lnTo>
+                    <a:pt x="4774000" y="2882705"/>
+                  </a:lnTo>
+                  <a:lnTo>
+                    <a:pt x="4850469" y="2889779"/>
+                  </a:lnTo>
+                  <a:lnTo>
+                    <a:pt x="4926937" y="2896717"/>
+                  </a:lnTo>
+                  <a:lnTo>
+                    <a:pt x="5003406" y="2903520"/>
+                  </a:lnTo>
+                  <a:lnTo>
+                    <a:pt x="5079874" y="2910193"/>
+                  </a:lnTo>
+                  <a:lnTo>
+                    <a:pt x="5156343" y="2916736"/>
+                  </a:lnTo>
+                  <a:lnTo>
+                    <a:pt x="5232811" y="2923154"/>
+                  </a:lnTo>
+                  <a:lnTo>
+                    <a:pt x="5309279" y="2929447"/>
+                  </a:lnTo>
+                  <a:lnTo>
+                    <a:pt x="5385748" y="2935619"/>
+                  </a:lnTo>
+                  <a:lnTo>
+                    <a:pt x="5462216" y="2941673"/>
+                  </a:lnTo>
+                  <a:lnTo>
+                    <a:pt x="5538685" y="2947609"/>
+                  </a:lnTo>
+                  <a:lnTo>
+                    <a:pt x="5615153" y="2953431"/>
+                  </a:lnTo>
+                  <a:lnTo>
+                    <a:pt x="5691622" y="2959140"/>
+                  </a:lnTo>
+                  <a:lnTo>
+                    <a:pt x="5768090" y="2964740"/>
                   </a:lnTo>
                 </a:path>
               </a:pathLst>
@@ -3808,297 +3808,297 @@
           </p:nvSpPr>
           <p:spPr>
             <a:xfrm>
-              <a:off x="817517" y="3617333"/>
-              <a:ext cx="7370972" cy="1900836"/>
+              <a:off x="915645" y="3649151"/>
+              <a:ext cx="7260303" cy="1772974"/>
             </a:xfrm>
             <a:custGeom>
               <a:avLst/>
               <a:pathLst>
-                <a:path w="7370972" h="1900836">
+                <a:path w="7260303" h="1772974">
                   <a:moveTo>
-                    <a:pt x="7370972" y="1900836"/>
+                    <a:pt x="7260303" y="1772974"/>
                   </a:moveTo>
                   <a:lnTo>
-                    <a:pt x="7293338" y="1898440"/>
-                  </a:lnTo>
-                  <a:lnTo>
-                    <a:pt x="7215704" y="1895896"/>
-                  </a:lnTo>
-                  <a:lnTo>
-                    <a:pt x="7138070" y="1893196"/>
-                  </a:lnTo>
-                  <a:lnTo>
-                    <a:pt x="7060436" y="1890331"/>
-                  </a:lnTo>
-                  <a:lnTo>
-                    <a:pt x="6982802" y="1887290"/>
-                  </a:lnTo>
-                  <a:lnTo>
-                    <a:pt x="6905168" y="1884062"/>
-                  </a:lnTo>
-                  <a:lnTo>
-                    <a:pt x="6827534" y="1880637"/>
-                  </a:lnTo>
-                  <a:lnTo>
-                    <a:pt x="6749900" y="1877001"/>
-                  </a:lnTo>
-                  <a:lnTo>
-                    <a:pt x="6672266" y="1873142"/>
-                  </a:lnTo>
-                  <a:lnTo>
-                    <a:pt x="6594632" y="1869047"/>
-                  </a:lnTo>
-                  <a:lnTo>
-                    <a:pt x="6516998" y="1864701"/>
-                  </a:lnTo>
-                  <a:lnTo>
-                    <a:pt x="6439364" y="1860088"/>
-                  </a:lnTo>
-                  <a:lnTo>
-                    <a:pt x="6361730" y="1855192"/>
-                  </a:lnTo>
-                  <a:lnTo>
-                    <a:pt x="6284096" y="1849996"/>
-                  </a:lnTo>
-                  <a:lnTo>
-                    <a:pt x="6206462" y="1844481"/>
-                  </a:lnTo>
-                  <a:lnTo>
-                    <a:pt x="6128827" y="1838628"/>
-                  </a:lnTo>
-                  <a:lnTo>
-                    <a:pt x="6051193" y="1832416"/>
-                  </a:lnTo>
-                  <a:lnTo>
-                    <a:pt x="5973559" y="1825824"/>
-                  </a:lnTo>
-                  <a:lnTo>
-                    <a:pt x="5895925" y="1818826"/>
-                  </a:lnTo>
-                  <a:lnTo>
-                    <a:pt x="5818291" y="1811400"/>
-                  </a:lnTo>
-                  <a:lnTo>
-                    <a:pt x="5740657" y="1803518"/>
-                  </a:lnTo>
-                  <a:lnTo>
-                    <a:pt x="5663023" y="1795153"/>
-                  </a:lnTo>
-                  <a:lnTo>
-                    <a:pt x="5585389" y="1786275"/>
-                  </a:lnTo>
-                  <a:lnTo>
-                    <a:pt x="5507755" y="1776852"/>
-                  </a:lnTo>
-                  <a:lnTo>
-                    <a:pt x="5430121" y="1766851"/>
-                  </a:lnTo>
-                  <a:lnTo>
-                    <a:pt x="5352487" y="1756237"/>
-                  </a:lnTo>
-                  <a:lnTo>
-                    <a:pt x="5274853" y="1744973"/>
-                  </a:lnTo>
-                  <a:lnTo>
-                    <a:pt x="5197219" y="1733017"/>
-                  </a:lnTo>
-                  <a:lnTo>
-                    <a:pt x="5119585" y="1720328"/>
-                  </a:lnTo>
-                  <a:lnTo>
-                    <a:pt x="5041951" y="1706861"/>
-                  </a:lnTo>
-                  <a:lnTo>
-                    <a:pt x="4964317" y="1692567"/>
-                  </a:lnTo>
-                  <a:lnTo>
-                    <a:pt x="4886683" y="1677398"/>
-                  </a:lnTo>
-                  <a:lnTo>
-                    <a:pt x="4809049" y="1661298"/>
-                  </a:lnTo>
-                  <a:lnTo>
-                    <a:pt x="4731415" y="1644210"/>
-                  </a:lnTo>
-                  <a:lnTo>
-                    <a:pt x="4653781" y="1626075"/>
-                  </a:lnTo>
-                  <a:lnTo>
-                    <a:pt x="4576147" y="1606827"/>
-                  </a:lnTo>
-                  <a:lnTo>
-                    <a:pt x="4498513" y="1586399"/>
-                  </a:lnTo>
-                  <a:lnTo>
-                    <a:pt x="4420879" y="1564718"/>
-                  </a:lnTo>
-                  <a:lnTo>
-                    <a:pt x="4343244" y="1541707"/>
-                  </a:lnTo>
-                  <a:lnTo>
-                    <a:pt x="4265610" y="1517285"/>
-                  </a:lnTo>
-                  <a:lnTo>
-                    <a:pt x="4187976" y="1491366"/>
-                  </a:lnTo>
-                  <a:lnTo>
-                    <a:pt x="4110342" y="1463857"/>
-                  </a:lnTo>
-                  <a:lnTo>
-                    <a:pt x="4032708" y="1434660"/>
-                  </a:lnTo>
-                  <a:lnTo>
-                    <a:pt x="3955074" y="1403673"/>
-                  </a:lnTo>
-                  <a:lnTo>
-                    <a:pt x="3877440" y="1370786"/>
-                  </a:lnTo>
-                  <a:lnTo>
-                    <a:pt x="3799806" y="1335881"/>
-                  </a:lnTo>
-                  <a:lnTo>
-                    <a:pt x="3722172" y="1298836"/>
-                  </a:lnTo>
-                  <a:lnTo>
-                    <a:pt x="3644538" y="1259519"/>
-                  </a:lnTo>
-                  <a:lnTo>
-                    <a:pt x="3566904" y="1217791"/>
-                  </a:lnTo>
-                  <a:lnTo>
-                    <a:pt x="3489270" y="1173504"/>
-                  </a:lnTo>
-                  <a:lnTo>
-                    <a:pt x="3411636" y="1126500"/>
-                  </a:lnTo>
-                  <a:lnTo>
-                    <a:pt x="3334002" y="1099528"/>
-                  </a:lnTo>
-                  <a:lnTo>
-                    <a:pt x="3256368" y="1082997"/>
-                  </a:lnTo>
-                  <a:lnTo>
-                    <a:pt x="3178734" y="1066142"/>
-                  </a:lnTo>
-                  <a:lnTo>
-                    <a:pt x="3101100" y="1048955"/>
-                  </a:lnTo>
-                  <a:lnTo>
-                    <a:pt x="3023466" y="1031429"/>
-                  </a:lnTo>
-                  <a:lnTo>
-                    <a:pt x="2945832" y="1013560"/>
-                  </a:lnTo>
-                  <a:lnTo>
-                    <a:pt x="2868198" y="995338"/>
-                  </a:lnTo>
-                  <a:lnTo>
-                    <a:pt x="2790564" y="976758"/>
-                  </a:lnTo>
-                  <a:lnTo>
-                    <a:pt x="2712930" y="957813"/>
-                  </a:lnTo>
-                  <a:lnTo>
-                    <a:pt x="2635295" y="938495"/>
-                  </a:lnTo>
-                  <a:lnTo>
-                    <a:pt x="2557661" y="918797"/>
-                  </a:lnTo>
-                  <a:lnTo>
-                    <a:pt x="2480027" y="898712"/>
-                  </a:lnTo>
-                  <a:lnTo>
-                    <a:pt x="2402393" y="878232"/>
-                  </a:lnTo>
-                  <a:lnTo>
-                    <a:pt x="2324759" y="857349"/>
-                  </a:lnTo>
-                  <a:lnTo>
-                    <a:pt x="2247125" y="836055"/>
-                  </a:lnTo>
-                  <a:lnTo>
-                    <a:pt x="2169491" y="814342"/>
-                  </a:lnTo>
-                  <a:lnTo>
-                    <a:pt x="2091857" y="792202"/>
-                  </a:lnTo>
-                  <a:lnTo>
-                    <a:pt x="2014223" y="769626"/>
-                  </a:lnTo>
-                  <a:lnTo>
-                    <a:pt x="1936589" y="746607"/>
-                  </a:lnTo>
-                  <a:lnTo>
-                    <a:pt x="1858955" y="723134"/>
-                  </a:lnTo>
-                  <a:lnTo>
-                    <a:pt x="1781321" y="699200"/>
-                  </a:lnTo>
-                  <a:lnTo>
-                    <a:pt x="1703687" y="674796"/>
-                  </a:lnTo>
-                  <a:lnTo>
-                    <a:pt x="1626053" y="649911"/>
-                  </a:lnTo>
-                  <a:lnTo>
-                    <a:pt x="1548419" y="624537"/>
-                  </a:lnTo>
-                  <a:lnTo>
-                    <a:pt x="1470785" y="598663"/>
-                  </a:lnTo>
-                  <a:lnTo>
-                    <a:pt x="1393151" y="572281"/>
-                  </a:lnTo>
-                  <a:lnTo>
-                    <a:pt x="1315517" y="545380"/>
-                  </a:lnTo>
-                  <a:lnTo>
-                    <a:pt x="1237883" y="517949"/>
-                  </a:lnTo>
-                  <a:lnTo>
-                    <a:pt x="1160249" y="489979"/>
-                  </a:lnTo>
-                  <a:lnTo>
-                    <a:pt x="1082615" y="461459"/>
-                  </a:lnTo>
-                  <a:lnTo>
-                    <a:pt x="1004981" y="432378"/>
-                  </a:lnTo>
-                  <a:lnTo>
-                    <a:pt x="927346" y="402725"/>
-                  </a:lnTo>
-                  <a:lnTo>
-                    <a:pt x="849712" y="372488"/>
-                  </a:lnTo>
-                  <a:lnTo>
-                    <a:pt x="772078" y="341657"/>
-                  </a:lnTo>
-                  <a:lnTo>
-                    <a:pt x="694444" y="310220"/>
-                  </a:lnTo>
-                  <a:lnTo>
-                    <a:pt x="616810" y="278164"/>
-                  </a:lnTo>
-                  <a:lnTo>
-                    <a:pt x="539176" y="245477"/>
-                  </a:lnTo>
-                  <a:lnTo>
-                    <a:pt x="461542" y="212148"/>
-                  </a:lnTo>
-                  <a:lnTo>
-                    <a:pt x="383908" y="178163"/>
-                  </a:lnTo>
-                  <a:lnTo>
-                    <a:pt x="306274" y="143509"/>
-                  </a:lnTo>
-                  <a:lnTo>
-                    <a:pt x="228640" y="108174"/>
-                  </a:lnTo>
-                  <a:lnTo>
-                    <a:pt x="151006" y="72144"/>
-                  </a:lnTo>
-                  <a:lnTo>
-                    <a:pt x="73372" y="35405"/>
+                    <a:pt x="7183835" y="1770738"/>
+                  </a:lnTo>
+                  <a:lnTo>
+                    <a:pt x="7107366" y="1768366"/>
+                  </a:lnTo>
+                  <a:lnTo>
+                    <a:pt x="7030898" y="1765848"/>
+                  </a:lnTo>
+                  <a:lnTo>
+                    <a:pt x="6954429" y="1763175"/>
+                  </a:lnTo>
+                  <a:lnTo>
+                    <a:pt x="6877961" y="1760339"/>
+                  </a:lnTo>
+                  <a:lnTo>
+                    <a:pt x="6801492" y="1757328"/>
+                  </a:lnTo>
+                  <a:lnTo>
+                    <a:pt x="6725024" y="1754133"/>
+                  </a:lnTo>
+                  <a:lnTo>
+                    <a:pt x="6648556" y="1750742"/>
+                  </a:lnTo>
+                  <a:lnTo>
+                    <a:pt x="6572087" y="1747143"/>
+                  </a:lnTo>
+                  <a:lnTo>
+                    <a:pt x="6495619" y="1743323"/>
+                  </a:lnTo>
+                  <a:lnTo>
+                    <a:pt x="6419150" y="1739269"/>
+                  </a:lnTo>
+                  <a:lnTo>
+                    <a:pt x="6342682" y="1734967"/>
+                  </a:lnTo>
+                  <a:lnTo>
+                    <a:pt x="6266213" y="1730400"/>
+                  </a:lnTo>
+                  <a:lnTo>
+                    <a:pt x="6189745" y="1725554"/>
+                  </a:lnTo>
+                  <a:lnTo>
+                    <a:pt x="6113277" y="1720410"/>
+                  </a:lnTo>
+                  <a:lnTo>
+                    <a:pt x="6036808" y="1714951"/>
+                  </a:lnTo>
+                  <a:lnTo>
+                    <a:pt x="5960340" y="1709157"/>
+                  </a:lnTo>
+                  <a:lnTo>
+                    <a:pt x="5883871" y="1703007"/>
+                  </a:lnTo>
+                  <a:lnTo>
+                    <a:pt x="5807403" y="1696481"/>
+                  </a:lnTo>
+                  <a:lnTo>
+                    <a:pt x="5730934" y="1689554"/>
+                  </a:lnTo>
+                  <a:lnTo>
+                    <a:pt x="5654466" y="1682202"/>
+                  </a:lnTo>
+                  <a:lnTo>
+                    <a:pt x="5577998" y="1674400"/>
+                  </a:lnTo>
+                  <a:lnTo>
+                    <a:pt x="5501529" y="1666119"/>
+                  </a:lnTo>
+                  <a:lnTo>
+                    <a:pt x="5425061" y="1657330"/>
+                  </a:lnTo>
+                  <a:lnTo>
+                    <a:pt x="5348592" y="1648002"/>
+                  </a:lnTo>
+                  <a:lnTo>
+                    <a:pt x="5272124" y="1638102"/>
+                  </a:lnTo>
+                  <a:lnTo>
+                    <a:pt x="5195655" y="1627595"/>
+                  </a:lnTo>
+                  <a:lnTo>
+                    <a:pt x="5119187" y="1616443"/>
+                  </a:lnTo>
+                  <a:lnTo>
+                    <a:pt x="5042719" y="1604608"/>
+                  </a:lnTo>
+                  <a:lnTo>
+                    <a:pt x="4966250" y="1592046"/>
+                  </a:lnTo>
+                  <a:lnTo>
+                    <a:pt x="4889782" y="1578715"/>
+                  </a:lnTo>
+                  <a:lnTo>
+                    <a:pt x="4813313" y="1564565"/>
+                  </a:lnTo>
+                  <a:lnTo>
+                    <a:pt x="4736845" y="1549548"/>
+                  </a:lnTo>
+                  <a:lnTo>
+                    <a:pt x="4660376" y="1533610"/>
+                  </a:lnTo>
+                  <a:lnTo>
+                    <a:pt x="4583908" y="1516695"/>
+                  </a:lnTo>
+                  <a:lnTo>
+                    <a:pt x="4507439" y="1498742"/>
+                  </a:lnTo>
+                  <a:lnTo>
+                    <a:pt x="4430971" y="1479688"/>
+                  </a:lnTo>
+                  <a:lnTo>
+                    <a:pt x="4354503" y="1459465"/>
+                  </a:lnTo>
+                  <a:lnTo>
+                    <a:pt x="4278034" y="1438002"/>
+                  </a:lnTo>
+                  <a:lnTo>
+                    <a:pt x="4201566" y="1415223"/>
+                  </a:lnTo>
+                  <a:lnTo>
+                    <a:pt x="4125097" y="1391047"/>
+                  </a:lnTo>
+                  <a:lnTo>
+                    <a:pt x="4048629" y="1365388"/>
+                  </a:lnTo>
+                  <a:lnTo>
+                    <a:pt x="3972160" y="1338156"/>
+                  </a:lnTo>
+                  <a:lnTo>
+                    <a:pt x="3895692" y="1309253"/>
+                  </a:lnTo>
+                  <a:lnTo>
+                    <a:pt x="3819224" y="1278578"/>
+                  </a:lnTo>
+                  <a:lnTo>
+                    <a:pt x="3742755" y="1246022"/>
+                  </a:lnTo>
+                  <a:lnTo>
+                    <a:pt x="3666287" y="1211468"/>
+                  </a:lnTo>
+                  <a:lnTo>
+                    <a:pt x="3589818" y="1174796"/>
+                  </a:lnTo>
+                  <a:lnTo>
+                    <a:pt x="3513350" y="1135875"/>
+                  </a:lnTo>
+                  <a:lnTo>
+                    <a:pt x="3436881" y="1094567"/>
+                  </a:lnTo>
+                  <a:lnTo>
+                    <a:pt x="3360413" y="1050725"/>
+                  </a:lnTo>
+                  <a:lnTo>
+                    <a:pt x="3283945" y="1025566"/>
+                  </a:lnTo>
+                  <a:lnTo>
+                    <a:pt x="3207476" y="1010148"/>
+                  </a:lnTo>
+                  <a:lnTo>
+                    <a:pt x="3131008" y="994426"/>
+                  </a:lnTo>
+                  <a:lnTo>
+                    <a:pt x="3054539" y="978395"/>
+                  </a:lnTo>
+                  <a:lnTo>
+                    <a:pt x="2978071" y="962049"/>
+                  </a:lnTo>
+                  <a:lnTo>
+                    <a:pt x="2901602" y="945381"/>
+                  </a:lnTo>
+                  <a:lnTo>
+                    <a:pt x="2825134" y="928385"/>
+                  </a:lnTo>
+                  <a:lnTo>
+                    <a:pt x="2748666" y="911055"/>
+                  </a:lnTo>
+                  <a:lnTo>
+                    <a:pt x="2672197" y="893385"/>
+                  </a:lnTo>
+                  <a:lnTo>
+                    <a:pt x="2595729" y="875366"/>
+                  </a:lnTo>
+                  <a:lnTo>
+                    <a:pt x="2519260" y="856993"/>
+                  </a:lnTo>
+                  <a:lnTo>
+                    <a:pt x="2442792" y="838259"/>
+                  </a:lnTo>
+                  <a:lnTo>
+                    <a:pt x="2366323" y="819156"/>
+                  </a:lnTo>
+                  <a:lnTo>
+                    <a:pt x="2289855" y="799678"/>
+                  </a:lnTo>
+                  <a:lnTo>
+                    <a:pt x="2213386" y="779816"/>
+                  </a:lnTo>
+                  <a:lnTo>
+                    <a:pt x="2136918" y="759564"/>
+                  </a:lnTo>
+                  <a:lnTo>
+                    <a:pt x="2060450" y="738913"/>
+                  </a:lnTo>
+                  <a:lnTo>
+                    <a:pt x="1983981" y="717856"/>
+                  </a:lnTo>
+                  <a:lnTo>
+                    <a:pt x="1907513" y="696385"/>
+                  </a:lnTo>
+                  <a:lnTo>
+                    <a:pt x="1831044" y="674492"/>
+                  </a:lnTo>
+                  <a:lnTo>
+                    <a:pt x="1754576" y="652168"/>
+                  </a:lnTo>
+                  <a:lnTo>
+                    <a:pt x="1678107" y="629405"/>
+                  </a:lnTo>
+                  <a:lnTo>
+                    <a:pt x="1601639" y="606194"/>
+                  </a:lnTo>
+                  <a:lnTo>
+                    <a:pt x="1525171" y="582526"/>
+                  </a:lnTo>
+                  <a:lnTo>
+                    <a:pt x="1448702" y="558393"/>
+                  </a:lnTo>
+                  <a:lnTo>
+                    <a:pt x="1372234" y="533786"/>
+                  </a:lnTo>
+                  <a:lnTo>
+                    <a:pt x="1295765" y="508694"/>
+                  </a:lnTo>
+                  <a:lnTo>
+                    <a:pt x="1219297" y="483109"/>
+                  </a:lnTo>
+                  <a:lnTo>
+                    <a:pt x="1142828" y="457020"/>
+                  </a:lnTo>
+                  <a:lnTo>
+                    <a:pt x="1066360" y="430418"/>
+                  </a:lnTo>
+                  <a:lnTo>
+                    <a:pt x="989892" y="403293"/>
+                  </a:lnTo>
+                  <a:lnTo>
+                    <a:pt x="913423" y="375635"/>
+                  </a:lnTo>
+                  <a:lnTo>
+                    <a:pt x="836955" y="347432"/>
+                  </a:lnTo>
+                  <a:lnTo>
+                    <a:pt x="760486" y="318675"/>
+                  </a:lnTo>
+                  <a:lnTo>
+                    <a:pt x="684018" y="289352"/>
+                  </a:lnTo>
+                  <a:lnTo>
+                    <a:pt x="607549" y="259453"/>
+                  </a:lnTo>
+                  <a:lnTo>
+                    <a:pt x="531081" y="228965"/>
+                  </a:lnTo>
+                  <a:lnTo>
+                    <a:pt x="454613" y="197877"/>
+                  </a:lnTo>
+                  <a:lnTo>
+                    <a:pt x="378144" y="166178"/>
+                  </a:lnTo>
+                  <a:lnTo>
+                    <a:pt x="301676" y="133856"/>
+                  </a:lnTo>
+                  <a:lnTo>
+                    <a:pt x="225207" y="100897"/>
+                  </a:lnTo>
+                  <a:lnTo>
+                    <a:pt x="148739" y="67291"/>
+                  </a:lnTo>
+                  <a:lnTo>
+                    <a:pt x="72270" y="33023"/>
                   </a:lnTo>
                   <a:lnTo>
                     <a:pt x="0" y="0"/>
@@ -4121,279 +4121,279 @@
           </p:nvSpPr>
           <p:spPr>
             <a:xfrm>
-              <a:off x="1383515" y="2073503"/>
-              <a:ext cx="6804975" cy="3374535"/>
+              <a:off x="1473144" y="2209169"/>
+              <a:ext cx="6702804" cy="3147542"/>
             </a:xfrm>
             <a:custGeom>
               <a:avLst/>
               <a:pathLst>
-                <a:path w="6804975" h="3374535">
+                <a:path w="6702804" h="3147542">
                   <a:moveTo>
                     <a:pt x="0" y="0"/>
                   </a:moveTo>
                   <a:lnTo>
-                    <a:pt x="50813" y="89511"/>
-                  </a:lnTo>
-                  <a:lnTo>
-                    <a:pt x="128447" y="220971"/>
-                  </a:lnTo>
-                  <a:lnTo>
-                    <a:pt x="206081" y="347341"/>
-                  </a:lnTo>
-                  <a:lnTo>
-                    <a:pt x="283715" y="468815"/>
-                  </a:lnTo>
-                  <a:lnTo>
-                    <a:pt x="361349" y="585585"/>
-                  </a:lnTo>
-                  <a:lnTo>
-                    <a:pt x="438983" y="697833"/>
-                  </a:lnTo>
-                  <a:lnTo>
-                    <a:pt x="516617" y="805733"/>
-                  </a:lnTo>
-                  <a:lnTo>
-                    <a:pt x="594251" y="909454"/>
-                  </a:lnTo>
-                  <a:lnTo>
-                    <a:pt x="671885" y="1009158"/>
-                  </a:lnTo>
-                  <a:lnTo>
-                    <a:pt x="749519" y="1105000"/>
-                  </a:lnTo>
-                  <a:lnTo>
-                    <a:pt x="827153" y="1197130"/>
-                  </a:lnTo>
-                  <a:lnTo>
-                    <a:pt x="904787" y="1285692"/>
-                  </a:lnTo>
-                  <a:lnTo>
-                    <a:pt x="982422" y="1370824"/>
-                  </a:lnTo>
-                  <a:lnTo>
-                    <a:pt x="1060056" y="1452659"/>
-                  </a:lnTo>
-                  <a:lnTo>
-                    <a:pt x="1137690" y="1531324"/>
-                  </a:lnTo>
-                  <a:lnTo>
-                    <a:pt x="1215324" y="1606942"/>
-                  </a:lnTo>
-                  <a:lnTo>
-                    <a:pt x="1292958" y="1679632"/>
-                  </a:lnTo>
-                  <a:lnTo>
-                    <a:pt x="1370592" y="1749506"/>
-                  </a:lnTo>
-                  <a:lnTo>
-                    <a:pt x="1448226" y="1816674"/>
-                  </a:lnTo>
-                  <a:lnTo>
-                    <a:pt x="1525860" y="1881241"/>
-                  </a:lnTo>
-                  <a:lnTo>
-                    <a:pt x="1603494" y="1943307"/>
-                  </a:lnTo>
-                  <a:lnTo>
-                    <a:pt x="1681128" y="2002969"/>
-                  </a:lnTo>
-                  <a:lnTo>
-                    <a:pt x="1758762" y="2060320"/>
-                  </a:lnTo>
-                  <a:lnTo>
-                    <a:pt x="1836396" y="2115451"/>
-                  </a:lnTo>
-                  <a:lnTo>
-                    <a:pt x="1914030" y="2168445"/>
-                  </a:lnTo>
-                  <a:lnTo>
-                    <a:pt x="1991664" y="2219388"/>
-                  </a:lnTo>
-                  <a:lnTo>
-                    <a:pt x="2069298" y="2268357"/>
-                  </a:lnTo>
-                  <a:lnTo>
-                    <a:pt x="2146932" y="2315430"/>
-                  </a:lnTo>
-                  <a:lnTo>
-                    <a:pt x="2224566" y="2360679"/>
-                  </a:lnTo>
-                  <a:lnTo>
-                    <a:pt x="2302200" y="2404176"/>
-                  </a:lnTo>
-                  <a:lnTo>
-                    <a:pt x="2379834" y="2445989"/>
-                  </a:lnTo>
-                  <a:lnTo>
-                    <a:pt x="2457468" y="2486182"/>
-                  </a:lnTo>
-                  <a:lnTo>
-                    <a:pt x="2535102" y="2524818"/>
-                  </a:lnTo>
-                  <a:lnTo>
-                    <a:pt x="2612736" y="2561958"/>
-                  </a:lnTo>
-                  <a:lnTo>
-                    <a:pt x="2690370" y="2597659"/>
-                  </a:lnTo>
-                  <a:lnTo>
-                    <a:pt x="2768005" y="2631978"/>
-                  </a:lnTo>
-                  <a:lnTo>
-                    <a:pt x="2845639" y="2664967"/>
-                  </a:lnTo>
-                  <a:lnTo>
-                    <a:pt x="2923273" y="2696679"/>
-                  </a:lnTo>
-                  <a:lnTo>
-                    <a:pt x="3000907" y="2727163"/>
-                  </a:lnTo>
-                  <a:lnTo>
-                    <a:pt x="3078541" y="2756466"/>
-                  </a:lnTo>
-                  <a:lnTo>
-                    <a:pt x="3156175" y="2784634"/>
-                  </a:lnTo>
-                  <a:lnTo>
-                    <a:pt x="3233809" y="2811711"/>
-                  </a:lnTo>
-                  <a:lnTo>
-                    <a:pt x="3311443" y="2837739"/>
-                  </a:lnTo>
-                  <a:lnTo>
-                    <a:pt x="3389077" y="2862759"/>
-                  </a:lnTo>
-                  <a:lnTo>
-                    <a:pt x="3466711" y="2886810"/>
-                  </a:lnTo>
-                  <a:lnTo>
-                    <a:pt x="3544345" y="2909930"/>
-                  </a:lnTo>
-                  <a:lnTo>
-                    <a:pt x="3621979" y="2932154"/>
-                  </a:lnTo>
-                  <a:lnTo>
-                    <a:pt x="3699613" y="2953518"/>
-                  </a:lnTo>
-                  <a:lnTo>
-                    <a:pt x="3777247" y="2974054"/>
-                  </a:lnTo>
-                  <a:lnTo>
-                    <a:pt x="3854881" y="2993795"/>
-                  </a:lnTo>
-                  <a:lnTo>
-                    <a:pt x="3932515" y="3012771"/>
-                  </a:lnTo>
-                  <a:lnTo>
-                    <a:pt x="4010149" y="3031012"/>
-                  </a:lnTo>
-                  <a:lnTo>
-                    <a:pt x="4087783" y="3048546"/>
-                  </a:lnTo>
-                  <a:lnTo>
-                    <a:pt x="4165417" y="3065402"/>
-                  </a:lnTo>
-                  <a:lnTo>
-                    <a:pt x="4243051" y="3081605"/>
-                  </a:lnTo>
-                  <a:lnTo>
-                    <a:pt x="4320685" y="3097180"/>
-                  </a:lnTo>
-                  <a:lnTo>
-                    <a:pt x="4398319" y="3112152"/>
-                  </a:lnTo>
-                  <a:lnTo>
-                    <a:pt x="4475954" y="3126544"/>
-                  </a:lnTo>
-                  <a:lnTo>
-                    <a:pt x="4553588" y="3140379"/>
-                  </a:lnTo>
-                  <a:lnTo>
-                    <a:pt x="4631222" y="3153677"/>
-                  </a:lnTo>
-                  <a:lnTo>
-                    <a:pt x="4708856" y="3166461"/>
-                  </a:lnTo>
-                  <a:lnTo>
-                    <a:pt x="4786490" y="3178750"/>
-                  </a:lnTo>
-                  <a:lnTo>
-                    <a:pt x="4864124" y="3190562"/>
-                  </a:lnTo>
-                  <a:lnTo>
-                    <a:pt x="4941758" y="3201918"/>
-                  </a:lnTo>
-                  <a:lnTo>
-                    <a:pt x="5019392" y="3212833"/>
-                  </a:lnTo>
-                  <a:lnTo>
-                    <a:pt x="5097026" y="3223326"/>
-                  </a:lnTo>
-                  <a:lnTo>
-                    <a:pt x="5174660" y="3233412"/>
-                  </a:lnTo>
-                  <a:lnTo>
-                    <a:pt x="5252294" y="3243108"/>
-                  </a:lnTo>
-                  <a:lnTo>
-                    <a:pt x="5329928" y="3252428"/>
-                  </a:lnTo>
-                  <a:lnTo>
-                    <a:pt x="5407562" y="3261387"/>
-                  </a:lnTo>
-                  <a:lnTo>
-                    <a:pt x="5485196" y="3269999"/>
-                  </a:lnTo>
-                  <a:lnTo>
-                    <a:pt x="5562830" y="3278277"/>
-                  </a:lnTo>
-                  <a:lnTo>
-                    <a:pt x="5640464" y="3286235"/>
-                  </a:lnTo>
-                  <a:lnTo>
-                    <a:pt x="5718098" y="3293885"/>
-                  </a:lnTo>
-                  <a:lnTo>
-                    <a:pt x="5795732" y="3301238"/>
-                  </a:lnTo>
-                  <a:lnTo>
-                    <a:pt x="5873366" y="3308307"/>
-                  </a:lnTo>
-                  <a:lnTo>
-                    <a:pt x="5951000" y="3315102"/>
-                  </a:lnTo>
-                  <a:lnTo>
-                    <a:pt x="6028634" y="3321634"/>
-                  </a:lnTo>
-                  <a:lnTo>
-                    <a:pt x="6106268" y="3327912"/>
-                  </a:lnTo>
-                  <a:lnTo>
-                    <a:pt x="6183903" y="3333948"/>
-                  </a:lnTo>
-                  <a:lnTo>
-                    <a:pt x="6261537" y="3339750"/>
-                  </a:lnTo>
-                  <a:lnTo>
-                    <a:pt x="6339171" y="3345327"/>
-                  </a:lnTo>
-                  <a:lnTo>
-                    <a:pt x="6416805" y="3350688"/>
-                  </a:lnTo>
-                  <a:lnTo>
-                    <a:pt x="6494439" y="3355841"/>
-                  </a:lnTo>
-                  <a:lnTo>
-                    <a:pt x="6572073" y="3360795"/>
-                  </a:lnTo>
-                  <a:lnTo>
-                    <a:pt x="6649707" y="3365557"/>
-                  </a:lnTo>
-                  <a:lnTo>
-                    <a:pt x="6727341" y="3370135"/>
-                  </a:lnTo>
-                  <a:lnTo>
-                    <a:pt x="6804975" y="3374535"/>
+                    <a:pt x="50050" y="83490"/>
+                  </a:lnTo>
+                  <a:lnTo>
+                    <a:pt x="126518" y="206107"/>
+                  </a:lnTo>
+                  <a:lnTo>
+                    <a:pt x="202987" y="323976"/>
+                  </a:lnTo>
+                  <a:lnTo>
+                    <a:pt x="279455" y="437280"/>
+                  </a:lnTo>
+                  <a:lnTo>
+                    <a:pt x="355924" y="546195"/>
+                  </a:lnTo>
+                  <a:lnTo>
+                    <a:pt x="432392" y="650892"/>
+                  </a:lnTo>
+                  <a:lnTo>
+                    <a:pt x="508861" y="751534"/>
+                  </a:lnTo>
+                  <a:lnTo>
+                    <a:pt x="585329" y="848278"/>
+                  </a:lnTo>
+                  <a:lnTo>
+                    <a:pt x="661798" y="941275"/>
+                  </a:lnTo>
+                  <a:lnTo>
+                    <a:pt x="738266" y="1030671"/>
+                  </a:lnTo>
+                  <a:lnTo>
+                    <a:pt x="814734" y="1116603"/>
+                  </a:lnTo>
+                  <a:lnTo>
+                    <a:pt x="891203" y="1199208"/>
+                  </a:lnTo>
+                  <a:lnTo>
+                    <a:pt x="967671" y="1278614"/>
+                  </a:lnTo>
+                  <a:lnTo>
+                    <a:pt x="1044140" y="1354944"/>
+                  </a:lnTo>
+                  <a:lnTo>
+                    <a:pt x="1120608" y="1428317"/>
+                  </a:lnTo>
+                  <a:lnTo>
+                    <a:pt x="1197077" y="1498849"/>
+                  </a:lnTo>
+                  <a:lnTo>
+                    <a:pt x="1273545" y="1566649"/>
+                  </a:lnTo>
+                  <a:lnTo>
+                    <a:pt x="1350013" y="1631823"/>
+                  </a:lnTo>
+                  <a:lnTo>
+                    <a:pt x="1426482" y="1694473"/>
+                  </a:lnTo>
+                  <a:lnTo>
+                    <a:pt x="1502950" y="1754697"/>
+                  </a:lnTo>
+                  <a:lnTo>
+                    <a:pt x="1579419" y="1812588"/>
+                  </a:lnTo>
+                  <a:lnTo>
+                    <a:pt x="1655887" y="1868237"/>
+                  </a:lnTo>
+                  <a:lnTo>
+                    <a:pt x="1732356" y="1921730"/>
+                  </a:lnTo>
+                  <a:lnTo>
+                    <a:pt x="1808824" y="1973152"/>
+                  </a:lnTo>
+                  <a:lnTo>
+                    <a:pt x="1885292" y="2022582"/>
+                  </a:lnTo>
+                  <a:lnTo>
+                    <a:pt x="1961761" y="2070098"/>
+                  </a:lnTo>
+                  <a:lnTo>
+                    <a:pt x="2038229" y="2115773"/>
+                  </a:lnTo>
+                  <a:lnTo>
+                    <a:pt x="2114698" y="2159679"/>
+                  </a:lnTo>
+                  <a:lnTo>
+                    <a:pt x="2191166" y="2201885"/>
+                  </a:lnTo>
+                  <a:lnTo>
+                    <a:pt x="2267635" y="2242456"/>
+                  </a:lnTo>
+                  <a:lnTo>
+                    <a:pt x="2344103" y="2281456"/>
+                  </a:lnTo>
+                  <a:lnTo>
+                    <a:pt x="2420571" y="2318945"/>
+                  </a:lnTo>
+                  <a:lnTo>
+                    <a:pt x="2497040" y="2354983"/>
+                  </a:lnTo>
+                  <a:lnTo>
+                    <a:pt x="2573508" y="2389624"/>
+                  </a:lnTo>
+                  <a:lnTo>
+                    <a:pt x="2649977" y="2422924"/>
+                  </a:lnTo>
+                  <a:lnTo>
+                    <a:pt x="2726445" y="2454934"/>
+                  </a:lnTo>
+                  <a:lnTo>
+                    <a:pt x="2802914" y="2485705"/>
+                  </a:lnTo>
+                  <a:lnTo>
+                    <a:pt x="2879382" y="2515283"/>
+                  </a:lnTo>
+                  <a:lnTo>
+                    <a:pt x="2955851" y="2543716"/>
+                  </a:lnTo>
+                  <a:lnTo>
+                    <a:pt x="3032319" y="2571048"/>
+                  </a:lnTo>
+                  <a:lnTo>
+                    <a:pt x="3108787" y="2597322"/>
+                  </a:lnTo>
+                  <a:lnTo>
+                    <a:pt x="3185256" y="2622577"/>
+                  </a:lnTo>
+                  <a:lnTo>
+                    <a:pt x="3261724" y="2646855"/>
+                  </a:lnTo>
+                  <a:lnTo>
+                    <a:pt x="3338193" y="2670192"/>
+                  </a:lnTo>
+                  <a:lnTo>
+                    <a:pt x="3414661" y="2692625"/>
+                  </a:lnTo>
+                  <a:lnTo>
+                    <a:pt x="3491130" y="2714190"/>
+                  </a:lnTo>
+                  <a:lnTo>
+                    <a:pt x="3567598" y="2734919"/>
+                  </a:lnTo>
+                  <a:lnTo>
+                    <a:pt x="3644066" y="2754845"/>
+                  </a:lnTo>
+                  <a:lnTo>
+                    <a:pt x="3720535" y="2774000"/>
+                  </a:lnTo>
+                  <a:lnTo>
+                    <a:pt x="3797003" y="2792413"/>
+                  </a:lnTo>
+                  <a:lnTo>
+                    <a:pt x="3873472" y="2810113"/>
+                  </a:lnTo>
+                  <a:lnTo>
+                    <a:pt x="3949940" y="2827127"/>
+                  </a:lnTo>
+                  <a:lnTo>
+                    <a:pt x="4026409" y="2843482"/>
+                  </a:lnTo>
+                  <a:lnTo>
+                    <a:pt x="4102877" y="2859204"/>
+                  </a:lnTo>
+                  <a:lnTo>
+                    <a:pt x="4179345" y="2874316"/>
+                  </a:lnTo>
+                  <a:lnTo>
+                    <a:pt x="4255814" y="2888844"/>
+                  </a:lnTo>
+                  <a:lnTo>
+                    <a:pt x="4332282" y="2902809"/>
+                  </a:lnTo>
+                  <a:lnTo>
+                    <a:pt x="4408751" y="2916233"/>
+                  </a:lnTo>
+                  <a:lnTo>
+                    <a:pt x="4485219" y="2929137"/>
+                  </a:lnTo>
+                  <a:lnTo>
+                    <a:pt x="4561688" y="2941541"/>
+                  </a:lnTo>
+                  <a:lnTo>
+                    <a:pt x="4638156" y="2953465"/>
+                  </a:lnTo>
+                  <a:lnTo>
+                    <a:pt x="4714624" y="2964927"/>
+                  </a:lnTo>
+                  <a:lnTo>
+                    <a:pt x="4791093" y="2975945"/>
+                  </a:lnTo>
+                  <a:lnTo>
+                    <a:pt x="4867561" y="2986536"/>
+                  </a:lnTo>
+                  <a:lnTo>
+                    <a:pt x="4944030" y="2996718"/>
+                  </a:lnTo>
+                  <a:lnTo>
+                    <a:pt x="5020498" y="3006504"/>
+                  </a:lnTo>
+                  <a:lnTo>
+                    <a:pt x="5096967" y="3015912"/>
+                  </a:lnTo>
+                  <a:lnTo>
+                    <a:pt x="5173435" y="3024956"/>
+                  </a:lnTo>
+                  <a:lnTo>
+                    <a:pt x="5249904" y="3033649"/>
+                  </a:lnTo>
+                  <a:lnTo>
+                    <a:pt x="5326372" y="3042005"/>
+                  </a:lnTo>
+                  <a:lnTo>
+                    <a:pt x="5402840" y="3050038"/>
+                  </a:lnTo>
+                  <a:lnTo>
+                    <a:pt x="5479309" y="3057760"/>
+                  </a:lnTo>
+                  <a:lnTo>
+                    <a:pt x="5555777" y="3065182"/>
+                  </a:lnTo>
+                  <a:lnTo>
+                    <a:pt x="5632246" y="3072317"/>
+                  </a:lnTo>
+                  <a:lnTo>
+                    <a:pt x="5708714" y="3079176"/>
+                  </a:lnTo>
+                  <a:lnTo>
+                    <a:pt x="5785183" y="3085769"/>
+                  </a:lnTo>
+                  <a:lnTo>
+                    <a:pt x="5861651" y="3092107"/>
+                  </a:lnTo>
+                  <a:lnTo>
+                    <a:pt x="5938119" y="3098200"/>
+                  </a:lnTo>
+                  <a:lnTo>
+                    <a:pt x="6014588" y="3104056"/>
+                  </a:lnTo>
+                  <a:lnTo>
+                    <a:pt x="6091056" y="3109685"/>
+                  </a:lnTo>
+                  <a:lnTo>
+                    <a:pt x="6167525" y="3115097"/>
+                  </a:lnTo>
+                  <a:lnTo>
+                    <a:pt x="6243993" y="3120299"/>
+                  </a:lnTo>
+                  <a:lnTo>
+                    <a:pt x="6320462" y="3125299"/>
+                  </a:lnTo>
+                  <a:lnTo>
+                    <a:pt x="6396930" y="3130106"/>
+                  </a:lnTo>
+                  <a:lnTo>
+                    <a:pt x="6473398" y="3134727"/>
+                  </a:lnTo>
+                  <a:lnTo>
+                    <a:pt x="6549867" y="3139168"/>
+                  </a:lnTo>
+                  <a:lnTo>
+                    <a:pt x="6626335" y="3143438"/>
+                  </a:lnTo>
+                  <a:lnTo>
+                    <a:pt x="6702804" y="3147542"/>
                   </a:lnTo>
                 </a:path>
               </a:pathLst>
@@ -4422,21 +4422,21 @@
           </p:nvSpPr>
           <p:spPr>
             <a:xfrm>
-              <a:off x="817517" y="4727786"/>
-              <a:ext cx="7799693" cy="0"/>
+              <a:off x="915645" y="4684908"/>
+              <a:ext cx="7682587" cy="0"/>
             </a:xfrm>
             <a:custGeom>
               <a:avLst/>
               <a:pathLst>
-                <a:path w="7799693" h="0">
+                <a:path w="7682587" h="0">
                   <a:moveTo>
                     <a:pt x="0" y="0"/>
                   </a:moveTo>
                   <a:lnTo>
-                    <a:pt x="7799693" y="0"/>
-                  </a:lnTo>
-                  <a:lnTo>
-                    <a:pt x="7799693" y="0"/>
+                    <a:pt x="7682587" y="0"/>
+                  </a:lnTo>
+                  <a:lnTo>
+                    <a:pt x="7682587" y="0"/>
                   </a:lnTo>
                 </a:path>
               </a:pathLst>
@@ -4465,15 +4465,15 @@
           </p:nvSpPr>
           <p:spPr>
             <a:xfrm>
-              <a:off x="4203673" y="2073503"/>
-              <a:ext cx="0" cy="3649639"/>
+              <a:off x="4250960" y="2209169"/>
+              <a:ext cx="0" cy="3404141"/>
             </a:xfrm>
             <a:custGeom>
               <a:avLst/>
               <a:pathLst>
-                <a:path w="0" h="3649639">
+                <a:path w="0" h="3404141">
                   <a:moveTo>
-                    <a:pt x="0" y="3649639"/>
+                    <a:pt x="0" y="3404141"/>
                   </a:moveTo>
                   <a:lnTo>
                     <a:pt x="0" y="0"/>
@@ -4508,8 +4508,8 @@
           </p:nvSpPr>
           <p:spPr>
             <a:xfrm>
-              <a:off x="692708" y="5517199"/>
-              <a:ext cx="62179" cy="80101"/>
+              <a:off x="756929" y="5407599"/>
+              <a:ext cx="79004" cy="101955"/>
             </a:xfrm>
             <a:prstGeom prst="rect">
               <a:avLst/>
@@ -4522,7 +4522,7 @@
             <a:p>
               <a:pPr algn="l" marL="0" marR="0" indent="0">
                 <a:lnSpc>
-                  <a:spcPts val="880"/>
+                  <a:spcPts val="1120"/>
                 </a:lnSpc>
                 <a:spcBef>
                   <a:spcPts val="0"/>
@@ -4532,7 +4532,7 @@
                 </a:spcAft>
               </a:pPr>
               <a:r>
-                <a:rPr sz="880">
+                <a:rPr sz="1120">
                   <a:solidFill>
                     <a:srgbClr val="4D4D4D">
                       <a:alpha val="100000"/>
@@ -4554,8 +4554,8 @@
           </p:nvSpPr>
           <p:spPr>
             <a:xfrm>
-              <a:off x="692708" y="4687735"/>
-              <a:ext cx="62179" cy="80101"/>
+              <a:off x="756929" y="4633931"/>
+              <a:ext cx="79004" cy="101955"/>
             </a:xfrm>
             <a:prstGeom prst="rect">
               <a:avLst/>
@@ -4568,7 +4568,7 @@
             <a:p>
               <a:pPr algn="l" marL="0" marR="0" indent="0">
                 <a:lnSpc>
-                  <a:spcPts val="880"/>
+                  <a:spcPts val="1120"/>
                 </a:lnSpc>
                 <a:spcBef>
                   <a:spcPts val="0"/>
@@ -4578,7 +4578,7 @@
                 </a:spcAft>
               </a:pPr>
               <a:r>
-                <a:rPr sz="880">
+                <a:rPr sz="1120">
                   <a:solidFill>
                     <a:srgbClr val="4D4D4D">
                       <a:alpha val="100000"/>
@@ -4600,8 +4600,8 @@
           </p:nvSpPr>
           <p:spPr>
             <a:xfrm>
-              <a:off x="692708" y="3858272"/>
-              <a:ext cx="62179" cy="80101"/>
+              <a:off x="756929" y="3860262"/>
+              <a:ext cx="79004" cy="101955"/>
             </a:xfrm>
             <a:prstGeom prst="rect">
               <a:avLst/>
@@ -4614,7 +4614,7 @@
             <a:p>
               <a:pPr algn="l" marL="0" marR="0" indent="0">
                 <a:lnSpc>
-                  <a:spcPts val="880"/>
+                  <a:spcPts val="1120"/>
                 </a:lnSpc>
                 <a:spcBef>
                   <a:spcPts val="0"/>
@@ -4624,7 +4624,7 @@
                 </a:spcAft>
               </a:pPr>
               <a:r>
-                <a:rPr sz="880">
+                <a:rPr sz="1120">
                   <a:solidFill>
                     <a:srgbClr val="4D4D4D">
                       <a:alpha val="100000"/>
@@ -4646,8 +4646,8 @@
           </p:nvSpPr>
           <p:spPr>
             <a:xfrm>
-              <a:off x="692708" y="3028808"/>
-              <a:ext cx="62179" cy="80101"/>
+              <a:off x="756929" y="3086593"/>
+              <a:ext cx="79004" cy="101955"/>
             </a:xfrm>
             <a:prstGeom prst="rect">
               <a:avLst/>
@@ -4660,7 +4660,7 @@
             <a:p>
               <a:pPr algn="l" marL="0" marR="0" indent="0">
                 <a:lnSpc>
-                  <a:spcPts val="880"/>
+                  <a:spcPts val="1120"/>
                 </a:lnSpc>
                 <a:spcBef>
                   <a:spcPts val="0"/>
@@ -4670,7 +4670,7 @@
                 </a:spcAft>
               </a:pPr>
               <a:r>
-                <a:rPr sz="880">
+                <a:rPr sz="1120">
                   <a:solidFill>
                     <a:srgbClr val="4D4D4D">
                       <a:alpha val="100000"/>
@@ -4692,8 +4692,8 @@
           </p:nvSpPr>
           <p:spPr>
             <a:xfrm>
-              <a:off x="692708" y="2199345"/>
-              <a:ext cx="62179" cy="80101"/>
+              <a:off x="756929" y="2312925"/>
+              <a:ext cx="79004" cy="101955"/>
             </a:xfrm>
             <a:prstGeom prst="rect">
               <a:avLst/>
@@ -4706,7 +4706,7 @@
             <a:p>
               <a:pPr algn="l" marL="0" marR="0" indent="0">
                 <a:lnSpc>
-                  <a:spcPts val="880"/>
+                  <a:spcPts val="1120"/>
                 </a:lnSpc>
                 <a:spcBef>
                   <a:spcPts val="0"/>
@@ -4716,7 +4716,7 @@
                 </a:spcAft>
               </a:pPr>
               <a:r>
-                <a:rPr sz="880">
+                <a:rPr sz="1120">
                   <a:solidFill>
                     <a:srgbClr val="4D4D4D">
                       <a:alpha val="100000"/>
@@ -4738,8 +4738,8 @@
           </p:nvSpPr>
           <p:spPr>
             <a:xfrm>
-              <a:off x="2423864" y="5785772"/>
-              <a:ext cx="155356" cy="80101"/>
+              <a:off x="2475630" y="5693022"/>
+              <a:ext cx="197510" cy="101955"/>
             </a:xfrm>
             <a:prstGeom prst="rect">
               <a:avLst/>
@@ -4752,7 +4752,7 @@
             <a:p>
               <a:pPr algn="l" marL="0" marR="0" indent="0">
                 <a:lnSpc>
-                  <a:spcPts val="880"/>
+                  <a:spcPts val="1120"/>
                 </a:lnSpc>
                 <a:spcBef>
                   <a:spcPts val="0"/>
@@ -4762,7 +4762,7 @@
                 </a:spcAft>
               </a:pPr>
               <a:r>
-                <a:rPr sz="880">
+                <a:rPr sz="1120">
                   <a:solidFill>
                     <a:srgbClr val="4D4D4D">
                       <a:alpha val="100000"/>
@@ -4784,8 +4784,8 @@
           </p:nvSpPr>
           <p:spPr>
             <a:xfrm>
-              <a:off x="4196521" y="5785772"/>
-              <a:ext cx="155356" cy="80101"/>
+              <a:off x="4221672" y="5693022"/>
+              <a:ext cx="197510" cy="101955"/>
             </a:xfrm>
             <a:prstGeom prst="rect">
               <a:avLst/>
@@ -4798,7 +4798,7 @@
             <a:p>
               <a:pPr algn="l" marL="0" marR="0" indent="0">
                 <a:lnSpc>
-                  <a:spcPts val="880"/>
+                  <a:spcPts val="1120"/>
                 </a:lnSpc>
                 <a:spcBef>
                   <a:spcPts val="0"/>
@@ -4808,7 +4808,7 @@
                 </a:spcAft>
               </a:pPr>
               <a:r>
-                <a:rPr sz="880">
+                <a:rPr sz="1120">
                   <a:solidFill>
                     <a:srgbClr val="4D4D4D">
                       <a:alpha val="100000"/>
@@ -4830,8 +4830,8 @@
           </p:nvSpPr>
           <p:spPr>
             <a:xfrm>
-              <a:off x="5969179" y="5785772"/>
-              <a:ext cx="155356" cy="80101"/>
+              <a:off x="5967715" y="5693022"/>
+              <a:ext cx="197510" cy="101955"/>
             </a:xfrm>
             <a:prstGeom prst="rect">
               <a:avLst/>
@@ -4844,7 +4844,7 @@
             <a:p>
               <a:pPr algn="l" marL="0" marR="0" indent="0">
                 <a:lnSpc>
-                  <a:spcPts val="880"/>
+                  <a:spcPts val="1120"/>
                 </a:lnSpc>
                 <a:spcBef>
                   <a:spcPts val="0"/>
@@ -4854,7 +4854,7 @@
                 </a:spcAft>
               </a:pPr>
               <a:r>
-                <a:rPr sz="880">
+                <a:rPr sz="1120">
                   <a:solidFill>
                     <a:srgbClr val="4D4D4D">
                       <a:alpha val="100000"/>
@@ -4876,8 +4876,8 @@
           </p:nvSpPr>
           <p:spPr>
             <a:xfrm>
-              <a:off x="7741836" y="5785772"/>
-              <a:ext cx="155356" cy="80101"/>
+              <a:off x="7713757" y="5693022"/>
+              <a:ext cx="197510" cy="101955"/>
             </a:xfrm>
             <a:prstGeom prst="rect">
               <a:avLst/>
@@ -4890,7 +4890,7 @@
             <a:p>
               <a:pPr algn="l" marL="0" marR="0" indent="0">
                 <a:lnSpc>
-                  <a:spcPts val="880"/>
+                  <a:spcPts val="1120"/>
                 </a:lnSpc>
                 <a:spcBef>
                   <a:spcPts val="0"/>
@@ -4900,7 +4900,7 @@
                 </a:spcAft>
               </a:pPr>
               <a:r>
-                <a:rPr sz="880">
+                <a:rPr sz="1120">
                   <a:solidFill>
                     <a:srgbClr val="4D4D4D">
                       <a:alpha val="100000"/>
@@ -4922,8 +4922,8 @@
           </p:nvSpPr>
           <p:spPr>
             <a:xfrm>
-              <a:off x="3879271" y="5925448"/>
-              <a:ext cx="1676186" cy="100218"/>
+              <a:off x="3690153" y="5870717"/>
+              <a:ext cx="2133569" cy="127558"/>
             </a:xfrm>
             <a:prstGeom prst="rect">
               <a:avLst/>
@@ -4936,7 +4936,7 @@
             <a:p>
               <a:pPr algn="l" marL="0" marR="0" indent="0">
                 <a:lnSpc>
-                  <a:spcPts val="1100"/>
+                  <a:spcPts val="1400"/>
                 </a:lnSpc>
                 <a:spcBef>
                   <a:spcPts val="0"/>
@@ -4946,7 +4946,7 @@
                 </a:spcAft>
               </a:pPr>
               <a:r>
-                <a:rPr sz="1100">
+                <a:rPr sz="1400">
                   <a:solidFill>
                     <a:srgbClr val="000000">
                       <a:alpha val="100000"/>
@@ -4968,8 +4968,8 @@
           </p:nvSpPr>
           <p:spPr>
             <a:xfrm rot="-5400000">
-              <a:off x="68446" y="3848213"/>
-              <a:ext cx="1016904" cy="100218"/>
+              <a:off x="-37527" y="3847460"/>
+              <a:ext cx="1294150" cy="127558"/>
             </a:xfrm>
             <a:prstGeom prst="rect">
               <a:avLst/>
@@ -4982,7 +4982,7 @@
             <a:p>
               <a:pPr algn="l" marL="0" marR="0" indent="0">
                 <a:lnSpc>
-                  <a:spcPts val="1100"/>
+                  <a:spcPts val="1400"/>
                 </a:lnSpc>
                 <a:spcBef>
                   <a:spcPts val="0"/>
@@ -4992,7 +4992,7 @@
                 </a:spcAft>
               </a:pPr>
               <a:r>
-                <a:rPr sz="1100">
+                <a:rPr sz="1400">
                   <a:solidFill>
                     <a:srgbClr val="000000">
                       <a:alpha val="100000"/>
@@ -5014,8 +5014,8 @@
           </p:nvSpPr>
           <p:spPr>
             <a:xfrm>
-              <a:off x="817517" y="1896563"/>
-              <a:ext cx="4233214" cy="82021"/>
+              <a:off x="915645" y="1977589"/>
+              <a:ext cx="5645871" cy="109362"/>
             </a:xfrm>
             <a:prstGeom prst="rect">
               <a:avLst/>
@@ -5028,7 +5028,7 @@
             <a:p>
               <a:pPr algn="l" marL="0" marR="0" indent="0">
                 <a:lnSpc>
-                  <a:spcPts val="900"/>
+                  <a:spcPts val="1200"/>
                 </a:lnSpc>
                 <a:spcBef>
                   <a:spcPts val="0"/>
@@ -5038,7 +5038,7 @@
                 </a:spcAft>
               </a:pPr>
               <a:r>
-                <a:rPr sz="900">
+                <a:rPr sz="1200">
                   <a:solidFill>
                     <a:srgbClr val="404040">
                       <a:alpha val="100000"/>
@@ -5060,8 +5060,8 @@
           </p:nvSpPr>
           <p:spPr>
             <a:xfrm>
-              <a:off x="817517" y="1669789"/>
-              <a:ext cx="3435949" cy="120152"/>
+              <a:off x="915645" y="1688767"/>
+              <a:ext cx="4374032" cy="153070"/>
             </a:xfrm>
             <a:prstGeom prst="rect">
               <a:avLst/>
@@ -5074,7 +5074,7 @@
             <a:p>
               <a:pPr algn="l" marL="0" marR="0" indent="0">
                 <a:lnSpc>
-                  <a:spcPts val="1320"/>
+                  <a:spcPts val="1680"/>
                 </a:lnSpc>
                 <a:spcBef>
                   <a:spcPts val="0"/>
@@ -5084,7 +5084,7 @@
                 </a:spcAft>
               </a:pPr>
               <a:r>
-                <a:rPr sz="1320">
+                <a:rPr sz="1680">
                   <a:solidFill>
                     <a:srgbClr val="000000">
                       <a:alpha val="100000"/>
